--- a/CostVision-CAPEE-Business-Case.pptx
+++ b/CostVision-CAPEE-Business-Case.pptx
@@ -508,7 +508,7 @@
           <a:lstStyle/>
           <a:p>
             <a:r>
-              <a:t>I want to start by saying what we do well, because the proposal is not a criticism of it. We cost parts properly. The method is bottom-up, it covers every commodity, and it is the number we would defend in front of a supplier. That is worth protecting and nothing I am about to propose changes it. What I want to talk about is the effort. Every one of those costings is set up by hand. A person chooses the material, the process and the machine. A person opens the 3D model and the drawing, reads the geometry and the tolerances, and types them in. Depending on the commodity that is somewhere between twelve and sixty-nine values per part, and those counts come straight off our own input forms. And when the economics move, somebody goes back in and updates the rates by hand. None of that is wrong. It is just slow, and it is why we cost the parts we have time for rather than the parts we would like to. The green strip is the whole idea in one line. Same method, same defensible answer, with the manual work taken out of it.</a:t>
+              <a:t>I want to start by saying what we do well, because none of this is a criticism of it. The left-hand card is our should-cost as it runs today. The method is trusted and thorough: a rigorous bottom-up build-up, applied across every commodity we buy, and it is the number we would defend in front of a supplier. Nothing I am about to propose changes that. What I want to talk about is the effort behind it. The setup is hands-on: a person chooses the material, the process and the machine, part by part. The data entry is manual: somebody opens the 3D model and the drawings, reads the geometry and the tolerances, and types them in. And when the economics move, somebody goes back and updates the rates by hand. The line at the bottom of that card is the size of it: between twelve and sixty-nine values typed per part depending on the commodity, and those counts come straight off our own input forms. None of that is wrong. It is just slow, and it is the reason we cost the parts we have time for rather than the parts we would like to. Now the right-hand side, and I want to be straight about why it is empty. I have not put a saving on this slide, because we have never timed this job and we have never compared this tool against a price we have actually paid. Any number I put there would be my estimate dressed up as a measurement. Four of these five are ours and we can get them quickly: how long a part takes, how much of that is reading and typing, how many parts we cost a year, and how many in a basket we never cost at all. Time a handful of parts in one commodity and you have the first two; the others are in our own records and the programme data. The fifth, E, is what the trial measures. Put those numbers in and the three boxes underneath fill themselves in: the hours we spend typing today, the hours we would get back, and how many more parts that time would cost. That is a business case we own rather than one I have handed you. And the green strip is the whole idea in one line: same method, same defensible answer, with the manual work taken out of it.</a:t>
             </a:r>
           </a:p>
         </p:txBody>
@@ -4072,7 +4072,7 @@
                 </a:solidFill>
                 <a:latin typeface="Calibri"/>
               </a:rPr>
-              <a:t>We already cost parts properly. The method is sound; the effort is manual — 12 to 69 values typed in for every part.</a:t>
+              <a:t>We already cost parts properly. On the left is that job as it runs today. On the right is what it is worth, in our own numbers.</a:t>
             </a:r>
           </a:p>
         </p:txBody>
@@ -4085,8 +4085,8 @@
         </p:nvSpPr>
         <p:spPr>
           <a:xfrm>
-            <a:off x="411480" y="1883664"/>
-            <a:ext cx="11365992" cy="868680"/>
+            <a:off x="411480" y="1792224"/>
+            <a:ext cx="5577840" cy="4114800"/>
           </a:xfrm>
           <a:prstGeom prst="roundRect">
             <a:avLst>
@@ -4133,14 +4133,14 @@
         </p:nvSpPr>
         <p:spPr>
           <a:xfrm>
-            <a:off x="411480" y="1883664"/>
-            <a:ext cx="68580" cy="868680"/>
+            <a:off x="411480" y="1792224"/>
+            <a:ext cx="68580" cy="4114800"/>
           </a:xfrm>
           <a:prstGeom prst="rect">
             <a:avLst/>
           </a:prstGeom>
           <a:solidFill>
-            <a:srgbClr val="2E8B57"/>
+            <a:srgbClr val="B7791F"/>
           </a:solidFill>
           <a:ln>
             <a:noFill/>
@@ -4169,40 +4169,16 @@
           </a:p>
         </p:txBody>
       </p:sp>
-      <p:pic>
-        <p:nvPicPr>
-          <p:cNvPr id="12" name="Picture 11" descr="check.png"/>
-          <p:cNvPicPr>
-            <a:picLocks noChangeAspect="1"/>
-          </p:cNvPicPr>
-          <p:nvPr/>
-        </p:nvPicPr>
-        <p:blipFill>
-          <a:blip r:embed="rId2"/>
-          <a:stretch>
-            <a:fillRect/>
-          </a:stretch>
-        </p:blipFill>
-        <p:spPr>
-          <a:xfrm>
-            <a:off x="801014" y="2186330"/>
-            <a:ext cx="263348" cy="263348"/>
-          </a:xfrm>
-          <a:prstGeom prst="rect">
-            <a:avLst/>
-          </a:prstGeom>
-        </p:spPr>
-      </p:pic>
-      <p:sp>
-        <p:nvSpPr>
-          <p:cNvPr id="13" name="TextBox 12"/>
+      <p:sp>
+        <p:nvSpPr>
+          <p:cNvPr id="12" name="TextBox 11"/>
           <p:cNvSpPr txBox="1"/>
           <p:nvPr/>
         </p:nvSpPr>
         <p:spPr>
           <a:xfrm>
-            <a:off x="1417320" y="2029968"/>
-            <a:ext cx="10131552" cy="256032"/>
+            <a:off x="612648" y="1920240"/>
+            <a:ext cx="5212080" cy="274320"/>
           </a:xfrm>
           <a:prstGeom prst="rect">
             <a:avLst/>
@@ -4224,15 +4200,258 @@
               </a:spcAft>
             </a:pPr>
             <a:r>
-              <a:rPr sz="1250" b="1" i="0">
+              <a:rPr sz="1300" b="1" i="0">
                 <a:solidFill>
                   <a:srgbClr val="16325C"/>
+                </a:solidFill>
+                <a:latin typeface="Calibri"/>
+              </a:rPr>
+              <a:t>OUR SHOULD-COST TODAY · capable, but hands-on</a:t>
+            </a:r>
+          </a:p>
+        </p:txBody>
+      </p:sp>
+      <p:sp>
+        <p:nvSpPr>
+          <p:cNvPr id="13" name="TextBox 12"/>
+          <p:cNvSpPr txBox="1"/>
+          <p:nvPr/>
+        </p:nvSpPr>
+        <p:spPr>
+          <a:xfrm>
+            <a:off x="612648" y="2231136"/>
+            <a:ext cx="5212080" cy="3566160"/>
+          </a:xfrm>
+          <a:prstGeom prst="rect">
+            <a:avLst/>
+          </a:prstGeom>
+          <a:noFill/>
+        </p:spPr>
+        <p:txBody>
+          <a:bodyPr wrap="square" anchor="t" lIns="0" rIns="0" tIns="0" bIns="0">
+            <a:spAutoFit/>
+          </a:bodyPr>
+          <a:lstStyle/>
+          <a:p>
+            <a:pPr algn="l">
+              <a:lnSpc>
+                <a:spcPct val="112000"/>
+              </a:lnSpc>
+              <a:spcAft>
+                <a:spcPts val="300"/>
+              </a:spcAft>
+            </a:pPr>
+            <a:r>
+              <a:rPr sz="1050" b="1" i="0">
+                <a:solidFill>
+                  <a:srgbClr val="2E8B57"/>
                 </a:solidFill>
                 <a:latin typeface="Calibri"/>
               </a:rPr>
               <a:t>Trusted and thorough</a:t>
             </a:r>
           </a:p>
+          <a:p>
+            <a:pPr algn="l">
+              <a:lnSpc>
+                <a:spcPct val="112000"/>
+              </a:lnSpc>
+              <a:spcAft>
+                <a:spcPts val="300"/>
+              </a:spcAft>
+            </a:pPr>
+            <a:r>
+              <a:rPr sz="1050" b="0" i="0">
+                <a:solidFill>
+                  <a:srgbClr val="3A4356"/>
+                </a:solidFill>
+                <a:latin typeface="Calibri"/>
+              </a:rPr>
+              <a:t>A rigorous bottom-up method, across every commodity.</a:t>
+            </a:r>
+          </a:p>
+          <a:p>
+            <a:pPr algn="l">
+              <a:lnSpc>
+                <a:spcPct val="112000"/>
+              </a:lnSpc>
+              <a:spcAft>
+                <a:spcPts val="300"/>
+              </a:spcAft>
+            </a:pPr>
+          </a:p>
+          <a:p>
+            <a:pPr algn="l">
+              <a:lnSpc>
+                <a:spcPct val="112000"/>
+              </a:lnSpc>
+              <a:spcAft>
+                <a:spcPts val="300"/>
+              </a:spcAft>
+            </a:pPr>
+            <a:r>
+              <a:rPr sz="1050" b="1" i="0">
+                <a:solidFill>
+                  <a:srgbClr val="16325C"/>
+                </a:solidFill>
+                <a:latin typeface="Calibri"/>
+              </a:rPr>
+              <a:t>Hands-on setup</a:t>
+            </a:r>
+          </a:p>
+          <a:p>
+            <a:pPr algn="l">
+              <a:lnSpc>
+                <a:spcPct val="112000"/>
+              </a:lnSpc>
+              <a:spcAft>
+                <a:spcPts val="300"/>
+              </a:spcAft>
+            </a:pPr>
+            <a:r>
+              <a:rPr sz="1050" b="0" i="0">
+                <a:solidFill>
+                  <a:srgbClr val="3A4356"/>
+                </a:solidFill>
+                <a:latin typeface="Calibri"/>
+              </a:rPr>
+              <a:t>Material, process and machine chosen by a person,</a:t>
+            </a:r>
+          </a:p>
+          <a:p>
+            <a:pPr algn="l">
+              <a:lnSpc>
+                <a:spcPct val="112000"/>
+              </a:lnSpc>
+              <a:spcAft>
+                <a:spcPts val="300"/>
+              </a:spcAft>
+            </a:pPr>
+            <a:r>
+              <a:rPr sz="1050" b="0" i="0">
+                <a:solidFill>
+                  <a:srgbClr val="3A4356"/>
+                </a:solidFill>
+                <a:latin typeface="Calibri"/>
+              </a:rPr>
+              <a:t>part by part.</a:t>
+            </a:r>
+          </a:p>
+          <a:p>
+            <a:pPr algn="l">
+              <a:lnSpc>
+                <a:spcPct val="112000"/>
+              </a:lnSpc>
+              <a:spcAft>
+                <a:spcPts val="300"/>
+              </a:spcAft>
+            </a:pPr>
+          </a:p>
+          <a:p>
+            <a:pPr algn="l">
+              <a:lnSpc>
+                <a:spcPct val="112000"/>
+              </a:lnSpc>
+              <a:spcAft>
+                <a:spcPts val="300"/>
+              </a:spcAft>
+            </a:pPr>
+            <a:r>
+              <a:rPr sz="1050" b="1" i="0">
+                <a:solidFill>
+                  <a:srgbClr val="16325C"/>
+                </a:solidFill>
+                <a:latin typeface="Calibri"/>
+              </a:rPr>
+              <a:t>Manual data entry</a:t>
+            </a:r>
+          </a:p>
+          <a:p>
+            <a:pPr algn="l">
+              <a:lnSpc>
+                <a:spcPct val="112000"/>
+              </a:lnSpc>
+              <a:spcAft>
+                <a:spcPts val="300"/>
+              </a:spcAft>
+            </a:pPr>
+            <a:r>
+              <a:rPr sz="1050" b="0" i="0">
+                <a:solidFill>
+                  <a:srgbClr val="3A4356"/>
+                </a:solidFill>
+                <a:latin typeface="Calibri"/>
+              </a:rPr>
+              <a:t>Geometry and tolerances read off the 3D model and the</a:t>
+            </a:r>
+          </a:p>
+          <a:p>
+            <a:pPr algn="l">
+              <a:lnSpc>
+                <a:spcPct val="112000"/>
+              </a:lnSpc>
+              <a:spcAft>
+                <a:spcPts val="300"/>
+              </a:spcAft>
+            </a:pPr>
+            <a:r>
+              <a:rPr sz="1050" b="0" i="0">
+                <a:solidFill>
+                  <a:srgbClr val="3A4356"/>
+                </a:solidFill>
+                <a:latin typeface="Calibri"/>
+              </a:rPr>
+              <a:t>drawings, then typed in — 12 to 69 values per part.</a:t>
+            </a:r>
+          </a:p>
+          <a:p>
+            <a:pPr algn="l">
+              <a:lnSpc>
+                <a:spcPct val="112000"/>
+              </a:lnSpc>
+              <a:spcAft>
+                <a:spcPts val="300"/>
+              </a:spcAft>
+            </a:pPr>
+          </a:p>
+          <a:p>
+            <a:pPr algn="l">
+              <a:lnSpc>
+                <a:spcPct val="112000"/>
+              </a:lnSpc>
+              <a:spcAft>
+                <a:spcPts val="300"/>
+              </a:spcAft>
+            </a:pPr>
+            <a:r>
+              <a:rPr sz="1050" b="1" i="0">
+                <a:solidFill>
+                  <a:srgbClr val="16325C"/>
+                </a:solidFill>
+                <a:latin typeface="Calibri"/>
+              </a:rPr>
+              <a:t>Updated by hand</a:t>
+            </a:r>
+          </a:p>
+          <a:p>
+            <a:pPr algn="l">
+              <a:lnSpc>
+                <a:spcPct val="112000"/>
+              </a:lnSpc>
+              <a:spcAft>
+                <a:spcPts val="300"/>
+              </a:spcAft>
+            </a:pPr>
+            <a:r>
+              <a:rPr sz="1050" b="0" i="0">
+                <a:solidFill>
+                  <a:srgbClr val="3A4356"/>
+                </a:solidFill>
+                <a:latin typeface="Calibri"/>
+              </a:rPr>
+              <a:t>Rates and inputs refreshed manually as economics move.</a:t>
+            </a:r>
+          </a:p>
         </p:txBody>
       </p:sp>
       <p:sp>
@@ -4243,8 +4462,8 @@
         </p:nvSpPr>
         <p:spPr>
           <a:xfrm>
-            <a:off x="1417320" y="2313432"/>
-            <a:ext cx="10131552" cy="365760"/>
+            <a:off x="6199632" y="1810512"/>
+            <a:ext cx="5577840" cy="274320"/>
           </a:xfrm>
           <a:prstGeom prst="rect">
             <a:avLst/>
@@ -4259,39 +4478,286 @@
           <a:p>
             <a:pPr algn="l">
               <a:lnSpc>
-                <a:spcPct val="113000"/>
+                <a:spcPct val="100000"/>
               </a:lnSpc>
               <a:spcAft>
                 <a:spcPts val="400"/>
               </a:spcAft>
             </a:pPr>
             <a:r>
-              <a:rPr sz="1019" b="0" i="0">
-                <a:solidFill>
-                  <a:srgbClr val="3A4356"/>
+              <a:rPr sz="1150" b="1" i="0">
+                <a:solidFill>
+                  <a:srgbClr val="6B7280"/>
                 </a:solidFill>
                 <a:latin typeface="Calibri"/>
               </a:rPr>
-              <a:t>A rigorous bottom-up method, applied across every commodity we buy.</a:t>
-            </a:r>
-          </a:p>
-        </p:txBody>
-      </p:sp>
-      <p:sp>
-        <p:nvSpPr>
-          <p:cNvPr id="15" name="Rounded Rectangle 14"/>
+              <a:t>What it is worth: five numbers, four of them ours</a:t>
+            </a:r>
+          </a:p>
+        </p:txBody>
+      </p:sp>
+      <p:sp>
+        <p:nvSpPr>
+          <p:cNvPr id="15" name="Rectangle 14"/>
           <p:cNvSpPr/>
           <p:nvPr/>
         </p:nvSpPr>
         <p:spPr>
           <a:xfrm>
-            <a:off x="411480" y="2816352"/>
-            <a:ext cx="11365992" cy="868680"/>
-          </a:xfrm>
-          <a:prstGeom prst="roundRect">
-            <a:avLst>
-              <a:gd name="adj" fmla="val 12000"/>
-            </a:avLst>
+            <a:off x="6199632" y="2066543"/>
+            <a:ext cx="411480" cy="329184"/>
+          </a:xfrm>
+          <a:prstGeom prst="rect">
+            <a:avLst/>
+          </a:prstGeom>
+          <a:solidFill>
+            <a:srgbClr val="16325C"/>
+          </a:solidFill>
+          <a:ln>
+            <a:noFill/>
+          </a:ln>
+          <a:effectLst/>
+        </p:spPr>
+        <p:style>
+          <a:lnRef idx="1">
+            <a:schemeClr val="accent1"/>
+          </a:lnRef>
+          <a:fillRef idx="3">
+            <a:schemeClr val="accent1"/>
+          </a:fillRef>
+          <a:effectRef idx="2">
+            <a:schemeClr val="accent1"/>
+          </a:effectRef>
+          <a:fontRef idx="minor">
+            <a:schemeClr val="lt1"/>
+          </a:fontRef>
+        </p:style>
+        <p:txBody>
+          <a:bodyPr rtlCol="0" anchor="ctr"/>
+          <a:lstStyle/>
+          <a:p>
+            <a:pPr algn="ctr"/>
+          </a:p>
+        </p:txBody>
+      </p:sp>
+      <p:sp>
+        <p:nvSpPr>
+          <p:cNvPr id="16" name="TextBox 15"/>
+          <p:cNvSpPr txBox="1"/>
+          <p:nvPr/>
+        </p:nvSpPr>
+        <p:spPr>
+          <a:xfrm>
+            <a:off x="6281928" y="2148839"/>
+            <a:ext cx="265176" cy="219456"/>
+          </a:xfrm>
+          <a:prstGeom prst="rect">
+            <a:avLst/>
+          </a:prstGeom>
+          <a:noFill/>
+        </p:spPr>
+        <p:txBody>
+          <a:bodyPr wrap="square" anchor="t" lIns="0" rIns="0" tIns="0" bIns="0">
+            <a:spAutoFit/>
+          </a:bodyPr>
+          <a:lstStyle/>
+          <a:p>
+            <a:pPr algn="l">
+              <a:lnSpc>
+                <a:spcPct val="100000"/>
+              </a:lnSpc>
+              <a:spcAft>
+                <a:spcPts val="400"/>
+              </a:spcAft>
+            </a:pPr>
+          </a:p>
+        </p:txBody>
+      </p:sp>
+      <p:sp>
+        <p:nvSpPr>
+          <p:cNvPr id="17" name="Rectangle 16"/>
+          <p:cNvSpPr/>
+          <p:nvPr/>
+        </p:nvSpPr>
+        <p:spPr>
+          <a:xfrm>
+            <a:off x="6611112" y="2066543"/>
+            <a:ext cx="3611880" cy="329184"/>
+          </a:xfrm>
+          <a:prstGeom prst="rect">
+            <a:avLst/>
+          </a:prstGeom>
+          <a:solidFill>
+            <a:srgbClr val="16325C"/>
+          </a:solidFill>
+          <a:ln>
+            <a:noFill/>
+          </a:ln>
+          <a:effectLst/>
+        </p:spPr>
+        <p:style>
+          <a:lnRef idx="1">
+            <a:schemeClr val="accent1"/>
+          </a:lnRef>
+          <a:fillRef idx="3">
+            <a:schemeClr val="accent1"/>
+          </a:fillRef>
+          <a:effectRef idx="2">
+            <a:schemeClr val="accent1"/>
+          </a:effectRef>
+          <a:fontRef idx="minor">
+            <a:schemeClr val="lt1"/>
+          </a:fontRef>
+        </p:style>
+        <p:txBody>
+          <a:bodyPr rtlCol="0" anchor="ctr"/>
+          <a:lstStyle/>
+          <a:p>
+            <a:pPr algn="ctr"/>
+          </a:p>
+        </p:txBody>
+      </p:sp>
+      <p:sp>
+        <p:nvSpPr>
+          <p:cNvPr id="18" name="TextBox 17"/>
+          <p:cNvSpPr txBox="1"/>
+          <p:nvPr/>
+        </p:nvSpPr>
+        <p:spPr>
+          <a:xfrm>
+            <a:off x="6693408" y="2148839"/>
+            <a:ext cx="3465576" cy="219456"/>
+          </a:xfrm>
+          <a:prstGeom prst="rect">
+            <a:avLst/>
+          </a:prstGeom>
+          <a:noFill/>
+        </p:spPr>
+        <p:txBody>
+          <a:bodyPr wrap="square" anchor="t" lIns="0" rIns="0" tIns="0" bIns="0">
+            <a:spAutoFit/>
+          </a:bodyPr>
+          <a:lstStyle/>
+          <a:p>
+            <a:pPr algn="l">
+              <a:lnSpc>
+                <a:spcPct val="100000"/>
+              </a:lnSpc>
+              <a:spcAft>
+                <a:spcPts val="400"/>
+              </a:spcAft>
+            </a:pPr>
+            <a:r>
+              <a:rPr sz="950" b="1" i="0">
+                <a:solidFill>
+                  <a:srgbClr val="FFFFFF"/>
+                </a:solidFill>
+                <a:latin typeface="Calibri"/>
+              </a:rPr>
+              <a:t>What it is</a:t>
+            </a:r>
+          </a:p>
+        </p:txBody>
+      </p:sp>
+      <p:sp>
+        <p:nvSpPr>
+          <p:cNvPr id="19" name="Rectangle 18"/>
+          <p:cNvSpPr/>
+          <p:nvPr/>
+        </p:nvSpPr>
+        <p:spPr>
+          <a:xfrm>
+            <a:off x="10222992" y="2066543"/>
+            <a:ext cx="1554480" cy="329184"/>
+          </a:xfrm>
+          <a:prstGeom prst="rect">
+            <a:avLst/>
+          </a:prstGeom>
+          <a:solidFill>
+            <a:srgbClr val="16325C"/>
+          </a:solidFill>
+          <a:ln>
+            <a:noFill/>
+          </a:ln>
+          <a:effectLst/>
+        </p:spPr>
+        <p:style>
+          <a:lnRef idx="1">
+            <a:schemeClr val="accent1"/>
+          </a:lnRef>
+          <a:fillRef idx="3">
+            <a:schemeClr val="accent1"/>
+          </a:fillRef>
+          <a:effectRef idx="2">
+            <a:schemeClr val="accent1"/>
+          </a:effectRef>
+          <a:fontRef idx="minor">
+            <a:schemeClr val="lt1"/>
+          </a:fontRef>
+        </p:style>
+        <p:txBody>
+          <a:bodyPr rtlCol="0" anchor="ctr"/>
+          <a:lstStyle/>
+          <a:p>
+            <a:pPr algn="ctr"/>
+          </a:p>
+        </p:txBody>
+      </p:sp>
+      <p:sp>
+        <p:nvSpPr>
+          <p:cNvPr id="20" name="TextBox 19"/>
+          <p:cNvSpPr txBox="1"/>
+          <p:nvPr/>
+        </p:nvSpPr>
+        <p:spPr>
+          <a:xfrm>
+            <a:off x="10305288" y="2148839"/>
+            <a:ext cx="1408176" cy="219456"/>
+          </a:xfrm>
+          <a:prstGeom prst="rect">
+            <a:avLst/>
+          </a:prstGeom>
+          <a:noFill/>
+        </p:spPr>
+        <p:txBody>
+          <a:bodyPr wrap="square" anchor="t" lIns="0" rIns="0" tIns="0" bIns="0">
+            <a:spAutoFit/>
+          </a:bodyPr>
+          <a:lstStyle/>
+          <a:p>
+            <a:pPr algn="l">
+              <a:lnSpc>
+                <a:spcPct val="100000"/>
+              </a:lnSpc>
+              <a:spcAft>
+                <a:spcPts val="400"/>
+              </a:spcAft>
+            </a:pPr>
+            <a:r>
+              <a:rPr sz="950" b="1" i="0">
+                <a:solidFill>
+                  <a:srgbClr val="FFFFFF"/>
+                </a:solidFill>
+                <a:latin typeface="Calibri"/>
+              </a:rPr>
+              <a:t>Our number</a:t>
+            </a:r>
+          </a:p>
+        </p:txBody>
+      </p:sp>
+      <p:sp>
+        <p:nvSpPr>
+          <p:cNvPr id="21" name="Rectangle 20"/>
+          <p:cNvSpPr/>
+          <p:nvPr/>
+        </p:nvSpPr>
+        <p:spPr>
+          <a:xfrm>
+            <a:off x="6199632" y="2395727"/>
+            <a:ext cx="411480" cy="310896"/>
+          </a:xfrm>
+          <a:prstGeom prst="rect">
+            <a:avLst/>
           </a:prstGeom>
           <a:solidFill>
             <a:srgbClr val="FFFFFF"/>
@@ -4327,126 +4793,14 @@
       </p:sp>
       <p:sp>
         <p:nvSpPr>
-          <p:cNvPr id="16" name="Rectangle 15"/>
-          <p:cNvSpPr/>
-          <p:nvPr/>
-        </p:nvSpPr>
-        <p:spPr>
-          <a:xfrm>
-            <a:off x="411480" y="2816352"/>
-            <a:ext cx="68580" cy="868680"/>
-          </a:xfrm>
-          <a:prstGeom prst="rect">
-            <a:avLst/>
-          </a:prstGeom>
-          <a:solidFill>
-            <a:srgbClr val="B7791F"/>
-          </a:solidFill>
-          <a:ln>
-            <a:noFill/>
-          </a:ln>
-          <a:effectLst/>
-        </p:spPr>
-        <p:style>
-          <a:lnRef idx="1">
-            <a:schemeClr val="accent1"/>
-          </a:lnRef>
-          <a:fillRef idx="3">
-            <a:schemeClr val="accent1"/>
-          </a:fillRef>
-          <a:effectRef idx="2">
-            <a:schemeClr val="accent1"/>
-          </a:effectRef>
-          <a:fontRef idx="minor">
-            <a:schemeClr val="lt1"/>
-          </a:fontRef>
-        </p:style>
-        <p:txBody>
-          <a:bodyPr rtlCol="0" anchor="ctr"/>
-          <a:lstStyle/>
-          <a:p>
-            <a:pPr algn="ctr"/>
-          </a:p>
-        </p:txBody>
-      </p:sp>
-      <p:sp>
-        <p:nvSpPr>
-          <p:cNvPr id="17" name="Oval 16"/>
-          <p:cNvSpPr/>
-          <p:nvPr/>
-        </p:nvSpPr>
-        <p:spPr>
-          <a:xfrm>
-            <a:off x="658368" y="2976372"/>
-            <a:ext cx="548640" cy="548640"/>
-          </a:xfrm>
-          <a:prstGeom prst="ellipse">
-            <a:avLst/>
-          </a:prstGeom>
-          <a:solidFill>
-            <a:srgbClr val="B7791F"/>
-          </a:solidFill>
-          <a:ln>
-            <a:noFill/>
-          </a:ln>
-          <a:effectLst/>
-        </p:spPr>
-        <p:style>
-          <a:lnRef idx="1">
-            <a:schemeClr val="accent1"/>
-          </a:lnRef>
-          <a:fillRef idx="3">
-            <a:schemeClr val="accent1"/>
-          </a:fillRef>
-          <a:effectRef idx="2">
-            <a:schemeClr val="accent1"/>
-          </a:effectRef>
-          <a:fontRef idx="minor">
-            <a:schemeClr val="lt1"/>
-          </a:fontRef>
-        </p:style>
-        <p:txBody>
-          <a:bodyPr rtlCol="0" anchor="ctr"/>
-          <a:lstStyle/>
-          <a:p>
-            <a:pPr algn="ctr"/>
-          </a:p>
-        </p:txBody>
-      </p:sp>
-      <p:pic>
-        <p:nvPicPr>
-          <p:cNvPr id="18" name="Picture 17" descr="person.png"/>
-          <p:cNvPicPr>
-            <a:picLocks noChangeAspect="1"/>
-          </p:cNvPicPr>
-          <p:nvPr/>
-        </p:nvPicPr>
-        <p:blipFill>
-          <a:blip r:embed="rId3"/>
-          <a:stretch>
-            <a:fillRect/>
-          </a:stretch>
-        </p:blipFill>
-        <p:spPr>
-          <a:xfrm>
-            <a:off x="801014" y="3119018"/>
-            <a:ext cx="263348" cy="263348"/>
-          </a:xfrm>
-          <a:prstGeom prst="rect">
-            <a:avLst/>
-          </a:prstGeom>
-        </p:spPr>
-      </p:pic>
-      <p:sp>
-        <p:nvSpPr>
-          <p:cNvPr id="19" name="TextBox 18"/>
+          <p:cNvPr id="22" name="TextBox 21"/>
           <p:cNvSpPr txBox="1"/>
           <p:nvPr/>
         </p:nvSpPr>
         <p:spPr>
           <a:xfrm>
-            <a:off x="1417320" y="2962656"/>
-            <a:ext cx="10131552" cy="256032"/>
+            <a:off x="6281928" y="2459735"/>
+            <a:ext cx="265176" cy="219456"/>
           </a:xfrm>
           <a:prstGeom prst="rect">
             <a:avLst/>
@@ -4468,74 +4822,30 @@
               </a:spcAft>
             </a:pPr>
             <a:r>
-              <a:rPr sz="1250" b="1" i="0">
+              <a:rPr sz="980" b="1" i="0">
                 <a:solidFill>
                   <a:srgbClr val="16325C"/>
                 </a:solidFill>
                 <a:latin typeface="Calibri"/>
               </a:rPr>
-              <a:t>Hands-on setup</a:t>
-            </a:r>
-          </a:p>
-        </p:txBody>
-      </p:sp>
-      <p:sp>
-        <p:nvSpPr>
-          <p:cNvPr id="20" name="TextBox 19"/>
-          <p:cNvSpPr txBox="1"/>
-          <p:nvPr/>
-        </p:nvSpPr>
-        <p:spPr>
-          <a:xfrm>
-            <a:off x="1417320" y="3246120"/>
-            <a:ext cx="10131552" cy="365760"/>
-          </a:xfrm>
-          <a:prstGeom prst="rect">
-            <a:avLst/>
-          </a:prstGeom>
-          <a:noFill/>
-        </p:spPr>
-        <p:txBody>
-          <a:bodyPr wrap="square" anchor="t" lIns="0" rIns="0" tIns="0" bIns="0">
-            <a:spAutoFit/>
-          </a:bodyPr>
-          <a:lstStyle/>
-          <a:p>
-            <a:pPr algn="l">
-              <a:lnSpc>
-                <a:spcPct val="113000"/>
-              </a:lnSpc>
-              <a:spcAft>
-                <a:spcPts val="400"/>
-              </a:spcAft>
-            </a:pPr>
-            <a:r>
-              <a:rPr sz="1019" b="0" i="0">
-                <a:solidFill>
-                  <a:srgbClr val="3A4356"/>
-                </a:solidFill>
-                <a:latin typeface="Calibri"/>
-              </a:rPr>
-              <a:t>Material, process and machine are chosen by a person, part by part.</a:t>
-            </a:r>
-          </a:p>
-        </p:txBody>
-      </p:sp>
-      <p:sp>
-        <p:nvSpPr>
-          <p:cNvPr id="21" name="Rounded Rectangle 20"/>
+              <a:t>A</a:t>
+            </a:r>
+          </a:p>
+        </p:txBody>
+      </p:sp>
+      <p:sp>
+        <p:nvSpPr>
+          <p:cNvPr id="23" name="Rectangle 22"/>
           <p:cNvSpPr/>
           <p:nvPr/>
         </p:nvSpPr>
         <p:spPr>
           <a:xfrm>
-            <a:off x="411480" y="3749040"/>
-            <a:ext cx="11365992" cy="868680"/>
-          </a:xfrm>
-          <a:prstGeom prst="roundRect">
-            <a:avLst>
-              <a:gd name="adj" fmla="val 12000"/>
-            </a:avLst>
+            <a:off x="6611112" y="2395727"/>
+            <a:ext cx="3611880" cy="310896"/>
+          </a:xfrm>
+          <a:prstGeom prst="rect">
+            <a:avLst/>
           </a:prstGeom>
           <a:solidFill>
             <a:srgbClr val="FFFFFF"/>
@@ -4571,126 +4881,14 @@
       </p:sp>
       <p:sp>
         <p:nvSpPr>
-          <p:cNvPr id="22" name="Rectangle 21"/>
-          <p:cNvSpPr/>
-          <p:nvPr/>
-        </p:nvSpPr>
-        <p:spPr>
-          <a:xfrm>
-            <a:off x="411480" y="3749040"/>
-            <a:ext cx="68580" cy="868680"/>
-          </a:xfrm>
-          <a:prstGeom prst="rect">
-            <a:avLst/>
-          </a:prstGeom>
-          <a:solidFill>
-            <a:srgbClr val="B7791F"/>
-          </a:solidFill>
-          <a:ln>
-            <a:noFill/>
-          </a:ln>
-          <a:effectLst/>
-        </p:spPr>
-        <p:style>
-          <a:lnRef idx="1">
-            <a:schemeClr val="accent1"/>
-          </a:lnRef>
-          <a:fillRef idx="3">
-            <a:schemeClr val="accent1"/>
-          </a:fillRef>
-          <a:effectRef idx="2">
-            <a:schemeClr val="accent1"/>
-          </a:effectRef>
-          <a:fontRef idx="minor">
-            <a:schemeClr val="lt1"/>
-          </a:fontRef>
-        </p:style>
-        <p:txBody>
-          <a:bodyPr rtlCol="0" anchor="ctr"/>
-          <a:lstStyle/>
-          <a:p>
-            <a:pPr algn="ctr"/>
-          </a:p>
-        </p:txBody>
-      </p:sp>
-      <p:sp>
-        <p:nvSpPr>
-          <p:cNvPr id="23" name="Oval 22"/>
-          <p:cNvSpPr/>
-          <p:nvPr/>
-        </p:nvSpPr>
-        <p:spPr>
-          <a:xfrm>
-            <a:off x="658368" y="3909060"/>
-            <a:ext cx="548640" cy="548640"/>
-          </a:xfrm>
-          <a:prstGeom prst="ellipse">
-            <a:avLst/>
-          </a:prstGeom>
-          <a:solidFill>
-            <a:srgbClr val="B7791F"/>
-          </a:solidFill>
-          <a:ln>
-            <a:noFill/>
-          </a:ln>
-          <a:effectLst/>
-        </p:spPr>
-        <p:style>
-          <a:lnRef idx="1">
-            <a:schemeClr val="accent1"/>
-          </a:lnRef>
-          <a:fillRef idx="3">
-            <a:schemeClr val="accent1"/>
-          </a:fillRef>
-          <a:effectRef idx="2">
-            <a:schemeClr val="accent1"/>
-          </a:effectRef>
-          <a:fontRef idx="minor">
-            <a:schemeClr val="lt1"/>
-          </a:fontRef>
-        </p:style>
-        <p:txBody>
-          <a:bodyPr rtlCol="0" anchor="ctr"/>
-          <a:lstStyle/>
-          <a:p>
-            <a:pPr algn="ctr"/>
-          </a:p>
-        </p:txBody>
-      </p:sp>
-      <p:pic>
-        <p:nvPicPr>
-          <p:cNvPr id="24" name="Picture 23" descr="clip.png"/>
-          <p:cNvPicPr>
-            <a:picLocks noChangeAspect="1"/>
-          </p:cNvPicPr>
-          <p:nvPr/>
-        </p:nvPicPr>
-        <p:blipFill>
-          <a:blip r:embed="rId4"/>
-          <a:stretch>
-            <a:fillRect/>
-          </a:stretch>
-        </p:blipFill>
-        <p:spPr>
-          <a:xfrm>
-            <a:off x="801014" y="4051706"/>
-            <a:ext cx="263348" cy="263348"/>
-          </a:xfrm>
-          <a:prstGeom prst="rect">
-            <a:avLst/>
-          </a:prstGeom>
-        </p:spPr>
-      </p:pic>
-      <p:sp>
-        <p:nvSpPr>
-          <p:cNvPr id="25" name="TextBox 24"/>
+          <p:cNvPr id="24" name="TextBox 23"/>
           <p:cNvSpPr txBox="1"/>
           <p:nvPr/>
         </p:nvSpPr>
         <p:spPr>
           <a:xfrm>
-            <a:off x="1417320" y="3895344"/>
-            <a:ext cx="10131552" cy="256032"/>
+            <a:off x="6693408" y="2459735"/>
+            <a:ext cx="3465576" cy="219456"/>
           </a:xfrm>
           <a:prstGeom prst="rect">
             <a:avLst/>
@@ -4712,74 +4910,30 @@
               </a:spcAft>
             </a:pPr>
             <a:r>
-              <a:rPr sz="1250" b="1" i="0">
-                <a:solidFill>
-                  <a:srgbClr val="16325C"/>
+              <a:rPr sz="980" b="0" i="0">
+                <a:solidFill>
+                  <a:srgbClr val="3A4356"/>
                 </a:solidFill>
                 <a:latin typeface="Calibri"/>
               </a:rPr>
-              <a:t>Manual data entry</a:t>
-            </a:r>
-          </a:p>
-        </p:txBody>
-      </p:sp>
-      <p:sp>
-        <p:nvSpPr>
-          <p:cNvPr id="26" name="TextBox 25"/>
-          <p:cNvSpPr txBox="1"/>
-          <p:nvPr/>
-        </p:nvSpPr>
-        <p:spPr>
-          <a:xfrm>
-            <a:off x="1417320" y="4178808"/>
-            <a:ext cx="10131552" cy="365760"/>
-          </a:xfrm>
-          <a:prstGeom prst="rect">
-            <a:avLst/>
-          </a:prstGeom>
-          <a:noFill/>
-        </p:spPr>
-        <p:txBody>
-          <a:bodyPr wrap="square" anchor="t" lIns="0" rIns="0" tIns="0" bIns="0">
-            <a:spAutoFit/>
-          </a:bodyPr>
-          <a:lstStyle/>
-          <a:p>
-            <a:pPr algn="l">
-              <a:lnSpc>
-                <a:spcPct val="113000"/>
-              </a:lnSpc>
-              <a:spcAft>
-                <a:spcPts val="400"/>
-              </a:spcAft>
-            </a:pPr>
-            <a:r>
-              <a:rPr sz="1019" b="0" i="0">
-                <a:solidFill>
-                  <a:srgbClr val="3A4356"/>
-                </a:solidFill>
-                <a:latin typeface="Calibri"/>
-              </a:rPr>
-              <a:t>Geometry and tolerances are read off the 3D model and the drawing, then typed in.</a:t>
-            </a:r>
-          </a:p>
-        </p:txBody>
-      </p:sp>
-      <p:sp>
-        <p:nvSpPr>
-          <p:cNvPr id="27" name="Rounded Rectangle 26"/>
+              <a:t>Minutes to cost one part today</a:t>
+            </a:r>
+          </a:p>
+        </p:txBody>
+      </p:sp>
+      <p:sp>
+        <p:nvSpPr>
+          <p:cNvPr id="25" name="Rectangle 24"/>
           <p:cNvSpPr/>
           <p:nvPr/>
         </p:nvSpPr>
         <p:spPr>
           <a:xfrm>
-            <a:off x="411480" y="4681728"/>
-            <a:ext cx="11365992" cy="868680"/>
-          </a:xfrm>
-          <a:prstGeom prst="roundRect">
-            <a:avLst>
-              <a:gd name="adj" fmla="val 12000"/>
-            </a:avLst>
+            <a:off x="10222992" y="2395727"/>
+            <a:ext cx="1554480" cy="310896"/>
+          </a:xfrm>
+          <a:prstGeom prst="rect">
+            <a:avLst/>
           </a:prstGeom>
           <a:solidFill>
             <a:srgbClr val="FFFFFF"/>
@@ -4815,126 +4969,14 @@
       </p:sp>
       <p:sp>
         <p:nvSpPr>
-          <p:cNvPr id="28" name="Rectangle 27"/>
-          <p:cNvSpPr/>
-          <p:nvPr/>
-        </p:nvSpPr>
-        <p:spPr>
-          <a:xfrm>
-            <a:off x="411480" y="4681728"/>
-            <a:ext cx="68580" cy="868680"/>
-          </a:xfrm>
-          <a:prstGeom prst="rect">
-            <a:avLst/>
-          </a:prstGeom>
-          <a:solidFill>
-            <a:srgbClr val="B7791F"/>
-          </a:solidFill>
-          <a:ln>
-            <a:noFill/>
-          </a:ln>
-          <a:effectLst/>
-        </p:spPr>
-        <p:style>
-          <a:lnRef idx="1">
-            <a:schemeClr val="accent1"/>
-          </a:lnRef>
-          <a:fillRef idx="3">
-            <a:schemeClr val="accent1"/>
-          </a:fillRef>
-          <a:effectRef idx="2">
-            <a:schemeClr val="accent1"/>
-          </a:effectRef>
-          <a:fontRef idx="minor">
-            <a:schemeClr val="lt1"/>
-          </a:fontRef>
-        </p:style>
-        <p:txBody>
-          <a:bodyPr rtlCol="0" anchor="ctr"/>
-          <a:lstStyle/>
-          <a:p>
-            <a:pPr algn="ctr"/>
-          </a:p>
-        </p:txBody>
-      </p:sp>
-      <p:sp>
-        <p:nvSpPr>
-          <p:cNvPr id="29" name="Oval 28"/>
-          <p:cNvSpPr/>
-          <p:nvPr/>
-        </p:nvSpPr>
-        <p:spPr>
-          <a:xfrm>
-            <a:off x="658368" y="4841748"/>
-            <a:ext cx="548640" cy="548640"/>
-          </a:xfrm>
-          <a:prstGeom prst="ellipse">
-            <a:avLst/>
-          </a:prstGeom>
-          <a:solidFill>
-            <a:srgbClr val="B7791F"/>
-          </a:solidFill>
-          <a:ln>
-            <a:noFill/>
-          </a:ln>
-          <a:effectLst/>
-        </p:spPr>
-        <p:style>
-          <a:lnRef idx="1">
-            <a:schemeClr val="accent1"/>
-          </a:lnRef>
-          <a:fillRef idx="3">
-            <a:schemeClr val="accent1"/>
-          </a:fillRef>
-          <a:effectRef idx="2">
-            <a:schemeClr val="accent1"/>
-          </a:effectRef>
-          <a:fontRef idx="minor">
-            <a:schemeClr val="lt1"/>
-          </a:fontRef>
-        </p:style>
-        <p:txBody>
-          <a:bodyPr rtlCol="0" anchor="ctr"/>
-          <a:lstStyle/>
-          <a:p>
-            <a:pPr algn="ctr"/>
-          </a:p>
-        </p:txBody>
-      </p:sp>
-      <p:pic>
-        <p:nvPicPr>
-          <p:cNvPr id="30" name="Picture 29" descr="clock.png"/>
-          <p:cNvPicPr>
-            <a:picLocks noChangeAspect="1"/>
-          </p:cNvPicPr>
-          <p:nvPr/>
-        </p:nvPicPr>
-        <p:blipFill>
-          <a:blip r:embed="rId5"/>
-          <a:stretch>
-            <a:fillRect/>
-          </a:stretch>
-        </p:blipFill>
-        <p:spPr>
-          <a:xfrm>
-            <a:off x="801014" y="4984394"/>
-            <a:ext cx="263348" cy="263348"/>
-          </a:xfrm>
-          <a:prstGeom prst="rect">
-            <a:avLst/>
-          </a:prstGeom>
-        </p:spPr>
-      </p:pic>
-      <p:sp>
-        <p:nvSpPr>
-          <p:cNvPr id="31" name="TextBox 30"/>
+          <p:cNvPr id="26" name="TextBox 25"/>
           <p:cNvSpPr txBox="1"/>
           <p:nvPr/>
         </p:nvSpPr>
         <p:spPr>
           <a:xfrm>
-            <a:off x="1417320" y="4828032"/>
-            <a:ext cx="10131552" cy="256032"/>
+            <a:off x="10305288" y="2459735"/>
+            <a:ext cx="1408176" cy="219456"/>
           </a:xfrm>
           <a:prstGeom prst="rect">
             <a:avLst/>
@@ -4956,80 +4998,38 @@
               </a:spcAft>
             </a:pPr>
             <a:r>
-              <a:rPr sz="1250" b="1" i="0">
-                <a:solidFill>
-                  <a:srgbClr val="16325C"/>
+              <a:rPr sz="980" b="1" i="0">
+                <a:solidFill>
+                  <a:srgbClr val="1D6FB8"/>
                 </a:solidFill>
                 <a:latin typeface="Calibri"/>
               </a:rPr>
-              <a:t>Updated by hand</a:t>
-            </a:r>
-          </a:p>
-        </p:txBody>
-      </p:sp>
-      <p:sp>
-        <p:nvSpPr>
-          <p:cNvPr id="32" name="TextBox 31"/>
-          <p:cNvSpPr txBox="1"/>
-          <p:nvPr/>
-        </p:nvSpPr>
-        <p:spPr>
-          <a:xfrm>
-            <a:off x="1417320" y="5111496"/>
-            <a:ext cx="10131552" cy="365760"/>
-          </a:xfrm>
-          <a:prstGeom prst="rect">
-            <a:avLst/>
-          </a:prstGeom>
-          <a:noFill/>
-        </p:spPr>
-        <p:txBody>
-          <a:bodyPr wrap="square" anchor="t" lIns="0" rIns="0" tIns="0" bIns="0">
-            <a:spAutoFit/>
-          </a:bodyPr>
-          <a:lstStyle/>
-          <a:p>
-            <a:pPr algn="l">
-              <a:lnSpc>
-                <a:spcPct val="113000"/>
-              </a:lnSpc>
-              <a:spcAft>
-                <a:spcPts val="400"/>
-              </a:spcAft>
-            </a:pPr>
-            <a:r>
-              <a:rPr sz="1019" b="0" i="0">
-                <a:solidFill>
-                  <a:srgbClr val="3A4356"/>
-                </a:solidFill>
-                <a:latin typeface="Calibri"/>
-              </a:rPr>
-              <a:t>Rates and inputs are refreshed manually as the economics move.</a:t>
-            </a:r>
-          </a:p>
-        </p:txBody>
-      </p:sp>
-      <p:sp>
-        <p:nvSpPr>
-          <p:cNvPr id="33" name="Rounded Rectangle 32"/>
+              <a:t>________</a:t>
+            </a:r>
+          </a:p>
+        </p:txBody>
+      </p:sp>
+      <p:sp>
+        <p:nvSpPr>
+          <p:cNvPr id="27" name="Rectangle 26"/>
           <p:cNvSpPr/>
           <p:nvPr/>
         </p:nvSpPr>
         <p:spPr>
           <a:xfrm>
-            <a:off x="411480" y="5669280"/>
-            <a:ext cx="11365992" cy="914400"/>
-          </a:xfrm>
-          <a:prstGeom prst="roundRect">
-            <a:avLst>
-              <a:gd name="adj" fmla="val 12000"/>
-            </a:avLst>
+            <a:off x="6199632" y="2706623"/>
+            <a:ext cx="411480" cy="310896"/>
+          </a:xfrm>
+          <a:prstGeom prst="rect">
+            <a:avLst/>
           </a:prstGeom>
           <a:solidFill>
-            <a:srgbClr val="EAF6EF"/>
+            <a:srgbClr val="F4F7FB"/>
           </a:solidFill>
-          <a:ln>
-            <a:noFill/>
+          <a:ln w="9525">
+            <a:solidFill>
+              <a:srgbClr val="DCE3EE"/>
+            </a:solidFill>
           </a:ln>
           <a:effectLst/>
         </p:spPr>
@@ -5057,58 +5057,14 @@
       </p:sp>
       <p:sp>
         <p:nvSpPr>
-          <p:cNvPr id="34" name="Rectangle 33"/>
-          <p:cNvSpPr/>
-          <p:nvPr/>
-        </p:nvSpPr>
-        <p:spPr>
-          <a:xfrm>
-            <a:off x="411480" y="5669280"/>
-            <a:ext cx="68580" cy="914400"/>
-          </a:xfrm>
-          <a:prstGeom prst="rect">
-            <a:avLst/>
-          </a:prstGeom>
-          <a:solidFill>
-            <a:srgbClr val="2E8B57"/>
-          </a:solidFill>
-          <a:ln>
-            <a:noFill/>
-          </a:ln>
-          <a:effectLst/>
-        </p:spPr>
-        <p:style>
-          <a:lnRef idx="1">
-            <a:schemeClr val="accent1"/>
-          </a:lnRef>
-          <a:fillRef idx="3">
-            <a:schemeClr val="accent1"/>
-          </a:fillRef>
-          <a:effectRef idx="2">
-            <a:schemeClr val="accent1"/>
-          </a:effectRef>
-          <a:fontRef idx="minor">
-            <a:schemeClr val="lt1"/>
-          </a:fontRef>
-        </p:style>
-        <p:txBody>
-          <a:bodyPr rtlCol="0" anchor="ctr"/>
-          <a:lstStyle/>
-          <a:p>
-            <a:pPr algn="ctr"/>
-          </a:p>
-        </p:txBody>
-      </p:sp>
-      <p:sp>
-        <p:nvSpPr>
-          <p:cNvPr id="35" name="TextBox 34"/>
+          <p:cNvPr id="28" name="TextBox 27"/>
           <p:cNvSpPr txBox="1"/>
           <p:nvPr/>
         </p:nvSpPr>
         <p:spPr>
           <a:xfrm>
-            <a:off x="630936" y="5788152"/>
-            <a:ext cx="10954512" cy="256032"/>
+            <a:off x="6281928" y="2770631"/>
+            <a:ext cx="265176" cy="219456"/>
           </a:xfrm>
           <a:prstGeom prst="rect">
             <a:avLst/>
@@ -5130,6 +5086,1634 @@
               </a:spcAft>
             </a:pPr>
             <a:r>
+              <a:rPr sz="980" b="1" i="0">
+                <a:solidFill>
+                  <a:srgbClr val="16325C"/>
+                </a:solidFill>
+                <a:latin typeface="Calibri"/>
+              </a:rPr>
+              <a:t>B</a:t>
+            </a:r>
+          </a:p>
+        </p:txBody>
+      </p:sp>
+      <p:sp>
+        <p:nvSpPr>
+          <p:cNvPr id="29" name="Rectangle 28"/>
+          <p:cNvSpPr/>
+          <p:nvPr/>
+        </p:nvSpPr>
+        <p:spPr>
+          <a:xfrm>
+            <a:off x="6611112" y="2706623"/>
+            <a:ext cx="3611880" cy="310896"/>
+          </a:xfrm>
+          <a:prstGeom prst="rect">
+            <a:avLst/>
+          </a:prstGeom>
+          <a:solidFill>
+            <a:srgbClr val="F4F7FB"/>
+          </a:solidFill>
+          <a:ln w="9525">
+            <a:solidFill>
+              <a:srgbClr val="DCE3EE"/>
+            </a:solidFill>
+          </a:ln>
+          <a:effectLst/>
+        </p:spPr>
+        <p:style>
+          <a:lnRef idx="1">
+            <a:schemeClr val="accent1"/>
+          </a:lnRef>
+          <a:fillRef idx="3">
+            <a:schemeClr val="accent1"/>
+          </a:fillRef>
+          <a:effectRef idx="2">
+            <a:schemeClr val="accent1"/>
+          </a:effectRef>
+          <a:fontRef idx="minor">
+            <a:schemeClr val="lt1"/>
+          </a:fontRef>
+        </p:style>
+        <p:txBody>
+          <a:bodyPr rtlCol="0" anchor="ctr"/>
+          <a:lstStyle/>
+          <a:p>
+            <a:pPr algn="ctr"/>
+          </a:p>
+        </p:txBody>
+      </p:sp>
+      <p:sp>
+        <p:nvSpPr>
+          <p:cNvPr id="30" name="TextBox 29"/>
+          <p:cNvSpPr txBox="1"/>
+          <p:nvPr/>
+        </p:nvSpPr>
+        <p:spPr>
+          <a:xfrm>
+            <a:off x="6693408" y="2770631"/>
+            <a:ext cx="3465576" cy="219456"/>
+          </a:xfrm>
+          <a:prstGeom prst="rect">
+            <a:avLst/>
+          </a:prstGeom>
+          <a:noFill/>
+        </p:spPr>
+        <p:txBody>
+          <a:bodyPr wrap="square" anchor="t" lIns="0" rIns="0" tIns="0" bIns="0">
+            <a:spAutoFit/>
+          </a:bodyPr>
+          <a:lstStyle/>
+          <a:p>
+            <a:pPr algn="l">
+              <a:lnSpc>
+                <a:spcPct val="100000"/>
+              </a:lnSpc>
+              <a:spcAft>
+                <a:spcPts val="400"/>
+              </a:spcAft>
+            </a:pPr>
+            <a:r>
+              <a:rPr sz="980" b="0" i="0">
+                <a:solidFill>
+                  <a:srgbClr val="3A4356"/>
+                </a:solidFill>
+                <a:latin typeface="Calibri"/>
+              </a:rPr>
+              <a:t>Of those, minutes reading the model and typing</a:t>
+            </a:r>
+          </a:p>
+        </p:txBody>
+      </p:sp>
+      <p:sp>
+        <p:nvSpPr>
+          <p:cNvPr id="31" name="Rectangle 30"/>
+          <p:cNvSpPr/>
+          <p:nvPr/>
+        </p:nvSpPr>
+        <p:spPr>
+          <a:xfrm>
+            <a:off x="10222992" y="2706623"/>
+            <a:ext cx="1554480" cy="310896"/>
+          </a:xfrm>
+          <a:prstGeom prst="rect">
+            <a:avLst/>
+          </a:prstGeom>
+          <a:solidFill>
+            <a:srgbClr val="F4F7FB"/>
+          </a:solidFill>
+          <a:ln w="9525">
+            <a:solidFill>
+              <a:srgbClr val="DCE3EE"/>
+            </a:solidFill>
+          </a:ln>
+          <a:effectLst/>
+        </p:spPr>
+        <p:style>
+          <a:lnRef idx="1">
+            <a:schemeClr val="accent1"/>
+          </a:lnRef>
+          <a:fillRef idx="3">
+            <a:schemeClr val="accent1"/>
+          </a:fillRef>
+          <a:effectRef idx="2">
+            <a:schemeClr val="accent1"/>
+          </a:effectRef>
+          <a:fontRef idx="minor">
+            <a:schemeClr val="lt1"/>
+          </a:fontRef>
+        </p:style>
+        <p:txBody>
+          <a:bodyPr rtlCol="0" anchor="ctr"/>
+          <a:lstStyle/>
+          <a:p>
+            <a:pPr algn="ctr"/>
+          </a:p>
+        </p:txBody>
+      </p:sp>
+      <p:sp>
+        <p:nvSpPr>
+          <p:cNvPr id="32" name="TextBox 31"/>
+          <p:cNvSpPr txBox="1"/>
+          <p:nvPr/>
+        </p:nvSpPr>
+        <p:spPr>
+          <a:xfrm>
+            <a:off x="10305288" y="2770631"/>
+            <a:ext cx="1408176" cy="219456"/>
+          </a:xfrm>
+          <a:prstGeom prst="rect">
+            <a:avLst/>
+          </a:prstGeom>
+          <a:noFill/>
+        </p:spPr>
+        <p:txBody>
+          <a:bodyPr wrap="square" anchor="t" lIns="0" rIns="0" tIns="0" bIns="0">
+            <a:spAutoFit/>
+          </a:bodyPr>
+          <a:lstStyle/>
+          <a:p>
+            <a:pPr algn="l">
+              <a:lnSpc>
+                <a:spcPct val="100000"/>
+              </a:lnSpc>
+              <a:spcAft>
+                <a:spcPts val="400"/>
+              </a:spcAft>
+            </a:pPr>
+            <a:r>
+              <a:rPr sz="980" b="1" i="0">
+                <a:solidFill>
+                  <a:srgbClr val="1D6FB8"/>
+                </a:solidFill>
+                <a:latin typeface="Calibri"/>
+              </a:rPr>
+              <a:t>________</a:t>
+            </a:r>
+          </a:p>
+        </p:txBody>
+      </p:sp>
+      <p:sp>
+        <p:nvSpPr>
+          <p:cNvPr id="33" name="Rectangle 32"/>
+          <p:cNvSpPr/>
+          <p:nvPr/>
+        </p:nvSpPr>
+        <p:spPr>
+          <a:xfrm>
+            <a:off x="6199632" y="3017519"/>
+            <a:ext cx="411480" cy="310896"/>
+          </a:xfrm>
+          <a:prstGeom prst="rect">
+            <a:avLst/>
+          </a:prstGeom>
+          <a:solidFill>
+            <a:srgbClr val="FFFFFF"/>
+          </a:solidFill>
+          <a:ln w="9525">
+            <a:solidFill>
+              <a:srgbClr val="DCE3EE"/>
+            </a:solidFill>
+          </a:ln>
+          <a:effectLst/>
+        </p:spPr>
+        <p:style>
+          <a:lnRef idx="1">
+            <a:schemeClr val="accent1"/>
+          </a:lnRef>
+          <a:fillRef idx="3">
+            <a:schemeClr val="accent1"/>
+          </a:fillRef>
+          <a:effectRef idx="2">
+            <a:schemeClr val="accent1"/>
+          </a:effectRef>
+          <a:fontRef idx="minor">
+            <a:schemeClr val="lt1"/>
+          </a:fontRef>
+        </p:style>
+        <p:txBody>
+          <a:bodyPr rtlCol="0" anchor="ctr"/>
+          <a:lstStyle/>
+          <a:p>
+            <a:pPr algn="ctr"/>
+          </a:p>
+        </p:txBody>
+      </p:sp>
+      <p:sp>
+        <p:nvSpPr>
+          <p:cNvPr id="34" name="TextBox 33"/>
+          <p:cNvSpPr txBox="1"/>
+          <p:nvPr/>
+        </p:nvSpPr>
+        <p:spPr>
+          <a:xfrm>
+            <a:off x="6281928" y="3081527"/>
+            <a:ext cx="265176" cy="219456"/>
+          </a:xfrm>
+          <a:prstGeom prst="rect">
+            <a:avLst/>
+          </a:prstGeom>
+          <a:noFill/>
+        </p:spPr>
+        <p:txBody>
+          <a:bodyPr wrap="square" anchor="t" lIns="0" rIns="0" tIns="0" bIns="0">
+            <a:spAutoFit/>
+          </a:bodyPr>
+          <a:lstStyle/>
+          <a:p>
+            <a:pPr algn="l">
+              <a:lnSpc>
+                <a:spcPct val="100000"/>
+              </a:lnSpc>
+              <a:spcAft>
+                <a:spcPts val="400"/>
+              </a:spcAft>
+            </a:pPr>
+            <a:r>
+              <a:rPr sz="980" b="1" i="0">
+                <a:solidFill>
+                  <a:srgbClr val="16325C"/>
+                </a:solidFill>
+                <a:latin typeface="Calibri"/>
+              </a:rPr>
+              <a:t>C</a:t>
+            </a:r>
+          </a:p>
+        </p:txBody>
+      </p:sp>
+      <p:sp>
+        <p:nvSpPr>
+          <p:cNvPr id="35" name="Rectangle 34"/>
+          <p:cNvSpPr/>
+          <p:nvPr/>
+        </p:nvSpPr>
+        <p:spPr>
+          <a:xfrm>
+            <a:off x="6611112" y="3017519"/>
+            <a:ext cx="3611880" cy="310896"/>
+          </a:xfrm>
+          <a:prstGeom prst="rect">
+            <a:avLst/>
+          </a:prstGeom>
+          <a:solidFill>
+            <a:srgbClr val="FFFFFF"/>
+          </a:solidFill>
+          <a:ln w="9525">
+            <a:solidFill>
+              <a:srgbClr val="DCE3EE"/>
+            </a:solidFill>
+          </a:ln>
+          <a:effectLst/>
+        </p:spPr>
+        <p:style>
+          <a:lnRef idx="1">
+            <a:schemeClr val="accent1"/>
+          </a:lnRef>
+          <a:fillRef idx="3">
+            <a:schemeClr val="accent1"/>
+          </a:fillRef>
+          <a:effectRef idx="2">
+            <a:schemeClr val="accent1"/>
+          </a:effectRef>
+          <a:fontRef idx="minor">
+            <a:schemeClr val="lt1"/>
+          </a:fontRef>
+        </p:style>
+        <p:txBody>
+          <a:bodyPr rtlCol="0" anchor="ctr"/>
+          <a:lstStyle/>
+          <a:p>
+            <a:pPr algn="ctr"/>
+          </a:p>
+        </p:txBody>
+      </p:sp>
+      <p:sp>
+        <p:nvSpPr>
+          <p:cNvPr id="36" name="TextBox 35"/>
+          <p:cNvSpPr txBox="1"/>
+          <p:nvPr/>
+        </p:nvSpPr>
+        <p:spPr>
+          <a:xfrm>
+            <a:off x="6693408" y="3081527"/>
+            <a:ext cx="3465576" cy="219456"/>
+          </a:xfrm>
+          <a:prstGeom prst="rect">
+            <a:avLst/>
+          </a:prstGeom>
+          <a:noFill/>
+        </p:spPr>
+        <p:txBody>
+          <a:bodyPr wrap="square" anchor="t" lIns="0" rIns="0" tIns="0" bIns="0">
+            <a:spAutoFit/>
+          </a:bodyPr>
+          <a:lstStyle/>
+          <a:p>
+            <a:pPr algn="l">
+              <a:lnSpc>
+                <a:spcPct val="100000"/>
+              </a:lnSpc>
+              <a:spcAft>
+                <a:spcPts val="400"/>
+              </a:spcAft>
+            </a:pPr>
+            <a:r>
+              <a:rPr sz="980" b="0" i="0">
+                <a:solidFill>
+                  <a:srgbClr val="3A4356"/>
+                </a:solidFill>
+                <a:latin typeface="Calibri"/>
+              </a:rPr>
+              <a:t>Parts we cost in a year</a:t>
+            </a:r>
+          </a:p>
+        </p:txBody>
+      </p:sp>
+      <p:sp>
+        <p:nvSpPr>
+          <p:cNvPr id="37" name="Rectangle 36"/>
+          <p:cNvSpPr/>
+          <p:nvPr/>
+        </p:nvSpPr>
+        <p:spPr>
+          <a:xfrm>
+            <a:off x="10222992" y="3017519"/>
+            <a:ext cx="1554480" cy="310896"/>
+          </a:xfrm>
+          <a:prstGeom prst="rect">
+            <a:avLst/>
+          </a:prstGeom>
+          <a:solidFill>
+            <a:srgbClr val="FFFFFF"/>
+          </a:solidFill>
+          <a:ln w="9525">
+            <a:solidFill>
+              <a:srgbClr val="DCE3EE"/>
+            </a:solidFill>
+          </a:ln>
+          <a:effectLst/>
+        </p:spPr>
+        <p:style>
+          <a:lnRef idx="1">
+            <a:schemeClr val="accent1"/>
+          </a:lnRef>
+          <a:fillRef idx="3">
+            <a:schemeClr val="accent1"/>
+          </a:fillRef>
+          <a:effectRef idx="2">
+            <a:schemeClr val="accent1"/>
+          </a:effectRef>
+          <a:fontRef idx="minor">
+            <a:schemeClr val="lt1"/>
+          </a:fontRef>
+        </p:style>
+        <p:txBody>
+          <a:bodyPr rtlCol="0" anchor="ctr"/>
+          <a:lstStyle/>
+          <a:p>
+            <a:pPr algn="ctr"/>
+          </a:p>
+        </p:txBody>
+      </p:sp>
+      <p:sp>
+        <p:nvSpPr>
+          <p:cNvPr id="38" name="TextBox 37"/>
+          <p:cNvSpPr txBox="1"/>
+          <p:nvPr/>
+        </p:nvSpPr>
+        <p:spPr>
+          <a:xfrm>
+            <a:off x="10305288" y="3081527"/>
+            <a:ext cx="1408176" cy="219456"/>
+          </a:xfrm>
+          <a:prstGeom prst="rect">
+            <a:avLst/>
+          </a:prstGeom>
+          <a:noFill/>
+        </p:spPr>
+        <p:txBody>
+          <a:bodyPr wrap="square" anchor="t" lIns="0" rIns="0" tIns="0" bIns="0">
+            <a:spAutoFit/>
+          </a:bodyPr>
+          <a:lstStyle/>
+          <a:p>
+            <a:pPr algn="l">
+              <a:lnSpc>
+                <a:spcPct val="100000"/>
+              </a:lnSpc>
+              <a:spcAft>
+                <a:spcPts val="400"/>
+              </a:spcAft>
+            </a:pPr>
+            <a:r>
+              <a:rPr sz="980" b="1" i="0">
+                <a:solidFill>
+                  <a:srgbClr val="1D6FB8"/>
+                </a:solidFill>
+                <a:latin typeface="Calibri"/>
+              </a:rPr>
+              <a:t>________</a:t>
+            </a:r>
+          </a:p>
+        </p:txBody>
+      </p:sp>
+      <p:sp>
+        <p:nvSpPr>
+          <p:cNvPr id="39" name="Rectangle 38"/>
+          <p:cNvSpPr/>
+          <p:nvPr/>
+        </p:nvSpPr>
+        <p:spPr>
+          <a:xfrm>
+            <a:off x="6199632" y="3328415"/>
+            <a:ext cx="411480" cy="310896"/>
+          </a:xfrm>
+          <a:prstGeom prst="rect">
+            <a:avLst/>
+          </a:prstGeom>
+          <a:solidFill>
+            <a:srgbClr val="F4F7FB"/>
+          </a:solidFill>
+          <a:ln w="9525">
+            <a:solidFill>
+              <a:srgbClr val="DCE3EE"/>
+            </a:solidFill>
+          </a:ln>
+          <a:effectLst/>
+        </p:spPr>
+        <p:style>
+          <a:lnRef idx="1">
+            <a:schemeClr val="accent1"/>
+          </a:lnRef>
+          <a:fillRef idx="3">
+            <a:schemeClr val="accent1"/>
+          </a:fillRef>
+          <a:effectRef idx="2">
+            <a:schemeClr val="accent1"/>
+          </a:effectRef>
+          <a:fontRef idx="minor">
+            <a:schemeClr val="lt1"/>
+          </a:fontRef>
+        </p:style>
+        <p:txBody>
+          <a:bodyPr rtlCol="0" anchor="ctr"/>
+          <a:lstStyle/>
+          <a:p>
+            <a:pPr algn="ctr"/>
+          </a:p>
+        </p:txBody>
+      </p:sp>
+      <p:sp>
+        <p:nvSpPr>
+          <p:cNvPr id="40" name="TextBox 39"/>
+          <p:cNvSpPr txBox="1"/>
+          <p:nvPr/>
+        </p:nvSpPr>
+        <p:spPr>
+          <a:xfrm>
+            <a:off x="6281928" y="3392423"/>
+            <a:ext cx="265176" cy="219456"/>
+          </a:xfrm>
+          <a:prstGeom prst="rect">
+            <a:avLst/>
+          </a:prstGeom>
+          <a:noFill/>
+        </p:spPr>
+        <p:txBody>
+          <a:bodyPr wrap="square" anchor="t" lIns="0" rIns="0" tIns="0" bIns="0">
+            <a:spAutoFit/>
+          </a:bodyPr>
+          <a:lstStyle/>
+          <a:p>
+            <a:pPr algn="l">
+              <a:lnSpc>
+                <a:spcPct val="100000"/>
+              </a:lnSpc>
+              <a:spcAft>
+                <a:spcPts val="400"/>
+              </a:spcAft>
+            </a:pPr>
+            <a:r>
+              <a:rPr sz="980" b="1" i="0">
+                <a:solidFill>
+                  <a:srgbClr val="16325C"/>
+                </a:solidFill>
+                <a:latin typeface="Calibri"/>
+              </a:rPr>
+              <a:t>D</a:t>
+            </a:r>
+          </a:p>
+        </p:txBody>
+      </p:sp>
+      <p:sp>
+        <p:nvSpPr>
+          <p:cNvPr id="41" name="Rectangle 40"/>
+          <p:cNvSpPr/>
+          <p:nvPr/>
+        </p:nvSpPr>
+        <p:spPr>
+          <a:xfrm>
+            <a:off x="6611112" y="3328415"/>
+            <a:ext cx="3611880" cy="310896"/>
+          </a:xfrm>
+          <a:prstGeom prst="rect">
+            <a:avLst/>
+          </a:prstGeom>
+          <a:solidFill>
+            <a:srgbClr val="F4F7FB"/>
+          </a:solidFill>
+          <a:ln w="9525">
+            <a:solidFill>
+              <a:srgbClr val="DCE3EE"/>
+            </a:solidFill>
+          </a:ln>
+          <a:effectLst/>
+        </p:spPr>
+        <p:style>
+          <a:lnRef idx="1">
+            <a:schemeClr val="accent1"/>
+          </a:lnRef>
+          <a:fillRef idx="3">
+            <a:schemeClr val="accent1"/>
+          </a:fillRef>
+          <a:effectRef idx="2">
+            <a:schemeClr val="accent1"/>
+          </a:effectRef>
+          <a:fontRef idx="minor">
+            <a:schemeClr val="lt1"/>
+          </a:fontRef>
+        </p:style>
+        <p:txBody>
+          <a:bodyPr rtlCol="0" anchor="ctr"/>
+          <a:lstStyle/>
+          <a:p>
+            <a:pPr algn="ctr"/>
+          </a:p>
+        </p:txBody>
+      </p:sp>
+      <p:sp>
+        <p:nvSpPr>
+          <p:cNvPr id="42" name="TextBox 41"/>
+          <p:cNvSpPr txBox="1"/>
+          <p:nvPr/>
+        </p:nvSpPr>
+        <p:spPr>
+          <a:xfrm>
+            <a:off x="6693408" y="3392423"/>
+            <a:ext cx="3465576" cy="219456"/>
+          </a:xfrm>
+          <a:prstGeom prst="rect">
+            <a:avLst/>
+          </a:prstGeom>
+          <a:noFill/>
+        </p:spPr>
+        <p:txBody>
+          <a:bodyPr wrap="square" anchor="t" lIns="0" rIns="0" tIns="0" bIns="0">
+            <a:spAutoFit/>
+          </a:bodyPr>
+          <a:lstStyle/>
+          <a:p>
+            <a:pPr algn="l">
+              <a:lnSpc>
+                <a:spcPct val="100000"/>
+              </a:lnSpc>
+              <a:spcAft>
+                <a:spcPts val="400"/>
+              </a:spcAft>
+            </a:pPr>
+            <a:r>
+              <a:rPr sz="980" b="0" i="0">
+                <a:solidFill>
+                  <a:srgbClr val="3A4356"/>
+                </a:solidFill>
+                <a:latin typeface="Calibri"/>
+              </a:rPr>
+              <a:t>Parts in a basket we never cost individually</a:t>
+            </a:r>
+          </a:p>
+        </p:txBody>
+      </p:sp>
+      <p:sp>
+        <p:nvSpPr>
+          <p:cNvPr id="43" name="Rectangle 42"/>
+          <p:cNvSpPr/>
+          <p:nvPr/>
+        </p:nvSpPr>
+        <p:spPr>
+          <a:xfrm>
+            <a:off x="10222992" y="3328415"/>
+            <a:ext cx="1554480" cy="310896"/>
+          </a:xfrm>
+          <a:prstGeom prst="rect">
+            <a:avLst/>
+          </a:prstGeom>
+          <a:solidFill>
+            <a:srgbClr val="F4F7FB"/>
+          </a:solidFill>
+          <a:ln w="9525">
+            <a:solidFill>
+              <a:srgbClr val="DCE3EE"/>
+            </a:solidFill>
+          </a:ln>
+          <a:effectLst/>
+        </p:spPr>
+        <p:style>
+          <a:lnRef idx="1">
+            <a:schemeClr val="accent1"/>
+          </a:lnRef>
+          <a:fillRef idx="3">
+            <a:schemeClr val="accent1"/>
+          </a:fillRef>
+          <a:effectRef idx="2">
+            <a:schemeClr val="accent1"/>
+          </a:effectRef>
+          <a:fontRef idx="minor">
+            <a:schemeClr val="lt1"/>
+          </a:fontRef>
+        </p:style>
+        <p:txBody>
+          <a:bodyPr rtlCol="0" anchor="ctr"/>
+          <a:lstStyle/>
+          <a:p>
+            <a:pPr algn="ctr"/>
+          </a:p>
+        </p:txBody>
+      </p:sp>
+      <p:sp>
+        <p:nvSpPr>
+          <p:cNvPr id="44" name="TextBox 43"/>
+          <p:cNvSpPr txBox="1"/>
+          <p:nvPr/>
+        </p:nvSpPr>
+        <p:spPr>
+          <a:xfrm>
+            <a:off x="10305288" y="3392423"/>
+            <a:ext cx="1408176" cy="219456"/>
+          </a:xfrm>
+          <a:prstGeom prst="rect">
+            <a:avLst/>
+          </a:prstGeom>
+          <a:noFill/>
+        </p:spPr>
+        <p:txBody>
+          <a:bodyPr wrap="square" anchor="t" lIns="0" rIns="0" tIns="0" bIns="0">
+            <a:spAutoFit/>
+          </a:bodyPr>
+          <a:lstStyle/>
+          <a:p>
+            <a:pPr algn="l">
+              <a:lnSpc>
+                <a:spcPct val="100000"/>
+              </a:lnSpc>
+              <a:spcAft>
+                <a:spcPts val="400"/>
+              </a:spcAft>
+            </a:pPr>
+            <a:r>
+              <a:rPr sz="980" b="1" i="0">
+                <a:solidFill>
+                  <a:srgbClr val="1D6FB8"/>
+                </a:solidFill>
+                <a:latin typeface="Calibri"/>
+              </a:rPr>
+              <a:t>________</a:t>
+            </a:r>
+          </a:p>
+        </p:txBody>
+      </p:sp>
+      <p:sp>
+        <p:nvSpPr>
+          <p:cNvPr id="45" name="Rectangle 44"/>
+          <p:cNvSpPr/>
+          <p:nvPr/>
+        </p:nvSpPr>
+        <p:spPr>
+          <a:xfrm>
+            <a:off x="6199632" y="3639311"/>
+            <a:ext cx="411480" cy="310896"/>
+          </a:xfrm>
+          <a:prstGeom prst="rect">
+            <a:avLst/>
+          </a:prstGeom>
+          <a:solidFill>
+            <a:srgbClr val="FFFFFF"/>
+          </a:solidFill>
+          <a:ln w="9525">
+            <a:solidFill>
+              <a:srgbClr val="DCE3EE"/>
+            </a:solidFill>
+          </a:ln>
+          <a:effectLst/>
+        </p:spPr>
+        <p:style>
+          <a:lnRef idx="1">
+            <a:schemeClr val="accent1"/>
+          </a:lnRef>
+          <a:fillRef idx="3">
+            <a:schemeClr val="accent1"/>
+          </a:fillRef>
+          <a:effectRef idx="2">
+            <a:schemeClr val="accent1"/>
+          </a:effectRef>
+          <a:fontRef idx="minor">
+            <a:schemeClr val="lt1"/>
+          </a:fontRef>
+        </p:style>
+        <p:txBody>
+          <a:bodyPr rtlCol="0" anchor="ctr"/>
+          <a:lstStyle/>
+          <a:p>
+            <a:pPr algn="ctr"/>
+          </a:p>
+        </p:txBody>
+      </p:sp>
+      <p:sp>
+        <p:nvSpPr>
+          <p:cNvPr id="46" name="TextBox 45"/>
+          <p:cNvSpPr txBox="1"/>
+          <p:nvPr/>
+        </p:nvSpPr>
+        <p:spPr>
+          <a:xfrm>
+            <a:off x="6281928" y="3703319"/>
+            <a:ext cx="265176" cy="219456"/>
+          </a:xfrm>
+          <a:prstGeom prst="rect">
+            <a:avLst/>
+          </a:prstGeom>
+          <a:noFill/>
+        </p:spPr>
+        <p:txBody>
+          <a:bodyPr wrap="square" anchor="t" lIns="0" rIns="0" tIns="0" bIns="0">
+            <a:spAutoFit/>
+          </a:bodyPr>
+          <a:lstStyle/>
+          <a:p>
+            <a:pPr algn="l">
+              <a:lnSpc>
+                <a:spcPct val="100000"/>
+              </a:lnSpc>
+              <a:spcAft>
+                <a:spcPts val="400"/>
+              </a:spcAft>
+            </a:pPr>
+            <a:r>
+              <a:rPr sz="980" b="1" i="0">
+                <a:solidFill>
+                  <a:srgbClr val="16325C"/>
+                </a:solidFill>
+                <a:latin typeface="Calibri"/>
+              </a:rPr>
+              <a:t>E</a:t>
+            </a:r>
+          </a:p>
+        </p:txBody>
+      </p:sp>
+      <p:sp>
+        <p:nvSpPr>
+          <p:cNvPr id="47" name="Rectangle 46"/>
+          <p:cNvSpPr/>
+          <p:nvPr/>
+        </p:nvSpPr>
+        <p:spPr>
+          <a:xfrm>
+            <a:off x="6611112" y="3639311"/>
+            <a:ext cx="3611880" cy="310896"/>
+          </a:xfrm>
+          <a:prstGeom prst="rect">
+            <a:avLst/>
+          </a:prstGeom>
+          <a:solidFill>
+            <a:srgbClr val="FFFFFF"/>
+          </a:solidFill>
+          <a:ln w="9525">
+            <a:solidFill>
+              <a:srgbClr val="DCE3EE"/>
+            </a:solidFill>
+          </a:ln>
+          <a:effectLst/>
+        </p:spPr>
+        <p:style>
+          <a:lnRef idx="1">
+            <a:schemeClr val="accent1"/>
+          </a:lnRef>
+          <a:fillRef idx="3">
+            <a:schemeClr val="accent1"/>
+          </a:fillRef>
+          <a:effectRef idx="2">
+            <a:schemeClr val="accent1"/>
+          </a:effectRef>
+          <a:fontRef idx="minor">
+            <a:schemeClr val="lt1"/>
+          </a:fontRef>
+        </p:style>
+        <p:txBody>
+          <a:bodyPr rtlCol="0" anchor="ctr"/>
+          <a:lstStyle/>
+          <a:p>
+            <a:pPr algn="ctr"/>
+          </a:p>
+        </p:txBody>
+      </p:sp>
+      <p:sp>
+        <p:nvSpPr>
+          <p:cNvPr id="48" name="TextBox 47"/>
+          <p:cNvSpPr txBox="1"/>
+          <p:nvPr/>
+        </p:nvSpPr>
+        <p:spPr>
+          <a:xfrm>
+            <a:off x="6693408" y="3703319"/>
+            <a:ext cx="3465576" cy="219456"/>
+          </a:xfrm>
+          <a:prstGeom prst="rect">
+            <a:avLst/>
+          </a:prstGeom>
+          <a:noFill/>
+        </p:spPr>
+        <p:txBody>
+          <a:bodyPr wrap="square" anchor="t" lIns="0" rIns="0" tIns="0" bIns="0">
+            <a:spAutoFit/>
+          </a:bodyPr>
+          <a:lstStyle/>
+          <a:p>
+            <a:pPr algn="l">
+              <a:lnSpc>
+                <a:spcPct val="100000"/>
+              </a:lnSpc>
+              <a:spcAft>
+                <a:spcPts val="400"/>
+              </a:spcAft>
+            </a:pPr>
+            <a:r>
+              <a:rPr sz="980" b="0" i="0">
+                <a:solidFill>
+                  <a:srgbClr val="3A4356"/>
+                </a:solidFill>
+                <a:latin typeface="Calibri"/>
+              </a:rPr>
+              <a:t>Share of those values the software fills itself</a:t>
+            </a:r>
+          </a:p>
+        </p:txBody>
+      </p:sp>
+      <p:sp>
+        <p:nvSpPr>
+          <p:cNvPr id="49" name="Rectangle 48"/>
+          <p:cNvSpPr/>
+          <p:nvPr/>
+        </p:nvSpPr>
+        <p:spPr>
+          <a:xfrm>
+            <a:off x="10222992" y="3639311"/>
+            <a:ext cx="1554480" cy="310896"/>
+          </a:xfrm>
+          <a:prstGeom prst="rect">
+            <a:avLst/>
+          </a:prstGeom>
+          <a:solidFill>
+            <a:srgbClr val="FFFFFF"/>
+          </a:solidFill>
+          <a:ln w="9525">
+            <a:solidFill>
+              <a:srgbClr val="DCE3EE"/>
+            </a:solidFill>
+          </a:ln>
+          <a:effectLst/>
+        </p:spPr>
+        <p:style>
+          <a:lnRef idx="1">
+            <a:schemeClr val="accent1"/>
+          </a:lnRef>
+          <a:fillRef idx="3">
+            <a:schemeClr val="accent1"/>
+          </a:fillRef>
+          <a:effectRef idx="2">
+            <a:schemeClr val="accent1"/>
+          </a:effectRef>
+          <a:fontRef idx="minor">
+            <a:schemeClr val="lt1"/>
+          </a:fontRef>
+        </p:style>
+        <p:txBody>
+          <a:bodyPr rtlCol="0" anchor="ctr"/>
+          <a:lstStyle/>
+          <a:p>
+            <a:pPr algn="ctr"/>
+          </a:p>
+        </p:txBody>
+      </p:sp>
+      <p:sp>
+        <p:nvSpPr>
+          <p:cNvPr id="50" name="TextBox 49"/>
+          <p:cNvSpPr txBox="1"/>
+          <p:nvPr/>
+        </p:nvSpPr>
+        <p:spPr>
+          <a:xfrm>
+            <a:off x="10305288" y="3703319"/>
+            <a:ext cx="1408176" cy="219456"/>
+          </a:xfrm>
+          <a:prstGeom prst="rect">
+            <a:avLst/>
+          </a:prstGeom>
+          <a:noFill/>
+        </p:spPr>
+        <p:txBody>
+          <a:bodyPr wrap="square" anchor="t" lIns="0" rIns="0" tIns="0" bIns="0">
+            <a:spAutoFit/>
+          </a:bodyPr>
+          <a:lstStyle/>
+          <a:p>
+            <a:pPr algn="l">
+              <a:lnSpc>
+                <a:spcPct val="100000"/>
+              </a:lnSpc>
+              <a:spcAft>
+                <a:spcPts val="400"/>
+              </a:spcAft>
+            </a:pPr>
+            <a:r>
+              <a:rPr sz="980" b="1" i="0">
+                <a:solidFill>
+                  <a:srgbClr val="2E8B57"/>
+                </a:solidFill>
+                <a:latin typeface="Calibri"/>
+              </a:rPr>
+              <a:t>________</a:t>
+            </a:r>
+          </a:p>
+        </p:txBody>
+      </p:sp>
+      <p:sp>
+        <p:nvSpPr>
+          <p:cNvPr id="51" name="Rounded Rectangle 50"/>
+          <p:cNvSpPr/>
+          <p:nvPr/>
+        </p:nvSpPr>
+        <p:spPr>
+          <a:xfrm>
+            <a:off x="6199632" y="4206240"/>
+            <a:ext cx="5577840" cy="530352"/>
+          </a:xfrm>
+          <a:prstGeom prst="roundRect">
+            <a:avLst>
+              <a:gd name="adj" fmla="val 12000"/>
+            </a:avLst>
+          </a:prstGeom>
+          <a:solidFill>
+            <a:srgbClr val="FFFFFF"/>
+          </a:solidFill>
+          <a:ln w="9525">
+            <a:solidFill>
+              <a:srgbClr val="DCE3EE"/>
+            </a:solidFill>
+          </a:ln>
+          <a:effectLst/>
+        </p:spPr>
+        <p:style>
+          <a:lnRef idx="1">
+            <a:schemeClr val="accent1"/>
+          </a:lnRef>
+          <a:fillRef idx="3">
+            <a:schemeClr val="accent1"/>
+          </a:fillRef>
+          <a:effectRef idx="2">
+            <a:schemeClr val="accent1"/>
+          </a:effectRef>
+          <a:fontRef idx="minor">
+            <a:schemeClr val="lt1"/>
+          </a:fontRef>
+        </p:style>
+        <p:txBody>
+          <a:bodyPr rtlCol="0" anchor="ctr"/>
+          <a:lstStyle/>
+          <a:p>
+            <a:pPr algn="ctr"/>
+          </a:p>
+        </p:txBody>
+      </p:sp>
+      <p:sp>
+        <p:nvSpPr>
+          <p:cNvPr id="52" name="Rectangle 51"/>
+          <p:cNvSpPr/>
+          <p:nvPr/>
+        </p:nvSpPr>
+        <p:spPr>
+          <a:xfrm>
+            <a:off x="6199632" y="4206240"/>
+            <a:ext cx="68580" cy="530352"/>
+          </a:xfrm>
+          <a:prstGeom prst="rect">
+            <a:avLst/>
+          </a:prstGeom>
+          <a:solidFill>
+            <a:srgbClr val="B03A2E"/>
+          </a:solidFill>
+          <a:ln>
+            <a:noFill/>
+          </a:ln>
+          <a:effectLst/>
+        </p:spPr>
+        <p:style>
+          <a:lnRef idx="1">
+            <a:schemeClr val="accent1"/>
+          </a:lnRef>
+          <a:fillRef idx="3">
+            <a:schemeClr val="accent1"/>
+          </a:fillRef>
+          <a:effectRef idx="2">
+            <a:schemeClr val="accent1"/>
+          </a:effectRef>
+          <a:fontRef idx="minor">
+            <a:schemeClr val="lt1"/>
+          </a:fontRef>
+        </p:style>
+        <p:txBody>
+          <a:bodyPr rtlCol="0" anchor="ctr"/>
+          <a:lstStyle/>
+          <a:p>
+            <a:pPr algn="ctr"/>
+          </a:p>
+        </p:txBody>
+      </p:sp>
+      <p:sp>
+        <p:nvSpPr>
+          <p:cNvPr id="53" name="TextBox 52"/>
+          <p:cNvSpPr txBox="1"/>
+          <p:nvPr/>
+        </p:nvSpPr>
+        <p:spPr>
+          <a:xfrm>
+            <a:off x="6419088" y="4343400"/>
+            <a:ext cx="3200400" cy="256032"/>
+          </a:xfrm>
+          <a:prstGeom prst="rect">
+            <a:avLst/>
+          </a:prstGeom>
+          <a:noFill/>
+        </p:spPr>
+        <p:txBody>
+          <a:bodyPr wrap="square" anchor="t" lIns="0" rIns="0" tIns="0" bIns="0">
+            <a:spAutoFit/>
+          </a:bodyPr>
+          <a:lstStyle/>
+          <a:p>
+            <a:pPr algn="l">
+              <a:lnSpc>
+                <a:spcPct val="100000"/>
+              </a:lnSpc>
+              <a:spcAft>
+                <a:spcPts val="400"/>
+              </a:spcAft>
+            </a:pPr>
+            <a:r>
+              <a:rPr sz="1050" b="1" i="0">
+                <a:solidFill>
+                  <a:srgbClr val="16325C"/>
+                </a:solidFill>
+                <a:latin typeface="Calibri"/>
+              </a:rPr>
+              <a:t>Hours spent typing today</a:t>
+            </a:r>
+          </a:p>
+        </p:txBody>
+      </p:sp>
+      <p:sp>
+        <p:nvSpPr>
+          <p:cNvPr id="54" name="TextBox 53"/>
+          <p:cNvSpPr txBox="1"/>
+          <p:nvPr/>
+        </p:nvSpPr>
+        <p:spPr>
+          <a:xfrm>
+            <a:off x="9646920" y="4325112"/>
+            <a:ext cx="2011680" cy="274320"/>
+          </a:xfrm>
+          <a:prstGeom prst="rect">
+            <a:avLst/>
+          </a:prstGeom>
+          <a:noFill/>
+        </p:spPr>
+        <p:txBody>
+          <a:bodyPr wrap="square" anchor="t" lIns="0" rIns="0" tIns="0" bIns="0">
+            <a:spAutoFit/>
+          </a:bodyPr>
+          <a:lstStyle/>
+          <a:p>
+            <a:pPr algn="r">
+              <a:lnSpc>
+                <a:spcPct val="100000"/>
+              </a:lnSpc>
+              <a:spcAft>
+                <a:spcPts val="400"/>
+              </a:spcAft>
+            </a:pPr>
+            <a:r>
+              <a:rPr sz="1250" b="1" i="0">
+                <a:solidFill>
+                  <a:srgbClr val="B03A2E"/>
+                </a:solidFill>
+                <a:latin typeface="Calibri"/>
+              </a:rPr>
+              <a:t>B × C ÷ 60</a:t>
+            </a:r>
+          </a:p>
+        </p:txBody>
+      </p:sp>
+      <p:sp>
+        <p:nvSpPr>
+          <p:cNvPr id="55" name="Rounded Rectangle 54"/>
+          <p:cNvSpPr/>
+          <p:nvPr/>
+        </p:nvSpPr>
+        <p:spPr>
+          <a:xfrm>
+            <a:off x="6199632" y="4773168"/>
+            <a:ext cx="5577840" cy="530352"/>
+          </a:xfrm>
+          <a:prstGeom prst="roundRect">
+            <a:avLst>
+              <a:gd name="adj" fmla="val 12000"/>
+            </a:avLst>
+          </a:prstGeom>
+          <a:solidFill>
+            <a:srgbClr val="FFFFFF"/>
+          </a:solidFill>
+          <a:ln w="9525">
+            <a:solidFill>
+              <a:srgbClr val="DCE3EE"/>
+            </a:solidFill>
+          </a:ln>
+          <a:effectLst/>
+        </p:spPr>
+        <p:style>
+          <a:lnRef idx="1">
+            <a:schemeClr val="accent1"/>
+          </a:lnRef>
+          <a:fillRef idx="3">
+            <a:schemeClr val="accent1"/>
+          </a:fillRef>
+          <a:effectRef idx="2">
+            <a:schemeClr val="accent1"/>
+          </a:effectRef>
+          <a:fontRef idx="minor">
+            <a:schemeClr val="lt1"/>
+          </a:fontRef>
+        </p:style>
+        <p:txBody>
+          <a:bodyPr rtlCol="0" anchor="ctr"/>
+          <a:lstStyle/>
+          <a:p>
+            <a:pPr algn="ctr"/>
+          </a:p>
+        </p:txBody>
+      </p:sp>
+      <p:sp>
+        <p:nvSpPr>
+          <p:cNvPr id="56" name="Rectangle 55"/>
+          <p:cNvSpPr/>
+          <p:nvPr/>
+        </p:nvSpPr>
+        <p:spPr>
+          <a:xfrm>
+            <a:off x="6199632" y="4773168"/>
+            <a:ext cx="68580" cy="530352"/>
+          </a:xfrm>
+          <a:prstGeom prst="rect">
+            <a:avLst/>
+          </a:prstGeom>
+          <a:solidFill>
+            <a:srgbClr val="2E8B57"/>
+          </a:solidFill>
+          <a:ln>
+            <a:noFill/>
+          </a:ln>
+          <a:effectLst/>
+        </p:spPr>
+        <p:style>
+          <a:lnRef idx="1">
+            <a:schemeClr val="accent1"/>
+          </a:lnRef>
+          <a:fillRef idx="3">
+            <a:schemeClr val="accent1"/>
+          </a:fillRef>
+          <a:effectRef idx="2">
+            <a:schemeClr val="accent1"/>
+          </a:effectRef>
+          <a:fontRef idx="minor">
+            <a:schemeClr val="lt1"/>
+          </a:fontRef>
+        </p:style>
+        <p:txBody>
+          <a:bodyPr rtlCol="0" anchor="ctr"/>
+          <a:lstStyle/>
+          <a:p>
+            <a:pPr algn="ctr"/>
+          </a:p>
+        </p:txBody>
+      </p:sp>
+      <p:sp>
+        <p:nvSpPr>
+          <p:cNvPr id="57" name="TextBox 56"/>
+          <p:cNvSpPr txBox="1"/>
+          <p:nvPr/>
+        </p:nvSpPr>
+        <p:spPr>
+          <a:xfrm>
+            <a:off x="6419088" y="4910328"/>
+            <a:ext cx="3200400" cy="256032"/>
+          </a:xfrm>
+          <a:prstGeom prst="rect">
+            <a:avLst/>
+          </a:prstGeom>
+          <a:noFill/>
+        </p:spPr>
+        <p:txBody>
+          <a:bodyPr wrap="square" anchor="t" lIns="0" rIns="0" tIns="0" bIns="0">
+            <a:spAutoFit/>
+          </a:bodyPr>
+          <a:lstStyle/>
+          <a:p>
+            <a:pPr algn="l">
+              <a:lnSpc>
+                <a:spcPct val="100000"/>
+              </a:lnSpc>
+              <a:spcAft>
+                <a:spcPts val="400"/>
+              </a:spcAft>
+            </a:pPr>
+            <a:r>
+              <a:rPr sz="1050" b="1" i="0">
+                <a:solidFill>
+                  <a:srgbClr val="16325C"/>
+                </a:solidFill>
+                <a:latin typeface="Calibri"/>
+              </a:rPr>
+              <a:t>Hours freed a year</a:t>
+            </a:r>
+          </a:p>
+        </p:txBody>
+      </p:sp>
+      <p:sp>
+        <p:nvSpPr>
+          <p:cNvPr id="58" name="TextBox 57"/>
+          <p:cNvSpPr txBox="1"/>
+          <p:nvPr/>
+        </p:nvSpPr>
+        <p:spPr>
+          <a:xfrm>
+            <a:off x="9646920" y="4892040"/>
+            <a:ext cx="2011680" cy="274320"/>
+          </a:xfrm>
+          <a:prstGeom prst="rect">
+            <a:avLst/>
+          </a:prstGeom>
+          <a:noFill/>
+        </p:spPr>
+        <p:txBody>
+          <a:bodyPr wrap="square" anchor="t" lIns="0" rIns="0" tIns="0" bIns="0">
+            <a:spAutoFit/>
+          </a:bodyPr>
+          <a:lstStyle/>
+          <a:p>
+            <a:pPr algn="r">
+              <a:lnSpc>
+                <a:spcPct val="100000"/>
+              </a:lnSpc>
+              <a:spcAft>
+                <a:spcPts val="400"/>
+              </a:spcAft>
+            </a:pPr>
+            <a:r>
+              <a:rPr sz="1250" b="1" i="0">
+                <a:solidFill>
+                  <a:srgbClr val="2E8B57"/>
+                </a:solidFill>
+                <a:latin typeface="Calibri"/>
+              </a:rPr>
+              <a:t>B × E × C ÷ 60</a:t>
+            </a:r>
+          </a:p>
+        </p:txBody>
+      </p:sp>
+      <p:sp>
+        <p:nvSpPr>
+          <p:cNvPr id="59" name="Rounded Rectangle 58"/>
+          <p:cNvSpPr/>
+          <p:nvPr/>
+        </p:nvSpPr>
+        <p:spPr>
+          <a:xfrm>
+            <a:off x="6199632" y="5340096"/>
+            <a:ext cx="5577840" cy="530352"/>
+          </a:xfrm>
+          <a:prstGeom prst="roundRect">
+            <a:avLst>
+              <a:gd name="adj" fmla="val 12000"/>
+            </a:avLst>
+          </a:prstGeom>
+          <a:solidFill>
+            <a:srgbClr val="FFFFFF"/>
+          </a:solidFill>
+          <a:ln w="9525">
+            <a:solidFill>
+              <a:srgbClr val="DCE3EE"/>
+            </a:solidFill>
+          </a:ln>
+          <a:effectLst/>
+        </p:spPr>
+        <p:style>
+          <a:lnRef idx="1">
+            <a:schemeClr val="accent1"/>
+          </a:lnRef>
+          <a:fillRef idx="3">
+            <a:schemeClr val="accent1"/>
+          </a:fillRef>
+          <a:effectRef idx="2">
+            <a:schemeClr val="accent1"/>
+          </a:effectRef>
+          <a:fontRef idx="minor">
+            <a:schemeClr val="lt1"/>
+          </a:fontRef>
+        </p:style>
+        <p:txBody>
+          <a:bodyPr rtlCol="0" anchor="ctr"/>
+          <a:lstStyle/>
+          <a:p>
+            <a:pPr algn="ctr"/>
+          </a:p>
+        </p:txBody>
+      </p:sp>
+      <p:sp>
+        <p:nvSpPr>
+          <p:cNvPr id="60" name="Rectangle 59"/>
+          <p:cNvSpPr/>
+          <p:nvPr/>
+        </p:nvSpPr>
+        <p:spPr>
+          <a:xfrm>
+            <a:off x="6199632" y="5340096"/>
+            <a:ext cx="68580" cy="530352"/>
+          </a:xfrm>
+          <a:prstGeom prst="rect">
+            <a:avLst/>
+          </a:prstGeom>
+          <a:solidFill>
+            <a:srgbClr val="1D6FB8"/>
+          </a:solidFill>
+          <a:ln>
+            <a:noFill/>
+          </a:ln>
+          <a:effectLst/>
+        </p:spPr>
+        <p:style>
+          <a:lnRef idx="1">
+            <a:schemeClr val="accent1"/>
+          </a:lnRef>
+          <a:fillRef idx="3">
+            <a:schemeClr val="accent1"/>
+          </a:fillRef>
+          <a:effectRef idx="2">
+            <a:schemeClr val="accent1"/>
+          </a:effectRef>
+          <a:fontRef idx="minor">
+            <a:schemeClr val="lt1"/>
+          </a:fontRef>
+        </p:style>
+        <p:txBody>
+          <a:bodyPr rtlCol="0" anchor="ctr"/>
+          <a:lstStyle/>
+          <a:p>
+            <a:pPr algn="ctr"/>
+          </a:p>
+        </p:txBody>
+      </p:sp>
+      <p:sp>
+        <p:nvSpPr>
+          <p:cNvPr id="61" name="TextBox 60"/>
+          <p:cNvSpPr txBox="1"/>
+          <p:nvPr/>
+        </p:nvSpPr>
+        <p:spPr>
+          <a:xfrm>
+            <a:off x="6419088" y="5477256"/>
+            <a:ext cx="3200400" cy="256032"/>
+          </a:xfrm>
+          <a:prstGeom prst="rect">
+            <a:avLst/>
+          </a:prstGeom>
+          <a:noFill/>
+        </p:spPr>
+        <p:txBody>
+          <a:bodyPr wrap="square" anchor="t" lIns="0" rIns="0" tIns="0" bIns="0">
+            <a:spAutoFit/>
+          </a:bodyPr>
+          <a:lstStyle/>
+          <a:p>
+            <a:pPr algn="l">
+              <a:lnSpc>
+                <a:spcPct val="100000"/>
+              </a:lnSpc>
+              <a:spcAft>
+                <a:spcPts val="400"/>
+              </a:spcAft>
+            </a:pPr>
+            <a:r>
+              <a:rPr sz="1050" b="1" i="0">
+                <a:solidFill>
+                  <a:srgbClr val="16325C"/>
+                </a:solidFill>
+                <a:latin typeface="Calibri"/>
+              </a:rPr>
+              <a:t>Extra parts that time would cost</a:t>
+            </a:r>
+          </a:p>
+        </p:txBody>
+      </p:sp>
+      <p:sp>
+        <p:nvSpPr>
+          <p:cNvPr id="62" name="TextBox 61"/>
+          <p:cNvSpPr txBox="1"/>
+          <p:nvPr/>
+        </p:nvSpPr>
+        <p:spPr>
+          <a:xfrm>
+            <a:off x="9646920" y="5458968"/>
+            <a:ext cx="2011680" cy="274320"/>
+          </a:xfrm>
+          <a:prstGeom prst="rect">
+            <a:avLst/>
+          </a:prstGeom>
+          <a:noFill/>
+        </p:spPr>
+        <p:txBody>
+          <a:bodyPr wrap="square" anchor="t" lIns="0" rIns="0" tIns="0" bIns="0">
+            <a:spAutoFit/>
+          </a:bodyPr>
+          <a:lstStyle/>
+          <a:p>
+            <a:pPr algn="r">
+              <a:lnSpc>
+                <a:spcPct val="100000"/>
+              </a:lnSpc>
+              <a:spcAft>
+                <a:spcPts val="400"/>
+              </a:spcAft>
+            </a:pPr>
+            <a:r>
+              <a:rPr sz="1250" b="1" i="0">
+                <a:solidFill>
+                  <a:srgbClr val="1D6FB8"/>
+                </a:solidFill>
+                <a:latin typeface="Calibri"/>
+              </a:rPr>
+              <a:t>B × E × C ÷ A</a:t>
+            </a:r>
+          </a:p>
+        </p:txBody>
+      </p:sp>
+      <p:sp>
+        <p:nvSpPr>
+          <p:cNvPr id="63" name="Rounded Rectangle 62"/>
+          <p:cNvSpPr/>
+          <p:nvPr/>
+        </p:nvSpPr>
+        <p:spPr>
+          <a:xfrm>
+            <a:off x="411480" y="5998464"/>
+            <a:ext cx="11365992" cy="749808"/>
+          </a:xfrm>
+          <a:prstGeom prst="roundRect">
+            <a:avLst>
+              <a:gd name="adj" fmla="val 12000"/>
+            </a:avLst>
+          </a:prstGeom>
+          <a:solidFill>
+            <a:srgbClr val="EAF6EF"/>
+          </a:solidFill>
+          <a:ln>
+            <a:noFill/>
+          </a:ln>
+          <a:effectLst/>
+        </p:spPr>
+        <p:style>
+          <a:lnRef idx="1">
+            <a:schemeClr val="accent1"/>
+          </a:lnRef>
+          <a:fillRef idx="3">
+            <a:schemeClr val="accent1"/>
+          </a:fillRef>
+          <a:effectRef idx="2">
+            <a:schemeClr val="accent1"/>
+          </a:effectRef>
+          <a:fontRef idx="minor">
+            <a:schemeClr val="lt1"/>
+          </a:fontRef>
+        </p:style>
+        <p:txBody>
+          <a:bodyPr rtlCol="0" anchor="ctr"/>
+          <a:lstStyle/>
+          <a:p>
+            <a:pPr algn="ctr"/>
+          </a:p>
+        </p:txBody>
+      </p:sp>
+      <p:sp>
+        <p:nvSpPr>
+          <p:cNvPr id="64" name="Rectangle 63"/>
+          <p:cNvSpPr/>
+          <p:nvPr/>
+        </p:nvSpPr>
+        <p:spPr>
+          <a:xfrm>
+            <a:off x="411480" y="5998464"/>
+            <a:ext cx="68580" cy="749808"/>
+          </a:xfrm>
+          <a:prstGeom prst="rect">
+            <a:avLst/>
+          </a:prstGeom>
+          <a:solidFill>
+            <a:srgbClr val="2E8B57"/>
+          </a:solidFill>
+          <a:ln>
+            <a:noFill/>
+          </a:ln>
+          <a:effectLst/>
+        </p:spPr>
+        <p:style>
+          <a:lnRef idx="1">
+            <a:schemeClr val="accent1"/>
+          </a:lnRef>
+          <a:fillRef idx="3">
+            <a:schemeClr val="accent1"/>
+          </a:fillRef>
+          <a:effectRef idx="2">
+            <a:schemeClr val="accent1"/>
+          </a:effectRef>
+          <a:fontRef idx="minor">
+            <a:schemeClr val="lt1"/>
+          </a:fontRef>
+        </p:style>
+        <p:txBody>
+          <a:bodyPr rtlCol="0" anchor="ctr"/>
+          <a:lstStyle/>
+          <a:p>
+            <a:pPr algn="ctr"/>
+          </a:p>
+        </p:txBody>
+      </p:sp>
+      <p:sp>
+        <p:nvSpPr>
+          <p:cNvPr id="65" name="TextBox 64"/>
+          <p:cNvSpPr txBox="1"/>
+          <p:nvPr/>
+        </p:nvSpPr>
+        <p:spPr>
+          <a:xfrm>
+            <a:off x="630936" y="6117336"/>
+            <a:ext cx="10954512" cy="256032"/>
+          </a:xfrm>
+          <a:prstGeom prst="rect">
+            <a:avLst/>
+          </a:prstGeom>
+          <a:noFill/>
+        </p:spPr>
+        <p:txBody>
+          <a:bodyPr wrap="square" anchor="t" lIns="0" rIns="0" tIns="0" bIns="0">
+            <a:spAutoFit/>
+          </a:bodyPr>
+          <a:lstStyle/>
+          <a:p>
+            <a:pPr algn="l">
+              <a:lnSpc>
+                <a:spcPct val="100000"/>
+              </a:lnSpc>
+              <a:spcAft>
+                <a:spcPts val="400"/>
+              </a:spcAft>
+            </a:pPr>
+            <a:r>
               <a:rPr sz="1200" b="1" i="0">
                 <a:solidFill>
                   <a:srgbClr val="2E8B57"/>
@@ -5143,14 +6727,14 @@
       </p:sp>
       <p:sp>
         <p:nvSpPr>
-          <p:cNvPr id="36" name="TextBox 35"/>
+          <p:cNvPr id="66" name="TextBox 65"/>
           <p:cNvSpPr txBox="1"/>
           <p:nvPr/>
         </p:nvSpPr>
         <p:spPr>
           <a:xfrm>
-            <a:off x="630936" y="6071616"/>
-            <a:ext cx="10954512" cy="411480"/>
+            <a:off x="630936" y="6400800"/>
+            <a:ext cx="10954512" cy="246888"/>
           </a:xfrm>
           <a:prstGeom prst="rect">
             <a:avLst/>

--- a/CostVision-CAPEE-Business-Case.pptx
+++ b/CostVision-CAPEE-Business-Case.pptx
@@ -648,7 +648,7 @@
           <a:lstStyle/>
           <a:p>
             <a:r>
-              <a:t>Option two is a different thing and I want to be clear it is not just Option one at a bigger scale. Take the three rows in turn. The first is the one that changes what we can promise the business. Today we cost the parts we have engineer-hours for, and the rest of a basket gets estimated from a sample or taken from what the supplier last quoted. With this, a list of parts and their models goes in and every single one gets costed from its own geometry, with a report per part and per basket. The second row is where the AI sits, and I want to be precise about what it does and does not do. It does the setting up: it picks the process route and the machine, fills in what the geometry gives it, and comes back to a person with one question rather than a hundred, which then gets applied across every part that question affects. What it does not do is set a price. The money is still worked out by the same fixed rules we use today, so the answer is still one we can defend line by line. The third row is the part I would not want to lose. These are things we cannot do at all at the moment. Put a supplier quote next to our own build-up and the tool tells you which bucket the gap is in and what to ask them about it. On a machined part quoted twenty-eight per cent above our cost it came back with the gap by bucket, the recovery levers and the questions to put to the supplier. Savings ideas get a price on them rather than sitting on a list. It compares ten countries side by side to show where a part should be made. And as we feed it prices we have actually paid, it tightens its own confidence range. The red strip is what has to be in place first, and the first item on it is the AI approval. I have put it there deliberately rather than leaving it for somebody to raise.</a:t>
+              <a:t>This is the slide I would spend the most time on, because it is the part of the case that is easy to under-sell. These are six things we cannot do at all at the moment, and every one of them is in the tool today. Top left is the one people expect. A list of parts and their models goes in and every part comes back costed, with a report per part and per basket, without anybody sitting there. Today we cost the parts we have hours for and estimate the rest from a sample. Next to it is the one that usually gets a reaction in the room. You take a photograph of a circuit board and the tool works out what is on it, builds the bill of materials, works out the board specification and costs it. That is a job that takes an electronics buyer a long time and most of us cannot do at all. Third along, an RFQ pack goes in and comes back as costed lines, ranked by where the money is, with a first draft of the negotiation brief written for you. Bottom left is the assistant, and I want to be precise about it. It does the setting up: it picks the process route and the machine and fills in what the geometry gives it, and then it comes back to a person with one question rather than a hundred. Next to that is the one our buyers will care about most. Put a supplier's price next to our own build-up and the tool tells you which part of it the gap sits in and what to ask them about it. And the last one turns design-for-cost from a list into a decision: it flags what makes a part expensive and puts a number on each change, ordered by what it saves. The blue strip at the bottom is the sentence I would want people to leave with. The AI reads and sorts and sets up. It never sets a price. The money is still worked out by the same fixed rules and the same rate book we use now, so every number can be explained line by line, exactly as it can today.</a:t>
             </a:r>
           </a:p>
         </p:txBody>
@@ -718,7 +718,7 @@
           <a:lstStyle/>
           <a:p>
             <a:r>
-              <a:t>Last slide, and it is two things: what it is worth, and what I want from you. The two cards at the top are what each option needs, and the difference between them is the reason for doing them in this order. Option one needs a server, a way into CAPEE, and some parts where we know what we paid. Option two needs all of that plus the AI approval, our rate book, and a few things built around the engine. Now the table, and I want to be straight about why it is empty. I have not put a saving on this slide, because we have never timed how long this job actually takes us and we have never compared this tool against a price we have paid. Any number I put there would be my estimate dressed up as a measurement, and the first person to ask where it came from would be right to. Four of these five are yours and you can get them in a week. The fifth, E, is what the trial measures. Put your numbers in and the three boxes underneath fill themselves in — hours we spend typing today, hours we would get back, and how many more parts that time would cost. That is a case you own rather than one I have handed you. And the ask is deliberately small. One commodity, thirty to fifty parts we have already bought, our own time. What it buys is the two numbers that make the Option two conversation possible. In parallel I would start the AI approval, because that is the long pole on Option two and there is no reason to wait for the trial to finish before beginning it.</a:t>
+              <a:t>Last slide, and it is two things: what changes for the business, and what I want from you. Read the table down the right-hand column. Today we cost the parts we have hours for; with this, every part in the basket gets a proper cost. Today a basket takes days of engineer time; with this it is one run, once we have the data together — and I want to be clear that gathering the part list, the models and our own rate data is the real work, not the computing. The third row is the one I would put to the purchasing side: today we take our estimate to a supplier, and with this we take the build-up, plus where their price differs from it and what to ask them about it. And the last row is what it does for the engineers. They stop typing values in and spend the time answering the questions only a person can answer, and acting on what the tool finds. The two cards are what each option needs, and the difference between them is the reason for doing them in this order. Option one needs a server, a way into CAPEE, and some parts where we know what we paid. Option two needs all of that plus the AI approval, our rate book, and a few things built around the engine. The green strip is the ask and it is deliberately small: one commodity, thirty to fifty parts we have already bought, our own time. In parallel I would start the AI approval, because that is the long pole on Option two and there is no reason to wait for the trial to finish before beginning it. The amber box is me being straight with you twice. Everything I showed you on the last slide works today, but it works one part at a time — making it run unattended over a basket is real work. And we have still never checked this against a price we have actually paid. That is exactly what the trial is for.</a:t>
             </a:r>
           </a:p>
         </p:txBody>
@@ -9556,7 +9556,7 @@
                 </a:solidFill>
                 <a:latin typeface="Cambria"/>
               </a:rPr>
-              <a:t>Option 2: should-cost that runs by itself</a:t>
+              <a:t>Option 2: what CostVision does</a:t>
             </a:r>
           </a:p>
         </p:txBody>
@@ -9598,7 +9598,7 @@
                 </a:solidFill>
                 <a:latin typeface="Calibri"/>
               </a:rPr>
-              <a:t>This is not Option 1 at a larger scale. It is three things we cannot do at all today.</a:t>
+              <a:t>Six things we cannot do at all today. All of them exist in the tool now.</a:t>
             </a:r>
           </a:p>
         </p:txBody>
@@ -9611,8 +9611,8 @@
         </p:nvSpPr>
         <p:spPr>
           <a:xfrm>
-            <a:off x="411480" y="1865376"/>
-            <a:ext cx="11365992" cy="1170432"/>
+            <a:off x="411480" y="1828800"/>
+            <a:ext cx="3666744" cy="1874519"/>
           </a:xfrm>
           <a:prstGeom prst="roundRect">
             <a:avLst>
@@ -9659,8 +9659,8 @@
         </p:nvSpPr>
         <p:spPr>
           <a:xfrm>
-            <a:off x="411480" y="1865376"/>
-            <a:ext cx="68580" cy="1170432"/>
+            <a:off x="411480" y="1828800"/>
+            <a:ext cx="3666744" cy="54864"/>
           </a:xfrm>
           <a:prstGeom prst="rect">
             <a:avLst/>
@@ -9703,7 +9703,7 @@
         </p:nvSpPr>
         <p:spPr>
           <a:xfrm>
-            <a:off x="658368" y="2176272"/>
+            <a:off x="649224" y="2066544"/>
             <a:ext cx="548640" cy="548640"/>
           </a:xfrm>
           <a:prstGeom prst="ellipse">
@@ -9741,7 +9741,7 @@
       </p:sp>
       <p:pic>
         <p:nvPicPr>
-          <p:cNvPr id="13" name="Picture 12" descr="upload.png"/>
+          <p:cNvPr id="13" name="Picture 12" descr="cog.png"/>
           <p:cNvPicPr>
             <a:picLocks noChangeAspect="1"/>
           </p:cNvPicPr>
@@ -9755,7 +9755,7 @@
         </p:blipFill>
         <p:spPr>
           <a:xfrm>
-            <a:off x="801014" y="2318918"/>
+            <a:off x="791870" y="2209190"/>
             <a:ext cx="263348" cy="263348"/>
           </a:xfrm>
           <a:prstGeom prst="rect">
@@ -9771,8 +9771,8 @@
         </p:nvSpPr>
         <p:spPr>
           <a:xfrm>
-            <a:off x="1417320" y="2011680"/>
-            <a:ext cx="10131552" cy="256032"/>
+            <a:off x="649224" y="2743200"/>
+            <a:ext cx="3209544" cy="310896"/>
           </a:xfrm>
           <a:prstGeom prst="rect">
             <a:avLst/>
@@ -9794,13 +9794,13 @@
               </a:spcAft>
             </a:pPr>
             <a:r>
-              <a:rPr sz="1250" b="1" i="0">
+              <a:rPr sz="1180" b="1" i="0">
                 <a:solidFill>
                   <a:srgbClr val="16325C"/>
                 </a:solidFill>
                 <a:latin typeface="Calibri"/>
               </a:rPr>
-              <a:t>Cost the whole basket, not a sample</a:t>
+              <a:t>Cost a whole basket, unattended</a:t>
             </a:r>
           </a:p>
         </p:txBody>
@@ -9813,8 +9813,8 @@
         </p:nvSpPr>
         <p:spPr>
           <a:xfrm>
-            <a:off x="1417320" y="2295144"/>
-            <a:ext cx="10131552" cy="667512"/>
+            <a:off x="649224" y="3072384"/>
+            <a:ext cx="3209544" cy="557783"/>
           </a:xfrm>
           <a:prstGeom prst="rect">
             <a:avLst/>
@@ -9829,20 +9829,20 @@
           <a:p>
             <a:pPr algn="l">
               <a:lnSpc>
-                <a:spcPct val="113000"/>
+                <a:spcPct val="114000"/>
               </a:lnSpc>
               <a:spcAft>
                 <a:spcPts val="400"/>
               </a:spcAft>
             </a:pPr>
             <a:r>
-              <a:rPr sz="1000" b="0" i="0">
+              <a:rPr sz="980" b="0" i="0">
                 <a:solidFill>
                   <a:srgbClr val="3A4356"/>
                 </a:solidFill>
                 <a:latin typeface="Calibri"/>
               </a:rPr>
-              <a:t>A list of parts and their 3D models goes in. Every part is costed from its own geometry, and a report comes out for each part and for the basket. Today we cost what we have hours for and estimate the rest from a sample.</a:t>
+              <a:t>A list of parts and their 3D models goes in. Every part is costed and reported without anyone sitting there.</a:t>
             </a:r>
           </a:p>
         </p:txBody>
@@ -9855,8 +9855,8 @@
         </p:nvSpPr>
         <p:spPr>
           <a:xfrm>
-            <a:off x="411480" y="3108960"/>
-            <a:ext cx="11365992" cy="1170432"/>
+            <a:off x="4261104" y="1828800"/>
+            <a:ext cx="3666744" cy="1874519"/>
           </a:xfrm>
           <a:prstGeom prst="roundRect">
             <a:avLst>
@@ -9903,8 +9903,8 @@
         </p:nvSpPr>
         <p:spPr>
           <a:xfrm>
-            <a:off x="411480" y="3108960"/>
-            <a:ext cx="68580" cy="1170432"/>
+            <a:off x="4261104" y="1828800"/>
+            <a:ext cx="3666744" cy="54864"/>
           </a:xfrm>
           <a:prstGeom prst="rect">
             <a:avLst/>
@@ -9947,7 +9947,7 @@
         </p:nvSpPr>
         <p:spPr>
           <a:xfrm>
-            <a:off x="658368" y="3419856"/>
+            <a:off x="4498848" y="2066544"/>
             <a:ext cx="548640" cy="548640"/>
           </a:xfrm>
           <a:prstGeom prst="ellipse">
@@ -9985,7 +9985,7 @@
       </p:sp>
       <p:pic>
         <p:nvPicPr>
-          <p:cNvPr id="19" name="Picture 18" descr="cog.png"/>
+          <p:cNvPr id="19" name="Picture 18" descr="eye.png"/>
           <p:cNvPicPr>
             <a:picLocks noChangeAspect="1"/>
           </p:cNvPicPr>
@@ -9999,7 +9999,7 @@
         </p:blipFill>
         <p:spPr>
           <a:xfrm>
-            <a:off x="801014" y="3562502"/>
+            <a:off x="4641494" y="2209190"/>
             <a:ext cx="263348" cy="263348"/>
           </a:xfrm>
           <a:prstGeom prst="rect">
@@ -10015,8 +10015,8 @@
         </p:nvSpPr>
         <p:spPr>
           <a:xfrm>
-            <a:off x="1417320" y="3255264"/>
-            <a:ext cx="10131552" cy="256032"/>
+            <a:off x="4498848" y="2743200"/>
+            <a:ext cx="3209544" cy="310896"/>
           </a:xfrm>
           <a:prstGeom prst="rect">
             <a:avLst/>
@@ -10038,13 +10038,13 @@
               </a:spcAft>
             </a:pPr>
             <a:r>
-              <a:rPr sz="1250" b="1" i="0">
+              <a:rPr sz="1180" b="1" i="0">
                 <a:solidFill>
                   <a:srgbClr val="16325C"/>
                 </a:solidFill>
                 <a:latin typeface="Calibri"/>
               </a:rPr>
-              <a:t>An assistant does the setting up</a:t>
+              <a:t>A board photo becomes a costed BOM</a:t>
             </a:r>
           </a:p>
         </p:txBody>
@@ -10057,8 +10057,8 @@
         </p:nvSpPr>
         <p:spPr>
           <a:xfrm>
-            <a:off x="1417320" y="3538728"/>
-            <a:ext cx="10131552" cy="667512"/>
+            <a:off x="4498848" y="3072384"/>
+            <a:ext cx="3209544" cy="557783"/>
           </a:xfrm>
           <a:prstGeom prst="rect">
             <a:avLst/>
@@ -10073,20 +10073,20 @@
           <a:p>
             <a:pPr algn="l">
               <a:lnSpc>
-                <a:spcPct val="113000"/>
+                <a:spcPct val="114000"/>
               </a:lnSpc>
               <a:spcAft>
                 <a:spcPts val="400"/>
               </a:spcAft>
             </a:pPr>
             <a:r>
-              <a:rPr sz="1000" b="0" i="0">
+              <a:rPr sz="980" b="0" i="0">
                 <a:solidFill>
                   <a:srgbClr val="3A4356"/>
                 </a:solidFill>
                 <a:latin typeface="Calibri"/>
               </a:rPr>
-              <a:t>An AI assistant picks the process route and the machine, fills in what the geometry gives, and comes back with one question instead of a hundred — answered once and applied to every part it affects. It never sets a price: the money is worked out by the same fixed rules as today.</a:t>
+              <a:t>Take a picture of a circuit board. The tool works out what is on it, builds the bill of materials and the board spec, and costs it.</a:t>
             </a:r>
           </a:p>
         </p:txBody>
@@ -10099,8 +10099,8 @@
         </p:nvSpPr>
         <p:spPr>
           <a:xfrm>
-            <a:off x="411480" y="4352544"/>
-            <a:ext cx="11365992" cy="1170432"/>
+            <a:off x="8110728" y="1828800"/>
+            <a:ext cx="3666744" cy="1874519"/>
           </a:xfrm>
           <a:prstGeom prst="roundRect">
             <a:avLst>
@@ -10147,14 +10147,14 @@
         </p:nvSpPr>
         <p:spPr>
           <a:xfrm>
-            <a:off x="411480" y="4352544"/>
-            <a:ext cx="68580" cy="1170432"/>
+            <a:off x="8110728" y="1828800"/>
+            <a:ext cx="3666744" cy="54864"/>
           </a:xfrm>
           <a:prstGeom prst="rect">
             <a:avLst/>
           </a:prstGeom>
           <a:solidFill>
-            <a:srgbClr val="1D6FB8"/>
+            <a:srgbClr val="6B3FA0"/>
           </a:solidFill>
           <a:ln>
             <a:noFill/>
@@ -10191,14 +10191,14 @@
         </p:nvSpPr>
         <p:spPr>
           <a:xfrm>
-            <a:off x="658368" y="4663440"/>
+            <a:off x="8348472" y="2066544"/>
             <a:ext cx="548640" cy="548640"/>
           </a:xfrm>
           <a:prstGeom prst="ellipse">
             <a:avLst/>
           </a:prstGeom>
           <a:solidFill>
-            <a:srgbClr val="1D6FB8"/>
+            <a:srgbClr val="6B3FA0"/>
           </a:solidFill>
           <a:ln>
             <a:noFill/>
@@ -10229,7 +10229,7 @@
       </p:sp>
       <p:pic>
         <p:nvPicPr>
-          <p:cNvPr id="25" name="Picture 24" descr="eye.png"/>
+          <p:cNvPr id="25" name="Picture 24" descr="clip.png"/>
           <p:cNvPicPr>
             <a:picLocks noChangeAspect="1"/>
           </p:cNvPicPr>
@@ -10243,7 +10243,7 @@
         </p:blipFill>
         <p:spPr>
           <a:xfrm>
-            <a:off x="801014" y="4806086"/>
+            <a:off x="8491118" y="2209190"/>
             <a:ext cx="263348" cy="263348"/>
           </a:xfrm>
           <a:prstGeom prst="rect">
@@ -10259,8 +10259,8 @@
         </p:nvSpPr>
         <p:spPr>
           <a:xfrm>
-            <a:off x="1417320" y="4498848"/>
-            <a:ext cx="10131552" cy="256032"/>
+            <a:off x="8348472" y="2743200"/>
+            <a:ext cx="3209544" cy="310896"/>
           </a:xfrm>
           <a:prstGeom prst="rect">
             <a:avLst/>
@@ -10282,13 +10282,13 @@
               </a:spcAft>
             </a:pPr>
             <a:r>
-              <a:rPr sz="1250" b="1" i="0">
+              <a:rPr sz="1180" b="1" i="0">
                 <a:solidFill>
                   <a:srgbClr val="16325C"/>
                 </a:solidFill>
                 <a:latin typeface="Calibri"/>
               </a:rPr>
-              <a:t>Answers we cannot get today</a:t>
+              <a:t>An RFQ pack becomes costed lines</a:t>
             </a:r>
           </a:p>
         </p:txBody>
@@ -10301,8 +10301,8 @@
         </p:nvSpPr>
         <p:spPr>
           <a:xfrm>
-            <a:off x="1417320" y="4782312"/>
-            <a:ext cx="10131552" cy="667512"/>
+            <a:off x="8348472" y="3072384"/>
+            <a:ext cx="3209544" cy="557783"/>
           </a:xfrm>
           <a:prstGeom prst="rect">
             <a:avLst/>
@@ -10317,37 +10317,39 @@
           <a:p>
             <a:pPr algn="l">
               <a:lnSpc>
-                <a:spcPct val="113000"/>
+                <a:spcPct val="114000"/>
               </a:lnSpc>
               <a:spcAft>
                 <a:spcPts val="400"/>
               </a:spcAft>
             </a:pPr>
             <a:r>
-              <a:rPr sz="1000" b="0" i="0">
+              <a:rPr sz="980" b="0" i="0">
                 <a:solidFill>
                   <a:srgbClr val="3A4356"/>
                 </a:solidFill>
                 <a:latin typeface="Calibri"/>
               </a:rPr>
-              <a:t>Put a supplier quote next to our own build-up and see which part of it the gap is in, with the questions to ask them. Savings ideas priced rather than just listed. Where a part should be made, ten countries side by side. What happens if the metal price or the volume moves. And the tool narrows its own range as we feed it prices we have actually paid.</a:t>
-            </a:r>
-          </a:p>
-        </p:txBody>
-      </p:sp>
-      <p:sp>
-        <p:nvSpPr>
-          <p:cNvPr id="28" name="Rectangle 27"/>
+              <a:t>The tool pulls the line items out of the pack, costs each one, ranks them by money and drafts the negotiation brief.</a:t>
+            </a:r>
+          </a:p>
+        </p:txBody>
+      </p:sp>
+      <p:sp>
+        <p:nvSpPr>
+          <p:cNvPr id="28" name="Rounded Rectangle 27"/>
           <p:cNvSpPr/>
           <p:nvPr/>
         </p:nvSpPr>
         <p:spPr>
           <a:xfrm>
-            <a:off x="411480" y="5632704"/>
-            <a:ext cx="11365992" cy="566928"/>
-          </a:xfrm>
-          <a:prstGeom prst="rect">
-            <a:avLst/>
+            <a:off x="411480" y="3794760"/>
+            <a:ext cx="3666744" cy="1874519"/>
+          </a:xfrm>
+          <a:prstGeom prst="roundRect">
+            <a:avLst>
+              <a:gd name="adj" fmla="val 12000"/>
+            </a:avLst>
           </a:prstGeom>
           <a:solidFill>
             <a:srgbClr val="FFFFFF"/>
@@ -10389,14 +10391,14 @@
         </p:nvSpPr>
         <p:spPr>
           <a:xfrm>
-            <a:off x="411480" y="5632704"/>
-            <a:ext cx="1371600" cy="566928"/>
+            <a:off x="411480" y="3794760"/>
+            <a:ext cx="3666744" cy="54864"/>
           </a:xfrm>
           <a:prstGeom prst="rect">
             <a:avLst/>
           </a:prstGeom>
           <a:solidFill>
-            <a:srgbClr val="B03A2E"/>
+            <a:srgbClr val="1D6FB8"/>
           </a:solidFill>
           <a:ln>
             <a:noFill/>
@@ -10427,19 +10429,21 @@
       </p:sp>
       <p:sp>
         <p:nvSpPr>
-          <p:cNvPr id="30" name="Rectangle 29"/>
+          <p:cNvPr id="30" name="Oval 29"/>
           <p:cNvSpPr/>
           <p:nvPr/>
         </p:nvSpPr>
         <p:spPr>
           <a:xfrm>
-            <a:off x="411480" y="5632704"/>
-            <a:ext cx="1371600" cy="566928"/>
-          </a:xfrm>
-          <a:prstGeom prst="rect">
-            <a:avLst/>
-          </a:prstGeom>
-          <a:noFill/>
+            <a:off x="649224" y="4032504"/>
+            <a:ext cx="548640" cy="548640"/>
+          </a:xfrm>
+          <a:prstGeom prst="ellipse">
+            <a:avLst/>
+          </a:prstGeom>
+          <a:solidFill>
+            <a:srgbClr val="1D6FB8"/>
+          </a:solidFill>
           <a:ln>
             <a:noFill/>
           </a:ln>
@@ -10460,32 +10464,47 @@
           </a:fontRef>
         </p:style>
         <p:txBody>
-          <a:bodyPr rtlCol="0" anchor="ctr" wrap="square" lIns="109728" rIns="54864"/>
-          <a:lstStyle/>
-          <a:p>
-            <a:pPr algn="l"/>
-            <a:r>
-              <a:rPr sz="1050" b="1">
-                <a:solidFill>
-                  <a:srgbClr val="FFFFFF"/>
-                </a:solidFill>
-                <a:latin typeface="Calibri"/>
-              </a:rPr>
-              <a:t>FIRST WE NEED</a:t>
-            </a:r>
-          </a:p>
-        </p:txBody>
-      </p:sp>
-      <p:sp>
-        <p:nvSpPr>
-          <p:cNvPr id="31" name="TextBox 30"/>
+          <a:bodyPr rtlCol="0" anchor="ctr"/>
+          <a:lstStyle/>
+          <a:p>
+            <a:pPr algn="ctr"/>
+          </a:p>
+        </p:txBody>
+      </p:sp>
+      <p:pic>
+        <p:nvPicPr>
+          <p:cNvPr id="31" name="Picture 30" descr="person.png"/>
+          <p:cNvPicPr>
+            <a:picLocks noChangeAspect="1"/>
+          </p:cNvPicPr>
+          <p:nvPr/>
+        </p:nvPicPr>
+        <p:blipFill>
+          <a:blip r:embed="rId5"/>
+          <a:stretch>
+            <a:fillRect/>
+          </a:stretch>
+        </p:blipFill>
+        <p:spPr>
+          <a:xfrm>
+            <a:off x="791870" y="4175150"/>
+            <a:ext cx="263348" cy="263348"/>
+          </a:xfrm>
+          <a:prstGeom prst="rect">
+            <a:avLst/>
+          </a:prstGeom>
+        </p:spPr>
+      </p:pic>
+      <p:sp>
+        <p:nvSpPr>
+          <p:cNvPr id="32" name="TextBox 31"/>
           <p:cNvSpPr txBox="1"/>
           <p:nvPr/>
         </p:nvSpPr>
         <p:spPr>
           <a:xfrm>
-            <a:off x="1892808" y="5751576"/>
-            <a:ext cx="1779422" cy="329184"/>
+            <a:off x="649224" y="4709160"/>
+            <a:ext cx="3209544" cy="310896"/>
           </a:xfrm>
           <a:prstGeom prst="rect">
             <a:avLst/>
@@ -10493,47 +10512,137 @@
           <a:noFill/>
         </p:spPr>
         <p:txBody>
-          <a:bodyPr wrap="square" anchor="ctr" lIns="0" rIns="0" tIns="0" bIns="0">
+          <a:bodyPr wrap="square" anchor="t" lIns="0" rIns="0" tIns="0" bIns="0">
             <a:spAutoFit/>
           </a:bodyPr>
           <a:lstStyle/>
           <a:p>
             <a:pPr algn="l">
               <a:lnSpc>
-                <a:spcPct val="112000"/>
+                <a:spcPct val="100000"/>
               </a:lnSpc>
               <a:spcAft>
                 <a:spcPts val="400"/>
               </a:spcAft>
             </a:pPr>
             <a:r>
-              <a:rPr sz="919" b="0" i="0">
-                <a:solidFill>
-                  <a:srgbClr val="3A4356"/>
+              <a:rPr sz="1180" b="1" i="0">
+                <a:solidFill>
+                  <a:srgbClr val="16325C"/>
                 </a:solidFill>
                 <a:latin typeface="Calibri"/>
               </a:rPr>
-              <a:t>Approval to use AI</a:t>
-            </a:r>
-          </a:p>
-        </p:txBody>
-      </p:sp>
-      <p:sp>
-        <p:nvSpPr>
-          <p:cNvPr id="32" name="Rectangle 31"/>
+              <a:t>An assistant does the setting up</a:t>
+            </a:r>
+          </a:p>
+        </p:txBody>
+      </p:sp>
+      <p:sp>
+        <p:nvSpPr>
+          <p:cNvPr id="33" name="TextBox 32"/>
+          <p:cNvSpPr txBox="1"/>
+          <p:nvPr/>
+        </p:nvSpPr>
+        <p:spPr>
+          <a:xfrm>
+            <a:off x="649224" y="5038344"/>
+            <a:ext cx="3209544" cy="557783"/>
+          </a:xfrm>
+          <a:prstGeom prst="rect">
+            <a:avLst/>
+          </a:prstGeom>
+          <a:noFill/>
+        </p:spPr>
+        <p:txBody>
+          <a:bodyPr wrap="square" anchor="t" lIns="0" rIns="0" tIns="0" bIns="0">
+            <a:spAutoFit/>
+          </a:bodyPr>
+          <a:lstStyle/>
+          <a:p>
+            <a:pPr algn="l">
+              <a:lnSpc>
+                <a:spcPct val="114000"/>
+              </a:lnSpc>
+              <a:spcAft>
+                <a:spcPts val="400"/>
+              </a:spcAft>
+            </a:pPr>
+            <a:r>
+              <a:rPr sz="980" b="0" i="0">
+                <a:solidFill>
+                  <a:srgbClr val="3A4356"/>
+                </a:solidFill>
+                <a:latin typeface="Calibri"/>
+              </a:rPr>
+              <a:t>It picks the process route and the machine and fills in what the geometry gives, then asks one question instead of a hundred.</a:t>
+            </a:r>
+          </a:p>
+        </p:txBody>
+      </p:sp>
+      <p:sp>
+        <p:nvSpPr>
+          <p:cNvPr id="34" name="Rounded Rectangle 33"/>
           <p:cNvSpPr/>
           <p:nvPr/>
         </p:nvSpPr>
         <p:spPr>
           <a:xfrm>
-            <a:off x="3781958" y="5687568"/>
-            <a:ext cx="9525" cy="457200"/>
-          </a:xfrm>
-          <a:prstGeom prst="rect">
-            <a:avLst/>
+            <a:off x="4261104" y="3794760"/>
+            <a:ext cx="3666744" cy="1874519"/>
+          </a:xfrm>
+          <a:prstGeom prst="roundRect">
+            <a:avLst>
+              <a:gd name="adj" fmla="val 12000"/>
+            </a:avLst>
           </a:prstGeom>
           <a:solidFill>
-            <a:srgbClr val="DCE3EE"/>
+            <a:srgbClr val="FFFFFF"/>
+          </a:solidFill>
+          <a:ln w="9525">
+            <a:solidFill>
+              <a:srgbClr val="DCE3EE"/>
+            </a:solidFill>
+          </a:ln>
+          <a:effectLst/>
+        </p:spPr>
+        <p:style>
+          <a:lnRef idx="1">
+            <a:schemeClr val="accent1"/>
+          </a:lnRef>
+          <a:fillRef idx="3">
+            <a:schemeClr val="accent1"/>
+          </a:fillRef>
+          <a:effectRef idx="2">
+            <a:schemeClr val="accent1"/>
+          </a:effectRef>
+          <a:fontRef idx="minor">
+            <a:schemeClr val="lt1"/>
+          </a:fontRef>
+        </p:style>
+        <p:txBody>
+          <a:bodyPr rtlCol="0" anchor="ctr"/>
+          <a:lstStyle/>
+          <a:p>
+            <a:pPr algn="ctr"/>
+          </a:p>
+        </p:txBody>
+      </p:sp>
+      <p:sp>
+        <p:nvSpPr>
+          <p:cNvPr id="35" name="Rectangle 34"/>
+          <p:cNvSpPr/>
+          <p:nvPr/>
+        </p:nvSpPr>
+        <p:spPr>
+          <a:xfrm>
+            <a:off x="4261104" y="3794760"/>
+            <a:ext cx="3666744" cy="54864"/>
+          </a:xfrm>
+          <a:prstGeom prst="rect">
+            <a:avLst/>
+          </a:prstGeom>
+          <a:solidFill>
+            <a:srgbClr val="1D6FB8"/>
           </a:solidFill>
           <a:ln>
             <a:noFill/>
@@ -10564,14 +10673,82 @@
       </p:sp>
       <p:sp>
         <p:nvSpPr>
-          <p:cNvPr id="33" name="TextBox 32"/>
+          <p:cNvPr id="36" name="Oval 35"/>
+          <p:cNvSpPr/>
+          <p:nvPr/>
+        </p:nvSpPr>
+        <p:spPr>
+          <a:xfrm>
+            <a:off x="4498848" y="4032504"/>
+            <a:ext cx="548640" cy="548640"/>
+          </a:xfrm>
+          <a:prstGeom prst="ellipse">
+            <a:avLst/>
+          </a:prstGeom>
+          <a:solidFill>
+            <a:srgbClr val="1D6FB8"/>
+          </a:solidFill>
+          <a:ln>
+            <a:noFill/>
+          </a:ln>
+          <a:effectLst/>
+        </p:spPr>
+        <p:style>
+          <a:lnRef idx="1">
+            <a:schemeClr val="accent1"/>
+          </a:lnRef>
+          <a:fillRef idx="3">
+            <a:schemeClr val="accent1"/>
+          </a:fillRef>
+          <a:effectRef idx="2">
+            <a:schemeClr val="accent1"/>
+          </a:effectRef>
+          <a:fontRef idx="minor">
+            <a:schemeClr val="lt1"/>
+          </a:fontRef>
+        </p:style>
+        <p:txBody>
+          <a:bodyPr rtlCol="0" anchor="ctr"/>
+          <a:lstStyle/>
+          <a:p>
+            <a:pPr algn="ctr"/>
+          </a:p>
+        </p:txBody>
+      </p:sp>
+      <p:pic>
+        <p:nvPicPr>
+          <p:cNvPr id="37" name="Picture 36" descr="coins.png"/>
+          <p:cNvPicPr>
+            <a:picLocks noChangeAspect="1"/>
+          </p:cNvPicPr>
+          <p:nvPr/>
+        </p:nvPicPr>
+        <p:blipFill>
+          <a:blip r:embed="rId6"/>
+          <a:stretch>
+            <a:fillRect/>
+          </a:stretch>
+        </p:blipFill>
+        <p:spPr>
+          <a:xfrm>
+            <a:off x="4641494" y="4175150"/>
+            <a:ext cx="263348" cy="263348"/>
+          </a:xfrm>
+          <a:prstGeom prst="rect">
+            <a:avLst/>
+          </a:prstGeom>
+        </p:spPr>
+      </p:pic>
+      <p:sp>
+        <p:nvSpPr>
+          <p:cNvPr id="38" name="TextBox 37"/>
           <p:cNvSpPr txBox="1"/>
           <p:nvPr/>
         </p:nvSpPr>
         <p:spPr>
           <a:xfrm>
-            <a:off x="3891686" y="5751576"/>
-            <a:ext cx="1779422" cy="329184"/>
+            <a:off x="4498848" y="4709160"/>
+            <a:ext cx="3209544" cy="310896"/>
           </a:xfrm>
           <a:prstGeom prst="rect">
             <a:avLst/>
@@ -10579,47 +10756,137 @@
           <a:noFill/>
         </p:spPr>
         <p:txBody>
-          <a:bodyPr wrap="square" anchor="ctr" lIns="0" rIns="0" tIns="0" bIns="0">
+          <a:bodyPr wrap="square" anchor="t" lIns="0" rIns="0" tIns="0" bIns="0">
             <a:spAutoFit/>
           </a:bodyPr>
           <a:lstStyle/>
           <a:p>
             <a:pPr algn="l">
               <a:lnSpc>
-                <a:spcPct val="112000"/>
+                <a:spcPct val="100000"/>
               </a:lnSpc>
               <a:spcAft>
                 <a:spcPts val="400"/>
               </a:spcAft>
             </a:pPr>
             <a:r>
-              <a:rPr sz="919" b="0" i="0">
-                <a:solidFill>
-                  <a:srgbClr val="3A4356"/>
+              <a:rPr sz="1180" b="1" i="0">
+                <a:solidFill>
+                  <a:srgbClr val="16325C"/>
                 </a:solidFill>
                 <a:latin typeface="Calibri"/>
               </a:rPr>
-              <a:t>Our own rate book</a:t>
-            </a:r>
-          </a:p>
-        </p:txBody>
-      </p:sp>
-      <p:sp>
-        <p:nvSpPr>
-          <p:cNvPr id="34" name="Rectangle 33"/>
+              <a:t>Supplier quotes taken apart</a:t>
+            </a:r>
+          </a:p>
+        </p:txBody>
+      </p:sp>
+      <p:sp>
+        <p:nvSpPr>
+          <p:cNvPr id="39" name="TextBox 38"/>
+          <p:cNvSpPr txBox="1"/>
+          <p:nvPr/>
+        </p:nvSpPr>
+        <p:spPr>
+          <a:xfrm>
+            <a:off x="4498848" y="5038344"/>
+            <a:ext cx="3209544" cy="557783"/>
+          </a:xfrm>
+          <a:prstGeom prst="rect">
+            <a:avLst/>
+          </a:prstGeom>
+          <a:noFill/>
+        </p:spPr>
+        <p:txBody>
+          <a:bodyPr wrap="square" anchor="t" lIns="0" rIns="0" tIns="0" bIns="0">
+            <a:spAutoFit/>
+          </a:bodyPr>
+          <a:lstStyle/>
+          <a:p>
+            <a:pPr algn="l">
+              <a:lnSpc>
+                <a:spcPct val="114000"/>
+              </a:lnSpc>
+              <a:spcAft>
+                <a:spcPts val="400"/>
+              </a:spcAft>
+            </a:pPr>
+            <a:r>
+              <a:rPr sz="980" b="0" i="0">
+                <a:solidFill>
+                  <a:srgbClr val="3A4356"/>
+                </a:solidFill>
+                <a:latin typeface="Calibri"/>
+              </a:rPr>
+              <a:t>Put their price next to our own build-up and see which part of it the gap is in, with the questions to put to them.</a:t>
+            </a:r>
+          </a:p>
+        </p:txBody>
+      </p:sp>
+      <p:sp>
+        <p:nvSpPr>
+          <p:cNvPr id="40" name="Rounded Rectangle 39"/>
           <p:cNvSpPr/>
           <p:nvPr/>
         </p:nvSpPr>
         <p:spPr>
           <a:xfrm>
-            <a:off x="5780836" y="5687568"/>
-            <a:ext cx="9525" cy="457200"/>
-          </a:xfrm>
-          <a:prstGeom prst="rect">
-            <a:avLst/>
+            <a:off x="8110728" y="3794760"/>
+            <a:ext cx="3666744" cy="1874519"/>
+          </a:xfrm>
+          <a:prstGeom prst="roundRect">
+            <a:avLst>
+              <a:gd name="adj" fmla="val 12000"/>
+            </a:avLst>
           </a:prstGeom>
           <a:solidFill>
-            <a:srgbClr val="DCE3EE"/>
+            <a:srgbClr val="FFFFFF"/>
+          </a:solidFill>
+          <a:ln w="9525">
+            <a:solidFill>
+              <a:srgbClr val="DCE3EE"/>
+            </a:solidFill>
+          </a:ln>
+          <a:effectLst/>
+        </p:spPr>
+        <p:style>
+          <a:lnRef idx="1">
+            <a:schemeClr val="accent1"/>
+          </a:lnRef>
+          <a:fillRef idx="3">
+            <a:schemeClr val="accent1"/>
+          </a:fillRef>
+          <a:effectRef idx="2">
+            <a:schemeClr val="accent1"/>
+          </a:effectRef>
+          <a:fontRef idx="minor">
+            <a:schemeClr val="lt1"/>
+          </a:fontRef>
+        </p:style>
+        <p:txBody>
+          <a:bodyPr rtlCol="0" anchor="ctr"/>
+          <a:lstStyle/>
+          <a:p>
+            <a:pPr algn="ctr"/>
+          </a:p>
+        </p:txBody>
+      </p:sp>
+      <p:sp>
+        <p:nvSpPr>
+          <p:cNvPr id="41" name="Rectangle 40"/>
+          <p:cNvSpPr/>
+          <p:nvPr/>
+        </p:nvSpPr>
+        <p:spPr>
+          <a:xfrm>
+            <a:off x="8110728" y="3794760"/>
+            <a:ext cx="3666744" cy="54864"/>
+          </a:xfrm>
+          <a:prstGeom prst="rect">
+            <a:avLst/>
+          </a:prstGeom>
+          <a:solidFill>
+            <a:srgbClr val="1D6FB8"/>
           </a:solidFill>
           <a:ln>
             <a:noFill/>
@@ -10650,14 +10917,82 @@
       </p:sp>
       <p:sp>
         <p:nvSpPr>
-          <p:cNvPr id="35" name="TextBox 34"/>
+          <p:cNvPr id="42" name="Oval 41"/>
+          <p:cNvSpPr/>
+          <p:nvPr/>
+        </p:nvSpPr>
+        <p:spPr>
+          <a:xfrm>
+            <a:off x="8348472" y="4032504"/>
+            <a:ext cx="548640" cy="548640"/>
+          </a:xfrm>
+          <a:prstGeom prst="ellipse">
+            <a:avLst/>
+          </a:prstGeom>
+          <a:solidFill>
+            <a:srgbClr val="1D6FB8"/>
+          </a:solidFill>
+          <a:ln>
+            <a:noFill/>
+          </a:ln>
+          <a:effectLst/>
+        </p:spPr>
+        <p:style>
+          <a:lnRef idx="1">
+            <a:schemeClr val="accent1"/>
+          </a:lnRef>
+          <a:fillRef idx="3">
+            <a:schemeClr val="accent1"/>
+          </a:fillRef>
+          <a:effectRef idx="2">
+            <a:schemeClr val="accent1"/>
+          </a:effectRef>
+          <a:fontRef idx="minor">
+            <a:schemeClr val="lt1"/>
+          </a:fontRef>
+        </p:style>
+        <p:txBody>
+          <a:bodyPr rtlCol="0" anchor="ctr"/>
+          <a:lstStyle/>
+          <a:p>
+            <a:pPr algn="ctr"/>
+          </a:p>
+        </p:txBody>
+      </p:sp>
+      <p:pic>
+        <p:nvPicPr>
+          <p:cNvPr id="43" name="Picture 42" descr="press.png"/>
+          <p:cNvPicPr>
+            <a:picLocks noChangeAspect="1"/>
+          </p:cNvPicPr>
+          <p:nvPr/>
+        </p:nvPicPr>
+        <p:blipFill>
+          <a:blip r:embed="rId7"/>
+          <a:stretch>
+            <a:fillRect/>
+          </a:stretch>
+        </p:blipFill>
+        <p:spPr>
+          <a:xfrm>
+            <a:off x="8491118" y="4175150"/>
+            <a:ext cx="263348" cy="263348"/>
+          </a:xfrm>
+          <a:prstGeom prst="rect">
+            <a:avLst/>
+          </a:prstGeom>
+        </p:spPr>
+      </p:pic>
+      <p:sp>
+        <p:nvSpPr>
+          <p:cNvPr id="44" name="TextBox 43"/>
           <p:cNvSpPr txBox="1"/>
           <p:nvPr/>
         </p:nvSpPr>
         <p:spPr>
           <a:xfrm>
-            <a:off x="5890564" y="5751576"/>
-            <a:ext cx="1779422" cy="329184"/>
+            <a:off x="8348472" y="4709160"/>
+            <a:ext cx="3209544" cy="310896"/>
           </a:xfrm>
           <a:prstGeom prst="rect">
             <a:avLst/>
@@ -10665,47 +11000,91 @@
           <a:noFill/>
         </p:spPr>
         <p:txBody>
-          <a:bodyPr wrap="square" anchor="ctr" lIns="0" rIns="0" tIns="0" bIns="0">
+          <a:bodyPr wrap="square" anchor="t" lIns="0" rIns="0" tIns="0" bIns="0">
             <a:spAutoFit/>
           </a:bodyPr>
           <a:lstStyle/>
           <a:p>
             <a:pPr algn="l">
               <a:lnSpc>
-                <a:spcPct val="112000"/>
+                <a:spcPct val="100000"/>
               </a:lnSpc>
               <a:spcAft>
                 <a:spcPts val="400"/>
               </a:spcAft>
             </a:pPr>
             <a:r>
-              <a:rPr sz="919" b="0" i="0">
-                <a:solidFill>
-                  <a:srgbClr val="3A4356"/>
+              <a:rPr sz="1180" b="1" i="0">
+                <a:solidFill>
+                  <a:srgbClr val="16325C"/>
                 </a:solidFill>
                 <a:latin typeface="Calibri"/>
               </a:rPr>
-              <a:t>A history of rate changes</a:t>
-            </a:r>
-          </a:p>
-        </p:txBody>
-      </p:sp>
-      <p:sp>
-        <p:nvSpPr>
-          <p:cNvPr id="36" name="Rectangle 35"/>
+              <a:t>Design changes priced, not guessed</a:t>
+            </a:r>
+          </a:p>
+        </p:txBody>
+      </p:sp>
+      <p:sp>
+        <p:nvSpPr>
+          <p:cNvPr id="45" name="TextBox 44"/>
+          <p:cNvSpPr txBox="1"/>
+          <p:nvPr/>
+        </p:nvSpPr>
+        <p:spPr>
+          <a:xfrm>
+            <a:off x="8348472" y="5038344"/>
+            <a:ext cx="3209544" cy="557783"/>
+          </a:xfrm>
+          <a:prstGeom prst="rect">
+            <a:avLst/>
+          </a:prstGeom>
+          <a:noFill/>
+        </p:spPr>
+        <p:txBody>
+          <a:bodyPr wrap="square" anchor="t" lIns="0" rIns="0" tIns="0" bIns="0">
+            <a:spAutoFit/>
+          </a:bodyPr>
+          <a:lstStyle/>
+          <a:p>
+            <a:pPr algn="l">
+              <a:lnSpc>
+                <a:spcPct val="114000"/>
+              </a:lnSpc>
+              <a:spcAft>
+                <a:spcPts val="400"/>
+              </a:spcAft>
+            </a:pPr>
+            <a:r>
+              <a:rPr sz="980" b="0" i="0">
+                <a:solidFill>
+                  <a:srgbClr val="3A4356"/>
+                </a:solidFill>
+                <a:latin typeface="Calibri"/>
+              </a:rPr>
+              <a:t>It flags what makes a part expensive and puts a number on each change, ranked by the money it would save.</a:t>
+            </a:r>
+          </a:p>
+        </p:txBody>
+      </p:sp>
+      <p:sp>
+        <p:nvSpPr>
+          <p:cNvPr id="46" name="Rounded Rectangle 45"/>
           <p:cNvSpPr/>
           <p:nvPr/>
         </p:nvSpPr>
         <p:spPr>
           <a:xfrm>
-            <a:off x="7779715" y="5687568"/>
-            <a:ext cx="9525" cy="457200"/>
-          </a:xfrm>
-          <a:prstGeom prst="rect">
-            <a:avLst/>
+            <a:off x="411480" y="5779008"/>
+            <a:ext cx="11365992" cy="868680"/>
+          </a:xfrm>
+          <a:prstGeom prst="roundRect">
+            <a:avLst>
+              <a:gd name="adj" fmla="val 12000"/>
+            </a:avLst>
           </a:prstGeom>
           <a:solidFill>
-            <a:srgbClr val="DCE3EE"/>
+            <a:srgbClr val="E8F1FA"/>
           </a:solidFill>
           <a:ln>
             <a:noFill/>
@@ -10736,14 +11115,58 @@
       </p:sp>
       <p:sp>
         <p:nvSpPr>
-          <p:cNvPr id="37" name="TextBox 36"/>
+          <p:cNvPr id="47" name="Rectangle 46"/>
+          <p:cNvSpPr/>
+          <p:nvPr/>
+        </p:nvSpPr>
+        <p:spPr>
+          <a:xfrm>
+            <a:off x="411480" y="5779008"/>
+            <a:ext cx="68580" cy="868680"/>
+          </a:xfrm>
+          <a:prstGeom prst="rect">
+            <a:avLst/>
+          </a:prstGeom>
+          <a:solidFill>
+            <a:srgbClr val="1D6FB8"/>
+          </a:solidFill>
+          <a:ln>
+            <a:noFill/>
+          </a:ln>
+          <a:effectLst/>
+        </p:spPr>
+        <p:style>
+          <a:lnRef idx="1">
+            <a:schemeClr val="accent1"/>
+          </a:lnRef>
+          <a:fillRef idx="3">
+            <a:schemeClr val="accent1"/>
+          </a:fillRef>
+          <a:effectRef idx="2">
+            <a:schemeClr val="accent1"/>
+          </a:effectRef>
+          <a:fontRef idx="minor">
+            <a:schemeClr val="lt1"/>
+          </a:fontRef>
+        </p:style>
+        <p:txBody>
+          <a:bodyPr rtlCol="0" anchor="ctr"/>
+          <a:lstStyle/>
+          <a:p>
+            <a:pPr algn="ctr"/>
+          </a:p>
+        </p:txBody>
+      </p:sp>
+      <p:sp>
+        <p:nvSpPr>
+          <p:cNvPr id="48" name="TextBox 47"/>
           <p:cNvSpPr txBox="1"/>
           <p:nvPr/>
         </p:nvSpPr>
         <p:spPr>
           <a:xfrm>
-            <a:off x="7889443" y="5751576"/>
-            <a:ext cx="1779422" cy="329184"/>
+            <a:off x="630936" y="5897880"/>
+            <a:ext cx="10954512" cy="256032"/>
           </a:xfrm>
           <a:prstGeom prst="rect">
             <a:avLst/>
@@ -10751,85 +11174,41 @@
           <a:noFill/>
         </p:spPr>
         <p:txBody>
-          <a:bodyPr wrap="square" anchor="ctr" lIns="0" rIns="0" tIns="0" bIns="0">
+          <a:bodyPr wrap="square" anchor="t" lIns="0" rIns="0" tIns="0" bIns="0">
             <a:spAutoFit/>
           </a:bodyPr>
           <a:lstStyle/>
           <a:p>
             <a:pPr algn="l">
               <a:lnSpc>
-                <a:spcPct val="112000"/>
+                <a:spcPct val="100000"/>
               </a:lnSpc>
               <a:spcAft>
                 <a:spcPts val="400"/>
               </a:spcAft>
             </a:pPr>
             <a:r>
-              <a:rPr sz="919" b="0" i="0">
-                <a:solidFill>
-                  <a:srgbClr val="3A4356"/>
+              <a:rPr sz="1200" b="1" i="0">
+                <a:solidFill>
+                  <a:srgbClr val="1D6FB8"/>
                 </a:solidFill>
                 <a:latin typeface="Calibri"/>
               </a:rPr>
-              <a:t>A record of every costing</a:t>
-            </a:r>
-          </a:p>
-        </p:txBody>
-      </p:sp>
-      <p:sp>
-        <p:nvSpPr>
-          <p:cNvPr id="38" name="Rectangle 37"/>
-          <p:cNvSpPr/>
-          <p:nvPr/>
-        </p:nvSpPr>
-        <p:spPr>
-          <a:xfrm>
-            <a:off x="9778593" y="5687568"/>
-            <a:ext cx="9525" cy="457200"/>
-          </a:xfrm>
-          <a:prstGeom prst="rect">
-            <a:avLst/>
-          </a:prstGeom>
-          <a:solidFill>
-            <a:srgbClr val="DCE3EE"/>
-          </a:solidFill>
-          <a:ln>
-            <a:noFill/>
-          </a:ln>
-          <a:effectLst/>
-        </p:spPr>
-        <p:style>
-          <a:lnRef idx="1">
-            <a:schemeClr val="accent1"/>
-          </a:lnRef>
-          <a:fillRef idx="3">
-            <a:schemeClr val="accent1"/>
-          </a:fillRef>
-          <a:effectRef idx="2">
-            <a:schemeClr val="accent1"/>
-          </a:effectRef>
-          <a:fontRef idx="minor">
-            <a:schemeClr val="lt1"/>
-          </a:fontRef>
-        </p:style>
-        <p:txBody>
-          <a:bodyPr rtlCol="0" anchor="ctr"/>
-          <a:lstStyle/>
-          <a:p>
-            <a:pPr algn="ctr"/>
-          </a:p>
-        </p:txBody>
-      </p:sp>
-      <p:sp>
-        <p:nvSpPr>
-          <p:cNvPr id="39" name="TextBox 38"/>
+              <a:t>All six end in the same engine</a:t>
+            </a:r>
+          </a:p>
+        </p:txBody>
+      </p:sp>
+      <p:sp>
+        <p:nvSpPr>
+          <p:cNvPr id="49" name="TextBox 48"/>
           <p:cNvSpPr txBox="1"/>
           <p:nvPr/>
         </p:nvSpPr>
         <p:spPr>
           <a:xfrm>
-            <a:off x="9888321" y="5751576"/>
-            <a:ext cx="1779422" cy="329184"/>
+            <a:off x="630936" y="6181344"/>
+            <a:ext cx="10954512" cy="365760"/>
           </a:xfrm>
           <a:prstGeom prst="rect">
             <a:avLst/>
@@ -10837,27 +11216,27 @@
           <a:noFill/>
         </p:spPr>
         <p:txBody>
-          <a:bodyPr wrap="square" anchor="ctr" lIns="0" rIns="0" tIns="0" bIns="0">
+          <a:bodyPr wrap="square" anchor="t" lIns="0" rIns="0" tIns="0" bIns="0">
             <a:spAutoFit/>
           </a:bodyPr>
           <a:lstStyle/>
           <a:p>
             <a:pPr algn="l">
               <a:lnSpc>
-                <a:spcPct val="112000"/>
+                <a:spcPct val="114000"/>
               </a:lnSpc>
               <a:spcAft>
-                <a:spcPts val="400"/>
+                <a:spcPts val="300"/>
               </a:spcAft>
             </a:pPr>
             <a:r>
-              <a:rPr sz="919" b="0" i="0">
+              <a:rPr sz="1050" b="0" i="0">
                 <a:solidFill>
                   <a:srgbClr val="3A4356"/>
                 </a:solidFill>
                 <a:latin typeface="Calibri"/>
               </a:rPr>
-              <a:t>The run itself built</a:t>
+              <a:t>The AI reads, sorts and sets up — the photo, the pack, the drawing, the process route. It never sets a price. The money is worked out by the same fixed rules and the same rate book we use today, so every number can still be explained line by line.</a:t>
             </a:r>
           </a:p>
         </p:txBody>
@@ -11186,26 +11565,273 @@
                 </a:solidFill>
                 <a:latin typeface="Cambria"/>
               </a:rPr>
-              <a:t>What it is worth, and what we are asking for</a:t>
-            </a:r>
-          </a:p>
-        </p:txBody>
-      </p:sp>
-      <p:sp>
-        <p:nvSpPr>
-          <p:cNvPr id="9" name="Rounded Rectangle 8"/>
+              <a:t>What changes, and what we are asking for</a:t>
+            </a:r>
+          </a:p>
+        </p:txBody>
+      </p:sp>
+      <p:sp>
+        <p:nvSpPr>
+          <p:cNvPr id="9" name="Rectangle 8"/>
           <p:cNvSpPr/>
           <p:nvPr/>
         </p:nvSpPr>
         <p:spPr>
           <a:xfrm>
-            <a:off x="411480" y="1554480"/>
-            <a:ext cx="5577840" cy="1133856"/>
-          </a:xfrm>
-          <a:prstGeom prst="roundRect">
-            <a:avLst>
-              <a:gd name="adj" fmla="val 12000"/>
-            </a:avLst>
+            <a:off x="411480" y="1600200"/>
+            <a:ext cx="3776472" cy="329184"/>
+          </a:xfrm>
+          <a:prstGeom prst="rect">
+            <a:avLst/>
+          </a:prstGeom>
+          <a:solidFill>
+            <a:srgbClr val="16325C"/>
+          </a:solidFill>
+          <a:ln>
+            <a:noFill/>
+          </a:ln>
+          <a:effectLst/>
+        </p:spPr>
+        <p:style>
+          <a:lnRef idx="1">
+            <a:schemeClr val="accent1"/>
+          </a:lnRef>
+          <a:fillRef idx="3">
+            <a:schemeClr val="accent1"/>
+          </a:fillRef>
+          <a:effectRef idx="2">
+            <a:schemeClr val="accent1"/>
+          </a:effectRef>
+          <a:fontRef idx="minor">
+            <a:schemeClr val="lt1"/>
+          </a:fontRef>
+        </p:style>
+        <p:txBody>
+          <a:bodyPr rtlCol="0" anchor="ctr"/>
+          <a:lstStyle/>
+          <a:p>
+            <a:pPr algn="ctr"/>
+          </a:p>
+        </p:txBody>
+      </p:sp>
+      <p:sp>
+        <p:nvSpPr>
+          <p:cNvPr id="10" name="TextBox 9"/>
+          <p:cNvSpPr txBox="1"/>
+          <p:nvPr/>
+        </p:nvSpPr>
+        <p:spPr>
+          <a:xfrm>
+            <a:off x="493776" y="1682496"/>
+            <a:ext cx="3630168" cy="219456"/>
+          </a:xfrm>
+          <a:prstGeom prst="rect">
+            <a:avLst/>
+          </a:prstGeom>
+          <a:noFill/>
+        </p:spPr>
+        <p:txBody>
+          <a:bodyPr wrap="square" anchor="t" lIns="0" rIns="0" tIns="0" bIns="0">
+            <a:spAutoFit/>
+          </a:bodyPr>
+          <a:lstStyle/>
+          <a:p>
+            <a:pPr algn="l">
+              <a:lnSpc>
+                <a:spcPct val="100000"/>
+              </a:lnSpc>
+              <a:spcAft>
+                <a:spcPts val="400"/>
+              </a:spcAft>
+            </a:pPr>
+          </a:p>
+        </p:txBody>
+      </p:sp>
+      <p:sp>
+        <p:nvSpPr>
+          <p:cNvPr id="11" name="Rectangle 10"/>
+          <p:cNvSpPr/>
+          <p:nvPr/>
+        </p:nvSpPr>
+        <p:spPr>
+          <a:xfrm>
+            <a:off x="4187952" y="1600200"/>
+            <a:ext cx="3794760" cy="329184"/>
+          </a:xfrm>
+          <a:prstGeom prst="rect">
+            <a:avLst/>
+          </a:prstGeom>
+          <a:solidFill>
+            <a:srgbClr val="16325C"/>
+          </a:solidFill>
+          <a:ln>
+            <a:noFill/>
+          </a:ln>
+          <a:effectLst/>
+        </p:spPr>
+        <p:style>
+          <a:lnRef idx="1">
+            <a:schemeClr val="accent1"/>
+          </a:lnRef>
+          <a:fillRef idx="3">
+            <a:schemeClr val="accent1"/>
+          </a:fillRef>
+          <a:effectRef idx="2">
+            <a:schemeClr val="accent1"/>
+          </a:effectRef>
+          <a:fontRef idx="minor">
+            <a:schemeClr val="lt1"/>
+          </a:fontRef>
+        </p:style>
+        <p:txBody>
+          <a:bodyPr rtlCol="0" anchor="ctr"/>
+          <a:lstStyle/>
+          <a:p>
+            <a:pPr algn="ctr"/>
+          </a:p>
+        </p:txBody>
+      </p:sp>
+      <p:sp>
+        <p:nvSpPr>
+          <p:cNvPr id="12" name="TextBox 11"/>
+          <p:cNvSpPr txBox="1"/>
+          <p:nvPr/>
+        </p:nvSpPr>
+        <p:spPr>
+          <a:xfrm>
+            <a:off x="4270248" y="1682496"/>
+            <a:ext cx="3648456" cy="219456"/>
+          </a:xfrm>
+          <a:prstGeom prst="rect">
+            <a:avLst/>
+          </a:prstGeom>
+          <a:noFill/>
+        </p:spPr>
+        <p:txBody>
+          <a:bodyPr wrap="square" anchor="t" lIns="0" rIns="0" tIns="0" bIns="0">
+            <a:spAutoFit/>
+          </a:bodyPr>
+          <a:lstStyle/>
+          <a:p>
+            <a:pPr algn="l">
+              <a:lnSpc>
+                <a:spcPct val="100000"/>
+              </a:lnSpc>
+              <a:spcAft>
+                <a:spcPts val="400"/>
+              </a:spcAft>
+            </a:pPr>
+            <a:r>
+              <a:rPr sz="950" b="1" i="0">
+                <a:solidFill>
+                  <a:srgbClr val="FFFFFF"/>
+                </a:solidFill>
+                <a:latin typeface="Calibri"/>
+              </a:rPr>
+              <a:t>Today</a:t>
+            </a:r>
+          </a:p>
+        </p:txBody>
+      </p:sp>
+      <p:sp>
+        <p:nvSpPr>
+          <p:cNvPr id="13" name="Rectangle 12"/>
+          <p:cNvSpPr/>
+          <p:nvPr/>
+        </p:nvSpPr>
+        <p:spPr>
+          <a:xfrm>
+            <a:off x="7982712" y="1600200"/>
+            <a:ext cx="3794760" cy="329184"/>
+          </a:xfrm>
+          <a:prstGeom prst="rect">
+            <a:avLst/>
+          </a:prstGeom>
+          <a:solidFill>
+            <a:srgbClr val="16325C"/>
+          </a:solidFill>
+          <a:ln>
+            <a:noFill/>
+          </a:ln>
+          <a:effectLst/>
+        </p:spPr>
+        <p:style>
+          <a:lnRef idx="1">
+            <a:schemeClr val="accent1"/>
+          </a:lnRef>
+          <a:fillRef idx="3">
+            <a:schemeClr val="accent1"/>
+          </a:fillRef>
+          <a:effectRef idx="2">
+            <a:schemeClr val="accent1"/>
+          </a:effectRef>
+          <a:fontRef idx="minor">
+            <a:schemeClr val="lt1"/>
+          </a:fontRef>
+        </p:style>
+        <p:txBody>
+          <a:bodyPr rtlCol="0" anchor="ctr"/>
+          <a:lstStyle/>
+          <a:p>
+            <a:pPr algn="ctr"/>
+          </a:p>
+        </p:txBody>
+      </p:sp>
+      <p:sp>
+        <p:nvSpPr>
+          <p:cNvPr id="14" name="TextBox 13"/>
+          <p:cNvSpPr txBox="1"/>
+          <p:nvPr/>
+        </p:nvSpPr>
+        <p:spPr>
+          <a:xfrm>
+            <a:off x="8065008" y="1682496"/>
+            <a:ext cx="3648456" cy="219456"/>
+          </a:xfrm>
+          <a:prstGeom prst="rect">
+            <a:avLst/>
+          </a:prstGeom>
+          <a:noFill/>
+        </p:spPr>
+        <p:txBody>
+          <a:bodyPr wrap="square" anchor="t" lIns="0" rIns="0" tIns="0" bIns="0">
+            <a:spAutoFit/>
+          </a:bodyPr>
+          <a:lstStyle/>
+          <a:p>
+            <a:pPr algn="l">
+              <a:lnSpc>
+                <a:spcPct val="100000"/>
+              </a:lnSpc>
+              <a:spcAft>
+                <a:spcPts val="400"/>
+              </a:spcAft>
+            </a:pPr>
+            <a:r>
+              <a:rPr sz="950" b="1" i="0">
+                <a:solidFill>
+                  <a:srgbClr val="FFFFFF"/>
+                </a:solidFill>
+                <a:latin typeface="Calibri"/>
+              </a:rPr>
+              <a:t>With Option 2</a:t>
+            </a:r>
+          </a:p>
+        </p:txBody>
+      </p:sp>
+      <p:sp>
+        <p:nvSpPr>
+          <p:cNvPr id="15" name="Rectangle 14"/>
+          <p:cNvSpPr/>
+          <p:nvPr/>
+        </p:nvSpPr>
+        <p:spPr>
+          <a:xfrm>
+            <a:off x="411480" y="1929384"/>
+            <a:ext cx="3776472" cy="420624"/>
+          </a:xfrm>
+          <a:prstGeom prst="rect">
+            <a:avLst/>
           </a:prstGeom>
           <a:solidFill>
             <a:srgbClr val="FFFFFF"/>
@@ -11241,58 +11867,14 @@
       </p:sp>
       <p:sp>
         <p:nvSpPr>
-          <p:cNvPr id="10" name="Rectangle 9"/>
-          <p:cNvSpPr/>
-          <p:nvPr/>
-        </p:nvSpPr>
-        <p:spPr>
-          <a:xfrm>
-            <a:off x="411480" y="1554480"/>
-            <a:ext cx="68580" cy="1133856"/>
-          </a:xfrm>
-          <a:prstGeom prst="rect">
-            <a:avLst/>
-          </a:prstGeom>
-          <a:solidFill>
-            <a:srgbClr val="1D6FB8"/>
-          </a:solidFill>
-          <a:ln>
-            <a:noFill/>
-          </a:ln>
-          <a:effectLst/>
-        </p:spPr>
-        <p:style>
-          <a:lnRef idx="1">
-            <a:schemeClr val="accent1"/>
-          </a:lnRef>
-          <a:fillRef idx="3">
-            <a:schemeClr val="accent1"/>
-          </a:fillRef>
-          <a:effectRef idx="2">
-            <a:schemeClr val="accent1"/>
-          </a:effectRef>
-          <a:fontRef idx="minor">
-            <a:schemeClr val="lt1"/>
-          </a:fontRef>
-        </p:style>
-        <p:txBody>
-          <a:bodyPr rtlCol="0" anchor="ctr"/>
-          <a:lstStyle/>
-          <a:p>
-            <a:pPr algn="ctr"/>
-          </a:p>
-        </p:txBody>
-      </p:sp>
-      <p:sp>
-        <p:nvSpPr>
-          <p:cNvPr id="11" name="TextBox 10"/>
+          <p:cNvPr id="16" name="TextBox 15"/>
           <p:cNvSpPr txBox="1"/>
           <p:nvPr/>
         </p:nvSpPr>
         <p:spPr>
           <a:xfrm>
-            <a:off x="612648" y="1682496"/>
-            <a:ext cx="5212080" cy="274320"/>
+            <a:off x="493776" y="1993392"/>
+            <a:ext cx="3630168" cy="329184"/>
           </a:xfrm>
           <a:prstGeom prst="rect">
             <a:avLst/>
@@ -11314,112 +11896,30 @@
               </a:spcAft>
             </a:pPr>
             <a:r>
-              <a:rPr sz="1300" b="1" i="0">
-                <a:solidFill>
-                  <a:srgbClr val="16325C"/>
+              <a:rPr sz="1040" b="0" i="0">
+                <a:solidFill>
+                  <a:srgbClr val="3A4356"/>
                 </a:solidFill>
                 <a:latin typeface="Calibri"/>
               </a:rPr>
-              <a:t>OPTION 1 NEEDS</a:t>
-            </a:r>
-          </a:p>
-        </p:txBody>
-      </p:sp>
-      <p:sp>
-        <p:nvSpPr>
-          <p:cNvPr id="12" name="TextBox 11"/>
-          <p:cNvSpPr txBox="1"/>
-          <p:nvPr/>
-        </p:nvSpPr>
-        <p:spPr>
-          <a:xfrm>
-            <a:off x="612648" y="1993392"/>
-            <a:ext cx="5212080" cy="585216"/>
-          </a:xfrm>
-          <a:prstGeom prst="rect">
-            <a:avLst/>
-          </a:prstGeom>
-          <a:noFill/>
-        </p:spPr>
-        <p:txBody>
-          <a:bodyPr wrap="square" anchor="t" lIns="0" rIns="0" tIns="0" bIns="0">
-            <a:spAutoFit/>
-          </a:bodyPr>
-          <a:lstStyle/>
-          <a:p>
-            <a:pPr algn="l">
-              <a:lnSpc>
-                <a:spcPct val="112000"/>
-              </a:lnSpc>
-              <a:spcAft>
-                <a:spcPts val="300"/>
-              </a:spcAft>
-            </a:pPr>
-            <a:r>
-              <a:rPr sz="1050" b="0" i="0">
-                <a:solidFill>
-                  <a:srgbClr val="3A4356"/>
-                </a:solidFill>
-                <a:latin typeface="Calibri"/>
-              </a:rPr>
-              <a:t>A Linux server, and a way to pass numbers into CAPEE</a:t>
-            </a:r>
-          </a:p>
-          <a:p>
-            <a:pPr algn="l">
-              <a:lnSpc>
-                <a:spcPct val="112000"/>
-              </a:lnSpc>
-              <a:spcAft>
-                <a:spcPts val="300"/>
-              </a:spcAft>
-            </a:pPr>
-            <a:r>
-              <a:rPr sz="1050" b="0" i="0">
-                <a:solidFill>
-                  <a:srgbClr val="3A4356"/>
-                </a:solidFill>
-                <a:latin typeface="Calibri"/>
-              </a:rPr>
-              <a:t>30 to 50 parts where we know the price we paid</a:t>
-            </a:r>
-          </a:p>
-          <a:p>
-            <a:pPr algn="l">
-              <a:lnSpc>
-                <a:spcPct val="112000"/>
-              </a:lnSpc>
-              <a:spcAft>
-                <a:spcPts val="300"/>
-              </a:spcAft>
-            </a:pPr>
-            <a:r>
-              <a:rPr sz="1050" b="0" i="0">
-                <a:solidFill>
-                  <a:srgbClr val="3A4356"/>
-                </a:solidFill>
-                <a:latin typeface="Calibri"/>
-              </a:rPr>
-              <a:t>One part type and a small team for the trial</a:t>
-            </a:r>
-          </a:p>
-        </p:txBody>
-      </p:sp>
-      <p:sp>
-        <p:nvSpPr>
-          <p:cNvPr id="13" name="Rounded Rectangle 12"/>
+              <a:t>How many parts get a proper cost</a:t>
+            </a:r>
+          </a:p>
+        </p:txBody>
+      </p:sp>
+      <p:sp>
+        <p:nvSpPr>
+          <p:cNvPr id="17" name="Rectangle 16"/>
           <p:cNvSpPr/>
           <p:nvPr/>
         </p:nvSpPr>
         <p:spPr>
           <a:xfrm>
-            <a:off x="6199632" y="1554480"/>
-            <a:ext cx="5577840" cy="1133856"/>
-          </a:xfrm>
-          <a:prstGeom prst="roundRect">
-            <a:avLst>
-              <a:gd name="adj" fmla="val 12000"/>
-            </a:avLst>
+            <a:off x="4187952" y="1929384"/>
+            <a:ext cx="3794760" cy="420624"/>
+          </a:xfrm>
+          <a:prstGeom prst="rect">
+            <a:avLst/>
           </a:prstGeom>
           <a:solidFill>
             <a:srgbClr val="FFFFFF"/>
@@ -11455,58 +11955,14 @@
       </p:sp>
       <p:sp>
         <p:nvSpPr>
-          <p:cNvPr id="14" name="Rectangle 13"/>
-          <p:cNvSpPr/>
-          <p:nvPr/>
-        </p:nvSpPr>
-        <p:spPr>
-          <a:xfrm>
-            <a:off x="6199632" y="1554480"/>
-            <a:ext cx="68580" cy="1133856"/>
-          </a:xfrm>
-          <a:prstGeom prst="rect">
-            <a:avLst/>
-          </a:prstGeom>
-          <a:solidFill>
-            <a:srgbClr val="6B3FA0"/>
-          </a:solidFill>
-          <a:ln>
-            <a:noFill/>
-          </a:ln>
-          <a:effectLst/>
-        </p:spPr>
-        <p:style>
-          <a:lnRef idx="1">
-            <a:schemeClr val="accent1"/>
-          </a:lnRef>
-          <a:fillRef idx="3">
-            <a:schemeClr val="accent1"/>
-          </a:fillRef>
-          <a:effectRef idx="2">
-            <a:schemeClr val="accent1"/>
-          </a:effectRef>
-          <a:fontRef idx="minor">
-            <a:schemeClr val="lt1"/>
-          </a:fontRef>
-        </p:style>
-        <p:txBody>
-          <a:bodyPr rtlCol="0" anchor="ctr"/>
-          <a:lstStyle/>
-          <a:p>
-            <a:pPr algn="ctr"/>
-          </a:p>
-        </p:txBody>
-      </p:sp>
-      <p:sp>
-        <p:nvSpPr>
-          <p:cNvPr id="15" name="TextBox 14"/>
+          <p:cNvPr id="18" name="TextBox 17"/>
           <p:cNvSpPr txBox="1"/>
           <p:nvPr/>
         </p:nvSpPr>
         <p:spPr>
           <a:xfrm>
-            <a:off x="6400800" y="1682496"/>
-            <a:ext cx="5212080" cy="274320"/>
+            <a:off x="4270248" y="1993392"/>
+            <a:ext cx="3648456" cy="329184"/>
           </a:xfrm>
           <a:prstGeom prst="rect">
             <a:avLst/>
@@ -11528,484 +11984,27 @@
               </a:spcAft>
             </a:pPr>
             <a:r>
-              <a:rPr sz="1300" b="1" i="0">
-                <a:solidFill>
-                  <a:srgbClr val="16325C"/>
+              <a:rPr sz="1040" b="0" i="0">
+                <a:solidFill>
+                  <a:srgbClr val="B03A2E"/>
                 </a:solidFill>
                 <a:latin typeface="Calibri"/>
               </a:rPr>
-              <a:t>OPTION 2 NEEDS</a:t>
-            </a:r>
-          </a:p>
-        </p:txBody>
-      </p:sp>
-      <p:sp>
-        <p:nvSpPr>
-          <p:cNvPr id="16" name="TextBox 15"/>
-          <p:cNvSpPr txBox="1"/>
-          <p:nvPr/>
-        </p:nvSpPr>
-        <p:spPr>
-          <a:xfrm>
-            <a:off x="6400800" y="1993392"/>
-            <a:ext cx="5212080" cy="585216"/>
-          </a:xfrm>
-          <a:prstGeom prst="rect">
-            <a:avLst/>
-          </a:prstGeom>
-          <a:noFill/>
-        </p:spPr>
-        <p:txBody>
-          <a:bodyPr wrap="square" anchor="t" lIns="0" rIns="0" tIns="0" bIns="0">
-            <a:spAutoFit/>
-          </a:bodyPr>
-          <a:lstStyle/>
-          <a:p>
-            <a:pPr algn="l">
-              <a:lnSpc>
-                <a:spcPct val="112000"/>
-              </a:lnSpc>
-              <a:spcAft>
-                <a:spcPts val="300"/>
-              </a:spcAft>
-            </a:pPr>
-            <a:r>
-              <a:rPr sz="1050" b="0" i="0">
-                <a:solidFill>
-                  <a:srgbClr val="3A4356"/>
-                </a:solidFill>
-                <a:latin typeface="Calibri"/>
-              </a:rPr>
-              <a:t>Everything above, plus approval to use AI</a:t>
-            </a:r>
-          </a:p>
-          <a:p>
-            <a:pPr algn="l">
-              <a:lnSpc>
-                <a:spcPct val="112000"/>
-              </a:lnSpc>
-              <a:spcAft>
-                <a:spcPts val="300"/>
-              </a:spcAft>
-            </a:pPr>
-            <a:r>
-              <a:rPr sz="1050" b="0" i="0">
-                <a:solidFill>
-                  <a:srgbClr val="3A4356"/>
-                </a:solidFill>
-                <a:latin typeface="Calibri"/>
-              </a:rPr>
-              <a:t>Our own rate book loaded, with a change history</a:t>
-            </a:r>
-          </a:p>
-          <a:p>
-            <a:pPr algn="l">
-              <a:lnSpc>
-                <a:spcPct val="112000"/>
-              </a:lnSpc>
-              <a:spcAft>
-                <a:spcPts val="300"/>
-              </a:spcAft>
-            </a:pPr>
-            <a:r>
-              <a:rPr sz="1050" b="0" i="0">
-                <a:solidFill>
-                  <a:srgbClr val="3A4356"/>
-                </a:solidFill>
-                <a:latin typeface="Calibri"/>
-              </a:rPr>
-              <a:t>A record of every costing, and the run itself built</a:t>
-            </a:r>
-          </a:p>
-        </p:txBody>
-      </p:sp>
-      <p:sp>
-        <p:nvSpPr>
-          <p:cNvPr id="17" name="TextBox 16"/>
-          <p:cNvSpPr txBox="1"/>
-          <p:nvPr/>
-        </p:nvSpPr>
-        <p:spPr>
-          <a:xfrm>
-            <a:off x="411480" y="2816352"/>
-            <a:ext cx="11338560" cy="274320"/>
-          </a:xfrm>
-          <a:prstGeom prst="rect">
-            <a:avLst/>
-          </a:prstGeom>
-          <a:noFill/>
-        </p:spPr>
-        <p:txBody>
-          <a:bodyPr wrap="square" anchor="t" lIns="0" rIns="0" tIns="0" bIns="0">
-            <a:spAutoFit/>
-          </a:bodyPr>
-          <a:lstStyle/>
-          <a:p>
-            <a:pPr algn="l">
-              <a:lnSpc>
-                <a:spcPct val="100000"/>
-              </a:lnSpc>
-              <a:spcAft>
-                <a:spcPts val="400"/>
-              </a:spcAft>
-            </a:pPr>
-            <a:r>
-              <a:rPr sz="1150" b="1" i="0">
-                <a:solidFill>
-                  <a:srgbClr val="6B7280"/>
-                </a:solidFill>
-                <a:latin typeface="Calibri"/>
-              </a:rPr>
-              <a:t>What it is worth: five numbers, four of them yours</a:t>
-            </a:r>
-          </a:p>
-        </p:txBody>
-      </p:sp>
-      <p:sp>
-        <p:nvSpPr>
-          <p:cNvPr id="18" name="Rectangle 17"/>
+              <a:t>The ones we have hours for</a:t>
+            </a:r>
+          </a:p>
+        </p:txBody>
+      </p:sp>
+      <p:sp>
+        <p:nvSpPr>
+          <p:cNvPr id="19" name="Rectangle 18"/>
           <p:cNvSpPr/>
           <p:nvPr/>
         </p:nvSpPr>
         <p:spPr>
           <a:xfrm>
-            <a:off x="411480" y="3090672"/>
-            <a:ext cx="457200" cy="329184"/>
-          </a:xfrm>
-          <a:prstGeom prst="rect">
-            <a:avLst/>
-          </a:prstGeom>
-          <a:solidFill>
-            <a:srgbClr val="16325C"/>
-          </a:solidFill>
-          <a:ln>
-            <a:noFill/>
-          </a:ln>
-          <a:effectLst/>
-        </p:spPr>
-        <p:style>
-          <a:lnRef idx="1">
-            <a:schemeClr val="accent1"/>
-          </a:lnRef>
-          <a:fillRef idx="3">
-            <a:schemeClr val="accent1"/>
-          </a:fillRef>
-          <a:effectRef idx="2">
-            <a:schemeClr val="accent1"/>
-          </a:effectRef>
-          <a:fontRef idx="minor">
-            <a:schemeClr val="lt1"/>
-          </a:fontRef>
-        </p:style>
-        <p:txBody>
-          <a:bodyPr rtlCol="0" anchor="ctr"/>
-          <a:lstStyle/>
-          <a:p>
-            <a:pPr algn="ctr"/>
-          </a:p>
-        </p:txBody>
-      </p:sp>
-      <p:sp>
-        <p:nvSpPr>
-          <p:cNvPr id="19" name="TextBox 18"/>
-          <p:cNvSpPr txBox="1"/>
-          <p:nvPr/>
-        </p:nvSpPr>
-        <p:spPr>
-          <a:xfrm>
-            <a:off x="493776" y="3172968"/>
-            <a:ext cx="310896" cy="219456"/>
-          </a:xfrm>
-          <a:prstGeom prst="rect">
-            <a:avLst/>
-          </a:prstGeom>
-          <a:noFill/>
-        </p:spPr>
-        <p:txBody>
-          <a:bodyPr wrap="square" anchor="t" lIns="0" rIns="0" tIns="0" bIns="0">
-            <a:spAutoFit/>
-          </a:bodyPr>
-          <a:lstStyle/>
-          <a:p>
-            <a:pPr algn="l">
-              <a:lnSpc>
-                <a:spcPct val="100000"/>
-              </a:lnSpc>
-              <a:spcAft>
-                <a:spcPts val="400"/>
-              </a:spcAft>
-            </a:pPr>
-          </a:p>
-        </p:txBody>
-      </p:sp>
-      <p:sp>
-        <p:nvSpPr>
-          <p:cNvPr id="20" name="Rectangle 19"/>
-          <p:cNvSpPr/>
-          <p:nvPr/>
-        </p:nvSpPr>
-        <p:spPr>
-          <a:xfrm>
-            <a:off x="868680" y="3090672"/>
-            <a:ext cx="4846320" cy="329184"/>
-          </a:xfrm>
-          <a:prstGeom prst="rect">
-            <a:avLst/>
-          </a:prstGeom>
-          <a:solidFill>
-            <a:srgbClr val="16325C"/>
-          </a:solidFill>
-          <a:ln>
-            <a:noFill/>
-          </a:ln>
-          <a:effectLst/>
-        </p:spPr>
-        <p:style>
-          <a:lnRef idx="1">
-            <a:schemeClr val="accent1"/>
-          </a:lnRef>
-          <a:fillRef idx="3">
-            <a:schemeClr val="accent1"/>
-          </a:fillRef>
-          <a:effectRef idx="2">
-            <a:schemeClr val="accent1"/>
-          </a:effectRef>
-          <a:fontRef idx="minor">
-            <a:schemeClr val="lt1"/>
-          </a:fontRef>
-        </p:style>
-        <p:txBody>
-          <a:bodyPr rtlCol="0" anchor="ctr"/>
-          <a:lstStyle/>
-          <a:p>
-            <a:pPr algn="ctr"/>
-          </a:p>
-        </p:txBody>
-      </p:sp>
-      <p:sp>
-        <p:nvSpPr>
-          <p:cNvPr id="21" name="TextBox 20"/>
-          <p:cNvSpPr txBox="1"/>
-          <p:nvPr/>
-        </p:nvSpPr>
-        <p:spPr>
-          <a:xfrm>
-            <a:off x="950976" y="3172968"/>
-            <a:ext cx="4700016" cy="219456"/>
-          </a:xfrm>
-          <a:prstGeom prst="rect">
-            <a:avLst/>
-          </a:prstGeom>
-          <a:noFill/>
-        </p:spPr>
-        <p:txBody>
-          <a:bodyPr wrap="square" anchor="t" lIns="0" rIns="0" tIns="0" bIns="0">
-            <a:spAutoFit/>
-          </a:bodyPr>
-          <a:lstStyle/>
-          <a:p>
-            <a:pPr algn="l">
-              <a:lnSpc>
-                <a:spcPct val="100000"/>
-              </a:lnSpc>
-              <a:spcAft>
-                <a:spcPts val="400"/>
-              </a:spcAft>
-            </a:pPr>
-            <a:r>
-              <a:rPr sz="950" b="1" i="0">
-                <a:solidFill>
-                  <a:srgbClr val="FFFFFF"/>
-                </a:solidFill>
-                <a:latin typeface="Calibri"/>
-              </a:rPr>
-              <a:t>What it is</a:t>
-            </a:r>
-          </a:p>
-        </p:txBody>
-      </p:sp>
-      <p:sp>
-        <p:nvSpPr>
-          <p:cNvPr id="22" name="Rectangle 21"/>
-          <p:cNvSpPr/>
-          <p:nvPr/>
-        </p:nvSpPr>
-        <p:spPr>
-          <a:xfrm>
-            <a:off x="5715000" y="3090672"/>
-            <a:ext cx="1554480" cy="329184"/>
-          </a:xfrm>
-          <a:prstGeom prst="rect">
-            <a:avLst/>
-          </a:prstGeom>
-          <a:solidFill>
-            <a:srgbClr val="16325C"/>
-          </a:solidFill>
-          <a:ln>
-            <a:noFill/>
-          </a:ln>
-          <a:effectLst/>
-        </p:spPr>
-        <p:style>
-          <a:lnRef idx="1">
-            <a:schemeClr val="accent1"/>
-          </a:lnRef>
-          <a:fillRef idx="3">
-            <a:schemeClr val="accent1"/>
-          </a:fillRef>
-          <a:effectRef idx="2">
-            <a:schemeClr val="accent1"/>
-          </a:effectRef>
-          <a:fontRef idx="minor">
-            <a:schemeClr val="lt1"/>
-          </a:fontRef>
-        </p:style>
-        <p:txBody>
-          <a:bodyPr rtlCol="0" anchor="ctr"/>
-          <a:lstStyle/>
-          <a:p>
-            <a:pPr algn="ctr"/>
-          </a:p>
-        </p:txBody>
-      </p:sp>
-      <p:sp>
-        <p:nvSpPr>
-          <p:cNvPr id="23" name="TextBox 22"/>
-          <p:cNvSpPr txBox="1"/>
-          <p:nvPr/>
-        </p:nvSpPr>
-        <p:spPr>
-          <a:xfrm>
-            <a:off x="5797296" y="3172968"/>
-            <a:ext cx="1408176" cy="219456"/>
-          </a:xfrm>
-          <a:prstGeom prst="rect">
-            <a:avLst/>
-          </a:prstGeom>
-          <a:noFill/>
-        </p:spPr>
-        <p:txBody>
-          <a:bodyPr wrap="square" anchor="t" lIns="0" rIns="0" tIns="0" bIns="0">
-            <a:spAutoFit/>
-          </a:bodyPr>
-          <a:lstStyle/>
-          <a:p>
-            <a:pPr algn="l">
-              <a:lnSpc>
-                <a:spcPct val="100000"/>
-              </a:lnSpc>
-              <a:spcAft>
-                <a:spcPts val="400"/>
-              </a:spcAft>
-            </a:pPr>
-            <a:r>
-              <a:rPr sz="950" b="1" i="0">
-                <a:solidFill>
-                  <a:srgbClr val="FFFFFF"/>
-                </a:solidFill>
-                <a:latin typeface="Calibri"/>
-              </a:rPr>
-              <a:t>Our number</a:t>
-            </a:r>
-          </a:p>
-        </p:txBody>
-      </p:sp>
-      <p:sp>
-        <p:nvSpPr>
-          <p:cNvPr id="24" name="Rectangle 23"/>
-          <p:cNvSpPr/>
-          <p:nvPr/>
-        </p:nvSpPr>
-        <p:spPr>
-          <a:xfrm>
-            <a:off x="7269480" y="3090672"/>
-            <a:ext cx="4507992" cy="329184"/>
-          </a:xfrm>
-          <a:prstGeom prst="rect">
-            <a:avLst/>
-          </a:prstGeom>
-          <a:solidFill>
-            <a:srgbClr val="16325C"/>
-          </a:solidFill>
-          <a:ln>
-            <a:noFill/>
-          </a:ln>
-          <a:effectLst/>
-        </p:spPr>
-        <p:style>
-          <a:lnRef idx="1">
-            <a:schemeClr val="accent1"/>
-          </a:lnRef>
-          <a:fillRef idx="3">
-            <a:schemeClr val="accent1"/>
-          </a:fillRef>
-          <a:effectRef idx="2">
-            <a:schemeClr val="accent1"/>
-          </a:effectRef>
-          <a:fontRef idx="minor">
-            <a:schemeClr val="lt1"/>
-          </a:fontRef>
-        </p:style>
-        <p:txBody>
-          <a:bodyPr rtlCol="0" anchor="ctr"/>
-          <a:lstStyle/>
-          <a:p>
-            <a:pPr algn="ctr"/>
-          </a:p>
-        </p:txBody>
-      </p:sp>
-      <p:sp>
-        <p:nvSpPr>
-          <p:cNvPr id="25" name="TextBox 24"/>
-          <p:cNvSpPr txBox="1"/>
-          <p:nvPr/>
-        </p:nvSpPr>
-        <p:spPr>
-          <a:xfrm>
-            <a:off x="7351776" y="3172968"/>
-            <a:ext cx="4361688" cy="219456"/>
-          </a:xfrm>
-          <a:prstGeom prst="rect">
-            <a:avLst/>
-          </a:prstGeom>
-          <a:noFill/>
-        </p:spPr>
-        <p:txBody>
-          <a:bodyPr wrap="square" anchor="t" lIns="0" rIns="0" tIns="0" bIns="0">
-            <a:spAutoFit/>
-          </a:bodyPr>
-          <a:lstStyle/>
-          <a:p>
-            <a:pPr algn="l">
-              <a:lnSpc>
-                <a:spcPct val="100000"/>
-              </a:lnSpc>
-              <a:spcAft>
-                <a:spcPts val="400"/>
-              </a:spcAft>
-            </a:pPr>
-            <a:r>
-              <a:rPr sz="950" b="1" i="0">
-                <a:solidFill>
-                  <a:srgbClr val="FFFFFF"/>
-                </a:solidFill>
-                <a:latin typeface="Calibri"/>
-              </a:rPr>
-              <a:t>Where it comes from</a:t>
-            </a:r>
-          </a:p>
-        </p:txBody>
-      </p:sp>
-      <p:sp>
-        <p:nvSpPr>
-          <p:cNvPr id="26" name="Rectangle 25"/>
-          <p:cNvSpPr/>
-          <p:nvPr/>
-        </p:nvSpPr>
-        <p:spPr>
-          <a:xfrm>
-            <a:off x="411480" y="3419856"/>
-            <a:ext cx="457200" cy="283464"/>
+            <a:off x="7982712" y="1929384"/>
+            <a:ext cx="3794760" cy="420624"/>
           </a:xfrm>
           <a:prstGeom prst="rect">
             <a:avLst/>
@@ -12044,14 +12043,14 @@
       </p:sp>
       <p:sp>
         <p:nvSpPr>
-          <p:cNvPr id="27" name="TextBox 26"/>
+          <p:cNvPr id="20" name="TextBox 19"/>
           <p:cNvSpPr txBox="1"/>
           <p:nvPr/>
         </p:nvSpPr>
         <p:spPr>
           <a:xfrm>
-            <a:off x="493776" y="3483864"/>
-            <a:ext cx="310896" cy="192024"/>
+            <a:off x="8065008" y="1993392"/>
+            <a:ext cx="3648456" cy="329184"/>
           </a:xfrm>
           <a:prstGeom prst="rect">
             <a:avLst/>
@@ -12073,27 +12072,291 @@
               </a:spcAft>
             </a:pPr>
             <a:r>
-              <a:rPr sz="1019" b="1" i="0">
-                <a:solidFill>
-                  <a:srgbClr val="16325C"/>
+              <a:rPr sz="1040" b="1" i="0">
+                <a:solidFill>
+                  <a:srgbClr val="2E8B57"/>
                 </a:solidFill>
                 <a:latin typeface="Calibri"/>
               </a:rPr>
-              <a:t>A</a:t>
-            </a:r>
-          </a:p>
-        </p:txBody>
-      </p:sp>
-      <p:sp>
-        <p:nvSpPr>
-          <p:cNvPr id="28" name="Rectangle 27"/>
+              <a:t>All of them</a:t>
+            </a:r>
+          </a:p>
+        </p:txBody>
+      </p:sp>
+      <p:sp>
+        <p:nvSpPr>
+          <p:cNvPr id="21" name="Rectangle 20"/>
           <p:cNvSpPr/>
           <p:nvPr/>
         </p:nvSpPr>
         <p:spPr>
           <a:xfrm>
-            <a:off x="868680" y="3419856"/>
-            <a:ext cx="4846320" cy="283464"/>
+            <a:off x="411480" y="2350008"/>
+            <a:ext cx="3776472" cy="420624"/>
+          </a:xfrm>
+          <a:prstGeom prst="rect">
+            <a:avLst/>
+          </a:prstGeom>
+          <a:solidFill>
+            <a:srgbClr val="F4F7FB"/>
+          </a:solidFill>
+          <a:ln w="9525">
+            <a:solidFill>
+              <a:srgbClr val="DCE3EE"/>
+            </a:solidFill>
+          </a:ln>
+          <a:effectLst/>
+        </p:spPr>
+        <p:style>
+          <a:lnRef idx="1">
+            <a:schemeClr val="accent1"/>
+          </a:lnRef>
+          <a:fillRef idx="3">
+            <a:schemeClr val="accent1"/>
+          </a:fillRef>
+          <a:effectRef idx="2">
+            <a:schemeClr val="accent1"/>
+          </a:effectRef>
+          <a:fontRef idx="minor">
+            <a:schemeClr val="lt1"/>
+          </a:fontRef>
+        </p:style>
+        <p:txBody>
+          <a:bodyPr rtlCol="0" anchor="ctr"/>
+          <a:lstStyle/>
+          <a:p>
+            <a:pPr algn="ctr"/>
+          </a:p>
+        </p:txBody>
+      </p:sp>
+      <p:sp>
+        <p:nvSpPr>
+          <p:cNvPr id="22" name="TextBox 21"/>
+          <p:cNvSpPr txBox="1"/>
+          <p:nvPr/>
+        </p:nvSpPr>
+        <p:spPr>
+          <a:xfrm>
+            <a:off x="493776" y="2414016"/>
+            <a:ext cx="3630168" cy="329184"/>
+          </a:xfrm>
+          <a:prstGeom prst="rect">
+            <a:avLst/>
+          </a:prstGeom>
+          <a:noFill/>
+        </p:spPr>
+        <p:txBody>
+          <a:bodyPr wrap="square" anchor="t" lIns="0" rIns="0" tIns="0" bIns="0">
+            <a:spAutoFit/>
+          </a:bodyPr>
+          <a:lstStyle/>
+          <a:p>
+            <a:pPr algn="l">
+              <a:lnSpc>
+                <a:spcPct val="100000"/>
+              </a:lnSpc>
+              <a:spcAft>
+                <a:spcPts val="400"/>
+              </a:spcAft>
+            </a:pPr>
+            <a:r>
+              <a:rPr sz="1040" b="0" i="0">
+                <a:solidFill>
+                  <a:srgbClr val="3A4356"/>
+                </a:solidFill>
+                <a:latin typeface="Calibri"/>
+              </a:rPr>
+              <a:t>Turnaround on a basket</a:t>
+            </a:r>
+          </a:p>
+        </p:txBody>
+      </p:sp>
+      <p:sp>
+        <p:nvSpPr>
+          <p:cNvPr id="23" name="Rectangle 22"/>
+          <p:cNvSpPr/>
+          <p:nvPr/>
+        </p:nvSpPr>
+        <p:spPr>
+          <a:xfrm>
+            <a:off x="4187952" y="2350008"/>
+            <a:ext cx="3794760" cy="420624"/>
+          </a:xfrm>
+          <a:prstGeom prst="rect">
+            <a:avLst/>
+          </a:prstGeom>
+          <a:solidFill>
+            <a:srgbClr val="F4F7FB"/>
+          </a:solidFill>
+          <a:ln w="9525">
+            <a:solidFill>
+              <a:srgbClr val="DCE3EE"/>
+            </a:solidFill>
+          </a:ln>
+          <a:effectLst/>
+        </p:spPr>
+        <p:style>
+          <a:lnRef idx="1">
+            <a:schemeClr val="accent1"/>
+          </a:lnRef>
+          <a:fillRef idx="3">
+            <a:schemeClr val="accent1"/>
+          </a:fillRef>
+          <a:effectRef idx="2">
+            <a:schemeClr val="accent1"/>
+          </a:effectRef>
+          <a:fontRef idx="minor">
+            <a:schemeClr val="lt1"/>
+          </a:fontRef>
+        </p:style>
+        <p:txBody>
+          <a:bodyPr rtlCol="0" anchor="ctr"/>
+          <a:lstStyle/>
+          <a:p>
+            <a:pPr algn="ctr"/>
+          </a:p>
+        </p:txBody>
+      </p:sp>
+      <p:sp>
+        <p:nvSpPr>
+          <p:cNvPr id="24" name="TextBox 23"/>
+          <p:cNvSpPr txBox="1"/>
+          <p:nvPr/>
+        </p:nvSpPr>
+        <p:spPr>
+          <a:xfrm>
+            <a:off x="4270248" y="2414016"/>
+            <a:ext cx="3648456" cy="329184"/>
+          </a:xfrm>
+          <a:prstGeom prst="rect">
+            <a:avLst/>
+          </a:prstGeom>
+          <a:noFill/>
+        </p:spPr>
+        <p:txBody>
+          <a:bodyPr wrap="square" anchor="t" lIns="0" rIns="0" tIns="0" bIns="0">
+            <a:spAutoFit/>
+          </a:bodyPr>
+          <a:lstStyle/>
+          <a:p>
+            <a:pPr algn="l">
+              <a:lnSpc>
+                <a:spcPct val="100000"/>
+              </a:lnSpc>
+              <a:spcAft>
+                <a:spcPts val="400"/>
+              </a:spcAft>
+            </a:pPr>
+            <a:r>
+              <a:rPr sz="1040" b="0" i="0">
+                <a:solidFill>
+                  <a:srgbClr val="B03A2E"/>
+                </a:solidFill>
+                <a:latin typeface="Calibri"/>
+              </a:rPr>
+              <a:t>Days of engineer time</a:t>
+            </a:r>
+          </a:p>
+        </p:txBody>
+      </p:sp>
+      <p:sp>
+        <p:nvSpPr>
+          <p:cNvPr id="25" name="Rectangle 24"/>
+          <p:cNvSpPr/>
+          <p:nvPr/>
+        </p:nvSpPr>
+        <p:spPr>
+          <a:xfrm>
+            <a:off x="7982712" y="2350008"/>
+            <a:ext cx="3794760" cy="420624"/>
+          </a:xfrm>
+          <a:prstGeom prst="rect">
+            <a:avLst/>
+          </a:prstGeom>
+          <a:solidFill>
+            <a:srgbClr val="F4F7FB"/>
+          </a:solidFill>
+          <a:ln w="9525">
+            <a:solidFill>
+              <a:srgbClr val="DCE3EE"/>
+            </a:solidFill>
+          </a:ln>
+          <a:effectLst/>
+        </p:spPr>
+        <p:style>
+          <a:lnRef idx="1">
+            <a:schemeClr val="accent1"/>
+          </a:lnRef>
+          <a:fillRef idx="3">
+            <a:schemeClr val="accent1"/>
+          </a:fillRef>
+          <a:effectRef idx="2">
+            <a:schemeClr val="accent1"/>
+          </a:effectRef>
+          <a:fontRef idx="minor">
+            <a:schemeClr val="lt1"/>
+          </a:fontRef>
+        </p:style>
+        <p:txBody>
+          <a:bodyPr rtlCol="0" anchor="ctr"/>
+          <a:lstStyle/>
+          <a:p>
+            <a:pPr algn="ctr"/>
+          </a:p>
+        </p:txBody>
+      </p:sp>
+      <p:sp>
+        <p:nvSpPr>
+          <p:cNvPr id="26" name="TextBox 25"/>
+          <p:cNvSpPr txBox="1"/>
+          <p:nvPr/>
+        </p:nvSpPr>
+        <p:spPr>
+          <a:xfrm>
+            <a:off x="8065008" y="2414016"/>
+            <a:ext cx="3648456" cy="329184"/>
+          </a:xfrm>
+          <a:prstGeom prst="rect">
+            <a:avLst/>
+          </a:prstGeom>
+          <a:noFill/>
+        </p:spPr>
+        <p:txBody>
+          <a:bodyPr wrap="square" anchor="t" lIns="0" rIns="0" tIns="0" bIns="0">
+            <a:spAutoFit/>
+          </a:bodyPr>
+          <a:lstStyle/>
+          <a:p>
+            <a:pPr algn="l">
+              <a:lnSpc>
+                <a:spcPct val="100000"/>
+              </a:lnSpc>
+              <a:spcAft>
+                <a:spcPts val="400"/>
+              </a:spcAft>
+            </a:pPr>
+            <a:r>
+              <a:rPr sz="1040" b="1" i="0">
+                <a:solidFill>
+                  <a:srgbClr val="2E8B57"/>
+                </a:solidFill>
+                <a:latin typeface="Calibri"/>
+              </a:rPr>
+              <a:t>One run, once the data is together</a:t>
+            </a:r>
+          </a:p>
+        </p:txBody>
+      </p:sp>
+      <p:sp>
+        <p:nvSpPr>
+          <p:cNvPr id="27" name="Rectangle 26"/>
+          <p:cNvSpPr/>
+          <p:nvPr/>
+        </p:nvSpPr>
+        <p:spPr>
+          <a:xfrm>
+            <a:off x="411480" y="2770632"/>
+            <a:ext cx="3776472" cy="420624"/>
           </a:xfrm>
           <a:prstGeom prst="rect">
             <a:avLst/>
@@ -12132,14 +12395,14 @@
       </p:sp>
       <p:sp>
         <p:nvSpPr>
-          <p:cNvPr id="29" name="TextBox 28"/>
+          <p:cNvPr id="28" name="TextBox 27"/>
           <p:cNvSpPr txBox="1"/>
           <p:nvPr/>
         </p:nvSpPr>
         <p:spPr>
           <a:xfrm>
-            <a:off x="950976" y="3483864"/>
-            <a:ext cx="4700016" cy="192024"/>
+            <a:off x="493776" y="2834640"/>
+            <a:ext cx="3630168" cy="329184"/>
           </a:xfrm>
           <a:prstGeom prst="rect">
             <a:avLst/>
@@ -12161,27 +12424,27 @@
               </a:spcAft>
             </a:pPr>
             <a:r>
-              <a:rPr sz="1019" b="0" i="0">
+              <a:rPr sz="1040" b="0" i="0">
                 <a:solidFill>
                   <a:srgbClr val="3A4356"/>
                 </a:solidFill>
                 <a:latin typeface="Calibri"/>
               </a:rPr>
-              <a:t>Minutes to cost one part today</a:t>
-            </a:r>
-          </a:p>
-        </p:txBody>
-      </p:sp>
-      <p:sp>
-        <p:nvSpPr>
-          <p:cNvPr id="30" name="Rectangle 29"/>
+              <a:t>What we take to a supplier</a:t>
+            </a:r>
+          </a:p>
+        </p:txBody>
+      </p:sp>
+      <p:sp>
+        <p:nvSpPr>
+          <p:cNvPr id="29" name="Rectangle 28"/>
           <p:cNvSpPr/>
           <p:nvPr/>
         </p:nvSpPr>
         <p:spPr>
           <a:xfrm>
-            <a:off x="5715000" y="3419856"/>
-            <a:ext cx="1554480" cy="283464"/>
+            <a:off x="4187952" y="2770632"/>
+            <a:ext cx="3794760" cy="420624"/>
           </a:xfrm>
           <a:prstGeom prst="rect">
             <a:avLst/>
@@ -12220,14 +12483,14 @@
       </p:sp>
       <p:sp>
         <p:nvSpPr>
-          <p:cNvPr id="31" name="TextBox 30"/>
+          <p:cNvPr id="30" name="TextBox 29"/>
           <p:cNvSpPr txBox="1"/>
           <p:nvPr/>
         </p:nvSpPr>
         <p:spPr>
           <a:xfrm>
-            <a:off x="5797296" y="3483864"/>
-            <a:ext cx="1408176" cy="192024"/>
+            <a:off x="4270248" y="2834640"/>
+            <a:ext cx="3648456" cy="329184"/>
           </a:xfrm>
           <a:prstGeom prst="rect">
             <a:avLst/>
@@ -12249,27 +12512,27 @@
               </a:spcAft>
             </a:pPr>
             <a:r>
-              <a:rPr sz="1019" b="1" i="0">
-                <a:solidFill>
-                  <a:srgbClr val="1D6FB8"/>
+              <a:rPr sz="1040" b="0" i="0">
+                <a:solidFill>
+                  <a:srgbClr val="B7791F"/>
                 </a:solidFill>
                 <a:latin typeface="Calibri"/>
               </a:rPr>
-              <a:t>________</a:t>
-            </a:r>
-          </a:p>
-        </p:txBody>
-      </p:sp>
-      <p:sp>
-        <p:nvSpPr>
-          <p:cNvPr id="32" name="Rectangle 31"/>
+              <a:t>Our estimate</a:t>
+            </a:r>
+          </a:p>
+        </p:txBody>
+      </p:sp>
+      <p:sp>
+        <p:nvSpPr>
+          <p:cNvPr id="31" name="Rectangle 30"/>
           <p:cNvSpPr/>
           <p:nvPr/>
         </p:nvSpPr>
         <p:spPr>
           <a:xfrm>
-            <a:off x="7269480" y="3419856"/>
-            <a:ext cx="4507992" cy="283464"/>
+            <a:off x="7982712" y="2770632"/>
+            <a:ext cx="3794760" cy="420624"/>
           </a:xfrm>
           <a:prstGeom prst="rect">
             <a:avLst/>
@@ -12308,14 +12571,14 @@
       </p:sp>
       <p:sp>
         <p:nvSpPr>
-          <p:cNvPr id="33" name="TextBox 32"/>
+          <p:cNvPr id="32" name="TextBox 31"/>
           <p:cNvSpPr txBox="1"/>
           <p:nvPr/>
         </p:nvSpPr>
         <p:spPr>
           <a:xfrm>
-            <a:off x="7351776" y="3483864"/>
-            <a:ext cx="4361688" cy="192024"/>
+            <a:off x="8065008" y="2834640"/>
+            <a:ext cx="3648456" cy="329184"/>
           </a:xfrm>
           <a:prstGeom prst="rect">
             <a:avLst/>
@@ -12337,27 +12600,27 @@
               </a:spcAft>
             </a:pPr>
             <a:r>
-              <a:rPr sz="1019" b="0" i="0">
-                <a:solidFill>
-                  <a:srgbClr val="3A4356"/>
+              <a:rPr sz="1040" b="1" i="0">
+                <a:solidFill>
+                  <a:srgbClr val="2E8B57"/>
                 </a:solidFill>
                 <a:latin typeface="Calibri"/>
               </a:rPr>
-              <a:t>Time a handful of parts. One commodity is enough to start</a:t>
-            </a:r>
-          </a:p>
-        </p:txBody>
-      </p:sp>
-      <p:sp>
-        <p:nvSpPr>
-          <p:cNvPr id="34" name="Rectangle 33"/>
+              <a:t>The build-up, where their price differs, and what to ask</a:t>
+            </a:r>
+          </a:p>
+        </p:txBody>
+      </p:sp>
+      <p:sp>
+        <p:nvSpPr>
+          <p:cNvPr id="33" name="Rectangle 32"/>
           <p:cNvSpPr/>
           <p:nvPr/>
         </p:nvSpPr>
         <p:spPr>
           <a:xfrm>
-            <a:off x="411480" y="3703320"/>
-            <a:ext cx="457200" cy="283464"/>
+            <a:off x="411480" y="3191256"/>
+            <a:ext cx="3776472" cy="420624"/>
           </a:xfrm>
           <a:prstGeom prst="rect">
             <a:avLst/>
@@ -12396,14 +12659,14 @@
       </p:sp>
       <p:sp>
         <p:nvSpPr>
-          <p:cNvPr id="35" name="TextBox 34"/>
+          <p:cNvPr id="34" name="TextBox 33"/>
           <p:cNvSpPr txBox="1"/>
           <p:nvPr/>
         </p:nvSpPr>
         <p:spPr>
           <a:xfrm>
-            <a:off x="493776" y="3767328"/>
-            <a:ext cx="310896" cy="192024"/>
+            <a:off x="493776" y="3255264"/>
+            <a:ext cx="3630168" cy="329184"/>
           </a:xfrm>
           <a:prstGeom prst="rect">
             <a:avLst/>
@@ -12425,27 +12688,27 @@
               </a:spcAft>
             </a:pPr>
             <a:r>
-              <a:rPr sz="1019" b="1" i="0">
-                <a:solidFill>
-                  <a:srgbClr val="16325C"/>
+              <a:rPr sz="1040" b="0" i="0">
+                <a:solidFill>
+                  <a:srgbClr val="3A4356"/>
                 </a:solidFill>
                 <a:latin typeface="Calibri"/>
               </a:rPr>
-              <a:t>B</a:t>
-            </a:r>
-          </a:p>
-        </p:txBody>
-      </p:sp>
-      <p:sp>
-        <p:nvSpPr>
-          <p:cNvPr id="36" name="Rectangle 35"/>
+              <a:t>Where the engineer spends the time</a:t>
+            </a:r>
+          </a:p>
+        </p:txBody>
+      </p:sp>
+      <p:sp>
+        <p:nvSpPr>
+          <p:cNvPr id="35" name="Rectangle 34"/>
           <p:cNvSpPr/>
           <p:nvPr/>
         </p:nvSpPr>
         <p:spPr>
           <a:xfrm>
-            <a:off x="868680" y="3703320"/>
-            <a:ext cx="4846320" cy="283464"/>
+            <a:off x="4187952" y="3191256"/>
+            <a:ext cx="3794760" cy="420624"/>
           </a:xfrm>
           <a:prstGeom prst="rect">
             <a:avLst/>
@@ -12484,14 +12747,14 @@
       </p:sp>
       <p:sp>
         <p:nvSpPr>
-          <p:cNvPr id="37" name="TextBox 36"/>
+          <p:cNvPr id="36" name="TextBox 35"/>
           <p:cNvSpPr txBox="1"/>
           <p:nvPr/>
         </p:nvSpPr>
         <p:spPr>
           <a:xfrm>
-            <a:off x="950976" y="3767328"/>
-            <a:ext cx="4700016" cy="192024"/>
+            <a:off x="4270248" y="3255264"/>
+            <a:ext cx="3648456" cy="329184"/>
           </a:xfrm>
           <a:prstGeom prst="rect">
             <a:avLst/>
@@ -12513,27 +12776,27 @@
               </a:spcAft>
             </a:pPr>
             <a:r>
-              <a:rPr sz="1019" b="0" i="0">
-                <a:solidFill>
-                  <a:srgbClr val="3A4356"/>
+              <a:rPr sz="1040" b="0" i="0">
+                <a:solidFill>
+                  <a:srgbClr val="B03A2E"/>
                 </a:solidFill>
                 <a:latin typeface="Calibri"/>
               </a:rPr>
-              <a:t>Of those, the minutes spent reading the model and typing values in</a:t>
-            </a:r>
-          </a:p>
-        </p:txBody>
-      </p:sp>
-      <p:sp>
-        <p:nvSpPr>
-          <p:cNvPr id="38" name="Rectangle 37"/>
+              <a:t>Typing values in</a:t>
+            </a:r>
+          </a:p>
+        </p:txBody>
+      </p:sp>
+      <p:sp>
+        <p:nvSpPr>
+          <p:cNvPr id="37" name="Rectangle 36"/>
           <p:cNvSpPr/>
           <p:nvPr/>
         </p:nvSpPr>
         <p:spPr>
           <a:xfrm>
-            <a:off x="5715000" y="3703320"/>
-            <a:ext cx="1554480" cy="283464"/>
+            <a:off x="7982712" y="3191256"/>
+            <a:ext cx="3794760" cy="420624"/>
           </a:xfrm>
           <a:prstGeom prst="rect">
             <a:avLst/>
@@ -12572,14 +12835,14 @@
       </p:sp>
       <p:sp>
         <p:nvSpPr>
-          <p:cNvPr id="39" name="TextBox 38"/>
+          <p:cNvPr id="38" name="TextBox 37"/>
           <p:cNvSpPr txBox="1"/>
           <p:nvPr/>
         </p:nvSpPr>
         <p:spPr>
           <a:xfrm>
-            <a:off x="5797296" y="3767328"/>
-            <a:ext cx="1408176" cy="192024"/>
+            <a:off x="8065008" y="3255264"/>
+            <a:ext cx="3648456" cy="329184"/>
           </a:xfrm>
           <a:prstGeom prst="rect">
             <a:avLst/>
@@ -12601,118 +12864,32 @@
               </a:spcAft>
             </a:pPr>
             <a:r>
-              <a:rPr sz="1019" b="1" i="0">
-                <a:solidFill>
-                  <a:srgbClr val="1D6FB8"/>
+              <a:rPr sz="1040" b="1" i="0">
+                <a:solidFill>
+                  <a:srgbClr val="2E8B57"/>
                 </a:solidFill>
                 <a:latin typeface="Calibri"/>
               </a:rPr>
-              <a:t>________</a:t>
-            </a:r>
-          </a:p>
-        </p:txBody>
-      </p:sp>
-      <p:sp>
-        <p:nvSpPr>
-          <p:cNvPr id="40" name="Rectangle 39"/>
+              <a:t>Answering what only a person can, and acting on what it finds</a:t>
+            </a:r>
+          </a:p>
+        </p:txBody>
+      </p:sp>
+      <p:sp>
+        <p:nvSpPr>
+          <p:cNvPr id="39" name="Rounded Rectangle 38"/>
           <p:cNvSpPr/>
           <p:nvPr/>
         </p:nvSpPr>
         <p:spPr>
           <a:xfrm>
-            <a:off x="7269480" y="3703320"/>
-            <a:ext cx="4507992" cy="283464"/>
-          </a:xfrm>
-          <a:prstGeom prst="rect">
-            <a:avLst/>
-          </a:prstGeom>
-          <a:solidFill>
-            <a:srgbClr val="F4F7FB"/>
-          </a:solidFill>
-          <a:ln w="9525">
-            <a:solidFill>
-              <a:srgbClr val="DCE3EE"/>
-            </a:solidFill>
-          </a:ln>
-          <a:effectLst/>
-        </p:spPr>
-        <p:style>
-          <a:lnRef idx="1">
-            <a:schemeClr val="accent1"/>
-          </a:lnRef>
-          <a:fillRef idx="3">
-            <a:schemeClr val="accent1"/>
-          </a:fillRef>
-          <a:effectRef idx="2">
-            <a:schemeClr val="accent1"/>
-          </a:effectRef>
-          <a:fontRef idx="minor">
-            <a:schemeClr val="lt1"/>
-          </a:fontRef>
-        </p:style>
-        <p:txBody>
-          <a:bodyPr rtlCol="0" anchor="ctr"/>
-          <a:lstStyle/>
-          <a:p>
-            <a:pPr algn="ctr"/>
-          </a:p>
-        </p:txBody>
-      </p:sp>
-      <p:sp>
-        <p:nvSpPr>
-          <p:cNvPr id="41" name="TextBox 40"/>
-          <p:cNvSpPr txBox="1"/>
-          <p:nvPr/>
-        </p:nvSpPr>
-        <p:spPr>
-          <a:xfrm>
-            <a:off x="7351776" y="3767328"/>
-            <a:ext cx="4361688" cy="192024"/>
-          </a:xfrm>
-          <a:prstGeom prst="rect">
-            <a:avLst/>
-          </a:prstGeom>
-          <a:noFill/>
-        </p:spPr>
-        <p:txBody>
-          <a:bodyPr wrap="square" anchor="t" lIns="0" rIns="0" tIns="0" bIns="0">
-            <a:spAutoFit/>
-          </a:bodyPr>
-          <a:lstStyle/>
-          <a:p>
-            <a:pPr algn="l">
-              <a:lnSpc>
-                <a:spcPct val="100000"/>
-              </a:lnSpc>
-              <a:spcAft>
-                <a:spcPts val="400"/>
-              </a:spcAft>
-            </a:pPr>
-            <a:r>
-              <a:rPr sz="1019" b="0" i="0">
-                <a:solidFill>
-                  <a:srgbClr val="3A4356"/>
-                </a:solidFill>
-                <a:latin typeface="Calibri"/>
-              </a:rPr>
-              <a:t>The same exercise, timed separately</a:t>
-            </a:r>
-          </a:p>
-        </p:txBody>
-      </p:sp>
-      <p:sp>
-        <p:nvSpPr>
-          <p:cNvPr id="42" name="Rectangle 41"/>
-          <p:cNvSpPr/>
-          <p:nvPr/>
-        </p:nvSpPr>
-        <p:spPr>
-          <a:xfrm>
-            <a:off x="411480" y="3986784"/>
-            <a:ext cx="457200" cy="283464"/>
-          </a:xfrm>
-          <a:prstGeom prst="rect">
-            <a:avLst/>
+            <a:off x="411480" y="3694176"/>
+            <a:ext cx="5577840" cy="1188720"/>
+          </a:xfrm>
+          <a:prstGeom prst="roundRect">
+            <a:avLst>
+              <a:gd name="adj" fmla="val 12000"/>
+            </a:avLst>
           </a:prstGeom>
           <a:solidFill>
             <a:srgbClr val="FFFFFF"/>
@@ -12748,14 +12925,58 @@
       </p:sp>
       <p:sp>
         <p:nvSpPr>
-          <p:cNvPr id="43" name="TextBox 42"/>
+          <p:cNvPr id="40" name="Rectangle 39"/>
+          <p:cNvSpPr/>
+          <p:nvPr/>
+        </p:nvSpPr>
+        <p:spPr>
+          <a:xfrm>
+            <a:off x="411480" y="3694176"/>
+            <a:ext cx="68580" cy="1188720"/>
+          </a:xfrm>
+          <a:prstGeom prst="rect">
+            <a:avLst/>
+          </a:prstGeom>
+          <a:solidFill>
+            <a:srgbClr val="1D6FB8"/>
+          </a:solidFill>
+          <a:ln>
+            <a:noFill/>
+          </a:ln>
+          <a:effectLst/>
+        </p:spPr>
+        <p:style>
+          <a:lnRef idx="1">
+            <a:schemeClr val="accent1"/>
+          </a:lnRef>
+          <a:fillRef idx="3">
+            <a:schemeClr val="accent1"/>
+          </a:fillRef>
+          <a:effectRef idx="2">
+            <a:schemeClr val="accent1"/>
+          </a:effectRef>
+          <a:fontRef idx="minor">
+            <a:schemeClr val="lt1"/>
+          </a:fontRef>
+        </p:style>
+        <p:txBody>
+          <a:bodyPr rtlCol="0" anchor="ctr"/>
+          <a:lstStyle/>
+          <a:p>
+            <a:pPr algn="ctr"/>
+          </a:p>
+        </p:txBody>
+      </p:sp>
+      <p:sp>
+        <p:nvSpPr>
+          <p:cNvPr id="41" name="TextBox 40"/>
           <p:cNvSpPr txBox="1"/>
           <p:nvPr/>
         </p:nvSpPr>
         <p:spPr>
           <a:xfrm>
-            <a:off x="493776" y="4050792"/>
-            <a:ext cx="310896" cy="192024"/>
+            <a:off x="612648" y="3822192"/>
+            <a:ext cx="5212080" cy="274320"/>
           </a:xfrm>
           <a:prstGeom prst="rect">
             <a:avLst/>
@@ -12777,30 +12998,112 @@
               </a:spcAft>
             </a:pPr>
             <a:r>
-              <a:rPr sz="1019" b="1" i="0">
+              <a:rPr sz="1300" b="1" i="0">
                 <a:solidFill>
                   <a:srgbClr val="16325C"/>
                 </a:solidFill>
                 <a:latin typeface="Calibri"/>
               </a:rPr>
-              <a:t>C</a:t>
-            </a:r>
-          </a:p>
-        </p:txBody>
-      </p:sp>
-      <p:sp>
-        <p:nvSpPr>
-          <p:cNvPr id="44" name="Rectangle 43"/>
+              <a:t>OPTION 1 NEEDS</a:t>
+            </a:r>
+          </a:p>
+        </p:txBody>
+      </p:sp>
+      <p:sp>
+        <p:nvSpPr>
+          <p:cNvPr id="42" name="TextBox 41"/>
+          <p:cNvSpPr txBox="1"/>
+          <p:nvPr/>
+        </p:nvSpPr>
+        <p:spPr>
+          <a:xfrm>
+            <a:off x="612648" y="4133088"/>
+            <a:ext cx="5212080" cy="640080"/>
+          </a:xfrm>
+          <a:prstGeom prst="rect">
+            <a:avLst/>
+          </a:prstGeom>
+          <a:noFill/>
+        </p:spPr>
+        <p:txBody>
+          <a:bodyPr wrap="square" anchor="t" lIns="0" rIns="0" tIns="0" bIns="0">
+            <a:spAutoFit/>
+          </a:bodyPr>
+          <a:lstStyle/>
+          <a:p>
+            <a:pPr algn="l">
+              <a:lnSpc>
+                <a:spcPct val="112000"/>
+              </a:lnSpc>
+              <a:spcAft>
+                <a:spcPts val="300"/>
+              </a:spcAft>
+            </a:pPr>
+            <a:r>
+              <a:rPr sz="1050" b="0" i="0">
+                <a:solidFill>
+                  <a:srgbClr val="3A4356"/>
+                </a:solidFill>
+                <a:latin typeface="Calibri"/>
+              </a:rPr>
+              <a:t>A Linux server, and a way to pass numbers into CAPEE</a:t>
+            </a:r>
+          </a:p>
+          <a:p>
+            <a:pPr algn="l">
+              <a:lnSpc>
+                <a:spcPct val="112000"/>
+              </a:lnSpc>
+              <a:spcAft>
+                <a:spcPts val="300"/>
+              </a:spcAft>
+            </a:pPr>
+            <a:r>
+              <a:rPr sz="1050" b="0" i="0">
+                <a:solidFill>
+                  <a:srgbClr val="3A4356"/>
+                </a:solidFill>
+                <a:latin typeface="Calibri"/>
+              </a:rPr>
+              <a:t>30 to 50 parts where we know the price we paid</a:t>
+            </a:r>
+          </a:p>
+          <a:p>
+            <a:pPr algn="l">
+              <a:lnSpc>
+                <a:spcPct val="112000"/>
+              </a:lnSpc>
+              <a:spcAft>
+                <a:spcPts val="300"/>
+              </a:spcAft>
+            </a:pPr>
+            <a:r>
+              <a:rPr sz="1050" b="0" i="0">
+                <a:solidFill>
+                  <a:srgbClr val="3A4356"/>
+                </a:solidFill>
+                <a:latin typeface="Calibri"/>
+              </a:rPr>
+              <a:t>One commodity and a small team for the trial</a:t>
+            </a:r>
+          </a:p>
+        </p:txBody>
+      </p:sp>
+      <p:sp>
+        <p:nvSpPr>
+          <p:cNvPr id="43" name="Rounded Rectangle 42"/>
           <p:cNvSpPr/>
           <p:nvPr/>
         </p:nvSpPr>
         <p:spPr>
           <a:xfrm>
-            <a:off x="868680" y="3986784"/>
-            <a:ext cx="4846320" cy="283464"/>
-          </a:xfrm>
-          <a:prstGeom prst="rect">
-            <a:avLst/>
+            <a:off x="6199632" y="3694176"/>
+            <a:ext cx="5577840" cy="1188720"/>
+          </a:xfrm>
+          <a:prstGeom prst="roundRect">
+            <a:avLst>
+              <a:gd name="adj" fmla="val 12000"/>
+            </a:avLst>
           </a:prstGeom>
           <a:solidFill>
             <a:srgbClr val="FFFFFF"/>
@@ -12836,14 +13139,58 @@
       </p:sp>
       <p:sp>
         <p:nvSpPr>
+          <p:cNvPr id="44" name="Rectangle 43"/>
+          <p:cNvSpPr/>
+          <p:nvPr/>
+        </p:nvSpPr>
+        <p:spPr>
+          <a:xfrm>
+            <a:off x="6199632" y="3694176"/>
+            <a:ext cx="68580" cy="1188720"/>
+          </a:xfrm>
+          <a:prstGeom prst="rect">
+            <a:avLst/>
+          </a:prstGeom>
+          <a:solidFill>
+            <a:srgbClr val="6B3FA0"/>
+          </a:solidFill>
+          <a:ln>
+            <a:noFill/>
+          </a:ln>
+          <a:effectLst/>
+        </p:spPr>
+        <p:style>
+          <a:lnRef idx="1">
+            <a:schemeClr val="accent1"/>
+          </a:lnRef>
+          <a:fillRef idx="3">
+            <a:schemeClr val="accent1"/>
+          </a:fillRef>
+          <a:effectRef idx="2">
+            <a:schemeClr val="accent1"/>
+          </a:effectRef>
+          <a:fontRef idx="minor">
+            <a:schemeClr val="lt1"/>
+          </a:fontRef>
+        </p:style>
+        <p:txBody>
+          <a:bodyPr rtlCol="0" anchor="ctr"/>
+          <a:lstStyle/>
+          <a:p>
+            <a:pPr algn="ctr"/>
+          </a:p>
+        </p:txBody>
+      </p:sp>
+      <p:sp>
+        <p:nvSpPr>
           <p:cNvPr id="45" name="TextBox 44"/>
           <p:cNvSpPr txBox="1"/>
           <p:nvPr/>
         </p:nvSpPr>
         <p:spPr>
           <a:xfrm>
-            <a:off x="950976" y="4050792"/>
-            <a:ext cx="4700016" cy="192024"/>
+            <a:off x="6400800" y="3822192"/>
+            <a:ext cx="5212080" cy="274320"/>
           </a:xfrm>
           <a:prstGeom prst="rect">
             <a:avLst/>
@@ -12865,38 +13212,118 @@
               </a:spcAft>
             </a:pPr>
             <a:r>
-              <a:rPr sz="1019" b="0" i="0">
-                <a:solidFill>
-                  <a:srgbClr val="3A4356"/>
+              <a:rPr sz="1300" b="1" i="0">
+                <a:solidFill>
+                  <a:srgbClr val="16325C"/>
                 </a:solidFill>
                 <a:latin typeface="Calibri"/>
               </a:rPr>
-              <a:t>Parts we cost in a year</a:t>
-            </a:r>
-          </a:p>
-        </p:txBody>
-      </p:sp>
-      <p:sp>
-        <p:nvSpPr>
-          <p:cNvPr id="46" name="Rectangle 45"/>
+              <a:t>OPTION 2 NEEDS</a:t>
+            </a:r>
+          </a:p>
+        </p:txBody>
+      </p:sp>
+      <p:sp>
+        <p:nvSpPr>
+          <p:cNvPr id="46" name="TextBox 45"/>
+          <p:cNvSpPr txBox="1"/>
+          <p:nvPr/>
+        </p:nvSpPr>
+        <p:spPr>
+          <a:xfrm>
+            <a:off x="6400800" y="4133088"/>
+            <a:ext cx="5212080" cy="640080"/>
+          </a:xfrm>
+          <a:prstGeom prst="rect">
+            <a:avLst/>
+          </a:prstGeom>
+          <a:noFill/>
+        </p:spPr>
+        <p:txBody>
+          <a:bodyPr wrap="square" anchor="t" lIns="0" rIns="0" tIns="0" bIns="0">
+            <a:spAutoFit/>
+          </a:bodyPr>
+          <a:lstStyle/>
+          <a:p>
+            <a:pPr algn="l">
+              <a:lnSpc>
+                <a:spcPct val="112000"/>
+              </a:lnSpc>
+              <a:spcAft>
+                <a:spcPts val="300"/>
+              </a:spcAft>
+            </a:pPr>
+            <a:r>
+              <a:rPr sz="1050" b="0" i="0">
+                <a:solidFill>
+                  <a:srgbClr val="3A4356"/>
+                </a:solidFill>
+                <a:latin typeface="Calibri"/>
+              </a:rPr>
+              <a:t>Everything above, plus approval to use AI</a:t>
+            </a:r>
+          </a:p>
+          <a:p>
+            <a:pPr algn="l">
+              <a:lnSpc>
+                <a:spcPct val="112000"/>
+              </a:lnSpc>
+              <a:spcAft>
+                <a:spcPts val="300"/>
+              </a:spcAft>
+            </a:pPr>
+            <a:r>
+              <a:rPr sz="1050" b="0" i="0">
+                <a:solidFill>
+                  <a:srgbClr val="3A4356"/>
+                </a:solidFill>
+                <a:latin typeface="Calibri"/>
+              </a:rPr>
+              <a:t>Our own rate book loaded, with a change history</a:t>
+            </a:r>
+          </a:p>
+          <a:p>
+            <a:pPr algn="l">
+              <a:lnSpc>
+                <a:spcPct val="112000"/>
+              </a:lnSpc>
+              <a:spcAft>
+                <a:spcPts val="300"/>
+              </a:spcAft>
+            </a:pPr>
+            <a:r>
+              <a:rPr sz="1050" b="0" i="0">
+                <a:solidFill>
+                  <a:srgbClr val="3A4356"/>
+                </a:solidFill>
+                <a:latin typeface="Calibri"/>
+              </a:rPr>
+              <a:t>A record of every costing, and the run itself built</a:t>
+            </a:r>
+          </a:p>
+        </p:txBody>
+      </p:sp>
+      <p:sp>
+        <p:nvSpPr>
+          <p:cNvPr id="47" name="Rounded Rectangle 46"/>
           <p:cNvSpPr/>
           <p:nvPr/>
         </p:nvSpPr>
         <p:spPr>
           <a:xfrm>
-            <a:off x="5715000" y="3986784"/>
-            <a:ext cx="1554480" cy="283464"/>
-          </a:xfrm>
-          <a:prstGeom prst="rect">
-            <a:avLst/>
+            <a:off x="411480" y="4992624"/>
+            <a:ext cx="11365992" cy="822960"/>
+          </a:xfrm>
+          <a:prstGeom prst="roundRect">
+            <a:avLst>
+              <a:gd name="adj" fmla="val 12000"/>
+            </a:avLst>
           </a:prstGeom>
           <a:solidFill>
-            <a:srgbClr val="FFFFFF"/>
+            <a:srgbClr val="EAF6EF"/>
           </a:solidFill>
-          <a:ln w="9525">
-            <a:solidFill>
-              <a:srgbClr val="DCE3EE"/>
-            </a:solidFill>
+          <a:ln>
+            <a:noFill/>
           </a:ln>
           <a:effectLst/>
         </p:spPr>
@@ -12924,14 +13351,58 @@
       </p:sp>
       <p:sp>
         <p:nvSpPr>
-          <p:cNvPr id="47" name="TextBox 46"/>
+          <p:cNvPr id="48" name="Rectangle 47"/>
+          <p:cNvSpPr/>
+          <p:nvPr/>
+        </p:nvSpPr>
+        <p:spPr>
+          <a:xfrm>
+            <a:off x="411480" y="4992624"/>
+            <a:ext cx="68580" cy="822960"/>
+          </a:xfrm>
+          <a:prstGeom prst="rect">
+            <a:avLst/>
+          </a:prstGeom>
+          <a:solidFill>
+            <a:srgbClr val="2E8B57"/>
+          </a:solidFill>
+          <a:ln>
+            <a:noFill/>
+          </a:ln>
+          <a:effectLst/>
+        </p:spPr>
+        <p:style>
+          <a:lnRef idx="1">
+            <a:schemeClr val="accent1"/>
+          </a:lnRef>
+          <a:fillRef idx="3">
+            <a:schemeClr val="accent1"/>
+          </a:fillRef>
+          <a:effectRef idx="2">
+            <a:schemeClr val="accent1"/>
+          </a:effectRef>
+          <a:fontRef idx="minor">
+            <a:schemeClr val="lt1"/>
+          </a:fontRef>
+        </p:style>
+        <p:txBody>
+          <a:bodyPr rtlCol="0" anchor="ctr"/>
+          <a:lstStyle/>
+          <a:p>
+            <a:pPr algn="ctr"/>
+          </a:p>
+        </p:txBody>
+      </p:sp>
+      <p:sp>
+        <p:nvSpPr>
+          <p:cNvPr id="49" name="TextBox 48"/>
           <p:cNvSpPr txBox="1"/>
           <p:nvPr/>
         </p:nvSpPr>
         <p:spPr>
           <a:xfrm>
-            <a:off x="5797296" y="4050792"/>
-            <a:ext cx="1408176" cy="192024"/>
+            <a:off x="630936" y="5111496"/>
+            <a:ext cx="10954512" cy="256032"/>
           </a:xfrm>
           <a:prstGeom prst="rect">
             <a:avLst/>
@@ -12953,38 +13424,80 @@
               </a:spcAft>
             </a:pPr>
             <a:r>
-              <a:rPr sz="1019" b="1" i="0">
-                <a:solidFill>
-                  <a:srgbClr val="1D6FB8"/>
+              <a:rPr sz="1200" b="1" i="0">
+                <a:solidFill>
+                  <a:srgbClr val="2E8B57"/>
                 </a:solidFill>
                 <a:latin typeface="Calibri"/>
               </a:rPr>
-              <a:t>________</a:t>
-            </a:r>
-          </a:p>
-        </p:txBody>
-      </p:sp>
-      <p:sp>
-        <p:nvSpPr>
-          <p:cNvPr id="48" name="Rectangle 47"/>
+              <a:t>What we are asking for today: approve Option 1 as a trial, and start the AI approval for Option 2</a:t>
+            </a:r>
+          </a:p>
+        </p:txBody>
+      </p:sp>
+      <p:sp>
+        <p:nvSpPr>
+          <p:cNvPr id="50" name="TextBox 49"/>
+          <p:cNvSpPr txBox="1"/>
+          <p:nvPr/>
+        </p:nvSpPr>
+        <p:spPr>
+          <a:xfrm>
+            <a:off x="630936" y="5394960"/>
+            <a:ext cx="10954512" cy="320040"/>
+          </a:xfrm>
+          <a:prstGeom prst="rect">
+            <a:avLst/>
+          </a:prstGeom>
+          <a:noFill/>
+        </p:spPr>
+        <p:txBody>
+          <a:bodyPr wrap="square" anchor="t" lIns="0" rIns="0" tIns="0" bIns="0">
+            <a:spAutoFit/>
+          </a:bodyPr>
+          <a:lstStyle/>
+          <a:p>
+            <a:pPr algn="l">
+              <a:lnSpc>
+                <a:spcPct val="114000"/>
+              </a:lnSpc>
+              <a:spcAft>
+                <a:spcPts val="300"/>
+              </a:spcAft>
+            </a:pPr>
+            <a:r>
+              <a:rPr sz="1050" b="0" i="0">
+                <a:solidFill>
+                  <a:srgbClr val="3A4356"/>
+                </a:solidFill>
+                <a:latin typeface="Calibri"/>
+              </a:rPr>
+              <a:t>One commodity, 30 to 50 parts we have already bought, inside CAPEE, using our own time. It gives us the two numbers nobody can state today: how close the tool gets to a price we actually paid, and how much of the input it fills on its own.</a:t>
+            </a:r>
+          </a:p>
+        </p:txBody>
+      </p:sp>
+      <p:sp>
+        <p:nvSpPr>
+          <p:cNvPr id="51" name="Rounded Rectangle 50"/>
           <p:cNvSpPr/>
           <p:nvPr/>
         </p:nvSpPr>
         <p:spPr>
           <a:xfrm>
-            <a:off x="7269480" y="3986784"/>
-            <a:ext cx="4507992" cy="283464"/>
-          </a:xfrm>
-          <a:prstGeom prst="rect">
-            <a:avLst/>
+            <a:off x="411480" y="5925312"/>
+            <a:ext cx="11365992" cy="804672"/>
+          </a:xfrm>
+          <a:prstGeom prst="roundRect">
+            <a:avLst>
+              <a:gd name="adj" fmla="val 12000"/>
+            </a:avLst>
           </a:prstGeom>
           <a:solidFill>
-            <a:srgbClr val="FFFFFF"/>
+            <a:srgbClr val="FCF3E3"/>
           </a:solidFill>
-          <a:ln w="9525">
-            <a:solidFill>
-              <a:srgbClr val="DCE3EE"/>
-            </a:solidFill>
+          <a:ln>
+            <a:noFill/>
           </a:ln>
           <a:effectLst/>
         </p:spPr>
@@ -13012,14 +13525,58 @@
       </p:sp>
       <p:sp>
         <p:nvSpPr>
-          <p:cNvPr id="49" name="TextBox 48"/>
+          <p:cNvPr id="52" name="Rectangle 51"/>
+          <p:cNvSpPr/>
+          <p:nvPr/>
+        </p:nvSpPr>
+        <p:spPr>
+          <a:xfrm>
+            <a:off x="411480" y="5925312"/>
+            <a:ext cx="68580" cy="804672"/>
+          </a:xfrm>
+          <a:prstGeom prst="rect">
+            <a:avLst/>
+          </a:prstGeom>
+          <a:solidFill>
+            <a:srgbClr val="B7791F"/>
+          </a:solidFill>
+          <a:ln>
+            <a:noFill/>
+          </a:ln>
+          <a:effectLst/>
+        </p:spPr>
+        <p:style>
+          <a:lnRef idx="1">
+            <a:schemeClr val="accent1"/>
+          </a:lnRef>
+          <a:fillRef idx="3">
+            <a:schemeClr val="accent1"/>
+          </a:fillRef>
+          <a:effectRef idx="2">
+            <a:schemeClr val="accent1"/>
+          </a:effectRef>
+          <a:fontRef idx="minor">
+            <a:schemeClr val="lt1"/>
+          </a:fontRef>
+        </p:style>
+        <p:txBody>
+          <a:bodyPr rtlCol="0" anchor="ctr"/>
+          <a:lstStyle/>
+          <a:p>
+            <a:pPr algn="ctr"/>
+          </a:p>
+        </p:txBody>
+      </p:sp>
+      <p:sp>
+        <p:nvSpPr>
+          <p:cNvPr id="53" name="TextBox 52"/>
           <p:cNvSpPr txBox="1"/>
           <p:nvPr/>
         </p:nvSpPr>
         <p:spPr>
           <a:xfrm>
-            <a:off x="7351776" y="4050792"/>
-            <a:ext cx="4361688" cy="192024"/>
+            <a:off x="630936" y="6044184"/>
+            <a:ext cx="10954512" cy="256032"/>
           </a:xfrm>
           <a:prstGeom prst="rect">
             <a:avLst/>
@@ -13041,1391 +13598,27 @@
               </a:spcAft>
             </a:pPr>
             <a:r>
-              <a:rPr sz="1019" b="0" i="0">
-                <a:solidFill>
-                  <a:srgbClr val="3A4356"/>
+              <a:rPr sz="1200" b="1" i="0">
+                <a:solidFill>
+                  <a:srgbClr val="B7791F"/>
                 </a:solidFill>
                 <a:latin typeface="Calibri"/>
               </a:rPr>
-              <a:t>Our own records</a:t>
-            </a:r>
-          </a:p>
-        </p:txBody>
-      </p:sp>
-      <p:sp>
-        <p:nvSpPr>
-          <p:cNvPr id="50" name="Rectangle 49"/>
-          <p:cNvSpPr/>
-          <p:nvPr/>
-        </p:nvSpPr>
-        <p:spPr>
-          <a:xfrm>
-            <a:off x="411480" y="4270248"/>
-            <a:ext cx="457200" cy="283464"/>
-          </a:xfrm>
-          <a:prstGeom prst="rect">
-            <a:avLst/>
-          </a:prstGeom>
-          <a:solidFill>
-            <a:srgbClr val="F4F7FB"/>
-          </a:solidFill>
-          <a:ln w="9525">
-            <a:solidFill>
-              <a:srgbClr val="DCE3EE"/>
-            </a:solidFill>
-          </a:ln>
-          <a:effectLst/>
-        </p:spPr>
-        <p:style>
-          <a:lnRef idx="1">
-            <a:schemeClr val="accent1"/>
-          </a:lnRef>
-          <a:fillRef idx="3">
-            <a:schemeClr val="accent1"/>
-          </a:fillRef>
-          <a:effectRef idx="2">
-            <a:schemeClr val="accent1"/>
-          </a:effectRef>
-          <a:fontRef idx="minor">
-            <a:schemeClr val="lt1"/>
-          </a:fontRef>
-        </p:style>
-        <p:txBody>
-          <a:bodyPr rtlCol="0" anchor="ctr"/>
-          <a:lstStyle/>
-          <a:p>
-            <a:pPr algn="ctr"/>
-          </a:p>
-        </p:txBody>
-      </p:sp>
-      <p:sp>
-        <p:nvSpPr>
-          <p:cNvPr id="51" name="TextBox 50"/>
+              <a:t>Two things to be straight about</a:t>
+            </a:r>
+          </a:p>
+        </p:txBody>
+      </p:sp>
+      <p:sp>
+        <p:nvSpPr>
+          <p:cNvPr id="54" name="TextBox 53"/>
           <p:cNvSpPr txBox="1"/>
           <p:nvPr/>
         </p:nvSpPr>
         <p:spPr>
           <a:xfrm>
-            <a:off x="493776" y="4334256"/>
-            <a:ext cx="310896" cy="192024"/>
-          </a:xfrm>
-          <a:prstGeom prst="rect">
-            <a:avLst/>
-          </a:prstGeom>
-          <a:noFill/>
-        </p:spPr>
-        <p:txBody>
-          <a:bodyPr wrap="square" anchor="t" lIns="0" rIns="0" tIns="0" bIns="0">
-            <a:spAutoFit/>
-          </a:bodyPr>
-          <a:lstStyle/>
-          <a:p>
-            <a:pPr algn="l">
-              <a:lnSpc>
-                <a:spcPct val="100000"/>
-              </a:lnSpc>
-              <a:spcAft>
-                <a:spcPts val="400"/>
-              </a:spcAft>
-            </a:pPr>
-            <a:r>
-              <a:rPr sz="1019" b="1" i="0">
-                <a:solidFill>
-                  <a:srgbClr val="16325C"/>
-                </a:solidFill>
-                <a:latin typeface="Calibri"/>
-              </a:rPr>
-              <a:t>D</a:t>
-            </a:r>
-          </a:p>
-        </p:txBody>
-      </p:sp>
-      <p:sp>
-        <p:nvSpPr>
-          <p:cNvPr id="52" name="Rectangle 51"/>
-          <p:cNvSpPr/>
-          <p:nvPr/>
-        </p:nvSpPr>
-        <p:spPr>
-          <a:xfrm>
-            <a:off x="868680" y="4270248"/>
-            <a:ext cx="4846320" cy="283464"/>
-          </a:xfrm>
-          <a:prstGeom prst="rect">
-            <a:avLst/>
-          </a:prstGeom>
-          <a:solidFill>
-            <a:srgbClr val="F4F7FB"/>
-          </a:solidFill>
-          <a:ln w="9525">
-            <a:solidFill>
-              <a:srgbClr val="DCE3EE"/>
-            </a:solidFill>
-          </a:ln>
-          <a:effectLst/>
-        </p:spPr>
-        <p:style>
-          <a:lnRef idx="1">
-            <a:schemeClr val="accent1"/>
-          </a:lnRef>
-          <a:fillRef idx="3">
-            <a:schemeClr val="accent1"/>
-          </a:fillRef>
-          <a:effectRef idx="2">
-            <a:schemeClr val="accent1"/>
-          </a:effectRef>
-          <a:fontRef idx="minor">
-            <a:schemeClr val="lt1"/>
-          </a:fontRef>
-        </p:style>
-        <p:txBody>
-          <a:bodyPr rtlCol="0" anchor="ctr"/>
-          <a:lstStyle/>
-          <a:p>
-            <a:pPr algn="ctr"/>
-          </a:p>
-        </p:txBody>
-      </p:sp>
-      <p:sp>
-        <p:nvSpPr>
-          <p:cNvPr id="53" name="TextBox 52"/>
-          <p:cNvSpPr txBox="1"/>
-          <p:nvPr/>
-        </p:nvSpPr>
-        <p:spPr>
-          <a:xfrm>
-            <a:off x="950976" y="4334256"/>
-            <a:ext cx="4700016" cy="192024"/>
-          </a:xfrm>
-          <a:prstGeom prst="rect">
-            <a:avLst/>
-          </a:prstGeom>
-          <a:noFill/>
-        </p:spPr>
-        <p:txBody>
-          <a:bodyPr wrap="square" anchor="t" lIns="0" rIns="0" tIns="0" bIns="0">
-            <a:spAutoFit/>
-          </a:bodyPr>
-          <a:lstStyle/>
-          <a:p>
-            <a:pPr algn="l">
-              <a:lnSpc>
-                <a:spcPct val="100000"/>
-              </a:lnSpc>
-              <a:spcAft>
-                <a:spcPts val="400"/>
-              </a:spcAft>
-            </a:pPr>
-            <a:r>
-              <a:rPr sz="1019" b="0" i="0">
-                <a:solidFill>
-                  <a:srgbClr val="3A4356"/>
-                </a:solidFill>
-                <a:latin typeface="Calibri"/>
-              </a:rPr>
-              <a:t>Parts in a typical basket we never cost individually</a:t>
-            </a:r>
-          </a:p>
-        </p:txBody>
-      </p:sp>
-      <p:sp>
-        <p:nvSpPr>
-          <p:cNvPr id="54" name="Rectangle 53"/>
-          <p:cNvSpPr/>
-          <p:nvPr/>
-        </p:nvSpPr>
-        <p:spPr>
-          <a:xfrm>
-            <a:off x="5715000" y="4270248"/>
-            <a:ext cx="1554480" cy="283464"/>
-          </a:xfrm>
-          <a:prstGeom prst="rect">
-            <a:avLst/>
-          </a:prstGeom>
-          <a:solidFill>
-            <a:srgbClr val="F4F7FB"/>
-          </a:solidFill>
-          <a:ln w="9525">
-            <a:solidFill>
-              <a:srgbClr val="DCE3EE"/>
-            </a:solidFill>
-          </a:ln>
-          <a:effectLst/>
-        </p:spPr>
-        <p:style>
-          <a:lnRef idx="1">
-            <a:schemeClr val="accent1"/>
-          </a:lnRef>
-          <a:fillRef idx="3">
-            <a:schemeClr val="accent1"/>
-          </a:fillRef>
-          <a:effectRef idx="2">
-            <a:schemeClr val="accent1"/>
-          </a:effectRef>
-          <a:fontRef idx="minor">
-            <a:schemeClr val="lt1"/>
-          </a:fontRef>
-        </p:style>
-        <p:txBody>
-          <a:bodyPr rtlCol="0" anchor="ctr"/>
-          <a:lstStyle/>
-          <a:p>
-            <a:pPr algn="ctr"/>
-          </a:p>
-        </p:txBody>
-      </p:sp>
-      <p:sp>
-        <p:nvSpPr>
-          <p:cNvPr id="55" name="TextBox 54"/>
-          <p:cNvSpPr txBox="1"/>
-          <p:nvPr/>
-        </p:nvSpPr>
-        <p:spPr>
-          <a:xfrm>
-            <a:off x="5797296" y="4334256"/>
-            <a:ext cx="1408176" cy="192024"/>
-          </a:xfrm>
-          <a:prstGeom prst="rect">
-            <a:avLst/>
-          </a:prstGeom>
-          <a:noFill/>
-        </p:spPr>
-        <p:txBody>
-          <a:bodyPr wrap="square" anchor="t" lIns="0" rIns="0" tIns="0" bIns="0">
-            <a:spAutoFit/>
-          </a:bodyPr>
-          <a:lstStyle/>
-          <a:p>
-            <a:pPr algn="l">
-              <a:lnSpc>
-                <a:spcPct val="100000"/>
-              </a:lnSpc>
-              <a:spcAft>
-                <a:spcPts val="400"/>
-              </a:spcAft>
-            </a:pPr>
-            <a:r>
-              <a:rPr sz="1019" b="1" i="0">
-                <a:solidFill>
-                  <a:srgbClr val="1D6FB8"/>
-                </a:solidFill>
-                <a:latin typeface="Calibri"/>
-              </a:rPr>
-              <a:t>________</a:t>
-            </a:r>
-          </a:p>
-        </p:txBody>
-      </p:sp>
-      <p:sp>
-        <p:nvSpPr>
-          <p:cNvPr id="56" name="Rectangle 55"/>
-          <p:cNvSpPr/>
-          <p:nvPr/>
-        </p:nvSpPr>
-        <p:spPr>
-          <a:xfrm>
-            <a:off x="7269480" y="4270248"/>
-            <a:ext cx="4507992" cy="283464"/>
-          </a:xfrm>
-          <a:prstGeom prst="rect">
-            <a:avLst/>
-          </a:prstGeom>
-          <a:solidFill>
-            <a:srgbClr val="F4F7FB"/>
-          </a:solidFill>
-          <a:ln w="9525">
-            <a:solidFill>
-              <a:srgbClr val="DCE3EE"/>
-            </a:solidFill>
-          </a:ln>
-          <a:effectLst/>
-        </p:spPr>
-        <p:style>
-          <a:lnRef idx="1">
-            <a:schemeClr val="accent1"/>
-          </a:lnRef>
-          <a:fillRef idx="3">
-            <a:schemeClr val="accent1"/>
-          </a:fillRef>
-          <a:effectRef idx="2">
-            <a:schemeClr val="accent1"/>
-          </a:effectRef>
-          <a:fontRef idx="minor">
-            <a:schemeClr val="lt1"/>
-          </a:fontRef>
-        </p:style>
-        <p:txBody>
-          <a:bodyPr rtlCol="0" anchor="ctr"/>
-          <a:lstStyle/>
-          <a:p>
-            <a:pPr algn="ctr"/>
-          </a:p>
-        </p:txBody>
-      </p:sp>
-      <p:sp>
-        <p:nvSpPr>
-          <p:cNvPr id="57" name="TextBox 56"/>
-          <p:cNvSpPr txBox="1"/>
-          <p:nvPr/>
-        </p:nvSpPr>
-        <p:spPr>
-          <a:xfrm>
-            <a:off x="7351776" y="4334256"/>
-            <a:ext cx="4361688" cy="192024"/>
-          </a:xfrm>
-          <a:prstGeom prst="rect">
-            <a:avLst/>
-          </a:prstGeom>
-          <a:noFill/>
-        </p:spPr>
-        <p:txBody>
-          <a:bodyPr wrap="square" anchor="t" lIns="0" rIns="0" tIns="0" bIns="0">
-            <a:spAutoFit/>
-          </a:bodyPr>
-          <a:lstStyle/>
-          <a:p>
-            <a:pPr algn="l">
-              <a:lnSpc>
-                <a:spcPct val="100000"/>
-              </a:lnSpc>
-              <a:spcAft>
-                <a:spcPts val="400"/>
-              </a:spcAft>
-            </a:pPr>
-            <a:r>
-              <a:rPr sz="1019" b="0" i="0">
-                <a:solidFill>
-                  <a:srgbClr val="3A4356"/>
-                </a:solidFill>
-                <a:latin typeface="Calibri"/>
-              </a:rPr>
-              <a:t>Programme data. This is the ground Option 2 covers</a:t>
-            </a:r>
-          </a:p>
-        </p:txBody>
-      </p:sp>
-      <p:sp>
-        <p:nvSpPr>
-          <p:cNvPr id="58" name="Rectangle 57"/>
-          <p:cNvSpPr/>
-          <p:nvPr/>
-        </p:nvSpPr>
-        <p:spPr>
-          <a:xfrm>
-            <a:off x="411480" y="4553712"/>
-            <a:ext cx="457200" cy="283464"/>
-          </a:xfrm>
-          <a:prstGeom prst="rect">
-            <a:avLst/>
-          </a:prstGeom>
-          <a:solidFill>
-            <a:srgbClr val="FFFFFF"/>
-          </a:solidFill>
-          <a:ln w="9525">
-            <a:solidFill>
-              <a:srgbClr val="DCE3EE"/>
-            </a:solidFill>
-          </a:ln>
-          <a:effectLst/>
-        </p:spPr>
-        <p:style>
-          <a:lnRef idx="1">
-            <a:schemeClr val="accent1"/>
-          </a:lnRef>
-          <a:fillRef idx="3">
-            <a:schemeClr val="accent1"/>
-          </a:fillRef>
-          <a:effectRef idx="2">
-            <a:schemeClr val="accent1"/>
-          </a:effectRef>
-          <a:fontRef idx="minor">
-            <a:schemeClr val="lt1"/>
-          </a:fontRef>
-        </p:style>
-        <p:txBody>
-          <a:bodyPr rtlCol="0" anchor="ctr"/>
-          <a:lstStyle/>
-          <a:p>
-            <a:pPr algn="ctr"/>
-          </a:p>
-        </p:txBody>
-      </p:sp>
-      <p:sp>
-        <p:nvSpPr>
-          <p:cNvPr id="59" name="TextBox 58"/>
-          <p:cNvSpPr txBox="1"/>
-          <p:nvPr/>
-        </p:nvSpPr>
-        <p:spPr>
-          <a:xfrm>
-            <a:off x="493776" y="4617720"/>
-            <a:ext cx="310896" cy="192024"/>
-          </a:xfrm>
-          <a:prstGeom prst="rect">
-            <a:avLst/>
-          </a:prstGeom>
-          <a:noFill/>
-        </p:spPr>
-        <p:txBody>
-          <a:bodyPr wrap="square" anchor="t" lIns="0" rIns="0" tIns="0" bIns="0">
-            <a:spAutoFit/>
-          </a:bodyPr>
-          <a:lstStyle/>
-          <a:p>
-            <a:pPr algn="l">
-              <a:lnSpc>
-                <a:spcPct val="100000"/>
-              </a:lnSpc>
-              <a:spcAft>
-                <a:spcPts val="400"/>
-              </a:spcAft>
-            </a:pPr>
-            <a:r>
-              <a:rPr sz="1019" b="1" i="0">
-                <a:solidFill>
-                  <a:srgbClr val="16325C"/>
-                </a:solidFill>
-                <a:latin typeface="Calibri"/>
-              </a:rPr>
-              <a:t>E</a:t>
-            </a:r>
-          </a:p>
-        </p:txBody>
-      </p:sp>
-      <p:sp>
-        <p:nvSpPr>
-          <p:cNvPr id="60" name="Rectangle 59"/>
-          <p:cNvSpPr/>
-          <p:nvPr/>
-        </p:nvSpPr>
-        <p:spPr>
-          <a:xfrm>
-            <a:off x="868680" y="4553712"/>
-            <a:ext cx="4846320" cy="283464"/>
-          </a:xfrm>
-          <a:prstGeom prst="rect">
-            <a:avLst/>
-          </a:prstGeom>
-          <a:solidFill>
-            <a:srgbClr val="FFFFFF"/>
-          </a:solidFill>
-          <a:ln w="9525">
-            <a:solidFill>
-              <a:srgbClr val="DCE3EE"/>
-            </a:solidFill>
-          </a:ln>
-          <a:effectLst/>
-        </p:spPr>
-        <p:style>
-          <a:lnRef idx="1">
-            <a:schemeClr val="accent1"/>
-          </a:lnRef>
-          <a:fillRef idx="3">
-            <a:schemeClr val="accent1"/>
-          </a:fillRef>
-          <a:effectRef idx="2">
-            <a:schemeClr val="accent1"/>
-          </a:effectRef>
-          <a:fontRef idx="minor">
-            <a:schemeClr val="lt1"/>
-          </a:fontRef>
-        </p:style>
-        <p:txBody>
-          <a:bodyPr rtlCol="0" anchor="ctr"/>
-          <a:lstStyle/>
-          <a:p>
-            <a:pPr algn="ctr"/>
-          </a:p>
-        </p:txBody>
-      </p:sp>
-      <p:sp>
-        <p:nvSpPr>
-          <p:cNvPr id="61" name="TextBox 60"/>
-          <p:cNvSpPr txBox="1"/>
-          <p:nvPr/>
-        </p:nvSpPr>
-        <p:spPr>
-          <a:xfrm>
-            <a:off x="950976" y="4617720"/>
-            <a:ext cx="4700016" cy="192024"/>
-          </a:xfrm>
-          <a:prstGeom prst="rect">
-            <a:avLst/>
-          </a:prstGeom>
-          <a:noFill/>
-        </p:spPr>
-        <p:txBody>
-          <a:bodyPr wrap="square" anchor="t" lIns="0" rIns="0" tIns="0" bIns="0">
-            <a:spAutoFit/>
-          </a:bodyPr>
-          <a:lstStyle/>
-          <a:p>
-            <a:pPr algn="l">
-              <a:lnSpc>
-                <a:spcPct val="100000"/>
-              </a:lnSpc>
-              <a:spcAft>
-                <a:spcPts val="400"/>
-              </a:spcAft>
-            </a:pPr>
-            <a:r>
-              <a:rPr sz="1019" b="0" i="0">
-                <a:solidFill>
-                  <a:srgbClr val="3A4356"/>
-                </a:solidFill>
-                <a:latin typeface="Calibri"/>
-              </a:rPr>
-              <a:t>Share of those values the software fills on its own</a:t>
-            </a:r>
-          </a:p>
-        </p:txBody>
-      </p:sp>
-      <p:sp>
-        <p:nvSpPr>
-          <p:cNvPr id="62" name="Rectangle 61"/>
-          <p:cNvSpPr/>
-          <p:nvPr/>
-        </p:nvSpPr>
-        <p:spPr>
-          <a:xfrm>
-            <a:off x="5715000" y="4553712"/>
-            <a:ext cx="1554480" cy="283464"/>
-          </a:xfrm>
-          <a:prstGeom prst="rect">
-            <a:avLst/>
-          </a:prstGeom>
-          <a:solidFill>
-            <a:srgbClr val="FFFFFF"/>
-          </a:solidFill>
-          <a:ln w="9525">
-            <a:solidFill>
-              <a:srgbClr val="DCE3EE"/>
-            </a:solidFill>
-          </a:ln>
-          <a:effectLst/>
-        </p:spPr>
-        <p:style>
-          <a:lnRef idx="1">
-            <a:schemeClr val="accent1"/>
-          </a:lnRef>
-          <a:fillRef idx="3">
-            <a:schemeClr val="accent1"/>
-          </a:fillRef>
-          <a:effectRef idx="2">
-            <a:schemeClr val="accent1"/>
-          </a:effectRef>
-          <a:fontRef idx="minor">
-            <a:schemeClr val="lt1"/>
-          </a:fontRef>
-        </p:style>
-        <p:txBody>
-          <a:bodyPr rtlCol="0" anchor="ctr"/>
-          <a:lstStyle/>
-          <a:p>
-            <a:pPr algn="ctr"/>
-          </a:p>
-        </p:txBody>
-      </p:sp>
-      <p:sp>
-        <p:nvSpPr>
-          <p:cNvPr id="63" name="TextBox 62"/>
-          <p:cNvSpPr txBox="1"/>
-          <p:nvPr/>
-        </p:nvSpPr>
-        <p:spPr>
-          <a:xfrm>
-            <a:off x="5797296" y="4617720"/>
-            <a:ext cx="1408176" cy="192024"/>
-          </a:xfrm>
-          <a:prstGeom prst="rect">
-            <a:avLst/>
-          </a:prstGeom>
-          <a:noFill/>
-        </p:spPr>
-        <p:txBody>
-          <a:bodyPr wrap="square" anchor="t" lIns="0" rIns="0" tIns="0" bIns="0">
-            <a:spAutoFit/>
-          </a:bodyPr>
-          <a:lstStyle/>
-          <a:p>
-            <a:pPr algn="l">
-              <a:lnSpc>
-                <a:spcPct val="100000"/>
-              </a:lnSpc>
-              <a:spcAft>
-                <a:spcPts val="400"/>
-              </a:spcAft>
-            </a:pPr>
-            <a:r>
-              <a:rPr sz="1019" b="1" i="0">
-                <a:solidFill>
-                  <a:srgbClr val="2E8B57"/>
-                </a:solidFill>
-                <a:latin typeface="Calibri"/>
-              </a:rPr>
-              <a:t>________</a:t>
-            </a:r>
-          </a:p>
-        </p:txBody>
-      </p:sp>
-      <p:sp>
-        <p:nvSpPr>
-          <p:cNvPr id="64" name="Rectangle 63"/>
-          <p:cNvSpPr/>
-          <p:nvPr/>
-        </p:nvSpPr>
-        <p:spPr>
-          <a:xfrm>
-            <a:off x="7269480" y="4553712"/>
-            <a:ext cx="4507992" cy="283464"/>
-          </a:xfrm>
-          <a:prstGeom prst="rect">
-            <a:avLst/>
-          </a:prstGeom>
-          <a:solidFill>
-            <a:srgbClr val="FFFFFF"/>
-          </a:solidFill>
-          <a:ln w="9525">
-            <a:solidFill>
-              <a:srgbClr val="DCE3EE"/>
-            </a:solidFill>
-          </a:ln>
-          <a:effectLst/>
-        </p:spPr>
-        <p:style>
-          <a:lnRef idx="1">
-            <a:schemeClr val="accent1"/>
-          </a:lnRef>
-          <a:fillRef idx="3">
-            <a:schemeClr val="accent1"/>
-          </a:fillRef>
-          <a:effectRef idx="2">
-            <a:schemeClr val="accent1"/>
-          </a:effectRef>
-          <a:fontRef idx="minor">
-            <a:schemeClr val="lt1"/>
-          </a:fontRef>
-        </p:style>
-        <p:txBody>
-          <a:bodyPr rtlCol="0" anchor="ctr"/>
-          <a:lstStyle/>
-          <a:p>
-            <a:pPr algn="ctr"/>
-          </a:p>
-        </p:txBody>
-      </p:sp>
-      <p:sp>
-        <p:nvSpPr>
-          <p:cNvPr id="65" name="TextBox 64"/>
-          <p:cNvSpPr txBox="1"/>
-          <p:nvPr/>
-        </p:nvSpPr>
-        <p:spPr>
-          <a:xfrm>
-            <a:off x="7351776" y="4617720"/>
-            <a:ext cx="4361688" cy="192024"/>
-          </a:xfrm>
-          <a:prstGeom prst="rect">
-            <a:avLst/>
-          </a:prstGeom>
-          <a:noFill/>
-        </p:spPr>
-        <p:txBody>
-          <a:bodyPr wrap="square" anchor="t" lIns="0" rIns="0" tIns="0" bIns="0">
-            <a:spAutoFit/>
-          </a:bodyPr>
-          <a:lstStyle/>
-          <a:p>
-            <a:pPr algn="l">
-              <a:lnSpc>
-                <a:spcPct val="100000"/>
-              </a:lnSpc>
-              <a:spcAft>
-                <a:spcPts val="400"/>
-              </a:spcAft>
-            </a:pPr>
-            <a:r>
-              <a:rPr sz="1019" b="0" i="0">
-                <a:solidFill>
-                  <a:srgbClr val="3A4356"/>
-                </a:solidFill>
-                <a:latin typeface="Calibri"/>
-              </a:rPr>
-              <a:t>The trial measures this, per commodity</a:t>
-            </a:r>
-          </a:p>
-        </p:txBody>
-      </p:sp>
-      <p:sp>
-        <p:nvSpPr>
-          <p:cNvPr id="66" name="Rounded Rectangle 65"/>
-          <p:cNvSpPr/>
-          <p:nvPr/>
-        </p:nvSpPr>
-        <p:spPr>
-          <a:xfrm>
-            <a:off x="411480" y="4937760"/>
-            <a:ext cx="3712463" cy="731520"/>
-          </a:xfrm>
-          <a:prstGeom prst="roundRect">
-            <a:avLst>
-              <a:gd name="adj" fmla="val 12000"/>
-            </a:avLst>
-          </a:prstGeom>
-          <a:solidFill>
-            <a:srgbClr val="FFFFFF"/>
-          </a:solidFill>
-          <a:ln w="9525">
-            <a:solidFill>
-              <a:srgbClr val="DCE3EE"/>
-            </a:solidFill>
-          </a:ln>
-          <a:effectLst/>
-        </p:spPr>
-        <p:style>
-          <a:lnRef idx="1">
-            <a:schemeClr val="accent1"/>
-          </a:lnRef>
-          <a:fillRef idx="3">
-            <a:schemeClr val="accent1"/>
-          </a:fillRef>
-          <a:effectRef idx="2">
-            <a:schemeClr val="accent1"/>
-          </a:effectRef>
-          <a:fontRef idx="minor">
-            <a:schemeClr val="lt1"/>
-          </a:fontRef>
-        </p:style>
-        <p:txBody>
-          <a:bodyPr rtlCol="0" anchor="ctr"/>
-          <a:lstStyle/>
-          <a:p>
-            <a:pPr algn="ctr"/>
-          </a:p>
-        </p:txBody>
-      </p:sp>
-      <p:sp>
-        <p:nvSpPr>
-          <p:cNvPr id="67" name="Rectangle 66"/>
-          <p:cNvSpPr/>
-          <p:nvPr/>
-        </p:nvSpPr>
-        <p:spPr>
-          <a:xfrm>
-            <a:off x="411480" y="4937760"/>
-            <a:ext cx="3712463" cy="54864"/>
-          </a:xfrm>
-          <a:prstGeom prst="rect">
-            <a:avLst/>
-          </a:prstGeom>
-          <a:solidFill>
-            <a:srgbClr val="B03A2E"/>
-          </a:solidFill>
-          <a:ln>
-            <a:noFill/>
-          </a:ln>
-          <a:effectLst/>
-        </p:spPr>
-        <p:style>
-          <a:lnRef idx="1">
-            <a:schemeClr val="accent1"/>
-          </a:lnRef>
-          <a:fillRef idx="3">
-            <a:schemeClr val="accent1"/>
-          </a:fillRef>
-          <a:effectRef idx="2">
-            <a:schemeClr val="accent1"/>
-          </a:effectRef>
-          <a:fontRef idx="minor">
-            <a:schemeClr val="lt1"/>
-          </a:fontRef>
-        </p:style>
-        <p:txBody>
-          <a:bodyPr rtlCol="0" anchor="ctr"/>
-          <a:lstStyle/>
-          <a:p>
-            <a:pPr algn="ctr"/>
-          </a:p>
-        </p:txBody>
-      </p:sp>
-      <p:sp>
-        <p:nvSpPr>
-          <p:cNvPr id="68" name="TextBox 67"/>
-          <p:cNvSpPr txBox="1"/>
-          <p:nvPr/>
-        </p:nvSpPr>
-        <p:spPr>
-          <a:xfrm>
-            <a:off x="576072" y="5065776"/>
-            <a:ext cx="3383279" cy="237744"/>
-          </a:xfrm>
-          <a:prstGeom prst="rect">
-            <a:avLst/>
-          </a:prstGeom>
-          <a:noFill/>
-        </p:spPr>
-        <p:txBody>
-          <a:bodyPr wrap="square" anchor="t" lIns="0" rIns="0" tIns="0" bIns="0">
-            <a:spAutoFit/>
-          </a:bodyPr>
-          <a:lstStyle/>
-          <a:p>
-            <a:pPr algn="l">
-              <a:lnSpc>
-                <a:spcPct val="100000"/>
-              </a:lnSpc>
-              <a:spcAft>
-                <a:spcPts val="400"/>
-              </a:spcAft>
-            </a:pPr>
-            <a:r>
-              <a:rPr sz="1080" b="1" i="0">
-                <a:solidFill>
-                  <a:srgbClr val="16325C"/>
-                </a:solidFill>
-                <a:latin typeface="Calibri"/>
-              </a:rPr>
-              <a:t>Hours spent typing today</a:t>
-            </a:r>
-          </a:p>
-        </p:txBody>
-      </p:sp>
-      <p:sp>
-        <p:nvSpPr>
-          <p:cNvPr id="69" name="TextBox 68"/>
-          <p:cNvSpPr txBox="1"/>
-          <p:nvPr/>
-        </p:nvSpPr>
-        <p:spPr>
-          <a:xfrm>
-            <a:off x="576072" y="5321808"/>
-            <a:ext cx="3383279" cy="274320"/>
-          </a:xfrm>
-          <a:prstGeom prst="rect">
-            <a:avLst/>
-          </a:prstGeom>
-          <a:noFill/>
-        </p:spPr>
-        <p:txBody>
-          <a:bodyPr wrap="square" anchor="t" lIns="0" rIns="0" tIns="0" bIns="0">
-            <a:spAutoFit/>
-          </a:bodyPr>
-          <a:lstStyle/>
-          <a:p>
-            <a:pPr algn="l">
-              <a:lnSpc>
-                <a:spcPct val="100000"/>
-              </a:lnSpc>
-              <a:spcAft>
-                <a:spcPts val="400"/>
-              </a:spcAft>
-            </a:pPr>
-            <a:r>
-              <a:rPr sz="1350" b="1" i="0">
-                <a:solidFill>
-                  <a:srgbClr val="B03A2E"/>
-                </a:solidFill>
-                <a:latin typeface="Calibri"/>
-              </a:rPr>
-              <a:t>B × C ÷ 60</a:t>
-            </a:r>
-          </a:p>
-        </p:txBody>
-      </p:sp>
-      <p:sp>
-        <p:nvSpPr>
-          <p:cNvPr id="70" name="Rounded Rectangle 69"/>
-          <p:cNvSpPr/>
-          <p:nvPr/>
-        </p:nvSpPr>
-        <p:spPr>
-          <a:xfrm>
-            <a:off x="4238243" y="4937760"/>
-            <a:ext cx="3712463" cy="731520"/>
-          </a:xfrm>
-          <a:prstGeom prst="roundRect">
-            <a:avLst>
-              <a:gd name="adj" fmla="val 12000"/>
-            </a:avLst>
-          </a:prstGeom>
-          <a:solidFill>
-            <a:srgbClr val="FFFFFF"/>
-          </a:solidFill>
-          <a:ln w="9525">
-            <a:solidFill>
-              <a:srgbClr val="DCE3EE"/>
-            </a:solidFill>
-          </a:ln>
-          <a:effectLst/>
-        </p:spPr>
-        <p:style>
-          <a:lnRef idx="1">
-            <a:schemeClr val="accent1"/>
-          </a:lnRef>
-          <a:fillRef idx="3">
-            <a:schemeClr val="accent1"/>
-          </a:fillRef>
-          <a:effectRef idx="2">
-            <a:schemeClr val="accent1"/>
-          </a:effectRef>
-          <a:fontRef idx="minor">
-            <a:schemeClr val="lt1"/>
-          </a:fontRef>
-        </p:style>
-        <p:txBody>
-          <a:bodyPr rtlCol="0" anchor="ctr"/>
-          <a:lstStyle/>
-          <a:p>
-            <a:pPr algn="ctr"/>
-          </a:p>
-        </p:txBody>
-      </p:sp>
-      <p:sp>
-        <p:nvSpPr>
-          <p:cNvPr id="71" name="Rectangle 70"/>
-          <p:cNvSpPr/>
-          <p:nvPr/>
-        </p:nvSpPr>
-        <p:spPr>
-          <a:xfrm>
-            <a:off x="4238243" y="4937760"/>
-            <a:ext cx="3712463" cy="54864"/>
-          </a:xfrm>
-          <a:prstGeom prst="rect">
-            <a:avLst/>
-          </a:prstGeom>
-          <a:solidFill>
-            <a:srgbClr val="2E8B57"/>
-          </a:solidFill>
-          <a:ln>
-            <a:noFill/>
-          </a:ln>
-          <a:effectLst/>
-        </p:spPr>
-        <p:style>
-          <a:lnRef idx="1">
-            <a:schemeClr val="accent1"/>
-          </a:lnRef>
-          <a:fillRef idx="3">
-            <a:schemeClr val="accent1"/>
-          </a:fillRef>
-          <a:effectRef idx="2">
-            <a:schemeClr val="accent1"/>
-          </a:effectRef>
-          <a:fontRef idx="minor">
-            <a:schemeClr val="lt1"/>
-          </a:fontRef>
-        </p:style>
-        <p:txBody>
-          <a:bodyPr rtlCol="0" anchor="ctr"/>
-          <a:lstStyle/>
-          <a:p>
-            <a:pPr algn="ctr"/>
-          </a:p>
-        </p:txBody>
-      </p:sp>
-      <p:sp>
-        <p:nvSpPr>
-          <p:cNvPr id="72" name="TextBox 71"/>
-          <p:cNvSpPr txBox="1"/>
-          <p:nvPr/>
-        </p:nvSpPr>
-        <p:spPr>
-          <a:xfrm>
-            <a:off x="4402835" y="5065776"/>
-            <a:ext cx="3383279" cy="237744"/>
-          </a:xfrm>
-          <a:prstGeom prst="rect">
-            <a:avLst/>
-          </a:prstGeom>
-          <a:noFill/>
-        </p:spPr>
-        <p:txBody>
-          <a:bodyPr wrap="square" anchor="t" lIns="0" rIns="0" tIns="0" bIns="0">
-            <a:spAutoFit/>
-          </a:bodyPr>
-          <a:lstStyle/>
-          <a:p>
-            <a:pPr algn="l">
-              <a:lnSpc>
-                <a:spcPct val="100000"/>
-              </a:lnSpc>
-              <a:spcAft>
-                <a:spcPts val="400"/>
-              </a:spcAft>
-            </a:pPr>
-            <a:r>
-              <a:rPr sz="1080" b="1" i="0">
-                <a:solidFill>
-                  <a:srgbClr val="16325C"/>
-                </a:solidFill>
-                <a:latin typeface="Calibri"/>
-              </a:rPr>
-              <a:t>Hours freed a year</a:t>
-            </a:r>
-          </a:p>
-        </p:txBody>
-      </p:sp>
-      <p:sp>
-        <p:nvSpPr>
-          <p:cNvPr id="73" name="TextBox 72"/>
-          <p:cNvSpPr txBox="1"/>
-          <p:nvPr/>
-        </p:nvSpPr>
-        <p:spPr>
-          <a:xfrm>
-            <a:off x="4402835" y="5321808"/>
-            <a:ext cx="3383279" cy="274320"/>
-          </a:xfrm>
-          <a:prstGeom prst="rect">
-            <a:avLst/>
-          </a:prstGeom>
-          <a:noFill/>
-        </p:spPr>
-        <p:txBody>
-          <a:bodyPr wrap="square" anchor="t" lIns="0" rIns="0" tIns="0" bIns="0">
-            <a:spAutoFit/>
-          </a:bodyPr>
-          <a:lstStyle/>
-          <a:p>
-            <a:pPr algn="l">
-              <a:lnSpc>
-                <a:spcPct val="100000"/>
-              </a:lnSpc>
-              <a:spcAft>
-                <a:spcPts val="400"/>
-              </a:spcAft>
-            </a:pPr>
-            <a:r>
-              <a:rPr sz="1350" b="1" i="0">
-                <a:solidFill>
-                  <a:srgbClr val="2E8B57"/>
-                </a:solidFill>
-                <a:latin typeface="Calibri"/>
-              </a:rPr>
-              <a:t>B × E × C ÷ 60</a:t>
-            </a:r>
-          </a:p>
-        </p:txBody>
-      </p:sp>
-      <p:sp>
-        <p:nvSpPr>
-          <p:cNvPr id="74" name="Rounded Rectangle 73"/>
-          <p:cNvSpPr/>
-          <p:nvPr/>
-        </p:nvSpPr>
-        <p:spPr>
-          <a:xfrm>
-            <a:off x="8065006" y="4937760"/>
-            <a:ext cx="3712463" cy="731520"/>
-          </a:xfrm>
-          <a:prstGeom prst="roundRect">
-            <a:avLst>
-              <a:gd name="adj" fmla="val 12000"/>
-            </a:avLst>
-          </a:prstGeom>
-          <a:solidFill>
-            <a:srgbClr val="FFFFFF"/>
-          </a:solidFill>
-          <a:ln w="9525">
-            <a:solidFill>
-              <a:srgbClr val="DCE3EE"/>
-            </a:solidFill>
-          </a:ln>
-          <a:effectLst/>
-        </p:spPr>
-        <p:style>
-          <a:lnRef idx="1">
-            <a:schemeClr val="accent1"/>
-          </a:lnRef>
-          <a:fillRef idx="3">
-            <a:schemeClr val="accent1"/>
-          </a:fillRef>
-          <a:effectRef idx="2">
-            <a:schemeClr val="accent1"/>
-          </a:effectRef>
-          <a:fontRef idx="minor">
-            <a:schemeClr val="lt1"/>
-          </a:fontRef>
-        </p:style>
-        <p:txBody>
-          <a:bodyPr rtlCol="0" anchor="ctr"/>
-          <a:lstStyle/>
-          <a:p>
-            <a:pPr algn="ctr"/>
-          </a:p>
-        </p:txBody>
-      </p:sp>
-      <p:sp>
-        <p:nvSpPr>
-          <p:cNvPr id="75" name="Rectangle 74"/>
-          <p:cNvSpPr/>
-          <p:nvPr/>
-        </p:nvSpPr>
-        <p:spPr>
-          <a:xfrm>
-            <a:off x="8065006" y="4937760"/>
-            <a:ext cx="3712463" cy="54864"/>
-          </a:xfrm>
-          <a:prstGeom prst="rect">
-            <a:avLst/>
-          </a:prstGeom>
-          <a:solidFill>
-            <a:srgbClr val="1D6FB8"/>
-          </a:solidFill>
-          <a:ln>
-            <a:noFill/>
-          </a:ln>
-          <a:effectLst/>
-        </p:spPr>
-        <p:style>
-          <a:lnRef idx="1">
-            <a:schemeClr val="accent1"/>
-          </a:lnRef>
-          <a:fillRef idx="3">
-            <a:schemeClr val="accent1"/>
-          </a:fillRef>
-          <a:effectRef idx="2">
-            <a:schemeClr val="accent1"/>
-          </a:effectRef>
-          <a:fontRef idx="minor">
-            <a:schemeClr val="lt1"/>
-          </a:fontRef>
-        </p:style>
-        <p:txBody>
-          <a:bodyPr rtlCol="0" anchor="ctr"/>
-          <a:lstStyle/>
-          <a:p>
-            <a:pPr algn="ctr"/>
-          </a:p>
-        </p:txBody>
-      </p:sp>
-      <p:sp>
-        <p:nvSpPr>
-          <p:cNvPr id="76" name="TextBox 75"/>
-          <p:cNvSpPr txBox="1"/>
-          <p:nvPr/>
-        </p:nvSpPr>
-        <p:spPr>
-          <a:xfrm>
-            <a:off x="8229598" y="5065776"/>
-            <a:ext cx="3383279" cy="237744"/>
-          </a:xfrm>
-          <a:prstGeom prst="rect">
-            <a:avLst/>
-          </a:prstGeom>
-          <a:noFill/>
-        </p:spPr>
-        <p:txBody>
-          <a:bodyPr wrap="square" anchor="t" lIns="0" rIns="0" tIns="0" bIns="0">
-            <a:spAutoFit/>
-          </a:bodyPr>
-          <a:lstStyle/>
-          <a:p>
-            <a:pPr algn="l">
-              <a:lnSpc>
-                <a:spcPct val="100000"/>
-              </a:lnSpc>
-              <a:spcAft>
-                <a:spcPts val="400"/>
-              </a:spcAft>
-            </a:pPr>
-            <a:r>
-              <a:rPr sz="1080" b="1" i="0">
-                <a:solidFill>
-                  <a:srgbClr val="16325C"/>
-                </a:solidFill>
-                <a:latin typeface="Calibri"/>
-              </a:rPr>
-              <a:t>Extra parts that time would cost</a:t>
-            </a:r>
-          </a:p>
-        </p:txBody>
-      </p:sp>
-      <p:sp>
-        <p:nvSpPr>
-          <p:cNvPr id="77" name="TextBox 76"/>
-          <p:cNvSpPr txBox="1"/>
-          <p:nvPr/>
-        </p:nvSpPr>
-        <p:spPr>
-          <a:xfrm>
-            <a:off x="8229598" y="5321808"/>
-            <a:ext cx="3383279" cy="274320"/>
-          </a:xfrm>
-          <a:prstGeom prst="rect">
-            <a:avLst/>
-          </a:prstGeom>
-          <a:noFill/>
-        </p:spPr>
-        <p:txBody>
-          <a:bodyPr wrap="square" anchor="t" lIns="0" rIns="0" tIns="0" bIns="0">
-            <a:spAutoFit/>
-          </a:bodyPr>
-          <a:lstStyle/>
-          <a:p>
-            <a:pPr algn="l">
-              <a:lnSpc>
-                <a:spcPct val="100000"/>
-              </a:lnSpc>
-              <a:spcAft>
-                <a:spcPts val="400"/>
-              </a:spcAft>
-            </a:pPr>
-            <a:r>
-              <a:rPr sz="1350" b="1" i="0">
-                <a:solidFill>
-                  <a:srgbClr val="1D6FB8"/>
-                </a:solidFill>
-                <a:latin typeface="Calibri"/>
-              </a:rPr>
-              <a:t>B × E × C ÷ A</a:t>
-            </a:r>
-          </a:p>
-        </p:txBody>
-      </p:sp>
-      <p:sp>
-        <p:nvSpPr>
-          <p:cNvPr id="78" name="Rounded Rectangle 77"/>
-          <p:cNvSpPr/>
-          <p:nvPr/>
-        </p:nvSpPr>
-        <p:spPr>
-          <a:xfrm>
-            <a:off x="411480" y="5815584"/>
-            <a:ext cx="11365992" cy="822960"/>
-          </a:xfrm>
-          <a:prstGeom prst="roundRect">
-            <a:avLst>
-              <a:gd name="adj" fmla="val 12000"/>
-            </a:avLst>
-          </a:prstGeom>
-          <a:solidFill>
-            <a:srgbClr val="EAF6EF"/>
-          </a:solidFill>
-          <a:ln>
-            <a:noFill/>
-          </a:ln>
-          <a:effectLst/>
-        </p:spPr>
-        <p:style>
-          <a:lnRef idx="1">
-            <a:schemeClr val="accent1"/>
-          </a:lnRef>
-          <a:fillRef idx="3">
-            <a:schemeClr val="accent1"/>
-          </a:fillRef>
-          <a:effectRef idx="2">
-            <a:schemeClr val="accent1"/>
-          </a:effectRef>
-          <a:fontRef idx="minor">
-            <a:schemeClr val="lt1"/>
-          </a:fontRef>
-        </p:style>
-        <p:txBody>
-          <a:bodyPr rtlCol="0" anchor="ctr"/>
-          <a:lstStyle/>
-          <a:p>
-            <a:pPr algn="ctr"/>
-          </a:p>
-        </p:txBody>
-      </p:sp>
-      <p:sp>
-        <p:nvSpPr>
-          <p:cNvPr id="79" name="Rectangle 78"/>
-          <p:cNvSpPr/>
-          <p:nvPr/>
-        </p:nvSpPr>
-        <p:spPr>
-          <a:xfrm>
-            <a:off x="411480" y="5815584"/>
-            <a:ext cx="68580" cy="822960"/>
-          </a:xfrm>
-          <a:prstGeom prst="rect">
-            <a:avLst/>
-          </a:prstGeom>
-          <a:solidFill>
-            <a:srgbClr val="2E8B57"/>
-          </a:solidFill>
-          <a:ln>
-            <a:noFill/>
-          </a:ln>
-          <a:effectLst/>
-        </p:spPr>
-        <p:style>
-          <a:lnRef idx="1">
-            <a:schemeClr val="accent1"/>
-          </a:lnRef>
-          <a:fillRef idx="3">
-            <a:schemeClr val="accent1"/>
-          </a:fillRef>
-          <a:effectRef idx="2">
-            <a:schemeClr val="accent1"/>
-          </a:effectRef>
-          <a:fontRef idx="minor">
-            <a:schemeClr val="lt1"/>
-          </a:fontRef>
-        </p:style>
-        <p:txBody>
-          <a:bodyPr rtlCol="0" anchor="ctr"/>
-          <a:lstStyle/>
-          <a:p>
-            <a:pPr algn="ctr"/>
-          </a:p>
-        </p:txBody>
-      </p:sp>
-      <p:sp>
-        <p:nvSpPr>
-          <p:cNvPr id="80" name="TextBox 79"/>
-          <p:cNvSpPr txBox="1"/>
-          <p:nvPr/>
-        </p:nvSpPr>
-        <p:spPr>
-          <a:xfrm>
-            <a:off x="630936" y="5934456"/>
-            <a:ext cx="10954512" cy="256032"/>
-          </a:xfrm>
-          <a:prstGeom prst="rect">
-            <a:avLst/>
-          </a:prstGeom>
-          <a:noFill/>
-        </p:spPr>
-        <p:txBody>
-          <a:bodyPr wrap="square" anchor="t" lIns="0" rIns="0" tIns="0" bIns="0">
-            <a:spAutoFit/>
-          </a:bodyPr>
-          <a:lstStyle/>
-          <a:p>
-            <a:pPr algn="l">
-              <a:lnSpc>
-                <a:spcPct val="100000"/>
-              </a:lnSpc>
-              <a:spcAft>
-                <a:spcPts val="400"/>
-              </a:spcAft>
-            </a:pPr>
-            <a:r>
-              <a:rPr sz="1200" b="1" i="0">
-                <a:solidFill>
-                  <a:srgbClr val="2E8B57"/>
-                </a:solidFill>
-                <a:latin typeface="Calibri"/>
-              </a:rPr>
-              <a:t>What we are asking for today: approve Option 1 as a trial, and start the AI approval for Option 2</a:t>
-            </a:r>
-          </a:p>
-        </p:txBody>
-      </p:sp>
-      <p:sp>
-        <p:nvSpPr>
-          <p:cNvPr id="81" name="TextBox 80"/>
-          <p:cNvSpPr txBox="1"/>
-          <p:nvPr/>
-        </p:nvSpPr>
-        <p:spPr>
-          <a:xfrm>
-            <a:off x="630936" y="6217920"/>
-            <a:ext cx="10954512" cy="320040"/>
+            <a:off x="630936" y="6327648"/>
+            <a:ext cx="10954512" cy="301752"/>
           </a:xfrm>
           <a:prstGeom prst="rect">
             <a:avLst/>
@@ -14453,7 +13646,7 @@
                 </a:solidFill>
                 <a:latin typeface="Calibri"/>
               </a:rPr>
-              <a:t>One commodity, 30 to 50 parts we have already bought, inside CAPEE, using our own time. It gives us the two numbers nobody can state today: how close the tool gets to a price we actually paid, and how much of the input it fills on its own.</a:t>
+              <a:t>Everything on the last slide works today one part at a time. Making it run over a whole basket unattended is real work, not a switch. And we have never checked the tool against a price JLR has actually paid — which is exactly what the Option 1 trial settles.</a:t>
             </a:r>
           </a:p>
         </p:txBody>

--- a/CostVision-CAPEE-Business-Case.pptx
+++ b/CostVision-CAPEE-Business-Case.pptx
@@ -12,6 +12,7 @@
     <p:sldId id="257" r:id="rId9"/>
     <p:sldId id="258" r:id="rId10"/>
     <p:sldId id="259" r:id="rId11"/>
+    <p:sldId id="260" r:id="rId12"/>
   </p:sldIdLst>
   <p:sldSz cx="12191695" cy="6858000"/>
   <p:notesSz cx="6858000" cy="9144000"/>
@@ -718,7 +719,77 @@
           <a:lstStyle/>
           <a:p>
             <a:r>
-              <a:t>Last slide, and it is two things: what changes for the business, and what I want from you. Read the table down the right-hand column. Today we cost the parts we have hours for; with this, every part in the basket gets a proper cost. Today a basket takes days of engineer time; with this it is one run, once we have the data together — and I want to be clear that gathering the part list, the models and our own rate data is the real work, not the computing. The third row is the one I would put to the purchasing side: today we take our estimate to a supplier, and with this we take the build-up, plus where their price differs from it and what to ask them about it. And the last row is what it does for the engineers. They stop typing values in and spend the time answering the questions only a person can answer, and acting on what the tool finds. The two cards are what each option needs, and the difference between them is the reason for doing them in this order. Option one needs a server, a way into CAPEE, and some parts where we know what we paid. Option two needs all of that plus the AI approval, our rate book, and a few things built around the engine. The green strip is the ask and it is deliberately small: one commodity, thirty to fifty parts we have already bought, our own time. In parallel I would start the AI approval, because that is the long pole on Option two and there is no reason to wait for the trial to finish before beginning it. The amber box is me being straight with you twice. Everything I showed you on the last slide works today, but it works one part at a time — making it run unattended over a basket is real work. And we have still never checked this against a price we have actually paid. That is exactly what the trial is for.</a:t>
+              <a:t>This is the answer to what we get for it, and I have written it in kind rather than in pounds, for the reason I gave on the first slide: we have never timed this job and never checked the tool against a price we paid, so a pound figure from me would be a guess. Take the left column first. Option one turns the job from typing into checking, because the values come off the model. It gives the same answer every time, so a part costed by one engineer and a part costed by another are comparable, which matters when we put them in front of a supplier. The time that gets freed does not disappear — it goes back into costing more of the basket with the team we already have. Nobody learns a new tool, because CAPEE does not change. And the last one is the practical point for this room: there is no AI in Option one, so it does not wait on an AI approval. We can start it. Now the right column, and these are different in kind rather than bigger. Every part in a basket gets a proper cost instead of a sample scaled up. A basket that takes days of engineer time becomes one run, and I want to be honest that the real work then becomes gathering the part list, the models and our own rate data — the costing stops being the bottleneck. We stop taking an estimate to a supplier and start taking the build-up, plus where their price differs from ours and what to ask them about it. There is work we simply cannot do today: costing electronics from a photograph of the board, and turning an RFQ pack into costed, ranked lines. And design-to-cost stops being a list of suggestions and becomes a decision, because each change has a number against it. The green strip is the sequencing point. Option one's benefits arrive first and we keep them. Option two's depend on the accuracy figure that Option one produces, which is why these are an order rather than a choice.</a:t>
+            </a:r>
+          </a:p>
+        </p:txBody>
+      </p:sp>
+      <p:sp>
+        <p:nvSpPr>
+          <p:cNvPr id="4" name="Slide Number Placeholder 3"/>
+          <p:cNvSpPr>
+            <a:spLocks noGrp="1"/>
+          </p:cNvSpPr>
+          <p:nvPr>
+            <p:ph type="sldNum" idx="5" sz="quarter"/>
+          </p:nvPr>
+        </p:nvSpPr>
+        <p:spPr/>
+      </p:sp>
+    </p:spTree>
+  </p:cSld>
+  <p:clrMapOvr>
+    <a:masterClrMapping/>
+  </p:clrMapOvr>
+</p:notes>
+</file>
+
+<file path=ppt/notesSlides/notesSlide5.xml><?xml version="1.0" encoding="utf-8"?>
+<p:notes xmlns:a="http://schemas.openxmlformats.org/drawingml/2006/main" xmlns:p="http://schemas.openxmlformats.org/presentationml/2006/main" xmlns:r="http://schemas.openxmlformats.org/officeDocument/2006/relationships">
+  <p:cSld>
+    <p:spTree>
+      <p:nvGrpSpPr>
+        <p:cNvPr id="1" name=""/>
+        <p:cNvGrpSpPr/>
+        <p:nvPr/>
+      </p:nvGrpSpPr>
+      <p:grpSpPr>
+        <a:xfrm>
+          <a:off x="0" y="0"/>
+          <a:ext cx="0" cy="0"/>
+          <a:chOff x="0" y="0"/>
+          <a:chExt cx="0" cy="0"/>
+        </a:xfrm>
+      </p:grpSpPr>
+      <p:sp>
+        <p:nvSpPr>
+          <p:cNvPr id="2" name="Slide Image Placeholder 1"/>
+          <p:cNvSpPr>
+            <a:spLocks noGrp="1"/>
+          </p:cNvSpPr>
+          <p:nvPr>
+            <p:ph type="sldImg" idx="2"/>
+          </p:nvPr>
+        </p:nvSpPr>
+        <p:spPr/>
+      </p:sp>
+      <p:sp>
+        <p:nvSpPr>
+          <p:cNvPr id="3" name="Notes Placeholder 2"/>
+          <p:cNvSpPr>
+            <a:spLocks noGrp="1"/>
+          </p:cNvSpPr>
+          <p:nvPr>
+            <p:ph type="body" idx="3" sz="quarter"/>
+          </p:nvPr>
+        </p:nvSpPr>
+        <p:spPr/>
+        <p:txBody>
+          <a:bodyPr/>
+          <a:lstStyle/>
+          <a:p>
+            <a:r>
+              <a:t>Last slide, and it is two things: what changes for the business, and what I want from you. Read the table down the right-hand column. Today we cost the parts we have hours for; with this, every part in the basket gets a proper cost. Today a basket takes days of engineer time; with this it is one run, once we have the data together — and I want to be clear that gathering the part list, the models and our own rate data is the real work, not the computing. The third row is the one I would put to the purchasing side: today we take our estimate to a supplier, and with this we take the build-up, plus where their price differs from it and what to ask them about it. And the last row is what it does for the engineers. They stop typing values in and spend the time answering the questions only a person can answer, and acting on what the tool finds. The two cards are what each option needs, and the difference between them is the reason for doing them in this order. Option one needs a server, a way into CAPEE, and some parts where we know what we paid. Option two needs all of that plus the AI approval, our rate book, and a few things built around the engine. The green strip is the ask and it is deliberately small: one commodity, thirty to fifty parts we have already bought, our own time. In parallel I would start the AI approval, because that is the long pole on Option two and there is no reason to wait for the trial to finish before beginning it. The amber box is me being straight with you twice. The six capabilities I showed you work today, but they work one part at a time — making it run unattended over a basket is real work. And we have still never checked this against a price we have actually paid. That is exactly what the trial is for.</a:t>
             </a:r>
           </a:p>
         </p:txBody>
@@ -11523,7 +11594,7 @@
                 </a:solidFill>
                 <a:latin typeface="Calibri"/>
               </a:rPr>
-              <a:t>THE DECISION</a:t>
+              <a:t>THE BENEFITS</a:t>
             </a:r>
           </a:p>
         </p:txBody>
@@ -11565,65 +11636,21 @@
                 </a:solidFill>
                 <a:latin typeface="Cambria"/>
               </a:rPr>
-              <a:t>What changes, and what we are asking for</a:t>
-            </a:r>
-          </a:p>
-        </p:txBody>
-      </p:sp>
-      <p:sp>
-        <p:nvSpPr>
-          <p:cNvPr id="9" name="Rectangle 8"/>
-          <p:cNvSpPr/>
-          <p:nvPr/>
-        </p:nvSpPr>
-        <p:spPr>
-          <a:xfrm>
-            <a:off x="411480" y="1600200"/>
-            <a:ext cx="3776472" cy="329184"/>
-          </a:xfrm>
-          <a:prstGeom prst="rect">
-            <a:avLst/>
-          </a:prstGeom>
-          <a:solidFill>
-            <a:srgbClr val="16325C"/>
-          </a:solidFill>
-          <a:ln>
-            <a:noFill/>
-          </a:ln>
-          <a:effectLst/>
-        </p:spPr>
-        <p:style>
-          <a:lnRef idx="1">
-            <a:schemeClr val="accent1"/>
-          </a:lnRef>
-          <a:fillRef idx="3">
-            <a:schemeClr val="accent1"/>
-          </a:fillRef>
-          <a:effectRef idx="2">
-            <a:schemeClr val="accent1"/>
-          </a:effectRef>
-          <a:fontRef idx="minor">
-            <a:schemeClr val="lt1"/>
-          </a:fontRef>
-        </p:style>
-        <p:txBody>
-          <a:bodyPr rtlCol="0" anchor="ctr"/>
-          <a:lstStyle/>
-          <a:p>
-            <a:pPr algn="ctr"/>
-          </a:p>
-        </p:txBody>
-      </p:sp>
-      <p:sp>
-        <p:nvSpPr>
-          <p:cNvPr id="10" name="TextBox 9"/>
+              <a:t>What we get from each</a:t>
+            </a:r>
+          </a:p>
+        </p:txBody>
+      </p:sp>
+      <p:sp>
+        <p:nvSpPr>
+          <p:cNvPr id="9" name="TextBox 8"/>
           <p:cNvSpPr txBox="1"/>
           <p:nvPr/>
         </p:nvSpPr>
         <p:spPr>
           <a:xfrm>
-            <a:off x="493776" y="1682496"/>
-            <a:ext cx="3630168" cy="219456"/>
+            <a:off x="411480" y="1517904"/>
+            <a:ext cx="11338560" cy="274320"/>
           </a:xfrm>
           <a:prstGeom prst="rect">
             <a:avLst/>
@@ -11644,194 +11671,33 @@
                 <a:spcPts val="400"/>
               </a:spcAft>
             </a:pPr>
-          </a:p>
-        </p:txBody>
-      </p:sp>
-      <p:sp>
-        <p:nvSpPr>
-          <p:cNvPr id="11" name="Rectangle 10"/>
-          <p:cNvSpPr/>
-          <p:nvPr/>
-        </p:nvSpPr>
-        <p:spPr>
-          <a:xfrm>
-            <a:off x="4187952" y="1600200"/>
-            <a:ext cx="3794760" cy="329184"/>
-          </a:xfrm>
-          <a:prstGeom prst="rect">
-            <a:avLst/>
-          </a:prstGeom>
-          <a:solidFill>
-            <a:srgbClr val="16325C"/>
-          </a:solidFill>
-          <a:ln>
-            <a:noFill/>
-          </a:ln>
-          <a:effectLst/>
-        </p:spPr>
-        <p:style>
-          <a:lnRef idx="1">
-            <a:schemeClr val="accent1"/>
-          </a:lnRef>
-          <a:fillRef idx="3">
-            <a:schemeClr val="accent1"/>
-          </a:fillRef>
-          <a:effectRef idx="2">
-            <a:schemeClr val="accent1"/>
-          </a:effectRef>
-          <a:fontRef idx="minor">
-            <a:schemeClr val="lt1"/>
-          </a:fontRef>
-        </p:style>
-        <p:txBody>
-          <a:bodyPr rtlCol="0" anchor="ctr"/>
-          <a:lstStyle/>
-          <a:p>
-            <a:pPr algn="ctr"/>
-          </a:p>
-        </p:txBody>
-      </p:sp>
-      <p:sp>
-        <p:nvSpPr>
-          <p:cNvPr id="12" name="TextBox 11"/>
-          <p:cNvSpPr txBox="1"/>
-          <p:nvPr/>
-        </p:nvSpPr>
-        <p:spPr>
-          <a:xfrm>
-            <a:off x="4270248" y="1682496"/>
-            <a:ext cx="3648456" cy="219456"/>
-          </a:xfrm>
-          <a:prstGeom prst="rect">
-            <a:avLst/>
-          </a:prstGeom>
-          <a:noFill/>
-        </p:spPr>
-        <p:txBody>
-          <a:bodyPr wrap="square" anchor="t" lIns="0" rIns="0" tIns="0" bIns="0">
-            <a:spAutoFit/>
-          </a:bodyPr>
-          <a:lstStyle/>
-          <a:p>
-            <a:pPr algn="l">
-              <a:lnSpc>
-                <a:spcPct val="100000"/>
-              </a:lnSpc>
-              <a:spcAft>
-                <a:spcPts val="400"/>
-              </a:spcAft>
-            </a:pPr>
-            <a:r>
-              <a:rPr sz="950" b="1" i="0">
-                <a:solidFill>
-                  <a:srgbClr val="FFFFFF"/>
+            <a:r>
+              <a:rPr sz="1150" b="0" i="0">
+                <a:solidFill>
+                  <a:srgbClr val="3A4356"/>
                 </a:solidFill>
                 <a:latin typeface="Calibri"/>
               </a:rPr>
-              <a:t>Today</a:t>
-            </a:r>
-          </a:p>
-        </p:txBody>
-      </p:sp>
-      <p:sp>
-        <p:nvSpPr>
-          <p:cNvPr id="13" name="Rectangle 12"/>
+              <a:t>Stated in kind, not in pounds. Slide 1 turns these into hours once we fill in our own four numbers.</a:t>
+            </a:r>
+          </a:p>
+        </p:txBody>
+      </p:sp>
+      <p:sp>
+        <p:nvSpPr>
+          <p:cNvPr id="10" name="Rounded Rectangle 9"/>
           <p:cNvSpPr/>
           <p:nvPr/>
         </p:nvSpPr>
         <p:spPr>
           <a:xfrm>
-            <a:off x="7982712" y="1600200"/>
-            <a:ext cx="3794760" cy="329184"/>
-          </a:xfrm>
-          <a:prstGeom prst="rect">
-            <a:avLst/>
-          </a:prstGeom>
-          <a:solidFill>
-            <a:srgbClr val="16325C"/>
-          </a:solidFill>
-          <a:ln>
-            <a:noFill/>
-          </a:ln>
-          <a:effectLst/>
-        </p:spPr>
-        <p:style>
-          <a:lnRef idx="1">
-            <a:schemeClr val="accent1"/>
-          </a:lnRef>
-          <a:fillRef idx="3">
-            <a:schemeClr val="accent1"/>
-          </a:fillRef>
-          <a:effectRef idx="2">
-            <a:schemeClr val="accent1"/>
-          </a:effectRef>
-          <a:fontRef idx="minor">
-            <a:schemeClr val="lt1"/>
-          </a:fontRef>
-        </p:style>
-        <p:txBody>
-          <a:bodyPr rtlCol="0" anchor="ctr"/>
-          <a:lstStyle/>
-          <a:p>
-            <a:pPr algn="ctr"/>
-          </a:p>
-        </p:txBody>
-      </p:sp>
-      <p:sp>
-        <p:nvSpPr>
-          <p:cNvPr id="14" name="TextBox 13"/>
-          <p:cNvSpPr txBox="1"/>
-          <p:nvPr/>
-        </p:nvSpPr>
-        <p:spPr>
-          <a:xfrm>
-            <a:off x="8065008" y="1682496"/>
-            <a:ext cx="3648456" cy="219456"/>
-          </a:xfrm>
-          <a:prstGeom prst="rect">
-            <a:avLst/>
-          </a:prstGeom>
-          <a:noFill/>
-        </p:spPr>
-        <p:txBody>
-          <a:bodyPr wrap="square" anchor="t" lIns="0" rIns="0" tIns="0" bIns="0">
-            <a:spAutoFit/>
-          </a:bodyPr>
-          <a:lstStyle/>
-          <a:p>
-            <a:pPr algn="l">
-              <a:lnSpc>
-                <a:spcPct val="100000"/>
-              </a:lnSpc>
-              <a:spcAft>
-                <a:spcPts val="400"/>
-              </a:spcAft>
-            </a:pPr>
-            <a:r>
-              <a:rPr sz="950" b="1" i="0">
-                <a:solidFill>
-                  <a:srgbClr val="FFFFFF"/>
-                </a:solidFill>
-                <a:latin typeface="Calibri"/>
-              </a:rPr>
-              <a:t>With Option 2</a:t>
-            </a:r>
-          </a:p>
-        </p:txBody>
-      </p:sp>
-      <p:sp>
-        <p:nvSpPr>
-          <p:cNvPr id="15" name="Rectangle 14"/>
-          <p:cNvSpPr/>
-          <p:nvPr/>
-        </p:nvSpPr>
-        <p:spPr>
-          <a:xfrm>
-            <a:off x="411480" y="1929384"/>
-            <a:ext cx="3776472" cy="420624"/>
-          </a:xfrm>
-          <a:prstGeom prst="rect">
-            <a:avLst/>
+            <a:off x="411480" y="1828800"/>
+            <a:ext cx="5577840" cy="3977639"/>
+          </a:xfrm>
+          <a:prstGeom prst="roundRect">
+            <a:avLst>
+              <a:gd name="adj" fmla="val 12000"/>
+            </a:avLst>
           </a:prstGeom>
           <a:solidFill>
             <a:srgbClr val="FFFFFF"/>
@@ -11867,14 +11733,58 @@
       </p:sp>
       <p:sp>
         <p:nvSpPr>
-          <p:cNvPr id="16" name="TextBox 15"/>
+          <p:cNvPr id="11" name="Rectangle 10"/>
+          <p:cNvSpPr/>
+          <p:nvPr/>
+        </p:nvSpPr>
+        <p:spPr>
+          <a:xfrm>
+            <a:off x="411480" y="1828800"/>
+            <a:ext cx="68580" cy="3977639"/>
+          </a:xfrm>
+          <a:prstGeom prst="rect">
+            <a:avLst/>
+          </a:prstGeom>
+          <a:solidFill>
+            <a:srgbClr val="1D6FB8"/>
+          </a:solidFill>
+          <a:ln>
+            <a:noFill/>
+          </a:ln>
+          <a:effectLst/>
+        </p:spPr>
+        <p:style>
+          <a:lnRef idx="1">
+            <a:schemeClr val="accent1"/>
+          </a:lnRef>
+          <a:fillRef idx="3">
+            <a:schemeClr val="accent1"/>
+          </a:fillRef>
+          <a:effectRef idx="2">
+            <a:schemeClr val="accent1"/>
+          </a:effectRef>
+          <a:fontRef idx="minor">
+            <a:schemeClr val="lt1"/>
+          </a:fontRef>
+        </p:style>
+        <p:txBody>
+          <a:bodyPr rtlCol="0" anchor="ctr"/>
+          <a:lstStyle/>
+          <a:p>
+            <a:pPr algn="ctr"/>
+          </a:p>
+        </p:txBody>
+      </p:sp>
+      <p:sp>
+        <p:nvSpPr>
+          <p:cNvPr id="12" name="TextBox 11"/>
           <p:cNvSpPr txBox="1"/>
           <p:nvPr/>
         </p:nvSpPr>
         <p:spPr>
           <a:xfrm>
-            <a:off x="493776" y="1993392"/>
-            <a:ext cx="3630168" cy="329184"/>
+            <a:off x="612648" y="1956816"/>
+            <a:ext cx="5212080" cy="274320"/>
           </a:xfrm>
           <a:prstGeom prst="rect">
             <a:avLst/>
@@ -11896,30 +11806,285 @@
               </a:spcAft>
             </a:pPr>
             <a:r>
-              <a:rPr sz="1040" b="0" i="0">
-                <a:solidFill>
-                  <a:srgbClr val="3A4356"/>
+              <a:rPr sz="1300" b="1" i="0">
+                <a:solidFill>
+                  <a:srgbClr val="16325C"/>
                 </a:solidFill>
                 <a:latin typeface="Calibri"/>
               </a:rPr>
-              <a:t>How many parts get a proper cost</a:t>
-            </a:r>
-          </a:p>
-        </p:txBody>
-      </p:sp>
-      <p:sp>
-        <p:nvSpPr>
-          <p:cNvPr id="17" name="Rectangle 16"/>
+              <a:t>OPTION 1 · automatic input into CAPEE</a:t>
+            </a:r>
+          </a:p>
+        </p:txBody>
+      </p:sp>
+      <p:sp>
+        <p:nvSpPr>
+          <p:cNvPr id="13" name="TextBox 12"/>
+          <p:cNvSpPr txBox="1"/>
+          <p:nvPr/>
+        </p:nvSpPr>
+        <p:spPr>
+          <a:xfrm>
+            <a:off x="612648" y="2267712"/>
+            <a:ext cx="5212080" cy="3428999"/>
+          </a:xfrm>
+          <a:prstGeom prst="rect">
+            <a:avLst/>
+          </a:prstGeom>
+          <a:noFill/>
+        </p:spPr>
+        <p:txBody>
+          <a:bodyPr wrap="square" anchor="t" lIns="0" rIns="0" tIns="0" bIns="0">
+            <a:spAutoFit/>
+          </a:bodyPr>
+          <a:lstStyle/>
+          <a:p>
+            <a:pPr algn="l">
+              <a:lnSpc>
+                <a:spcPct val="112000"/>
+              </a:lnSpc>
+              <a:spcAft>
+                <a:spcPts val="300"/>
+              </a:spcAft>
+            </a:pPr>
+            <a:r>
+              <a:rPr sz="1050" b="1" i="0">
+                <a:solidFill>
+                  <a:srgbClr val="1D6FB8"/>
+                </a:solidFill>
+                <a:latin typeface="Calibri"/>
+              </a:rPr>
+              <a:t>Checking instead of typing</a:t>
+            </a:r>
+          </a:p>
+          <a:p>
+            <a:pPr algn="l">
+              <a:lnSpc>
+                <a:spcPct val="112000"/>
+              </a:lnSpc>
+              <a:spcAft>
+                <a:spcPts val="300"/>
+              </a:spcAft>
+            </a:pPr>
+            <a:r>
+              <a:rPr sz="1050" b="0" i="0">
+                <a:solidFill>
+                  <a:srgbClr val="3A4356"/>
+                </a:solidFill>
+                <a:latin typeface="Calibri"/>
+              </a:rPr>
+              <a:t>The values come off the 3D model; the engineer confirms.</a:t>
+            </a:r>
+          </a:p>
+          <a:p>
+            <a:pPr algn="l">
+              <a:lnSpc>
+                <a:spcPct val="112000"/>
+              </a:lnSpc>
+              <a:spcAft>
+                <a:spcPts val="300"/>
+              </a:spcAft>
+            </a:pPr>
+          </a:p>
+          <a:p>
+            <a:pPr algn="l">
+              <a:lnSpc>
+                <a:spcPct val="112000"/>
+              </a:lnSpc>
+              <a:spcAft>
+                <a:spcPts val="300"/>
+              </a:spcAft>
+            </a:pPr>
+            <a:r>
+              <a:rPr sz="1050" b="1" i="0">
+                <a:solidFill>
+                  <a:srgbClr val="1D6FB8"/>
+                </a:solidFill>
+                <a:latin typeface="Calibri"/>
+              </a:rPr>
+              <a:t>The same answer every time</a:t>
+            </a:r>
+          </a:p>
+          <a:p>
+            <a:pPr algn="l">
+              <a:lnSpc>
+                <a:spcPct val="112000"/>
+              </a:lnSpc>
+              <a:spcAft>
+                <a:spcPts val="300"/>
+              </a:spcAft>
+            </a:pPr>
+            <a:r>
+              <a:rPr sz="1050" b="0" i="0">
+                <a:solidFill>
+                  <a:srgbClr val="3A4356"/>
+                </a:solidFill>
+                <a:latin typeface="Calibri"/>
+              </a:rPr>
+              <a:t>One method, applied identically, whoever costs the part.</a:t>
+            </a:r>
+          </a:p>
+          <a:p>
+            <a:pPr algn="l">
+              <a:lnSpc>
+                <a:spcPct val="112000"/>
+              </a:lnSpc>
+              <a:spcAft>
+                <a:spcPts val="300"/>
+              </a:spcAft>
+            </a:pPr>
+          </a:p>
+          <a:p>
+            <a:pPr algn="l">
+              <a:lnSpc>
+                <a:spcPct val="112000"/>
+              </a:lnSpc>
+              <a:spcAft>
+                <a:spcPts val="300"/>
+              </a:spcAft>
+            </a:pPr>
+            <a:r>
+              <a:rPr sz="1050" b="1" i="0">
+                <a:solidFill>
+                  <a:srgbClr val="1D6FB8"/>
+                </a:solidFill>
+                <a:latin typeface="Calibri"/>
+              </a:rPr>
+              <a:t>More parts costed by the same team</a:t>
+            </a:r>
+          </a:p>
+          <a:p>
+            <a:pPr algn="l">
+              <a:lnSpc>
+                <a:spcPct val="112000"/>
+              </a:lnSpc>
+              <a:spcAft>
+                <a:spcPts val="300"/>
+              </a:spcAft>
+            </a:pPr>
+            <a:r>
+              <a:rPr sz="1050" b="0" i="0">
+                <a:solidFill>
+                  <a:srgbClr val="3A4356"/>
+                </a:solidFill>
+                <a:latin typeface="Calibri"/>
+              </a:rPr>
+              <a:t>The time saved goes back into costing more of the basket.</a:t>
+            </a:r>
+          </a:p>
+          <a:p>
+            <a:pPr algn="l">
+              <a:lnSpc>
+                <a:spcPct val="112000"/>
+              </a:lnSpc>
+              <a:spcAft>
+                <a:spcPts val="300"/>
+              </a:spcAft>
+            </a:pPr>
+          </a:p>
+          <a:p>
+            <a:pPr algn="l">
+              <a:lnSpc>
+                <a:spcPct val="112000"/>
+              </a:lnSpc>
+              <a:spcAft>
+                <a:spcPts val="300"/>
+              </a:spcAft>
+            </a:pPr>
+            <a:r>
+              <a:rPr sz="1050" b="1" i="0">
+                <a:solidFill>
+                  <a:srgbClr val="1D6FB8"/>
+                </a:solidFill>
+                <a:latin typeface="Calibri"/>
+              </a:rPr>
+              <a:t>Nothing new to learn</a:t>
+            </a:r>
+          </a:p>
+          <a:p>
+            <a:pPr algn="l">
+              <a:lnSpc>
+                <a:spcPct val="112000"/>
+              </a:lnSpc>
+              <a:spcAft>
+                <a:spcPts val="300"/>
+              </a:spcAft>
+            </a:pPr>
+            <a:r>
+              <a:rPr sz="1050" b="0" i="0">
+                <a:solidFill>
+                  <a:srgbClr val="3A4356"/>
+                </a:solidFill>
+                <a:latin typeface="Calibri"/>
+              </a:rPr>
+              <a:t>CAPEE does not change. Same screens, same way of working.</a:t>
+            </a:r>
+          </a:p>
+          <a:p>
+            <a:pPr algn="l">
+              <a:lnSpc>
+                <a:spcPct val="112000"/>
+              </a:lnSpc>
+              <a:spcAft>
+                <a:spcPts val="300"/>
+              </a:spcAft>
+            </a:pPr>
+          </a:p>
+          <a:p>
+            <a:pPr algn="l">
+              <a:lnSpc>
+                <a:spcPct val="112000"/>
+              </a:lnSpc>
+              <a:spcAft>
+                <a:spcPts val="300"/>
+              </a:spcAft>
+            </a:pPr>
+            <a:r>
+              <a:rPr sz="1050" b="1" i="0">
+                <a:solidFill>
+                  <a:srgbClr val="1D6FB8"/>
+                </a:solidFill>
+                <a:latin typeface="Calibri"/>
+              </a:rPr>
+              <a:t>It can start now</a:t>
+            </a:r>
+          </a:p>
+          <a:p>
+            <a:pPr algn="l">
+              <a:lnSpc>
+                <a:spcPct val="112000"/>
+              </a:lnSpc>
+              <a:spcAft>
+                <a:spcPts val="300"/>
+              </a:spcAft>
+            </a:pPr>
+            <a:r>
+              <a:rPr sz="1050" b="0" i="0">
+                <a:solidFill>
+                  <a:srgbClr val="3A4356"/>
+                </a:solidFill>
+                <a:latin typeface="Calibri"/>
+              </a:rPr>
+              <a:t>No AI involved, so it does not wait on an AI approval.</a:t>
+            </a:r>
+          </a:p>
+        </p:txBody>
+      </p:sp>
+      <p:sp>
+        <p:nvSpPr>
+          <p:cNvPr id="14" name="Rounded Rectangle 13"/>
           <p:cNvSpPr/>
           <p:nvPr/>
         </p:nvSpPr>
         <p:spPr>
           <a:xfrm>
-            <a:off x="4187952" y="1929384"/>
-            <a:ext cx="3794760" cy="420624"/>
-          </a:xfrm>
-          <a:prstGeom prst="rect">
-            <a:avLst/>
+            <a:off x="6199632" y="1828800"/>
+            <a:ext cx="5577840" cy="3977639"/>
+          </a:xfrm>
+          <a:prstGeom prst="roundRect">
+            <a:avLst>
+              <a:gd name="adj" fmla="val 12000"/>
+            </a:avLst>
           </a:prstGeom>
           <a:solidFill>
             <a:srgbClr val="FFFFFF"/>
@@ -11955,14 +12120,58 @@
       </p:sp>
       <p:sp>
         <p:nvSpPr>
-          <p:cNvPr id="18" name="TextBox 17"/>
+          <p:cNvPr id="15" name="Rectangle 14"/>
+          <p:cNvSpPr/>
+          <p:nvPr/>
+        </p:nvSpPr>
+        <p:spPr>
+          <a:xfrm>
+            <a:off x="6199632" y="1828800"/>
+            <a:ext cx="68580" cy="3977639"/>
+          </a:xfrm>
+          <a:prstGeom prst="rect">
+            <a:avLst/>
+          </a:prstGeom>
+          <a:solidFill>
+            <a:srgbClr val="6B3FA0"/>
+          </a:solidFill>
+          <a:ln>
+            <a:noFill/>
+          </a:ln>
+          <a:effectLst/>
+        </p:spPr>
+        <p:style>
+          <a:lnRef idx="1">
+            <a:schemeClr val="accent1"/>
+          </a:lnRef>
+          <a:fillRef idx="3">
+            <a:schemeClr val="accent1"/>
+          </a:fillRef>
+          <a:effectRef idx="2">
+            <a:schemeClr val="accent1"/>
+          </a:effectRef>
+          <a:fontRef idx="minor">
+            <a:schemeClr val="lt1"/>
+          </a:fontRef>
+        </p:style>
+        <p:txBody>
+          <a:bodyPr rtlCol="0" anchor="ctr"/>
+          <a:lstStyle/>
+          <a:p>
+            <a:pPr algn="ctr"/>
+          </a:p>
+        </p:txBody>
+      </p:sp>
+      <p:sp>
+        <p:nvSpPr>
+          <p:cNvPr id="16" name="TextBox 15"/>
           <p:cNvSpPr txBox="1"/>
           <p:nvPr/>
         </p:nvSpPr>
         <p:spPr>
           <a:xfrm>
-            <a:off x="4270248" y="1993392"/>
-            <a:ext cx="3648456" cy="329184"/>
+            <a:off x="6400800" y="1956816"/>
+            <a:ext cx="5212080" cy="274320"/>
           </a:xfrm>
           <a:prstGeom prst="rect">
             <a:avLst/>
@@ -11984,14 +12193,313 @@
               </a:spcAft>
             </a:pPr>
             <a:r>
-              <a:rPr sz="1040" b="0" i="0">
-                <a:solidFill>
-                  <a:srgbClr val="B03A2E"/>
+              <a:rPr sz="1300" b="1" i="0">
+                <a:solidFill>
+                  <a:srgbClr val="16325C"/>
                 </a:solidFill>
                 <a:latin typeface="Calibri"/>
               </a:rPr>
-              <a:t>The ones we have hours for</a:t>
-            </a:r>
+              <a:t>OPTION 2 · CostVision end to end</a:t>
+            </a:r>
+          </a:p>
+        </p:txBody>
+      </p:sp>
+      <p:sp>
+        <p:nvSpPr>
+          <p:cNvPr id="17" name="TextBox 16"/>
+          <p:cNvSpPr txBox="1"/>
+          <p:nvPr/>
+        </p:nvSpPr>
+        <p:spPr>
+          <a:xfrm>
+            <a:off x="6400800" y="2267712"/>
+            <a:ext cx="5212080" cy="3428999"/>
+          </a:xfrm>
+          <a:prstGeom prst="rect">
+            <a:avLst/>
+          </a:prstGeom>
+          <a:noFill/>
+        </p:spPr>
+        <p:txBody>
+          <a:bodyPr wrap="square" anchor="t" lIns="0" rIns="0" tIns="0" bIns="0">
+            <a:spAutoFit/>
+          </a:bodyPr>
+          <a:lstStyle/>
+          <a:p>
+            <a:pPr algn="l">
+              <a:lnSpc>
+                <a:spcPct val="112000"/>
+              </a:lnSpc>
+              <a:spcAft>
+                <a:spcPts val="300"/>
+              </a:spcAft>
+            </a:pPr>
+            <a:r>
+              <a:rPr sz="1050" b="1" i="0">
+                <a:solidFill>
+                  <a:srgbClr val="6B3FA0"/>
+                </a:solidFill>
+                <a:latin typeface="Calibri"/>
+              </a:rPr>
+              <a:t>Every part costed, not a sample</a:t>
+            </a:r>
+          </a:p>
+          <a:p>
+            <a:pPr algn="l">
+              <a:lnSpc>
+                <a:spcPct val="112000"/>
+              </a:lnSpc>
+              <a:spcAft>
+                <a:spcPts val="300"/>
+              </a:spcAft>
+            </a:pPr>
+            <a:r>
+              <a:rPr sz="1050" b="0" i="0">
+                <a:solidFill>
+                  <a:srgbClr val="3A4356"/>
+                </a:solidFill>
+                <a:latin typeface="Calibri"/>
+              </a:rPr>
+              <a:t>A whole basket priced from its own geometry, in one run.</a:t>
+            </a:r>
+          </a:p>
+          <a:p>
+            <a:pPr algn="l">
+              <a:lnSpc>
+                <a:spcPct val="112000"/>
+              </a:lnSpc>
+              <a:spcAft>
+                <a:spcPts val="300"/>
+              </a:spcAft>
+            </a:pPr>
+          </a:p>
+          <a:p>
+            <a:pPr algn="l">
+              <a:lnSpc>
+                <a:spcPct val="112000"/>
+              </a:lnSpc>
+              <a:spcAft>
+                <a:spcPts val="300"/>
+              </a:spcAft>
+            </a:pPr>
+            <a:r>
+              <a:rPr sz="1050" b="1" i="0">
+                <a:solidFill>
+                  <a:srgbClr val="6B3FA0"/>
+                </a:solidFill>
+                <a:latin typeface="Calibri"/>
+              </a:rPr>
+              <a:t>Days of work become one run</a:t>
+            </a:r>
+          </a:p>
+          <a:p>
+            <a:pPr algn="l">
+              <a:lnSpc>
+                <a:spcPct val="112000"/>
+              </a:lnSpc>
+              <a:spcAft>
+                <a:spcPts val="300"/>
+              </a:spcAft>
+            </a:pPr>
+            <a:r>
+              <a:rPr sz="1050" b="0" i="0">
+                <a:solidFill>
+                  <a:srgbClr val="3A4356"/>
+                </a:solidFill>
+                <a:latin typeface="Calibri"/>
+              </a:rPr>
+              <a:t>Gathering the data is the job; the costing stops being it.</a:t>
+            </a:r>
+          </a:p>
+          <a:p>
+            <a:pPr algn="l">
+              <a:lnSpc>
+                <a:spcPct val="112000"/>
+              </a:lnSpc>
+              <a:spcAft>
+                <a:spcPts val="300"/>
+              </a:spcAft>
+            </a:pPr>
+          </a:p>
+          <a:p>
+            <a:pPr algn="l">
+              <a:lnSpc>
+                <a:spcPct val="112000"/>
+              </a:lnSpc>
+              <a:spcAft>
+                <a:spcPts val="300"/>
+              </a:spcAft>
+            </a:pPr>
+            <a:r>
+              <a:rPr sz="1050" b="1" i="0">
+                <a:solidFill>
+                  <a:srgbClr val="6B3FA0"/>
+                </a:solidFill>
+                <a:latin typeface="Calibri"/>
+              </a:rPr>
+              <a:t>A stronger position with suppliers</a:t>
+            </a:r>
+          </a:p>
+          <a:p>
+            <a:pPr algn="l">
+              <a:lnSpc>
+                <a:spcPct val="112000"/>
+              </a:lnSpc>
+              <a:spcAft>
+                <a:spcPts val="300"/>
+              </a:spcAft>
+            </a:pPr>
+            <a:r>
+              <a:rPr sz="1050" b="0" i="0">
+                <a:solidFill>
+                  <a:srgbClr val="3A4356"/>
+                </a:solidFill>
+                <a:latin typeface="Calibri"/>
+              </a:rPr>
+              <a:t>The build-up, where their price differs, and what to ask.</a:t>
+            </a:r>
+          </a:p>
+          <a:p>
+            <a:pPr algn="l">
+              <a:lnSpc>
+                <a:spcPct val="112000"/>
+              </a:lnSpc>
+              <a:spcAft>
+                <a:spcPts val="300"/>
+              </a:spcAft>
+            </a:pPr>
+          </a:p>
+          <a:p>
+            <a:pPr algn="l">
+              <a:lnSpc>
+                <a:spcPct val="112000"/>
+              </a:lnSpc>
+              <a:spcAft>
+                <a:spcPts val="300"/>
+              </a:spcAft>
+            </a:pPr>
+            <a:r>
+              <a:rPr sz="1050" b="1" i="0">
+                <a:solidFill>
+                  <a:srgbClr val="6B3FA0"/>
+                </a:solidFill>
+                <a:latin typeface="Calibri"/>
+              </a:rPr>
+              <a:t>Work we cannot do at all today</a:t>
+            </a:r>
+          </a:p>
+          <a:p>
+            <a:pPr algn="l">
+              <a:lnSpc>
+                <a:spcPct val="112000"/>
+              </a:lnSpc>
+              <a:spcAft>
+                <a:spcPts val="300"/>
+              </a:spcAft>
+            </a:pPr>
+            <a:r>
+              <a:rPr sz="1050" b="0" i="0">
+                <a:solidFill>
+                  <a:srgbClr val="3A4356"/>
+                </a:solidFill>
+                <a:latin typeface="Calibri"/>
+              </a:rPr>
+              <a:t>Electronics costed from a photo. RFQ packs costed and ranked.</a:t>
+            </a:r>
+          </a:p>
+          <a:p>
+            <a:pPr algn="l">
+              <a:lnSpc>
+                <a:spcPct val="112000"/>
+              </a:lnSpc>
+              <a:spcAft>
+                <a:spcPts val="300"/>
+              </a:spcAft>
+            </a:pPr>
+          </a:p>
+          <a:p>
+            <a:pPr algn="l">
+              <a:lnSpc>
+                <a:spcPct val="112000"/>
+              </a:lnSpc>
+              <a:spcAft>
+                <a:spcPts val="300"/>
+              </a:spcAft>
+            </a:pPr>
+            <a:r>
+              <a:rPr sz="1050" b="1" i="0">
+                <a:solidFill>
+                  <a:srgbClr val="6B3FA0"/>
+                </a:solidFill>
+                <a:latin typeface="Calibri"/>
+              </a:rPr>
+              <a:t>Design-to-cost becomes a decision</a:t>
+            </a:r>
+          </a:p>
+          <a:p>
+            <a:pPr algn="l">
+              <a:lnSpc>
+                <a:spcPct val="112000"/>
+              </a:lnSpc>
+              <a:spcAft>
+                <a:spcPts val="300"/>
+              </a:spcAft>
+            </a:pPr>
+            <a:r>
+              <a:rPr sz="1050" b="0" i="0">
+                <a:solidFill>
+                  <a:srgbClr val="3A4356"/>
+                </a:solidFill>
+                <a:latin typeface="Calibri"/>
+              </a:rPr>
+              <a:t>Changes are priced and ranked, not just listed.</a:t>
+            </a:r>
+          </a:p>
+        </p:txBody>
+      </p:sp>
+      <p:sp>
+        <p:nvSpPr>
+          <p:cNvPr id="18" name="Rounded Rectangle 17"/>
+          <p:cNvSpPr/>
+          <p:nvPr/>
+        </p:nvSpPr>
+        <p:spPr>
+          <a:xfrm>
+            <a:off x="411480" y="5897880"/>
+            <a:ext cx="11365992" cy="822960"/>
+          </a:xfrm>
+          <a:prstGeom prst="roundRect">
+            <a:avLst>
+              <a:gd name="adj" fmla="val 12000"/>
+            </a:avLst>
+          </a:prstGeom>
+          <a:solidFill>
+            <a:srgbClr val="EAF6EF"/>
+          </a:solidFill>
+          <a:ln>
+            <a:noFill/>
+          </a:ln>
+          <a:effectLst/>
+        </p:spPr>
+        <p:style>
+          <a:lnRef idx="1">
+            <a:schemeClr val="accent1"/>
+          </a:lnRef>
+          <a:fillRef idx="3">
+            <a:schemeClr val="accent1"/>
+          </a:fillRef>
+          <a:effectRef idx="2">
+            <a:schemeClr val="accent1"/>
+          </a:effectRef>
+          <a:fontRef idx="minor">
+            <a:schemeClr val="lt1"/>
+          </a:fontRef>
+        </p:style>
+        <p:txBody>
+          <a:bodyPr rtlCol="0" anchor="ctr"/>
+          <a:lstStyle/>
+          <a:p>
+            <a:pPr algn="ctr"/>
           </a:p>
         </p:txBody>
       </p:sp>
@@ -12003,8 +12511,714 @@
         </p:nvSpPr>
         <p:spPr>
           <a:xfrm>
-            <a:off x="7982712" y="1929384"/>
-            <a:ext cx="3794760" cy="420624"/>
+            <a:off x="411480" y="5897880"/>
+            <a:ext cx="68580" cy="822960"/>
+          </a:xfrm>
+          <a:prstGeom prst="rect">
+            <a:avLst/>
+          </a:prstGeom>
+          <a:solidFill>
+            <a:srgbClr val="2E8B57"/>
+          </a:solidFill>
+          <a:ln>
+            <a:noFill/>
+          </a:ln>
+          <a:effectLst/>
+        </p:spPr>
+        <p:style>
+          <a:lnRef idx="1">
+            <a:schemeClr val="accent1"/>
+          </a:lnRef>
+          <a:fillRef idx="3">
+            <a:schemeClr val="accent1"/>
+          </a:fillRef>
+          <a:effectRef idx="2">
+            <a:schemeClr val="accent1"/>
+          </a:effectRef>
+          <a:fontRef idx="minor">
+            <a:schemeClr val="lt1"/>
+          </a:fontRef>
+        </p:style>
+        <p:txBody>
+          <a:bodyPr rtlCol="0" anchor="ctr"/>
+          <a:lstStyle/>
+          <a:p>
+            <a:pPr algn="ctr"/>
+          </a:p>
+        </p:txBody>
+      </p:sp>
+      <p:sp>
+        <p:nvSpPr>
+          <p:cNvPr id="20" name="TextBox 19"/>
+          <p:cNvSpPr txBox="1"/>
+          <p:nvPr/>
+        </p:nvSpPr>
+        <p:spPr>
+          <a:xfrm>
+            <a:off x="630936" y="6016752"/>
+            <a:ext cx="10954512" cy="256032"/>
+          </a:xfrm>
+          <a:prstGeom prst="rect">
+            <a:avLst/>
+          </a:prstGeom>
+          <a:noFill/>
+        </p:spPr>
+        <p:txBody>
+          <a:bodyPr wrap="square" anchor="t" lIns="0" rIns="0" tIns="0" bIns="0">
+            <a:spAutoFit/>
+          </a:bodyPr>
+          <a:lstStyle/>
+          <a:p>
+            <a:pPr algn="l">
+              <a:lnSpc>
+                <a:spcPct val="100000"/>
+              </a:lnSpc>
+              <a:spcAft>
+                <a:spcPts val="400"/>
+              </a:spcAft>
+            </a:pPr>
+            <a:r>
+              <a:rPr sz="1200" b="1" i="0">
+                <a:solidFill>
+                  <a:srgbClr val="2E8B57"/>
+                </a:solidFill>
+                <a:latin typeface="Calibri"/>
+              </a:rPr>
+              <a:t>The two build on each other</a:t>
+            </a:r>
+          </a:p>
+        </p:txBody>
+      </p:sp>
+      <p:sp>
+        <p:nvSpPr>
+          <p:cNvPr id="21" name="TextBox 20"/>
+          <p:cNvSpPr txBox="1"/>
+          <p:nvPr/>
+        </p:nvSpPr>
+        <p:spPr>
+          <a:xfrm>
+            <a:off x="630936" y="6300216"/>
+            <a:ext cx="10954512" cy="320040"/>
+          </a:xfrm>
+          <a:prstGeom prst="rect">
+            <a:avLst/>
+          </a:prstGeom>
+          <a:noFill/>
+        </p:spPr>
+        <p:txBody>
+          <a:bodyPr wrap="square" anchor="t" lIns="0" rIns="0" tIns="0" bIns="0">
+            <a:spAutoFit/>
+          </a:bodyPr>
+          <a:lstStyle/>
+          <a:p>
+            <a:pPr algn="l">
+              <a:lnSpc>
+                <a:spcPct val="114000"/>
+              </a:lnSpc>
+              <a:spcAft>
+                <a:spcPts val="300"/>
+              </a:spcAft>
+            </a:pPr>
+            <a:r>
+              <a:rPr sz="1050" b="0" i="0">
+                <a:solidFill>
+                  <a:srgbClr val="3A4356"/>
+                </a:solidFill>
+                <a:latin typeface="Calibri"/>
+              </a:rPr>
+              <a:t>Option 1's benefits arrive first and are kept when Option 2 lands. Option 2's rest on the accuracy figure that Option 1 produces, which is the reason for doing them in this order rather than choosing between them.</a:t>
+            </a:r>
+          </a:p>
+        </p:txBody>
+      </p:sp>
+    </p:spTree>
+  </p:cSld>
+  <p:clrMapOvr>
+    <a:masterClrMapping/>
+  </p:clrMapOvr>
+</p:sld>
+</file>
+
+<file path=ppt/slides/slide5.xml><?xml version="1.0" encoding="utf-8"?>
+<p:sld xmlns:a="http://schemas.openxmlformats.org/drawingml/2006/main" xmlns:p="http://schemas.openxmlformats.org/presentationml/2006/main" xmlns:r="http://schemas.openxmlformats.org/officeDocument/2006/relationships">
+  <p:cSld>
+    <p:spTree>
+      <p:nvGrpSpPr>
+        <p:cNvPr id="1" name=""/>
+        <p:cNvGrpSpPr/>
+        <p:nvPr/>
+      </p:nvGrpSpPr>
+      <p:grpSpPr/>
+      <p:sp>
+        <p:nvSpPr>
+          <p:cNvPr id="2" name="Rectangle 1"/>
+          <p:cNvSpPr/>
+          <p:nvPr/>
+        </p:nvSpPr>
+        <p:spPr>
+          <a:xfrm>
+            <a:off x="0" y="0"/>
+            <a:ext cx="12191695" cy="6858000"/>
+          </a:xfrm>
+          <a:prstGeom prst="rect">
+            <a:avLst/>
+          </a:prstGeom>
+          <a:solidFill>
+            <a:srgbClr val="F4F7FB"/>
+          </a:solidFill>
+          <a:ln>
+            <a:noFill/>
+          </a:ln>
+          <a:effectLst/>
+        </p:spPr>
+        <p:style>
+          <a:lnRef idx="1">
+            <a:schemeClr val="accent1"/>
+          </a:lnRef>
+          <a:fillRef idx="3">
+            <a:schemeClr val="accent1"/>
+          </a:fillRef>
+          <a:effectRef idx="2">
+            <a:schemeClr val="accent1"/>
+          </a:effectRef>
+          <a:fontRef idx="minor">
+            <a:schemeClr val="lt1"/>
+          </a:fontRef>
+        </p:style>
+        <p:txBody>
+          <a:bodyPr rtlCol="0" anchor="ctr"/>
+          <a:lstStyle/>
+          <a:p>
+            <a:pPr algn="ctr"/>
+          </a:p>
+        </p:txBody>
+      </p:sp>
+      <p:sp>
+        <p:nvSpPr>
+          <p:cNvPr id="3" name="Rounded Rectangle 2"/>
+          <p:cNvSpPr/>
+          <p:nvPr/>
+        </p:nvSpPr>
+        <p:spPr>
+          <a:xfrm>
+            <a:off x="320040" y="201168"/>
+            <a:ext cx="384048" cy="384048"/>
+          </a:xfrm>
+          <a:prstGeom prst="roundRect">
+            <a:avLst>
+              <a:gd name="adj" fmla="val 28000"/>
+            </a:avLst>
+          </a:prstGeom>
+          <a:solidFill>
+            <a:srgbClr val="1D6FB8"/>
+          </a:solidFill>
+          <a:ln>
+            <a:noFill/>
+          </a:ln>
+          <a:effectLst/>
+        </p:spPr>
+        <p:style>
+          <a:lnRef idx="1">
+            <a:schemeClr val="accent1"/>
+          </a:lnRef>
+          <a:fillRef idx="3">
+            <a:schemeClr val="accent1"/>
+          </a:fillRef>
+          <a:effectRef idx="2">
+            <a:schemeClr val="accent1"/>
+          </a:effectRef>
+          <a:fontRef idx="minor">
+            <a:schemeClr val="lt1"/>
+          </a:fontRef>
+        </p:style>
+        <p:txBody>
+          <a:bodyPr rtlCol="0" anchor="ctr" lIns="0" rIns="0" tIns="0" bIns="0"/>
+          <a:lstStyle/>
+          <a:p>
+            <a:pPr algn="ctr"/>
+            <a:r>
+              <a:rPr sz="1700" b="1">
+                <a:solidFill>
+                  <a:srgbClr val="FFFFFF"/>
+                </a:solidFill>
+                <a:latin typeface="Calibri"/>
+              </a:rPr>
+              <a:t>cv</a:t>
+            </a:r>
+          </a:p>
+        </p:txBody>
+      </p:sp>
+      <p:sp>
+        <p:nvSpPr>
+          <p:cNvPr id="4" name="TextBox 3"/>
+          <p:cNvSpPr txBox="1"/>
+          <p:nvPr/>
+        </p:nvSpPr>
+        <p:spPr>
+          <a:xfrm>
+            <a:off x="795528" y="173736"/>
+            <a:ext cx="2377440" cy="292608"/>
+          </a:xfrm>
+          <a:prstGeom prst="rect">
+            <a:avLst/>
+          </a:prstGeom>
+          <a:noFill/>
+        </p:spPr>
+        <p:txBody>
+          <a:bodyPr wrap="square" anchor="t" lIns="0" rIns="0" tIns="0" bIns="0">
+            <a:spAutoFit/>
+          </a:bodyPr>
+          <a:lstStyle/>
+          <a:p>
+            <a:pPr algn="l">
+              <a:lnSpc>
+                <a:spcPct val="100000"/>
+              </a:lnSpc>
+              <a:spcAft>
+                <a:spcPts val="400"/>
+              </a:spcAft>
+            </a:pPr>
+            <a:r>
+              <a:rPr sz="1800" b="1" i="0">
+                <a:solidFill>
+                  <a:srgbClr val="1D6FB8"/>
+                </a:solidFill>
+                <a:latin typeface="Calibri"/>
+              </a:rPr>
+              <a:t>CostVision</a:t>
+            </a:r>
+          </a:p>
+        </p:txBody>
+      </p:sp>
+      <p:sp>
+        <p:nvSpPr>
+          <p:cNvPr id="5" name="TextBox 4"/>
+          <p:cNvSpPr txBox="1"/>
+          <p:nvPr/>
+        </p:nvSpPr>
+        <p:spPr>
+          <a:xfrm>
+            <a:off x="795528" y="420624"/>
+            <a:ext cx="2560320" cy="201168"/>
+          </a:xfrm>
+          <a:prstGeom prst="rect">
+            <a:avLst/>
+          </a:prstGeom>
+          <a:noFill/>
+        </p:spPr>
+        <p:txBody>
+          <a:bodyPr wrap="square" anchor="t" lIns="0" rIns="0" tIns="0" bIns="0">
+            <a:spAutoFit/>
+          </a:bodyPr>
+          <a:lstStyle/>
+          <a:p>
+            <a:pPr algn="l">
+              <a:lnSpc>
+                <a:spcPct val="100000"/>
+              </a:lnSpc>
+              <a:spcAft>
+                <a:spcPts val="400"/>
+              </a:spcAft>
+            </a:pPr>
+            <a:r>
+              <a:rPr sz="750" b="0" i="0">
+                <a:solidFill>
+                  <a:srgbClr val="6B7280"/>
+                </a:solidFill>
+                <a:latin typeface="Calibri"/>
+              </a:rPr>
+              <a:t>AI  COST  INTELLIGENCE</a:t>
+            </a:r>
+          </a:p>
+        </p:txBody>
+      </p:sp>
+      <p:sp>
+        <p:nvSpPr>
+          <p:cNvPr id="6" name="Rectangle 5"/>
+          <p:cNvSpPr/>
+          <p:nvPr/>
+        </p:nvSpPr>
+        <p:spPr>
+          <a:xfrm>
+            <a:off x="0" y="713232"/>
+            <a:ext cx="12191695" cy="27940"/>
+          </a:xfrm>
+          <a:prstGeom prst="rect">
+            <a:avLst/>
+          </a:prstGeom>
+          <a:solidFill>
+            <a:srgbClr val="16325C"/>
+          </a:solidFill>
+          <a:ln>
+            <a:noFill/>
+          </a:ln>
+          <a:effectLst/>
+        </p:spPr>
+        <p:style>
+          <a:lnRef idx="1">
+            <a:schemeClr val="accent1"/>
+          </a:lnRef>
+          <a:fillRef idx="3">
+            <a:schemeClr val="accent1"/>
+          </a:fillRef>
+          <a:effectRef idx="2">
+            <a:schemeClr val="accent1"/>
+          </a:effectRef>
+          <a:fontRef idx="minor">
+            <a:schemeClr val="lt1"/>
+          </a:fontRef>
+        </p:style>
+        <p:txBody>
+          <a:bodyPr rtlCol="0" anchor="ctr"/>
+          <a:lstStyle/>
+          <a:p>
+            <a:pPr algn="ctr"/>
+          </a:p>
+        </p:txBody>
+      </p:sp>
+      <p:sp>
+        <p:nvSpPr>
+          <p:cNvPr id="7" name="TextBox 6"/>
+          <p:cNvSpPr txBox="1"/>
+          <p:nvPr/>
+        </p:nvSpPr>
+        <p:spPr>
+          <a:xfrm>
+            <a:off x="411480" y="868680"/>
+            <a:ext cx="10515600" cy="274320"/>
+          </a:xfrm>
+          <a:prstGeom prst="rect">
+            <a:avLst/>
+          </a:prstGeom>
+          <a:noFill/>
+        </p:spPr>
+        <p:txBody>
+          <a:bodyPr wrap="square" anchor="t" lIns="0" rIns="0" tIns="0" bIns="0">
+            <a:spAutoFit/>
+          </a:bodyPr>
+          <a:lstStyle/>
+          <a:p>
+            <a:pPr algn="l">
+              <a:lnSpc>
+                <a:spcPct val="100000"/>
+              </a:lnSpc>
+              <a:spcAft>
+                <a:spcPts val="400"/>
+              </a:spcAft>
+            </a:pPr>
+            <a:r>
+              <a:rPr sz="1100" b="1" i="0">
+                <a:solidFill>
+                  <a:srgbClr val="1D6FB8"/>
+                </a:solidFill>
+                <a:latin typeface="Calibri"/>
+              </a:rPr>
+              <a:t>THE DECISION</a:t>
+            </a:r>
+          </a:p>
+        </p:txBody>
+      </p:sp>
+      <p:sp>
+        <p:nvSpPr>
+          <p:cNvPr id="8" name="TextBox 7"/>
+          <p:cNvSpPr txBox="1"/>
+          <p:nvPr/>
+        </p:nvSpPr>
+        <p:spPr>
+          <a:xfrm>
+            <a:off x="411480" y="1115568"/>
+            <a:ext cx="11338560" cy="548640"/>
+          </a:xfrm>
+          <a:prstGeom prst="rect">
+            <a:avLst/>
+          </a:prstGeom>
+          <a:noFill/>
+        </p:spPr>
+        <p:txBody>
+          <a:bodyPr wrap="square" anchor="t" lIns="0" rIns="0" tIns="0" bIns="0">
+            <a:spAutoFit/>
+          </a:bodyPr>
+          <a:lstStyle/>
+          <a:p>
+            <a:pPr algn="l">
+              <a:lnSpc>
+                <a:spcPct val="100000"/>
+              </a:lnSpc>
+              <a:spcAft>
+                <a:spcPts val="400"/>
+              </a:spcAft>
+            </a:pPr>
+            <a:r>
+              <a:rPr sz="2700" b="1" i="0">
+                <a:solidFill>
+                  <a:srgbClr val="16325C"/>
+                </a:solidFill>
+                <a:latin typeface="Cambria"/>
+              </a:rPr>
+              <a:t>What changes, and what we are asking for</a:t>
+            </a:r>
+          </a:p>
+        </p:txBody>
+      </p:sp>
+      <p:sp>
+        <p:nvSpPr>
+          <p:cNvPr id="9" name="Rectangle 8"/>
+          <p:cNvSpPr/>
+          <p:nvPr/>
+        </p:nvSpPr>
+        <p:spPr>
+          <a:xfrm>
+            <a:off x="411480" y="1600200"/>
+            <a:ext cx="3776472" cy="329184"/>
+          </a:xfrm>
+          <a:prstGeom prst="rect">
+            <a:avLst/>
+          </a:prstGeom>
+          <a:solidFill>
+            <a:srgbClr val="16325C"/>
+          </a:solidFill>
+          <a:ln>
+            <a:noFill/>
+          </a:ln>
+          <a:effectLst/>
+        </p:spPr>
+        <p:style>
+          <a:lnRef idx="1">
+            <a:schemeClr val="accent1"/>
+          </a:lnRef>
+          <a:fillRef idx="3">
+            <a:schemeClr val="accent1"/>
+          </a:fillRef>
+          <a:effectRef idx="2">
+            <a:schemeClr val="accent1"/>
+          </a:effectRef>
+          <a:fontRef idx="minor">
+            <a:schemeClr val="lt1"/>
+          </a:fontRef>
+        </p:style>
+        <p:txBody>
+          <a:bodyPr rtlCol="0" anchor="ctr"/>
+          <a:lstStyle/>
+          <a:p>
+            <a:pPr algn="ctr"/>
+          </a:p>
+        </p:txBody>
+      </p:sp>
+      <p:sp>
+        <p:nvSpPr>
+          <p:cNvPr id="10" name="TextBox 9"/>
+          <p:cNvSpPr txBox="1"/>
+          <p:nvPr/>
+        </p:nvSpPr>
+        <p:spPr>
+          <a:xfrm>
+            <a:off x="493776" y="1682496"/>
+            <a:ext cx="3630168" cy="219456"/>
+          </a:xfrm>
+          <a:prstGeom prst="rect">
+            <a:avLst/>
+          </a:prstGeom>
+          <a:noFill/>
+        </p:spPr>
+        <p:txBody>
+          <a:bodyPr wrap="square" anchor="t" lIns="0" rIns="0" tIns="0" bIns="0">
+            <a:spAutoFit/>
+          </a:bodyPr>
+          <a:lstStyle/>
+          <a:p>
+            <a:pPr algn="l">
+              <a:lnSpc>
+                <a:spcPct val="100000"/>
+              </a:lnSpc>
+              <a:spcAft>
+                <a:spcPts val="400"/>
+              </a:spcAft>
+            </a:pPr>
+          </a:p>
+        </p:txBody>
+      </p:sp>
+      <p:sp>
+        <p:nvSpPr>
+          <p:cNvPr id="11" name="Rectangle 10"/>
+          <p:cNvSpPr/>
+          <p:nvPr/>
+        </p:nvSpPr>
+        <p:spPr>
+          <a:xfrm>
+            <a:off x="4187952" y="1600200"/>
+            <a:ext cx="3794760" cy="329184"/>
+          </a:xfrm>
+          <a:prstGeom prst="rect">
+            <a:avLst/>
+          </a:prstGeom>
+          <a:solidFill>
+            <a:srgbClr val="16325C"/>
+          </a:solidFill>
+          <a:ln>
+            <a:noFill/>
+          </a:ln>
+          <a:effectLst/>
+        </p:spPr>
+        <p:style>
+          <a:lnRef idx="1">
+            <a:schemeClr val="accent1"/>
+          </a:lnRef>
+          <a:fillRef idx="3">
+            <a:schemeClr val="accent1"/>
+          </a:fillRef>
+          <a:effectRef idx="2">
+            <a:schemeClr val="accent1"/>
+          </a:effectRef>
+          <a:fontRef idx="minor">
+            <a:schemeClr val="lt1"/>
+          </a:fontRef>
+        </p:style>
+        <p:txBody>
+          <a:bodyPr rtlCol="0" anchor="ctr"/>
+          <a:lstStyle/>
+          <a:p>
+            <a:pPr algn="ctr"/>
+          </a:p>
+        </p:txBody>
+      </p:sp>
+      <p:sp>
+        <p:nvSpPr>
+          <p:cNvPr id="12" name="TextBox 11"/>
+          <p:cNvSpPr txBox="1"/>
+          <p:nvPr/>
+        </p:nvSpPr>
+        <p:spPr>
+          <a:xfrm>
+            <a:off x="4270248" y="1682496"/>
+            <a:ext cx="3648456" cy="219456"/>
+          </a:xfrm>
+          <a:prstGeom prst="rect">
+            <a:avLst/>
+          </a:prstGeom>
+          <a:noFill/>
+        </p:spPr>
+        <p:txBody>
+          <a:bodyPr wrap="square" anchor="t" lIns="0" rIns="0" tIns="0" bIns="0">
+            <a:spAutoFit/>
+          </a:bodyPr>
+          <a:lstStyle/>
+          <a:p>
+            <a:pPr algn="l">
+              <a:lnSpc>
+                <a:spcPct val="100000"/>
+              </a:lnSpc>
+              <a:spcAft>
+                <a:spcPts val="400"/>
+              </a:spcAft>
+            </a:pPr>
+            <a:r>
+              <a:rPr sz="950" b="1" i="0">
+                <a:solidFill>
+                  <a:srgbClr val="FFFFFF"/>
+                </a:solidFill>
+                <a:latin typeface="Calibri"/>
+              </a:rPr>
+              <a:t>Today</a:t>
+            </a:r>
+          </a:p>
+        </p:txBody>
+      </p:sp>
+      <p:sp>
+        <p:nvSpPr>
+          <p:cNvPr id="13" name="Rectangle 12"/>
+          <p:cNvSpPr/>
+          <p:nvPr/>
+        </p:nvSpPr>
+        <p:spPr>
+          <a:xfrm>
+            <a:off x="7982712" y="1600200"/>
+            <a:ext cx="3794760" cy="329184"/>
+          </a:xfrm>
+          <a:prstGeom prst="rect">
+            <a:avLst/>
+          </a:prstGeom>
+          <a:solidFill>
+            <a:srgbClr val="16325C"/>
+          </a:solidFill>
+          <a:ln>
+            <a:noFill/>
+          </a:ln>
+          <a:effectLst/>
+        </p:spPr>
+        <p:style>
+          <a:lnRef idx="1">
+            <a:schemeClr val="accent1"/>
+          </a:lnRef>
+          <a:fillRef idx="3">
+            <a:schemeClr val="accent1"/>
+          </a:fillRef>
+          <a:effectRef idx="2">
+            <a:schemeClr val="accent1"/>
+          </a:effectRef>
+          <a:fontRef idx="minor">
+            <a:schemeClr val="lt1"/>
+          </a:fontRef>
+        </p:style>
+        <p:txBody>
+          <a:bodyPr rtlCol="0" anchor="ctr"/>
+          <a:lstStyle/>
+          <a:p>
+            <a:pPr algn="ctr"/>
+          </a:p>
+        </p:txBody>
+      </p:sp>
+      <p:sp>
+        <p:nvSpPr>
+          <p:cNvPr id="14" name="TextBox 13"/>
+          <p:cNvSpPr txBox="1"/>
+          <p:nvPr/>
+        </p:nvSpPr>
+        <p:spPr>
+          <a:xfrm>
+            <a:off x="8065008" y="1682496"/>
+            <a:ext cx="3648456" cy="219456"/>
+          </a:xfrm>
+          <a:prstGeom prst="rect">
+            <a:avLst/>
+          </a:prstGeom>
+          <a:noFill/>
+        </p:spPr>
+        <p:txBody>
+          <a:bodyPr wrap="square" anchor="t" lIns="0" rIns="0" tIns="0" bIns="0">
+            <a:spAutoFit/>
+          </a:bodyPr>
+          <a:lstStyle/>
+          <a:p>
+            <a:pPr algn="l">
+              <a:lnSpc>
+                <a:spcPct val="100000"/>
+              </a:lnSpc>
+              <a:spcAft>
+                <a:spcPts val="400"/>
+              </a:spcAft>
+            </a:pPr>
+            <a:r>
+              <a:rPr sz="950" b="1" i="0">
+                <a:solidFill>
+                  <a:srgbClr val="FFFFFF"/>
+                </a:solidFill>
+                <a:latin typeface="Calibri"/>
+              </a:rPr>
+              <a:t>With Option 2</a:t>
+            </a:r>
+          </a:p>
+        </p:txBody>
+      </p:sp>
+      <p:sp>
+        <p:nvSpPr>
+          <p:cNvPr id="15" name="Rectangle 14"/>
+          <p:cNvSpPr/>
+          <p:nvPr/>
+        </p:nvSpPr>
+        <p:spPr>
+          <a:xfrm>
+            <a:off x="411480" y="1929384"/>
+            <a:ext cx="3776472" cy="420624"/>
           </a:xfrm>
           <a:prstGeom prst="rect">
             <a:avLst/>
@@ -12043,6 +13257,182 @@
       </p:sp>
       <p:sp>
         <p:nvSpPr>
+          <p:cNvPr id="16" name="TextBox 15"/>
+          <p:cNvSpPr txBox="1"/>
+          <p:nvPr/>
+        </p:nvSpPr>
+        <p:spPr>
+          <a:xfrm>
+            <a:off x="493776" y="1993392"/>
+            <a:ext cx="3630168" cy="329184"/>
+          </a:xfrm>
+          <a:prstGeom prst="rect">
+            <a:avLst/>
+          </a:prstGeom>
+          <a:noFill/>
+        </p:spPr>
+        <p:txBody>
+          <a:bodyPr wrap="square" anchor="t" lIns="0" rIns="0" tIns="0" bIns="0">
+            <a:spAutoFit/>
+          </a:bodyPr>
+          <a:lstStyle/>
+          <a:p>
+            <a:pPr algn="l">
+              <a:lnSpc>
+                <a:spcPct val="100000"/>
+              </a:lnSpc>
+              <a:spcAft>
+                <a:spcPts val="400"/>
+              </a:spcAft>
+            </a:pPr>
+            <a:r>
+              <a:rPr sz="1040" b="0" i="0">
+                <a:solidFill>
+                  <a:srgbClr val="3A4356"/>
+                </a:solidFill>
+                <a:latin typeface="Calibri"/>
+              </a:rPr>
+              <a:t>How many parts get a proper cost</a:t>
+            </a:r>
+          </a:p>
+        </p:txBody>
+      </p:sp>
+      <p:sp>
+        <p:nvSpPr>
+          <p:cNvPr id="17" name="Rectangle 16"/>
+          <p:cNvSpPr/>
+          <p:nvPr/>
+        </p:nvSpPr>
+        <p:spPr>
+          <a:xfrm>
+            <a:off x="4187952" y="1929384"/>
+            <a:ext cx="3794760" cy="420624"/>
+          </a:xfrm>
+          <a:prstGeom prst="rect">
+            <a:avLst/>
+          </a:prstGeom>
+          <a:solidFill>
+            <a:srgbClr val="FFFFFF"/>
+          </a:solidFill>
+          <a:ln w="9525">
+            <a:solidFill>
+              <a:srgbClr val="DCE3EE"/>
+            </a:solidFill>
+          </a:ln>
+          <a:effectLst/>
+        </p:spPr>
+        <p:style>
+          <a:lnRef idx="1">
+            <a:schemeClr val="accent1"/>
+          </a:lnRef>
+          <a:fillRef idx="3">
+            <a:schemeClr val="accent1"/>
+          </a:fillRef>
+          <a:effectRef idx="2">
+            <a:schemeClr val="accent1"/>
+          </a:effectRef>
+          <a:fontRef idx="minor">
+            <a:schemeClr val="lt1"/>
+          </a:fontRef>
+        </p:style>
+        <p:txBody>
+          <a:bodyPr rtlCol="0" anchor="ctr"/>
+          <a:lstStyle/>
+          <a:p>
+            <a:pPr algn="ctr"/>
+          </a:p>
+        </p:txBody>
+      </p:sp>
+      <p:sp>
+        <p:nvSpPr>
+          <p:cNvPr id="18" name="TextBox 17"/>
+          <p:cNvSpPr txBox="1"/>
+          <p:nvPr/>
+        </p:nvSpPr>
+        <p:spPr>
+          <a:xfrm>
+            <a:off x="4270248" y="1993392"/>
+            <a:ext cx="3648456" cy="329184"/>
+          </a:xfrm>
+          <a:prstGeom prst="rect">
+            <a:avLst/>
+          </a:prstGeom>
+          <a:noFill/>
+        </p:spPr>
+        <p:txBody>
+          <a:bodyPr wrap="square" anchor="t" lIns="0" rIns="0" tIns="0" bIns="0">
+            <a:spAutoFit/>
+          </a:bodyPr>
+          <a:lstStyle/>
+          <a:p>
+            <a:pPr algn="l">
+              <a:lnSpc>
+                <a:spcPct val="100000"/>
+              </a:lnSpc>
+              <a:spcAft>
+                <a:spcPts val="400"/>
+              </a:spcAft>
+            </a:pPr>
+            <a:r>
+              <a:rPr sz="1040" b="0" i="0">
+                <a:solidFill>
+                  <a:srgbClr val="B03A2E"/>
+                </a:solidFill>
+                <a:latin typeface="Calibri"/>
+              </a:rPr>
+              <a:t>The ones we have hours for</a:t>
+            </a:r>
+          </a:p>
+        </p:txBody>
+      </p:sp>
+      <p:sp>
+        <p:nvSpPr>
+          <p:cNvPr id="19" name="Rectangle 18"/>
+          <p:cNvSpPr/>
+          <p:nvPr/>
+        </p:nvSpPr>
+        <p:spPr>
+          <a:xfrm>
+            <a:off x="7982712" y="1929384"/>
+            <a:ext cx="3794760" cy="420624"/>
+          </a:xfrm>
+          <a:prstGeom prst="rect">
+            <a:avLst/>
+          </a:prstGeom>
+          <a:solidFill>
+            <a:srgbClr val="FFFFFF"/>
+          </a:solidFill>
+          <a:ln w="9525">
+            <a:solidFill>
+              <a:srgbClr val="DCE3EE"/>
+            </a:solidFill>
+          </a:ln>
+          <a:effectLst/>
+        </p:spPr>
+        <p:style>
+          <a:lnRef idx="1">
+            <a:schemeClr val="accent1"/>
+          </a:lnRef>
+          <a:fillRef idx="3">
+            <a:schemeClr val="accent1"/>
+          </a:fillRef>
+          <a:effectRef idx="2">
+            <a:schemeClr val="accent1"/>
+          </a:effectRef>
+          <a:fontRef idx="minor">
+            <a:schemeClr val="lt1"/>
+          </a:fontRef>
+        </p:style>
+        <p:txBody>
+          <a:bodyPr rtlCol="0" anchor="ctr"/>
+          <a:lstStyle/>
+          <a:p>
+            <a:pPr algn="ctr"/>
+          </a:p>
+        </p:txBody>
+      </p:sp>
+      <p:sp>
+        <p:nvSpPr>
           <p:cNvPr id="20" name="TextBox 19"/>
           <p:cNvSpPr txBox="1"/>
           <p:nvPr/>
@@ -13646,7 +15036,7 @@
                 </a:solidFill>
                 <a:latin typeface="Calibri"/>
               </a:rPr>
-              <a:t>Everything on the last slide works today one part at a time. Making it run over a whole basket unattended is real work, not a switch. And we have never checked the tool against a price JLR has actually paid — which is exactly what the Option 1 trial settles.</a:t>
+              <a:t>Those six capabilities work today one part at a time. Making them run over a whole basket unattended is real work, not a switch. And we have never checked the tool against a price JLR has actually paid — which is exactly what the Option 1 trial settles.</a:t>
             </a:r>
           </a:p>
         </p:txBody>

--- a/CostVision-CAPEE-Business-Case.pptx
+++ b/CostVision-CAPEE-Business-Case.pptx
@@ -649,7 +649,7 @@
           <a:lstStyle/>
           <a:p>
             <a:r>
-              <a:t>This is the slide I would spend the most time on, because it is the part of the case that is easy to under-sell. These are six things we cannot do at all at the moment, and every one of them is in the tool today. Top left is the one people expect. A list of parts and their models goes in and every part comes back costed, with a report per part and per basket, without anybody sitting there. Today we cost the parts we have hours for and estimate the rest from a sample. Next to it is the one that usually gets a reaction in the room. You take a photograph of a circuit board and the tool works out what is on it, builds the bill of materials, works out the board specification and costs it. That is a job that takes an electronics buyer a long time and most of us cannot do at all. Third along, an RFQ pack goes in and comes back as costed lines, ranked by where the money is, with a first draft of the negotiation brief written for you. Bottom left is the assistant, and I want to be precise about it. It does the setting up: it picks the process route and the machine and fills in what the geometry gives it, and then it comes back to a person with one question rather than a hundred. Next to that is the one our buyers will care about most. Put a supplier's price next to our own build-up and the tool tells you which part of it the gap sits in and what to ask them about it. And the last one turns design-for-cost from a list into a decision: it flags what makes a part expensive and puts a number on each change, ordered by what it saves. The blue strip at the bottom is the sentence I would want people to leave with. The AI reads and sorts and sets up. It never sets a price. The money is still worked out by the same fixed rules and the same rate book we use now, so every number can be explained line by line, exactly as it can today.</a:t>
+              <a:t>This is the slide I would spend the most time on, because it is the part of the case that is easy to under-sell. Six things the tool does, and one distinction I want to make before I go through them: five of these work today, one part at a time, in the tool as it stands. The first one does not, and that is why it is the amber tile. A list of parts and their models goes in and every part comes back costed, with a report per part and per basket, without anybody sitting there — that is what Option two builds, and today we cost the parts we have hours for and estimate the rest from a sample. Next to it is the one that usually gets a reaction in the room. You take a photograph of a circuit board and the tool works out what is on it, builds the bill of materials, works out the board specification and costs it. That is a job that takes an electronics buyer a long time and most of us cannot do at all. Third along, an RFQ pack goes in and comes back as costed lines, ranked by where the money is, with a first draft of the negotiation brief written for you. Bottom left is the assistant, and I want to be precise about it. It does the setting up: it picks the process route and the machine and fills in what the geometry gives it, and then it comes back to a person with one question rather than a hundred. Next to that is the one our buyers will care about most. Put a supplier's price next to our own build-up and the tool tells you which part of it the gap sits in and what to ask them about it. And the last one turns design-for-cost from a list into a decision: it flags what makes a part expensive and puts a number on each change, ordered by what it saves. The blue strip at the bottom is the sentence I would want people to leave with. The AI reads and sorts and sets up. It never sets a price. The money is still worked out by the same fixed rules and the same rate book we use now, so every number can be explained line by line, exactly as it can today.</a:t>
             </a:r>
           </a:p>
         </p:txBody>
@@ -789,7 +789,7 @@
           <a:lstStyle/>
           <a:p>
             <a:r>
-              <a:t>Last slide, and it is two things: what changes for the business, and what I want from you. Read the table down the right-hand column. Today we cost the parts we have hours for; with this, every part in the basket gets a proper cost. Today a basket takes days of engineer time; with this it is one run, once we have the data together — and I want to be clear that gathering the part list, the models and our own rate data is the real work, not the computing. The third row is the one I would put to the purchasing side: today we take our estimate to a supplier, and with this we take the build-up, plus where their price differs from it and what to ask them about it. And the last row is what it does for the engineers. They stop typing values in and spend the time answering the questions only a person can answer, and acting on what the tool finds. The two cards are what each option needs, and the difference between them is the reason for doing them in this order. Option one needs a server, a way into CAPEE, and some parts where we know what we paid. Option two needs all of that plus the AI approval, our rate book, and a few things built around the engine. The green strip is the ask and it is deliberately small: one commodity, thirty to fifty parts we have already bought, our own time. In parallel I would start the AI approval, because that is the long pole on Option two and there is no reason to wait for the trial to finish before beginning it. The amber box is me being straight with you twice. The six capabilities I showed you work today, but they work one part at a time — making it run unattended over a basket is real work. And we have still never checked this against a price we have actually paid. That is exactly what the trial is for.</a:t>
+              <a:t>So this is the decision, and I have split it into what I want today and what I do not. On the left, Option one: approve the trial. One commodity, thirty to fifty parts we have already bought, run inside CAPEE. On the right, Option two: I am not asking you to decide it. What I am asking is that we start the AI approval alongside the trial, because that is the long pole and there is no sense discovering at the end of the trial that we now have to begin it. The two cards underneath are what each one needs. Option one needs a server, a way to pass numbers into CAPEE, some parts where we know what we paid, and an engineer from the commodity team for the trial. Option two needs all of that plus the AI approval, our own rate book with a change history, and a few things built around the engine. The green strip is what we get out of the trial and it is the reason to do it: two numbers that nobody in this company can state today. How close the tool gets to a price we actually paid, and how much of the input it fills on its own. Until we have those, any conversation about Option two is people trading opinions. Then three short things I want to say plainly rather than have asked. The first is the governance point and it is the one I would repeat if you take nothing else away: the AI reads, sorts and sets up, and it never sets a price. The money comes out of the same fixed rules and the same rate book as today, so every number can be defended line by line exactly as it can now. The second is the exit. We have never compared this against a price we have paid. If the trial says the tool is not close enough, we stop, and what we will have spent is our own engineering time — that is precisely why I am asking for a trial and not a rollout. And the third is the honest answer to how long: nobody has sized it. It waits on one answer from IT about how CAPEE is built, and the sizing comes back with that answer rather than being invented now.</a:t>
             </a:r>
           </a:p>
         </p:txBody>
@@ -3938,49 +3938,7 @@
       </p:sp>
       <p:sp>
         <p:nvSpPr>
-          <p:cNvPr id="5" name="TextBox 4"/>
-          <p:cNvSpPr txBox="1"/>
-          <p:nvPr/>
-        </p:nvSpPr>
-        <p:spPr>
-          <a:xfrm>
-            <a:off x="795528" y="420624"/>
-            <a:ext cx="2560320" cy="201168"/>
-          </a:xfrm>
-          <a:prstGeom prst="rect">
-            <a:avLst/>
-          </a:prstGeom>
-          <a:noFill/>
-        </p:spPr>
-        <p:txBody>
-          <a:bodyPr wrap="square" anchor="t" lIns="0" rIns="0" tIns="0" bIns="0">
-            <a:spAutoFit/>
-          </a:bodyPr>
-          <a:lstStyle/>
-          <a:p>
-            <a:pPr algn="l">
-              <a:lnSpc>
-                <a:spcPct val="100000"/>
-              </a:lnSpc>
-              <a:spcAft>
-                <a:spcPts val="400"/>
-              </a:spcAft>
-            </a:pPr>
-            <a:r>
-              <a:rPr sz="750" b="0" i="0">
-                <a:solidFill>
-                  <a:srgbClr val="6B7280"/>
-                </a:solidFill>
-                <a:latin typeface="Calibri"/>
-              </a:rPr>
-              <a:t>AI  COST  INTELLIGENCE</a:t>
-            </a:r>
-          </a:p>
-        </p:txBody>
-      </p:sp>
-      <p:sp>
-        <p:nvSpPr>
-          <p:cNvPr id="6" name="Rectangle 5"/>
+          <p:cNvPr id="5" name="Rectangle 4"/>
           <p:cNvSpPr/>
           <p:nvPr/>
         </p:nvSpPr>
@@ -4024,7 +3982,7 @@
       </p:sp>
       <p:sp>
         <p:nvSpPr>
-          <p:cNvPr id="7" name="TextBox 6"/>
+          <p:cNvPr id="6" name="TextBox 5"/>
           <p:cNvSpPr txBox="1"/>
           <p:nvPr/>
         </p:nvSpPr>
@@ -4066,7 +4024,7 @@
       </p:sp>
       <p:sp>
         <p:nvSpPr>
-          <p:cNvPr id="8" name="TextBox 7"/>
+          <p:cNvPr id="7" name="TextBox 6"/>
           <p:cNvSpPr txBox="1"/>
           <p:nvPr/>
         </p:nvSpPr>
@@ -4108,7 +4066,7 @@
       </p:sp>
       <p:sp>
         <p:nvSpPr>
-          <p:cNvPr id="9" name="TextBox 8"/>
+          <p:cNvPr id="8" name="TextBox 7"/>
           <p:cNvSpPr txBox="1"/>
           <p:nvPr/>
         </p:nvSpPr>
@@ -4150,7 +4108,7 @@
       </p:sp>
       <p:sp>
         <p:nvSpPr>
-          <p:cNvPr id="10" name="Rounded Rectangle 9"/>
+          <p:cNvPr id="9" name="Rounded Rectangle 8"/>
           <p:cNvSpPr/>
           <p:nvPr/>
         </p:nvSpPr>
@@ -4198,7 +4156,7 @@
       </p:sp>
       <p:sp>
         <p:nvSpPr>
-          <p:cNvPr id="11" name="Rectangle 10"/>
+          <p:cNvPr id="10" name="Rectangle 9"/>
           <p:cNvSpPr/>
           <p:nvPr/>
         </p:nvSpPr>
@@ -4242,7 +4200,7 @@
       </p:sp>
       <p:sp>
         <p:nvSpPr>
-          <p:cNvPr id="12" name="TextBox 11"/>
+          <p:cNvPr id="11" name="TextBox 10"/>
           <p:cNvSpPr txBox="1"/>
           <p:nvPr/>
         </p:nvSpPr>
@@ -4284,7 +4242,7 @@
       </p:sp>
       <p:sp>
         <p:nvSpPr>
-          <p:cNvPr id="13" name="TextBox 12"/>
+          <p:cNvPr id="12" name="TextBox 11"/>
           <p:cNvSpPr txBox="1"/>
           <p:nvPr/>
         </p:nvSpPr>
@@ -4527,7 +4485,7 @@
       </p:sp>
       <p:sp>
         <p:nvSpPr>
-          <p:cNvPr id="14" name="TextBox 13"/>
+          <p:cNvPr id="13" name="TextBox 12"/>
           <p:cNvSpPr txBox="1"/>
           <p:nvPr/>
         </p:nvSpPr>
@@ -4569,7 +4527,7 @@
       </p:sp>
       <p:sp>
         <p:nvSpPr>
-          <p:cNvPr id="15" name="Rectangle 14"/>
+          <p:cNvPr id="14" name="Rectangle 13"/>
           <p:cNvSpPr/>
           <p:nvPr/>
         </p:nvSpPr>
@@ -4613,7 +4571,7 @@
       </p:sp>
       <p:sp>
         <p:nvSpPr>
-          <p:cNvPr id="16" name="TextBox 15"/>
+          <p:cNvPr id="15" name="TextBox 14"/>
           <p:cNvSpPr txBox="1"/>
           <p:nvPr/>
         </p:nvSpPr>
@@ -4646,7 +4604,7 @@
       </p:sp>
       <p:sp>
         <p:nvSpPr>
-          <p:cNvPr id="17" name="Rectangle 16"/>
+          <p:cNvPr id="16" name="Rectangle 15"/>
           <p:cNvSpPr/>
           <p:nvPr/>
         </p:nvSpPr>
@@ -4690,7 +4648,7 @@
       </p:sp>
       <p:sp>
         <p:nvSpPr>
-          <p:cNvPr id="18" name="TextBox 17"/>
+          <p:cNvPr id="17" name="TextBox 16"/>
           <p:cNvSpPr txBox="1"/>
           <p:nvPr/>
         </p:nvSpPr>
@@ -4732,7 +4690,7 @@
       </p:sp>
       <p:sp>
         <p:nvSpPr>
-          <p:cNvPr id="19" name="Rectangle 18"/>
+          <p:cNvPr id="18" name="Rectangle 17"/>
           <p:cNvSpPr/>
           <p:nvPr/>
         </p:nvSpPr>
@@ -4776,7 +4734,7 @@
       </p:sp>
       <p:sp>
         <p:nvSpPr>
-          <p:cNvPr id="20" name="TextBox 19"/>
+          <p:cNvPr id="19" name="TextBox 18"/>
           <p:cNvSpPr txBox="1"/>
           <p:nvPr/>
         </p:nvSpPr>
@@ -4818,7 +4776,7 @@
       </p:sp>
       <p:sp>
         <p:nvSpPr>
-          <p:cNvPr id="21" name="Rectangle 20"/>
+          <p:cNvPr id="20" name="Rectangle 19"/>
           <p:cNvSpPr/>
           <p:nvPr/>
         </p:nvSpPr>
@@ -4864,7 +4822,7 @@
       </p:sp>
       <p:sp>
         <p:nvSpPr>
-          <p:cNvPr id="22" name="TextBox 21"/>
+          <p:cNvPr id="21" name="TextBox 20"/>
           <p:cNvSpPr txBox="1"/>
           <p:nvPr/>
         </p:nvSpPr>
@@ -4906,7 +4864,7 @@
       </p:sp>
       <p:sp>
         <p:nvSpPr>
-          <p:cNvPr id="23" name="Rectangle 22"/>
+          <p:cNvPr id="22" name="Rectangle 21"/>
           <p:cNvSpPr/>
           <p:nvPr/>
         </p:nvSpPr>
@@ -4952,7 +4910,7 @@
       </p:sp>
       <p:sp>
         <p:nvSpPr>
-          <p:cNvPr id="24" name="TextBox 23"/>
+          <p:cNvPr id="23" name="TextBox 22"/>
           <p:cNvSpPr txBox="1"/>
           <p:nvPr/>
         </p:nvSpPr>
@@ -4994,7 +4952,7 @@
       </p:sp>
       <p:sp>
         <p:nvSpPr>
-          <p:cNvPr id="25" name="Rectangle 24"/>
+          <p:cNvPr id="24" name="Rectangle 23"/>
           <p:cNvSpPr/>
           <p:nvPr/>
         </p:nvSpPr>
@@ -5040,7 +4998,7 @@
       </p:sp>
       <p:sp>
         <p:nvSpPr>
-          <p:cNvPr id="26" name="TextBox 25"/>
+          <p:cNvPr id="25" name="TextBox 24"/>
           <p:cNvSpPr txBox="1"/>
           <p:nvPr/>
         </p:nvSpPr>
@@ -5082,7 +5040,7 @@
       </p:sp>
       <p:sp>
         <p:nvSpPr>
-          <p:cNvPr id="27" name="Rectangle 26"/>
+          <p:cNvPr id="26" name="Rectangle 25"/>
           <p:cNvSpPr/>
           <p:nvPr/>
         </p:nvSpPr>
@@ -5128,7 +5086,7 @@
       </p:sp>
       <p:sp>
         <p:nvSpPr>
-          <p:cNvPr id="28" name="TextBox 27"/>
+          <p:cNvPr id="27" name="TextBox 26"/>
           <p:cNvSpPr txBox="1"/>
           <p:nvPr/>
         </p:nvSpPr>
@@ -5170,7 +5128,7 @@
       </p:sp>
       <p:sp>
         <p:nvSpPr>
-          <p:cNvPr id="29" name="Rectangle 28"/>
+          <p:cNvPr id="28" name="Rectangle 27"/>
           <p:cNvSpPr/>
           <p:nvPr/>
         </p:nvSpPr>
@@ -5216,7 +5174,7 @@
       </p:sp>
       <p:sp>
         <p:nvSpPr>
-          <p:cNvPr id="30" name="TextBox 29"/>
+          <p:cNvPr id="29" name="TextBox 28"/>
           <p:cNvSpPr txBox="1"/>
           <p:nvPr/>
         </p:nvSpPr>
@@ -5258,7 +5216,7 @@
       </p:sp>
       <p:sp>
         <p:nvSpPr>
-          <p:cNvPr id="31" name="Rectangle 30"/>
+          <p:cNvPr id="30" name="Rectangle 29"/>
           <p:cNvSpPr/>
           <p:nvPr/>
         </p:nvSpPr>
@@ -5304,7 +5262,7 @@
       </p:sp>
       <p:sp>
         <p:nvSpPr>
-          <p:cNvPr id="32" name="TextBox 31"/>
+          <p:cNvPr id="31" name="TextBox 30"/>
           <p:cNvSpPr txBox="1"/>
           <p:nvPr/>
         </p:nvSpPr>
@@ -5346,7 +5304,7 @@
       </p:sp>
       <p:sp>
         <p:nvSpPr>
-          <p:cNvPr id="33" name="Rectangle 32"/>
+          <p:cNvPr id="32" name="Rectangle 31"/>
           <p:cNvSpPr/>
           <p:nvPr/>
         </p:nvSpPr>
@@ -5392,7 +5350,7 @@
       </p:sp>
       <p:sp>
         <p:nvSpPr>
-          <p:cNvPr id="34" name="TextBox 33"/>
+          <p:cNvPr id="33" name="TextBox 32"/>
           <p:cNvSpPr txBox="1"/>
           <p:nvPr/>
         </p:nvSpPr>
@@ -5434,7 +5392,7 @@
       </p:sp>
       <p:sp>
         <p:nvSpPr>
-          <p:cNvPr id="35" name="Rectangle 34"/>
+          <p:cNvPr id="34" name="Rectangle 33"/>
           <p:cNvSpPr/>
           <p:nvPr/>
         </p:nvSpPr>
@@ -5480,7 +5438,7 @@
       </p:sp>
       <p:sp>
         <p:nvSpPr>
-          <p:cNvPr id="36" name="TextBox 35"/>
+          <p:cNvPr id="35" name="TextBox 34"/>
           <p:cNvSpPr txBox="1"/>
           <p:nvPr/>
         </p:nvSpPr>
@@ -5522,7 +5480,7 @@
       </p:sp>
       <p:sp>
         <p:nvSpPr>
-          <p:cNvPr id="37" name="Rectangle 36"/>
+          <p:cNvPr id="36" name="Rectangle 35"/>
           <p:cNvSpPr/>
           <p:nvPr/>
         </p:nvSpPr>
@@ -5568,7 +5526,7 @@
       </p:sp>
       <p:sp>
         <p:nvSpPr>
-          <p:cNvPr id="38" name="TextBox 37"/>
+          <p:cNvPr id="37" name="TextBox 36"/>
           <p:cNvSpPr txBox="1"/>
           <p:nvPr/>
         </p:nvSpPr>
@@ -5610,7 +5568,7 @@
       </p:sp>
       <p:sp>
         <p:nvSpPr>
-          <p:cNvPr id="39" name="Rectangle 38"/>
+          <p:cNvPr id="38" name="Rectangle 37"/>
           <p:cNvSpPr/>
           <p:nvPr/>
         </p:nvSpPr>
@@ -5656,7 +5614,7 @@
       </p:sp>
       <p:sp>
         <p:nvSpPr>
-          <p:cNvPr id="40" name="TextBox 39"/>
+          <p:cNvPr id="39" name="TextBox 38"/>
           <p:cNvSpPr txBox="1"/>
           <p:nvPr/>
         </p:nvSpPr>
@@ -5698,7 +5656,7 @@
       </p:sp>
       <p:sp>
         <p:nvSpPr>
-          <p:cNvPr id="41" name="Rectangle 40"/>
+          <p:cNvPr id="40" name="Rectangle 39"/>
           <p:cNvSpPr/>
           <p:nvPr/>
         </p:nvSpPr>
@@ -5744,7 +5702,7 @@
       </p:sp>
       <p:sp>
         <p:nvSpPr>
-          <p:cNvPr id="42" name="TextBox 41"/>
+          <p:cNvPr id="41" name="TextBox 40"/>
           <p:cNvSpPr txBox="1"/>
           <p:nvPr/>
         </p:nvSpPr>
@@ -5786,7 +5744,7 @@
       </p:sp>
       <p:sp>
         <p:nvSpPr>
-          <p:cNvPr id="43" name="Rectangle 42"/>
+          <p:cNvPr id="42" name="Rectangle 41"/>
           <p:cNvSpPr/>
           <p:nvPr/>
         </p:nvSpPr>
@@ -5832,7 +5790,7 @@
       </p:sp>
       <p:sp>
         <p:nvSpPr>
-          <p:cNvPr id="44" name="TextBox 43"/>
+          <p:cNvPr id="43" name="TextBox 42"/>
           <p:cNvSpPr txBox="1"/>
           <p:nvPr/>
         </p:nvSpPr>
@@ -5874,7 +5832,7 @@
       </p:sp>
       <p:sp>
         <p:nvSpPr>
-          <p:cNvPr id="45" name="Rectangle 44"/>
+          <p:cNvPr id="44" name="Rectangle 43"/>
           <p:cNvSpPr/>
           <p:nvPr/>
         </p:nvSpPr>
@@ -5920,7 +5878,7 @@
       </p:sp>
       <p:sp>
         <p:nvSpPr>
-          <p:cNvPr id="46" name="TextBox 45"/>
+          <p:cNvPr id="45" name="TextBox 44"/>
           <p:cNvSpPr txBox="1"/>
           <p:nvPr/>
         </p:nvSpPr>
@@ -5962,7 +5920,7 @@
       </p:sp>
       <p:sp>
         <p:nvSpPr>
-          <p:cNvPr id="47" name="Rectangle 46"/>
+          <p:cNvPr id="46" name="Rectangle 45"/>
           <p:cNvSpPr/>
           <p:nvPr/>
         </p:nvSpPr>
@@ -6008,7 +5966,7 @@
       </p:sp>
       <p:sp>
         <p:nvSpPr>
-          <p:cNvPr id="48" name="TextBox 47"/>
+          <p:cNvPr id="47" name="TextBox 46"/>
           <p:cNvSpPr txBox="1"/>
           <p:nvPr/>
         </p:nvSpPr>
@@ -6050,7 +6008,7 @@
       </p:sp>
       <p:sp>
         <p:nvSpPr>
-          <p:cNvPr id="49" name="Rectangle 48"/>
+          <p:cNvPr id="48" name="Rectangle 47"/>
           <p:cNvSpPr/>
           <p:nvPr/>
         </p:nvSpPr>
@@ -6096,7 +6054,7 @@
       </p:sp>
       <p:sp>
         <p:nvSpPr>
-          <p:cNvPr id="50" name="TextBox 49"/>
+          <p:cNvPr id="49" name="TextBox 48"/>
           <p:cNvSpPr txBox="1"/>
           <p:nvPr/>
         </p:nvSpPr>
@@ -6138,14 +6096,14 @@
       </p:sp>
       <p:sp>
         <p:nvSpPr>
-          <p:cNvPr id="51" name="Rounded Rectangle 50"/>
+          <p:cNvPr id="50" name="Rounded Rectangle 49"/>
           <p:cNvSpPr/>
           <p:nvPr/>
         </p:nvSpPr>
         <p:spPr>
           <a:xfrm>
-            <a:off x="6199632" y="4206240"/>
-            <a:ext cx="5577840" cy="530352"/>
+            <a:off x="6199632" y="4059936"/>
+            <a:ext cx="5577840" cy="475488"/>
           </a:xfrm>
           <a:prstGeom prst="roundRect">
             <a:avLst>
@@ -6186,14 +6144,14 @@
       </p:sp>
       <p:sp>
         <p:nvSpPr>
-          <p:cNvPr id="52" name="Rectangle 51"/>
+          <p:cNvPr id="51" name="Rectangle 50"/>
           <p:cNvSpPr/>
           <p:nvPr/>
         </p:nvSpPr>
         <p:spPr>
           <a:xfrm>
-            <a:off x="6199632" y="4206240"/>
-            <a:ext cx="68580" cy="530352"/>
+            <a:off x="6199632" y="4059936"/>
+            <a:ext cx="68580" cy="475488"/>
           </a:xfrm>
           <a:prstGeom prst="rect">
             <a:avLst/>
@@ -6230,13 +6188,13 @@
       </p:sp>
       <p:sp>
         <p:nvSpPr>
-          <p:cNvPr id="53" name="TextBox 52"/>
+          <p:cNvPr id="52" name="TextBox 51"/>
           <p:cNvSpPr txBox="1"/>
           <p:nvPr/>
         </p:nvSpPr>
         <p:spPr>
           <a:xfrm>
-            <a:off x="6419088" y="4343400"/>
+            <a:off x="6419088" y="4169664"/>
             <a:ext cx="3200400" cy="256032"/>
           </a:xfrm>
           <a:prstGeom prst="rect">
@@ -6272,13 +6230,13 @@
       </p:sp>
       <p:sp>
         <p:nvSpPr>
-          <p:cNvPr id="54" name="TextBox 53"/>
+          <p:cNvPr id="53" name="TextBox 52"/>
           <p:cNvSpPr txBox="1"/>
           <p:nvPr/>
         </p:nvSpPr>
         <p:spPr>
           <a:xfrm>
-            <a:off x="9646920" y="4325112"/>
+            <a:off x="9646920" y="4151376"/>
             <a:ext cx="2011680" cy="274320"/>
           </a:xfrm>
           <a:prstGeom prst="rect">
@@ -6314,14 +6272,14 @@
       </p:sp>
       <p:sp>
         <p:nvSpPr>
-          <p:cNvPr id="55" name="Rounded Rectangle 54"/>
+          <p:cNvPr id="54" name="Rounded Rectangle 53"/>
           <p:cNvSpPr/>
           <p:nvPr/>
         </p:nvSpPr>
         <p:spPr>
           <a:xfrm>
-            <a:off x="6199632" y="4773168"/>
-            <a:ext cx="5577840" cy="530352"/>
+            <a:off x="6199632" y="4572000"/>
+            <a:ext cx="5577840" cy="475488"/>
           </a:xfrm>
           <a:prstGeom prst="roundRect">
             <a:avLst>
@@ -6362,14 +6320,14 @@
       </p:sp>
       <p:sp>
         <p:nvSpPr>
-          <p:cNvPr id="56" name="Rectangle 55"/>
+          <p:cNvPr id="55" name="Rectangle 54"/>
           <p:cNvSpPr/>
           <p:nvPr/>
         </p:nvSpPr>
         <p:spPr>
           <a:xfrm>
-            <a:off x="6199632" y="4773168"/>
-            <a:ext cx="68580" cy="530352"/>
+            <a:off x="6199632" y="4572000"/>
+            <a:ext cx="68580" cy="475488"/>
           </a:xfrm>
           <a:prstGeom prst="rect">
             <a:avLst/>
@@ -6406,13 +6364,13 @@
       </p:sp>
       <p:sp>
         <p:nvSpPr>
-          <p:cNvPr id="57" name="TextBox 56"/>
+          <p:cNvPr id="56" name="TextBox 55"/>
           <p:cNvSpPr txBox="1"/>
           <p:nvPr/>
         </p:nvSpPr>
         <p:spPr>
           <a:xfrm>
-            <a:off x="6419088" y="4910328"/>
+            <a:off x="6419088" y="4681728"/>
             <a:ext cx="3200400" cy="256032"/>
           </a:xfrm>
           <a:prstGeom prst="rect">
@@ -6448,13 +6406,13 @@
       </p:sp>
       <p:sp>
         <p:nvSpPr>
-          <p:cNvPr id="58" name="TextBox 57"/>
+          <p:cNvPr id="57" name="TextBox 56"/>
           <p:cNvSpPr txBox="1"/>
           <p:nvPr/>
         </p:nvSpPr>
         <p:spPr>
           <a:xfrm>
-            <a:off x="9646920" y="4892040"/>
+            <a:off x="9646920" y="4663440"/>
             <a:ext cx="2011680" cy="274320"/>
           </a:xfrm>
           <a:prstGeom prst="rect">
@@ -6490,14 +6448,14 @@
       </p:sp>
       <p:sp>
         <p:nvSpPr>
-          <p:cNvPr id="59" name="Rounded Rectangle 58"/>
+          <p:cNvPr id="58" name="Rounded Rectangle 57"/>
           <p:cNvSpPr/>
           <p:nvPr/>
         </p:nvSpPr>
         <p:spPr>
           <a:xfrm>
-            <a:off x="6199632" y="5340096"/>
-            <a:ext cx="5577840" cy="530352"/>
+            <a:off x="6199632" y="5084064"/>
+            <a:ext cx="5577840" cy="475488"/>
           </a:xfrm>
           <a:prstGeom prst="roundRect">
             <a:avLst>
@@ -6538,14 +6496,14 @@
       </p:sp>
       <p:sp>
         <p:nvSpPr>
-          <p:cNvPr id="60" name="Rectangle 59"/>
+          <p:cNvPr id="59" name="Rectangle 58"/>
           <p:cNvSpPr/>
           <p:nvPr/>
         </p:nvSpPr>
         <p:spPr>
           <a:xfrm>
-            <a:off x="6199632" y="5340096"/>
-            <a:ext cx="68580" cy="530352"/>
+            <a:off x="6199632" y="5084064"/>
+            <a:ext cx="68580" cy="475488"/>
           </a:xfrm>
           <a:prstGeom prst="rect">
             <a:avLst/>
@@ -6582,13 +6540,13 @@
       </p:sp>
       <p:sp>
         <p:nvSpPr>
-          <p:cNvPr id="61" name="TextBox 60"/>
+          <p:cNvPr id="60" name="TextBox 59"/>
           <p:cNvSpPr txBox="1"/>
           <p:nvPr/>
         </p:nvSpPr>
         <p:spPr>
           <a:xfrm>
-            <a:off x="6419088" y="5477256"/>
+            <a:off x="6419088" y="5193792"/>
             <a:ext cx="3200400" cy="256032"/>
           </a:xfrm>
           <a:prstGeom prst="rect">
@@ -6624,13 +6582,13 @@
       </p:sp>
       <p:sp>
         <p:nvSpPr>
-          <p:cNvPr id="62" name="TextBox 61"/>
+          <p:cNvPr id="61" name="TextBox 60"/>
           <p:cNvSpPr txBox="1"/>
           <p:nvPr/>
         </p:nvSpPr>
         <p:spPr>
           <a:xfrm>
-            <a:off x="9646920" y="5458968"/>
+            <a:off x="9646920" y="5175504"/>
             <a:ext cx="2011680" cy="274320"/>
           </a:xfrm>
           <a:prstGeom prst="rect">
@@ -6660,6 +6618,48 @@
                 <a:latin typeface="Calibri"/>
               </a:rPr>
               <a:t>B × E × C ÷ A</a:t>
+            </a:r>
+          </a:p>
+        </p:txBody>
+      </p:sp>
+      <p:sp>
+        <p:nvSpPr>
+          <p:cNvPr id="62" name="TextBox 61"/>
+          <p:cNvSpPr txBox="1"/>
+          <p:nvPr/>
+        </p:nvSpPr>
+        <p:spPr>
+          <a:xfrm>
+            <a:off x="6199632" y="5596128"/>
+            <a:ext cx="5577840" cy="274320"/>
+          </a:xfrm>
+          <a:prstGeom prst="rect">
+            <a:avLst/>
+          </a:prstGeom>
+          <a:noFill/>
+        </p:spPr>
+        <p:txBody>
+          <a:bodyPr wrap="square" anchor="t" lIns="0" rIns="0" tIns="0" bIns="0">
+            <a:spAutoFit/>
+          </a:bodyPr>
+          <a:lstStyle/>
+          <a:p>
+            <a:pPr algn="l">
+              <a:lnSpc>
+                <a:spcPct val="110000"/>
+              </a:lnSpc>
+              <a:spcAft>
+                <a:spcPts val="400"/>
+              </a:spcAft>
+            </a:pPr>
+            <a:r>
+              <a:rPr sz="850" b="0" i="0">
+                <a:solidFill>
+                  <a:srgbClr val="6B7280"/>
+                </a:solidFill>
+                <a:latin typeface="Calibri"/>
+              </a:rPr>
+              <a:t>Assumes typing time falls in step with the values the software fills; the trial tests that.</a:t>
             </a:r>
           </a:p>
         </p:txBody>
@@ -6999,49 +6999,7 @@
       </p:sp>
       <p:sp>
         <p:nvSpPr>
-          <p:cNvPr id="5" name="TextBox 4"/>
-          <p:cNvSpPr txBox="1"/>
-          <p:nvPr/>
-        </p:nvSpPr>
-        <p:spPr>
-          <a:xfrm>
-            <a:off x="795528" y="420624"/>
-            <a:ext cx="2560320" cy="201168"/>
-          </a:xfrm>
-          <a:prstGeom prst="rect">
-            <a:avLst/>
-          </a:prstGeom>
-          <a:noFill/>
-        </p:spPr>
-        <p:txBody>
-          <a:bodyPr wrap="square" anchor="t" lIns="0" rIns="0" tIns="0" bIns="0">
-            <a:spAutoFit/>
-          </a:bodyPr>
-          <a:lstStyle/>
-          <a:p>
-            <a:pPr algn="l">
-              <a:lnSpc>
-                <a:spcPct val="100000"/>
-              </a:lnSpc>
-              <a:spcAft>
-                <a:spcPts val="400"/>
-              </a:spcAft>
-            </a:pPr>
-            <a:r>
-              <a:rPr sz="750" b="0" i="0">
-                <a:solidFill>
-                  <a:srgbClr val="6B7280"/>
-                </a:solidFill>
-                <a:latin typeface="Calibri"/>
-              </a:rPr>
-              <a:t>AI  COST  INTELLIGENCE</a:t>
-            </a:r>
-          </a:p>
-        </p:txBody>
-      </p:sp>
-      <p:sp>
-        <p:nvSpPr>
-          <p:cNvPr id="6" name="Rectangle 5"/>
+          <p:cNvPr id="5" name="Rectangle 4"/>
           <p:cNvSpPr/>
           <p:nvPr/>
         </p:nvSpPr>
@@ -7085,7 +7043,7 @@
       </p:sp>
       <p:sp>
         <p:nvSpPr>
-          <p:cNvPr id="7" name="TextBox 6"/>
+          <p:cNvPr id="6" name="TextBox 5"/>
           <p:cNvSpPr txBox="1"/>
           <p:nvPr/>
         </p:nvSpPr>
@@ -7127,7 +7085,7 @@
       </p:sp>
       <p:sp>
         <p:nvSpPr>
-          <p:cNvPr id="8" name="TextBox 7"/>
+          <p:cNvPr id="7" name="TextBox 6"/>
           <p:cNvSpPr txBox="1"/>
           <p:nvPr/>
         </p:nvSpPr>
@@ -7169,7 +7127,7 @@
       </p:sp>
       <p:sp>
         <p:nvSpPr>
-          <p:cNvPr id="9" name="TextBox 8"/>
+          <p:cNvPr id="8" name="TextBox 7"/>
           <p:cNvSpPr txBox="1"/>
           <p:nvPr/>
         </p:nvSpPr>
@@ -7211,7 +7169,7 @@
       </p:sp>
       <p:sp>
         <p:nvSpPr>
-          <p:cNvPr id="10" name="Rounded Rectangle 9"/>
+          <p:cNvPr id="9" name="Rounded Rectangle 8"/>
           <p:cNvSpPr/>
           <p:nvPr/>
         </p:nvSpPr>
@@ -7259,7 +7217,7 @@
       </p:sp>
       <p:sp>
         <p:nvSpPr>
-          <p:cNvPr id="11" name="Rectangle 10"/>
+          <p:cNvPr id="10" name="Rectangle 9"/>
           <p:cNvSpPr/>
           <p:nvPr/>
         </p:nvSpPr>
@@ -7303,7 +7261,7 @@
       </p:sp>
       <p:sp>
         <p:nvSpPr>
-          <p:cNvPr id="12" name="Oval 11"/>
+          <p:cNvPr id="11" name="Oval 10"/>
           <p:cNvSpPr/>
           <p:nvPr/>
         </p:nvSpPr>
@@ -7347,7 +7305,7 @@
       </p:sp>
       <p:pic>
         <p:nvPicPr>
-          <p:cNvPr id="13" name="Picture 12" descr="upload.png"/>
+          <p:cNvPr id="12" name="Picture 11" descr="upload.png"/>
           <p:cNvPicPr>
             <a:picLocks noChangeAspect="1"/>
           </p:cNvPicPr>
@@ -7371,7 +7329,7 @@
       </p:pic>
       <p:sp>
         <p:nvSpPr>
-          <p:cNvPr id="14" name="TextBox 13"/>
+          <p:cNvPr id="13" name="TextBox 12"/>
           <p:cNvSpPr txBox="1"/>
           <p:nvPr/>
         </p:nvSpPr>
@@ -7413,7 +7371,7 @@
       </p:sp>
       <p:sp>
         <p:nvSpPr>
-          <p:cNvPr id="15" name="TextBox 14"/>
+          <p:cNvPr id="14" name="TextBox 13"/>
           <p:cNvSpPr txBox="1"/>
           <p:nvPr/>
         </p:nvSpPr>
@@ -7455,7 +7413,7 @@
       </p:sp>
       <p:sp>
         <p:nvSpPr>
-          <p:cNvPr id="16" name="Right Arrow 15"/>
+          <p:cNvPr id="15" name="Right Arrow 14"/>
           <p:cNvSpPr/>
           <p:nvPr/>
         </p:nvSpPr>
@@ -7499,7 +7457,7 @@
       </p:sp>
       <p:sp>
         <p:nvSpPr>
-          <p:cNvPr id="17" name="Rounded Rectangle 16"/>
+          <p:cNvPr id="16" name="Rounded Rectangle 15"/>
           <p:cNvSpPr/>
           <p:nvPr/>
         </p:nvSpPr>
@@ -7547,7 +7505,7 @@
       </p:sp>
       <p:sp>
         <p:nvSpPr>
-          <p:cNvPr id="18" name="Rectangle 17"/>
+          <p:cNvPr id="17" name="Rectangle 16"/>
           <p:cNvSpPr/>
           <p:nvPr/>
         </p:nvSpPr>
@@ -7591,7 +7549,7 @@
       </p:sp>
       <p:sp>
         <p:nvSpPr>
-          <p:cNvPr id="19" name="Oval 18"/>
+          <p:cNvPr id="18" name="Oval 17"/>
           <p:cNvSpPr/>
           <p:nvPr/>
         </p:nvSpPr>
@@ -7635,7 +7593,7 @@
       </p:sp>
       <p:pic>
         <p:nvPicPr>
-          <p:cNvPr id="20" name="Picture 19" descr="ruler.png"/>
+          <p:cNvPr id="19" name="Picture 18" descr="ruler.png"/>
           <p:cNvPicPr>
             <a:picLocks noChangeAspect="1"/>
           </p:cNvPicPr>
@@ -7659,7 +7617,7 @@
       </p:pic>
       <p:sp>
         <p:nvSpPr>
-          <p:cNvPr id="21" name="TextBox 20"/>
+          <p:cNvPr id="20" name="TextBox 19"/>
           <p:cNvSpPr txBox="1"/>
           <p:nvPr/>
         </p:nvSpPr>
@@ -7701,7 +7659,7 @@
       </p:sp>
       <p:sp>
         <p:nvSpPr>
-          <p:cNvPr id="22" name="TextBox 21"/>
+          <p:cNvPr id="21" name="TextBox 20"/>
           <p:cNvSpPr txBox="1"/>
           <p:nvPr/>
         </p:nvSpPr>
@@ -7743,7 +7701,7 @@
       </p:sp>
       <p:sp>
         <p:nvSpPr>
-          <p:cNvPr id="23" name="Right Arrow 22"/>
+          <p:cNvPr id="22" name="Right Arrow 21"/>
           <p:cNvSpPr/>
           <p:nvPr/>
         </p:nvSpPr>
@@ -7787,7 +7745,7 @@
       </p:sp>
       <p:sp>
         <p:nvSpPr>
-          <p:cNvPr id="24" name="Rounded Rectangle 23"/>
+          <p:cNvPr id="23" name="Rounded Rectangle 22"/>
           <p:cNvSpPr/>
           <p:nvPr/>
         </p:nvSpPr>
@@ -7835,7 +7793,7 @@
       </p:sp>
       <p:sp>
         <p:nvSpPr>
-          <p:cNvPr id="25" name="Rectangle 24"/>
+          <p:cNvPr id="24" name="Rectangle 23"/>
           <p:cNvSpPr/>
           <p:nvPr/>
         </p:nvSpPr>
@@ -7879,7 +7837,7 @@
       </p:sp>
       <p:sp>
         <p:nvSpPr>
-          <p:cNvPr id="26" name="Oval 25"/>
+          <p:cNvPr id="25" name="Oval 24"/>
           <p:cNvSpPr/>
           <p:nvPr/>
         </p:nvSpPr>
@@ -7923,7 +7881,7 @@
       </p:sp>
       <p:pic>
         <p:nvPicPr>
-          <p:cNvPr id="27" name="Picture 26" descr="cog.png"/>
+          <p:cNvPr id="26" name="Picture 25" descr="cog.png"/>
           <p:cNvPicPr>
             <a:picLocks noChangeAspect="1"/>
           </p:cNvPicPr>
@@ -7947,7 +7905,7 @@
       </p:pic>
       <p:sp>
         <p:nvSpPr>
-          <p:cNvPr id="28" name="TextBox 27"/>
+          <p:cNvPr id="27" name="TextBox 26"/>
           <p:cNvSpPr txBox="1"/>
           <p:nvPr/>
         </p:nvSpPr>
@@ -7989,7 +7947,7 @@
       </p:sp>
       <p:sp>
         <p:nvSpPr>
-          <p:cNvPr id="29" name="TextBox 28"/>
+          <p:cNvPr id="28" name="TextBox 27"/>
           <p:cNvSpPr txBox="1"/>
           <p:nvPr/>
         </p:nvSpPr>
@@ -8031,7 +7989,7 @@
       </p:sp>
       <p:sp>
         <p:nvSpPr>
-          <p:cNvPr id="30" name="Right Arrow 29"/>
+          <p:cNvPr id="29" name="Right Arrow 28"/>
           <p:cNvSpPr/>
           <p:nvPr/>
         </p:nvSpPr>
@@ -8075,7 +8033,7 @@
       </p:sp>
       <p:sp>
         <p:nvSpPr>
-          <p:cNvPr id="31" name="Rounded Rectangle 30"/>
+          <p:cNvPr id="30" name="Rounded Rectangle 29"/>
           <p:cNvSpPr/>
           <p:nvPr/>
         </p:nvSpPr>
@@ -8123,7 +8081,7 @@
       </p:sp>
       <p:sp>
         <p:nvSpPr>
-          <p:cNvPr id="32" name="Rectangle 31"/>
+          <p:cNvPr id="31" name="Rectangle 30"/>
           <p:cNvSpPr/>
           <p:nvPr/>
         </p:nvSpPr>
@@ -8167,7 +8125,7 @@
       </p:sp>
       <p:sp>
         <p:nvSpPr>
-          <p:cNvPr id="33" name="Oval 32"/>
+          <p:cNvPr id="32" name="Oval 31"/>
           <p:cNvSpPr/>
           <p:nvPr/>
         </p:nvSpPr>
@@ -8211,7 +8169,7 @@
       </p:sp>
       <p:pic>
         <p:nvPicPr>
-          <p:cNvPr id="34" name="Picture 33" descr="person.png"/>
+          <p:cNvPr id="33" name="Picture 32" descr="person.png"/>
           <p:cNvPicPr>
             <a:picLocks noChangeAspect="1"/>
           </p:cNvPicPr>
@@ -8235,7 +8193,7 @@
       </p:pic>
       <p:sp>
         <p:nvSpPr>
-          <p:cNvPr id="35" name="TextBox 34"/>
+          <p:cNvPr id="34" name="TextBox 33"/>
           <p:cNvSpPr txBox="1"/>
           <p:nvPr/>
         </p:nvSpPr>
@@ -8277,7 +8235,7 @@
       </p:sp>
       <p:sp>
         <p:nvSpPr>
-          <p:cNvPr id="36" name="TextBox 35"/>
+          <p:cNvPr id="35" name="TextBox 34"/>
           <p:cNvSpPr txBox="1"/>
           <p:nvPr/>
         </p:nvSpPr>
@@ -8319,7 +8277,7 @@
       </p:sp>
       <p:sp>
         <p:nvSpPr>
-          <p:cNvPr id="37" name="Right Arrow 36"/>
+          <p:cNvPr id="36" name="Right Arrow 35"/>
           <p:cNvSpPr/>
           <p:nvPr/>
         </p:nvSpPr>
@@ -8363,7 +8321,7 @@
       </p:sp>
       <p:sp>
         <p:nvSpPr>
-          <p:cNvPr id="38" name="Rounded Rectangle 37"/>
+          <p:cNvPr id="37" name="Rounded Rectangle 36"/>
           <p:cNvSpPr/>
           <p:nvPr/>
         </p:nvSpPr>
@@ -8411,7 +8369,7 @@
       </p:sp>
       <p:sp>
         <p:nvSpPr>
-          <p:cNvPr id="39" name="Rectangle 38"/>
+          <p:cNvPr id="38" name="Rectangle 37"/>
           <p:cNvSpPr/>
           <p:nvPr/>
         </p:nvSpPr>
@@ -8455,7 +8413,7 @@
       </p:sp>
       <p:sp>
         <p:nvSpPr>
-          <p:cNvPr id="40" name="Oval 39"/>
+          <p:cNvPr id="39" name="Oval 38"/>
           <p:cNvSpPr/>
           <p:nvPr/>
         </p:nvSpPr>
@@ -8499,7 +8457,7 @@
       </p:sp>
       <p:pic>
         <p:nvPicPr>
-          <p:cNvPr id="41" name="Picture 40" descr="calc.png"/>
+          <p:cNvPr id="40" name="Picture 39" descr="calc.png"/>
           <p:cNvPicPr>
             <a:picLocks noChangeAspect="1"/>
           </p:cNvPicPr>
@@ -8523,7 +8481,7 @@
       </p:pic>
       <p:sp>
         <p:nvSpPr>
-          <p:cNvPr id="42" name="TextBox 41"/>
+          <p:cNvPr id="41" name="TextBox 40"/>
           <p:cNvSpPr txBox="1"/>
           <p:nvPr/>
         </p:nvSpPr>
@@ -8565,7 +8523,7 @@
       </p:sp>
       <p:sp>
         <p:nvSpPr>
-          <p:cNvPr id="43" name="TextBox 42"/>
+          <p:cNvPr id="42" name="TextBox 41"/>
           <p:cNvSpPr txBox="1"/>
           <p:nvPr/>
         </p:nvSpPr>
@@ -8607,7 +8565,7 @@
       </p:sp>
       <p:sp>
         <p:nvSpPr>
-          <p:cNvPr id="44" name="Rounded Rectangle 43"/>
+          <p:cNvPr id="43" name="Rounded Rectangle 42"/>
           <p:cNvSpPr/>
           <p:nvPr/>
         </p:nvSpPr>
@@ -8655,7 +8613,7 @@
       </p:sp>
       <p:sp>
         <p:nvSpPr>
-          <p:cNvPr id="45" name="Rectangle 44"/>
+          <p:cNvPr id="44" name="Rectangle 43"/>
           <p:cNvSpPr/>
           <p:nvPr/>
         </p:nvSpPr>
@@ -8699,7 +8657,7 @@
       </p:sp>
       <p:sp>
         <p:nvSpPr>
-          <p:cNvPr id="46" name="TextBox 45"/>
+          <p:cNvPr id="45" name="TextBox 44"/>
           <p:cNvSpPr txBox="1"/>
           <p:nvPr/>
         </p:nvSpPr>
@@ -8741,7 +8699,7 @@
       </p:sp>
       <p:sp>
         <p:nvSpPr>
-          <p:cNvPr id="47" name="TextBox 46"/>
+          <p:cNvPr id="46" name="TextBox 45"/>
           <p:cNvSpPr txBox="1"/>
           <p:nvPr/>
         </p:nvSpPr>
@@ -8869,7 +8827,7 @@
       </p:sp>
       <p:sp>
         <p:nvSpPr>
-          <p:cNvPr id="48" name="Rounded Rectangle 47"/>
+          <p:cNvPr id="47" name="Rounded Rectangle 46"/>
           <p:cNvSpPr/>
           <p:nvPr/>
         </p:nvSpPr>
@@ -8917,7 +8875,7 @@
       </p:sp>
       <p:sp>
         <p:nvSpPr>
-          <p:cNvPr id="49" name="Rectangle 48"/>
+          <p:cNvPr id="48" name="Rectangle 47"/>
           <p:cNvSpPr/>
           <p:nvPr/>
         </p:nvSpPr>
@@ -8961,7 +8919,7 @@
       </p:sp>
       <p:sp>
         <p:nvSpPr>
-          <p:cNvPr id="50" name="TextBox 49"/>
+          <p:cNvPr id="49" name="TextBox 48"/>
           <p:cNvSpPr txBox="1"/>
           <p:nvPr/>
         </p:nvSpPr>
@@ -9003,7 +8961,7 @@
       </p:sp>
       <p:sp>
         <p:nvSpPr>
-          <p:cNvPr id="51" name="TextBox 50"/>
+          <p:cNvPr id="50" name="TextBox 49"/>
           <p:cNvSpPr txBox="1"/>
           <p:nvPr/>
         </p:nvSpPr>
@@ -9131,7 +9089,7 @@
       </p:sp>
       <p:sp>
         <p:nvSpPr>
-          <p:cNvPr id="52" name="Rounded Rectangle 51"/>
+          <p:cNvPr id="51" name="Rounded Rectangle 50"/>
           <p:cNvSpPr/>
           <p:nvPr/>
         </p:nvSpPr>
@@ -9177,7 +9135,7 @@
       </p:sp>
       <p:sp>
         <p:nvSpPr>
-          <p:cNvPr id="53" name="Rectangle 52"/>
+          <p:cNvPr id="52" name="Rectangle 51"/>
           <p:cNvSpPr/>
           <p:nvPr/>
         </p:nvSpPr>
@@ -9221,7 +9179,7 @@
       </p:sp>
       <p:sp>
         <p:nvSpPr>
-          <p:cNvPr id="54" name="TextBox 53"/>
+          <p:cNvPr id="53" name="TextBox 52"/>
           <p:cNvSpPr txBox="1"/>
           <p:nvPr/>
         </p:nvSpPr>
@@ -9263,7 +9221,7 @@
       </p:sp>
       <p:sp>
         <p:nvSpPr>
-          <p:cNvPr id="55" name="TextBox 54"/>
+          <p:cNvPr id="54" name="TextBox 53"/>
           <p:cNvSpPr txBox="1"/>
           <p:nvPr/>
         </p:nvSpPr>
@@ -9464,49 +9422,7 @@
       </p:sp>
       <p:sp>
         <p:nvSpPr>
-          <p:cNvPr id="5" name="TextBox 4"/>
-          <p:cNvSpPr txBox="1"/>
-          <p:nvPr/>
-        </p:nvSpPr>
-        <p:spPr>
-          <a:xfrm>
-            <a:off x="795528" y="420624"/>
-            <a:ext cx="2560320" cy="201168"/>
-          </a:xfrm>
-          <a:prstGeom prst="rect">
-            <a:avLst/>
-          </a:prstGeom>
-          <a:noFill/>
-        </p:spPr>
-        <p:txBody>
-          <a:bodyPr wrap="square" anchor="t" lIns="0" rIns="0" tIns="0" bIns="0">
-            <a:spAutoFit/>
-          </a:bodyPr>
-          <a:lstStyle/>
-          <a:p>
-            <a:pPr algn="l">
-              <a:lnSpc>
-                <a:spcPct val="100000"/>
-              </a:lnSpc>
-              <a:spcAft>
-                <a:spcPts val="400"/>
-              </a:spcAft>
-            </a:pPr>
-            <a:r>
-              <a:rPr sz="750" b="0" i="0">
-                <a:solidFill>
-                  <a:srgbClr val="6B7280"/>
-                </a:solidFill>
-                <a:latin typeface="Calibri"/>
-              </a:rPr>
-              <a:t>AI  COST  INTELLIGENCE</a:t>
-            </a:r>
-          </a:p>
-        </p:txBody>
-      </p:sp>
-      <p:sp>
-        <p:nvSpPr>
-          <p:cNvPr id="6" name="Rectangle 5"/>
+          <p:cNvPr id="5" name="Rectangle 4"/>
           <p:cNvSpPr/>
           <p:nvPr/>
         </p:nvSpPr>
@@ -9550,7 +9466,7 @@
       </p:sp>
       <p:sp>
         <p:nvSpPr>
-          <p:cNvPr id="7" name="TextBox 6"/>
+          <p:cNvPr id="6" name="TextBox 5"/>
           <p:cNvSpPr txBox="1"/>
           <p:nvPr/>
         </p:nvSpPr>
@@ -9592,7 +9508,7 @@
       </p:sp>
       <p:sp>
         <p:nvSpPr>
-          <p:cNvPr id="8" name="TextBox 7"/>
+          <p:cNvPr id="7" name="TextBox 6"/>
           <p:cNvSpPr txBox="1"/>
           <p:nvPr/>
         </p:nvSpPr>
@@ -9634,7 +9550,7 @@
       </p:sp>
       <p:sp>
         <p:nvSpPr>
-          <p:cNvPr id="9" name="TextBox 8"/>
+          <p:cNvPr id="8" name="TextBox 7"/>
           <p:cNvSpPr txBox="1"/>
           <p:nvPr/>
         </p:nvSpPr>
@@ -9669,14 +9585,14 @@
                 </a:solidFill>
                 <a:latin typeface="Calibri"/>
               </a:rPr>
-              <a:t>Six things we cannot do at all today. All of them exist in the tool now.</a:t>
-            </a:r>
-          </a:p>
-        </p:txBody>
-      </p:sp>
-      <p:sp>
-        <p:nvSpPr>
-          <p:cNvPr id="10" name="Rounded Rectangle 9"/>
+              <a:t>What the tool does. Five of these work today, one part at a time — running them over a whole basket is what Option 2 builds.</a:t>
+            </a:r>
+          </a:p>
+        </p:txBody>
+      </p:sp>
+      <p:sp>
+        <p:nvSpPr>
+          <p:cNvPr id="9" name="Rounded Rectangle 8"/>
           <p:cNvSpPr/>
           <p:nvPr/>
         </p:nvSpPr>
@@ -9724,7 +9640,7 @@
       </p:sp>
       <p:sp>
         <p:nvSpPr>
-          <p:cNvPr id="11" name="Rectangle 10"/>
+          <p:cNvPr id="10" name="Rectangle 9"/>
           <p:cNvSpPr/>
           <p:nvPr/>
         </p:nvSpPr>
@@ -9737,7 +9653,7 @@
             <a:avLst/>
           </a:prstGeom>
           <a:solidFill>
-            <a:srgbClr val="6B3FA0"/>
+            <a:srgbClr val="B7791F"/>
           </a:solidFill>
           <a:ln>
             <a:noFill/>
@@ -9768,7 +9684,7 @@
       </p:sp>
       <p:sp>
         <p:nvSpPr>
-          <p:cNvPr id="12" name="Oval 11"/>
+          <p:cNvPr id="11" name="Oval 10"/>
           <p:cNvSpPr/>
           <p:nvPr/>
         </p:nvSpPr>
@@ -9781,7 +9697,7 @@
             <a:avLst/>
           </a:prstGeom>
           <a:solidFill>
-            <a:srgbClr val="6B3FA0"/>
+            <a:srgbClr val="B7791F"/>
           </a:solidFill>
           <a:ln>
             <a:noFill/>
@@ -9812,7 +9728,7 @@
       </p:sp>
       <p:pic>
         <p:nvPicPr>
-          <p:cNvPr id="13" name="Picture 12" descr="cog.png"/>
+          <p:cNvPr id="12" name="Picture 11" descr="cog.png"/>
           <p:cNvPicPr>
             <a:picLocks noChangeAspect="1"/>
           </p:cNvPicPr>
@@ -9836,7 +9752,7 @@
       </p:pic>
       <p:sp>
         <p:nvSpPr>
-          <p:cNvPr id="14" name="TextBox 13"/>
+          <p:cNvPr id="13" name="TextBox 12"/>
           <p:cNvSpPr txBox="1"/>
           <p:nvPr/>
         </p:nvSpPr>
@@ -9878,7 +9794,7 @@
       </p:sp>
       <p:sp>
         <p:nvSpPr>
-          <p:cNvPr id="15" name="TextBox 14"/>
+          <p:cNvPr id="14" name="TextBox 13"/>
           <p:cNvSpPr txBox="1"/>
           <p:nvPr/>
         </p:nvSpPr>
@@ -9913,14 +9829,14 @@
                 </a:solidFill>
                 <a:latin typeface="Calibri"/>
               </a:rPr>
-              <a:t>A list of parts and their 3D models goes in. Every part is costed and reported without anyone sitting there.</a:t>
-            </a:r>
-          </a:p>
-        </p:txBody>
-      </p:sp>
-      <p:sp>
-        <p:nvSpPr>
-          <p:cNvPr id="16" name="Rounded Rectangle 15"/>
+              <a:t>A list of parts and their 3D models goes in. Every part costed and reported with nobody sitting there. This is the one Option 2 builds.</a:t>
+            </a:r>
+          </a:p>
+        </p:txBody>
+      </p:sp>
+      <p:sp>
+        <p:nvSpPr>
+          <p:cNvPr id="15" name="Rounded Rectangle 14"/>
           <p:cNvSpPr/>
           <p:nvPr/>
         </p:nvSpPr>
@@ -9968,7 +9884,7 @@
       </p:sp>
       <p:sp>
         <p:nvSpPr>
-          <p:cNvPr id="17" name="Rectangle 16"/>
+          <p:cNvPr id="16" name="Rectangle 15"/>
           <p:cNvSpPr/>
           <p:nvPr/>
         </p:nvSpPr>
@@ -10012,7 +9928,7 @@
       </p:sp>
       <p:sp>
         <p:nvSpPr>
-          <p:cNvPr id="18" name="Oval 17"/>
+          <p:cNvPr id="17" name="Oval 16"/>
           <p:cNvSpPr/>
           <p:nvPr/>
         </p:nvSpPr>
@@ -10056,7 +9972,7 @@
       </p:sp>
       <p:pic>
         <p:nvPicPr>
-          <p:cNvPr id="19" name="Picture 18" descr="eye.png"/>
+          <p:cNvPr id="18" name="Picture 17" descr="eye.png"/>
           <p:cNvPicPr>
             <a:picLocks noChangeAspect="1"/>
           </p:cNvPicPr>
@@ -10080,7 +9996,7 @@
       </p:pic>
       <p:sp>
         <p:nvSpPr>
-          <p:cNvPr id="20" name="TextBox 19"/>
+          <p:cNvPr id="19" name="TextBox 18"/>
           <p:cNvSpPr txBox="1"/>
           <p:nvPr/>
         </p:nvSpPr>
@@ -10122,7 +10038,7 @@
       </p:sp>
       <p:sp>
         <p:nvSpPr>
-          <p:cNvPr id="21" name="TextBox 20"/>
+          <p:cNvPr id="20" name="TextBox 19"/>
           <p:cNvSpPr txBox="1"/>
           <p:nvPr/>
         </p:nvSpPr>
@@ -10164,7 +10080,7 @@
       </p:sp>
       <p:sp>
         <p:nvSpPr>
-          <p:cNvPr id="22" name="Rounded Rectangle 21"/>
+          <p:cNvPr id="21" name="Rounded Rectangle 20"/>
           <p:cNvSpPr/>
           <p:nvPr/>
         </p:nvSpPr>
@@ -10212,7 +10128,7 @@
       </p:sp>
       <p:sp>
         <p:nvSpPr>
-          <p:cNvPr id="23" name="Rectangle 22"/>
+          <p:cNvPr id="22" name="Rectangle 21"/>
           <p:cNvSpPr/>
           <p:nvPr/>
         </p:nvSpPr>
@@ -10256,7 +10172,7 @@
       </p:sp>
       <p:sp>
         <p:nvSpPr>
-          <p:cNvPr id="24" name="Oval 23"/>
+          <p:cNvPr id="23" name="Oval 22"/>
           <p:cNvSpPr/>
           <p:nvPr/>
         </p:nvSpPr>
@@ -10300,7 +10216,7 @@
       </p:sp>
       <p:pic>
         <p:nvPicPr>
-          <p:cNvPr id="25" name="Picture 24" descr="clip.png"/>
+          <p:cNvPr id="24" name="Picture 23" descr="clip.png"/>
           <p:cNvPicPr>
             <a:picLocks noChangeAspect="1"/>
           </p:cNvPicPr>
@@ -10324,7 +10240,7 @@
       </p:pic>
       <p:sp>
         <p:nvSpPr>
-          <p:cNvPr id="26" name="TextBox 25"/>
+          <p:cNvPr id="25" name="TextBox 24"/>
           <p:cNvSpPr txBox="1"/>
           <p:nvPr/>
         </p:nvSpPr>
@@ -10366,7 +10282,7 @@
       </p:sp>
       <p:sp>
         <p:nvSpPr>
-          <p:cNvPr id="27" name="TextBox 26"/>
+          <p:cNvPr id="26" name="TextBox 25"/>
           <p:cNvSpPr txBox="1"/>
           <p:nvPr/>
         </p:nvSpPr>
@@ -10408,7 +10324,7 @@
       </p:sp>
       <p:sp>
         <p:nvSpPr>
-          <p:cNvPr id="28" name="Rounded Rectangle 27"/>
+          <p:cNvPr id="27" name="Rounded Rectangle 26"/>
           <p:cNvSpPr/>
           <p:nvPr/>
         </p:nvSpPr>
@@ -10456,7 +10372,7 @@
       </p:sp>
       <p:sp>
         <p:nvSpPr>
-          <p:cNvPr id="29" name="Rectangle 28"/>
+          <p:cNvPr id="28" name="Rectangle 27"/>
           <p:cNvSpPr/>
           <p:nvPr/>
         </p:nvSpPr>
@@ -10500,7 +10416,7 @@
       </p:sp>
       <p:sp>
         <p:nvSpPr>
-          <p:cNvPr id="30" name="Oval 29"/>
+          <p:cNvPr id="29" name="Oval 28"/>
           <p:cNvSpPr/>
           <p:nvPr/>
         </p:nvSpPr>
@@ -10544,7 +10460,7 @@
       </p:sp>
       <p:pic>
         <p:nvPicPr>
-          <p:cNvPr id="31" name="Picture 30" descr="person.png"/>
+          <p:cNvPr id="30" name="Picture 29" descr="person.png"/>
           <p:cNvPicPr>
             <a:picLocks noChangeAspect="1"/>
           </p:cNvPicPr>
@@ -10568,7 +10484,7 @@
       </p:pic>
       <p:sp>
         <p:nvSpPr>
-          <p:cNvPr id="32" name="TextBox 31"/>
+          <p:cNvPr id="31" name="TextBox 30"/>
           <p:cNvSpPr txBox="1"/>
           <p:nvPr/>
         </p:nvSpPr>
@@ -10610,7 +10526,7 @@
       </p:sp>
       <p:sp>
         <p:nvSpPr>
-          <p:cNvPr id="33" name="TextBox 32"/>
+          <p:cNvPr id="32" name="TextBox 31"/>
           <p:cNvSpPr txBox="1"/>
           <p:nvPr/>
         </p:nvSpPr>
@@ -10652,7 +10568,7 @@
       </p:sp>
       <p:sp>
         <p:nvSpPr>
-          <p:cNvPr id="34" name="Rounded Rectangle 33"/>
+          <p:cNvPr id="33" name="Rounded Rectangle 32"/>
           <p:cNvSpPr/>
           <p:nvPr/>
         </p:nvSpPr>
@@ -10700,7 +10616,7 @@
       </p:sp>
       <p:sp>
         <p:nvSpPr>
-          <p:cNvPr id="35" name="Rectangle 34"/>
+          <p:cNvPr id="34" name="Rectangle 33"/>
           <p:cNvSpPr/>
           <p:nvPr/>
         </p:nvSpPr>
@@ -10744,7 +10660,7 @@
       </p:sp>
       <p:sp>
         <p:nvSpPr>
-          <p:cNvPr id="36" name="Oval 35"/>
+          <p:cNvPr id="35" name="Oval 34"/>
           <p:cNvSpPr/>
           <p:nvPr/>
         </p:nvSpPr>
@@ -10788,7 +10704,7 @@
       </p:sp>
       <p:pic>
         <p:nvPicPr>
-          <p:cNvPr id="37" name="Picture 36" descr="coins.png"/>
+          <p:cNvPr id="36" name="Picture 35" descr="coins.png"/>
           <p:cNvPicPr>
             <a:picLocks noChangeAspect="1"/>
           </p:cNvPicPr>
@@ -10812,7 +10728,7 @@
       </p:pic>
       <p:sp>
         <p:nvSpPr>
-          <p:cNvPr id="38" name="TextBox 37"/>
+          <p:cNvPr id="37" name="TextBox 36"/>
           <p:cNvSpPr txBox="1"/>
           <p:nvPr/>
         </p:nvSpPr>
@@ -10854,7 +10770,7 @@
       </p:sp>
       <p:sp>
         <p:nvSpPr>
-          <p:cNvPr id="39" name="TextBox 38"/>
+          <p:cNvPr id="38" name="TextBox 37"/>
           <p:cNvSpPr txBox="1"/>
           <p:nvPr/>
         </p:nvSpPr>
@@ -10896,7 +10812,7 @@
       </p:sp>
       <p:sp>
         <p:nvSpPr>
-          <p:cNvPr id="40" name="Rounded Rectangle 39"/>
+          <p:cNvPr id="39" name="Rounded Rectangle 38"/>
           <p:cNvSpPr/>
           <p:nvPr/>
         </p:nvSpPr>
@@ -10944,7 +10860,7 @@
       </p:sp>
       <p:sp>
         <p:nvSpPr>
-          <p:cNvPr id="41" name="Rectangle 40"/>
+          <p:cNvPr id="40" name="Rectangle 39"/>
           <p:cNvSpPr/>
           <p:nvPr/>
         </p:nvSpPr>
@@ -10988,7 +10904,7 @@
       </p:sp>
       <p:sp>
         <p:nvSpPr>
-          <p:cNvPr id="42" name="Oval 41"/>
+          <p:cNvPr id="41" name="Oval 40"/>
           <p:cNvSpPr/>
           <p:nvPr/>
         </p:nvSpPr>
@@ -11032,7 +10948,7 @@
       </p:sp>
       <p:pic>
         <p:nvPicPr>
-          <p:cNvPr id="43" name="Picture 42" descr="press.png"/>
+          <p:cNvPr id="42" name="Picture 41" descr="press.png"/>
           <p:cNvPicPr>
             <a:picLocks noChangeAspect="1"/>
           </p:cNvPicPr>
@@ -11056,7 +10972,7 @@
       </p:pic>
       <p:sp>
         <p:nvSpPr>
-          <p:cNvPr id="44" name="TextBox 43"/>
+          <p:cNvPr id="43" name="TextBox 42"/>
           <p:cNvSpPr txBox="1"/>
           <p:nvPr/>
         </p:nvSpPr>
@@ -11098,7 +11014,7 @@
       </p:sp>
       <p:sp>
         <p:nvSpPr>
-          <p:cNvPr id="45" name="TextBox 44"/>
+          <p:cNvPr id="44" name="TextBox 43"/>
           <p:cNvSpPr txBox="1"/>
           <p:nvPr/>
         </p:nvSpPr>
@@ -11140,7 +11056,7 @@
       </p:sp>
       <p:sp>
         <p:nvSpPr>
-          <p:cNvPr id="46" name="Rounded Rectangle 45"/>
+          <p:cNvPr id="45" name="Rounded Rectangle 44"/>
           <p:cNvSpPr/>
           <p:nvPr/>
         </p:nvSpPr>
@@ -11186,7 +11102,7 @@
       </p:sp>
       <p:sp>
         <p:nvSpPr>
-          <p:cNvPr id="47" name="Rectangle 46"/>
+          <p:cNvPr id="46" name="Rectangle 45"/>
           <p:cNvSpPr/>
           <p:nvPr/>
         </p:nvSpPr>
@@ -11230,7 +11146,7 @@
       </p:sp>
       <p:sp>
         <p:nvSpPr>
-          <p:cNvPr id="48" name="TextBox 47"/>
+          <p:cNvPr id="47" name="TextBox 46"/>
           <p:cNvSpPr txBox="1"/>
           <p:nvPr/>
         </p:nvSpPr>
@@ -11272,7 +11188,7 @@
       </p:sp>
       <p:sp>
         <p:nvSpPr>
-          <p:cNvPr id="49" name="TextBox 48"/>
+          <p:cNvPr id="48" name="TextBox 47"/>
           <p:cNvSpPr txBox="1"/>
           <p:nvPr/>
         </p:nvSpPr>
@@ -11473,49 +11389,7 @@
       </p:sp>
       <p:sp>
         <p:nvSpPr>
-          <p:cNvPr id="5" name="TextBox 4"/>
-          <p:cNvSpPr txBox="1"/>
-          <p:nvPr/>
-        </p:nvSpPr>
-        <p:spPr>
-          <a:xfrm>
-            <a:off x="795528" y="420624"/>
-            <a:ext cx="2560320" cy="201168"/>
-          </a:xfrm>
-          <a:prstGeom prst="rect">
-            <a:avLst/>
-          </a:prstGeom>
-          <a:noFill/>
-        </p:spPr>
-        <p:txBody>
-          <a:bodyPr wrap="square" anchor="t" lIns="0" rIns="0" tIns="0" bIns="0">
-            <a:spAutoFit/>
-          </a:bodyPr>
-          <a:lstStyle/>
-          <a:p>
-            <a:pPr algn="l">
-              <a:lnSpc>
-                <a:spcPct val="100000"/>
-              </a:lnSpc>
-              <a:spcAft>
-                <a:spcPts val="400"/>
-              </a:spcAft>
-            </a:pPr>
-            <a:r>
-              <a:rPr sz="750" b="0" i="0">
-                <a:solidFill>
-                  <a:srgbClr val="6B7280"/>
-                </a:solidFill>
-                <a:latin typeface="Calibri"/>
-              </a:rPr>
-              <a:t>AI  COST  INTELLIGENCE</a:t>
-            </a:r>
-          </a:p>
-        </p:txBody>
-      </p:sp>
-      <p:sp>
-        <p:nvSpPr>
-          <p:cNvPr id="6" name="Rectangle 5"/>
+          <p:cNvPr id="5" name="Rectangle 4"/>
           <p:cNvSpPr/>
           <p:nvPr/>
         </p:nvSpPr>
@@ -11559,7 +11433,7 @@
       </p:sp>
       <p:sp>
         <p:nvSpPr>
-          <p:cNvPr id="7" name="TextBox 6"/>
+          <p:cNvPr id="6" name="TextBox 5"/>
           <p:cNvSpPr txBox="1"/>
           <p:nvPr/>
         </p:nvSpPr>
@@ -11601,7 +11475,7 @@
       </p:sp>
       <p:sp>
         <p:nvSpPr>
-          <p:cNvPr id="8" name="TextBox 7"/>
+          <p:cNvPr id="7" name="TextBox 6"/>
           <p:cNvSpPr txBox="1"/>
           <p:nvPr/>
         </p:nvSpPr>
@@ -11643,7 +11517,7 @@
       </p:sp>
       <p:sp>
         <p:nvSpPr>
-          <p:cNvPr id="9" name="TextBox 8"/>
+          <p:cNvPr id="8" name="TextBox 7"/>
           <p:cNvSpPr txBox="1"/>
           <p:nvPr/>
         </p:nvSpPr>
@@ -11685,7 +11559,7 @@
       </p:sp>
       <p:sp>
         <p:nvSpPr>
-          <p:cNvPr id="10" name="Rounded Rectangle 9"/>
+          <p:cNvPr id="9" name="Rounded Rectangle 8"/>
           <p:cNvSpPr/>
           <p:nvPr/>
         </p:nvSpPr>
@@ -11733,7 +11607,7 @@
       </p:sp>
       <p:sp>
         <p:nvSpPr>
-          <p:cNvPr id="11" name="Rectangle 10"/>
+          <p:cNvPr id="10" name="Rectangle 9"/>
           <p:cNvSpPr/>
           <p:nvPr/>
         </p:nvSpPr>
@@ -11777,7 +11651,7 @@
       </p:sp>
       <p:sp>
         <p:nvSpPr>
-          <p:cNvPr id="12" name="TextBox 11"/>
+          <p:cNvPr id="11" name="TextBox 10"/>
           <p:cNvSpPr txBox="1"/>
           <p:nvPr/>
         </p:nvSpPr>
@@ -11819,7 +11693,7 @@
       </p:sp>
       <p:sp>
         <p:nvSpPr>
-          <p:cNvPr id="13" name="TextBox 12"/>
+          <p:cNvPr id="12" name="TextBox 11"/>
           <p:cNvSpPr txBox="1"/>
           <p:nvPr/>
         </p:nvSpPr>
@@ -12072,7 +11946,7 @@
       </p:sp>
       <p:sp>
         <p:nvSpPr>
-          <p:cNvPr id="14" name="Rounded Rectangle 13"/>
+          <p:cNvPr id="13" name="Rounded Rectangle 12"/>
           <p:cNvSpPr/>
           <p:nvPr/>
         </p:nvSpPr>
@@ -12120,7 +11994,7 @@
       </p:sp>
       <p:sp>
         <p:nvSpPr>
-          <p:cNvPr id="15" name="Rectangle 14"/>
+          <p:cNvPr id="14" name="Rectangle 13"/>
           <p:cNvSpPr/>
           <p:nvPr/>
         </p:nvSpPr>
@@ -12164,7 +12038,7 @@
       </p:sp>
       <p:sp>
         <p:nvSpPr>
-          <p:cNvPr id="16" name="TextBox 15"/>
+          <p:cNvPr id="15" name="TextBox 14"/>
           <p:cNvSpPr txBox="1"/>
           <p:nvPr/>
         </p:nvSpPr>
@@ -12206,7 +12080,7 @@
       </p:sp>
       <p:sp>
         <p:nvSpPr>
-          <p:cNvPr id="17" name="TextBox 16"/>
+          <p:cNvPr id="16" name="TextBox 15"/>
           <p:cNvSpPr txBox="1"/>
           <p:nvPr/>
         </p:nvSpPr>
@@ -12459,7 +12333,7 @@
       </p:sp>
       <p:sp>
         <p:nvSpPr>
-          <p:cNvPr id="18" name="Rounded Rectangle 17"/>
+          <p:cNvPr id="17" name="Rounded Rectangle 16"/>
           <p:cNvSpPr/>
           <p:nvPr/>
         </p:nvSpPr>
@@ -12505,7 +12379,7 @@
       </p:sp>
       <p:sp>
         <p:nvSpPr>
-          <p:cNvPr id="19" name="Rectangle 18"/>
+          <p:cNvPr id="18" name="Rectangle 17"/>
           <p:cNvSpPr/>
           <p:nvPr/>
         </p:nvSpPr>
@@ -12549,7 +12423,7 @@
       </p:sp>
       <p:sp>
         <p:nvSpPr>
-          <p:cNvPr id="20" name="TextBox 19"/>
+          <p:cNvPr id="19" name="TextBox 18"/>
           <p:cNvSpPr txBox="1"/>
           <p:nvPr/>
         </p:nvSpPr>
@@ -12591,7 +12465,7 @@
       </p:sp>
       <p:sp>
         <p:nvSpPr>
-          <p:cNvPr id="21" name="TextBox 20"/>
+          <p:cNvPr id="20" name="TextBox 19"/>
           <p:cNvSpPr txBox="1"/>
           <p:nvPr/>
         </p:nvSpPr>
@@ -12792,49 +12666,7 @@
       </p:sp>
       <p:sp>
         <p:nvSpPr>
-          <p:cNvPr id="5" name="TextBox 4"/>
-          <p:cNvSpPr txBox="1"/>
-          <p:nvPr/>
-        </p:nvSpPr>
-        <p:spPr>
-          <a:xfrm>
-            <a:off x="795528" y="420624"/>
-            <a:ext cx="2560320" cy="201168"/>
-          </a:xfrm>
-          <a:prstGeom prst="rect">
-            <a:avLst/>
-          </a:prstGeom>
-          <a:noFill/>
-        </p:spPr>
-        <p:txBody>
-          <a:bodyPr wrap="square" anchor="t" lIns="0" rIns="0" tIns="0" bIns="0">
-            <a:spAutoFit/>
-          </a:bodyPr>
-          <a:lstStyle/>
-          <a:p>
-            <a:pPr algn="l">
-              <a:lnSpc>
-                <a:spcPct val="100000"/>
-              </a:lnSpc>
-              <a:spcAft>
-                <a:spcPts val="400"/>
-              </a:spcAft>
-            </a:pPr>
-            <a:r>
-              <a:rPr sz="750" b="0" i="0">
-                <a:solidFill>
-                  <a:srgbClr val="6B7280"/>
-                </a:solidFill>
-                <a:latin typeface="Calibri"/>
-              </a:rPr>
-              <a:t>AI  COST  INTELLIGENCE</a:t>
-            </a:r>
-          </a:p>
-        </p:txBody>
-      </p:sp>
-      <p:sp>
-        <p:nvSpPr>
-          <p:cNvPr id="6" name="Rectangle 5"/>
+          <p:cNvPr id="5" name="Rectangle 4"/>
           <p:cNvSpPr/>
           <p:nvPr/>
         </p:nvSpPr>
@@ -12878,7 +12710,7 @@
       </p:sp>
       <p:sp>
         <p:nvSpPr>
-          <p:cNvPr id="7" name="TextBox 6"/>
+          <p:cNvPr id="6" name="TextBox 5"/>
           <p:cNvSpPr txBox="1"/>
           <p:nvPr/>
         </p:nvSpPr>
@@ -12920,7 +12752,7 @@
       </p:sp>
       <p:sp>
         <p:nvSpPr>
-          <p:cNvPr id="8" name="TextBox 7"/>
+          <p:cNvPr id="7" name="TextBox 6"/>
           <p:cNvSpPr txBox="1"/>
           <p:nvPr/>
         </p:nvSpPr>
@@ -12955,273 +12787,26 @@
                 </a:solidFill>
                 <a:latin typeface="Cambria"/>
               </a:rPr>
-              <a:t>What changes, and what we are asking for</a:t>
-            </a:r>
-          </a:p>
-        </p:txBody>
-      </p:sp>
-      <p:sp>
-        <p:nvSpPr>
-          <p:cNvPr id="9" name="Rectangle 8"/>
+              <a:t>What we are asking for</a:t>
+            </a:r>
+          </a:p>
+        </p:txBody>
+      </p:sp>
+      <p:sp>
+        <p:nvSpPr>
+          <p:cNvPr id="8" name="Rounded Rectangle 7"/>
           <p:cNvSpPr/>
           <p:nvPr/>
         </p:nvSpPr>
         <p:spPr>
           <a:xfrm>
-            <a:off x="411480" y="1600200"/>
-            <a:ext cx="3776472" cy="329184"/>
-          </a:xfrm>
-          <a:prstGeom prst="rect">
-            <a:avLst/>
-          </a:prstGeom>
-          <a:solidFill>
-            <a:srgbClr val="16325C"/>
-          </a:solidFill>
-          <a:ln>
-            <a:noFill/>
-          </a:ln>
-          <a:effectLst/>
-        </p:spPr>
-        <p:style>
-          <a:lnRef idx="1">
-            <a:schemeClr val="accent1"/>
-          </a:lnRef>
-          <a:fillRef idx="3">
-            <a:schemeClr val="accent1"/>
-          </a:fillRef>
-          <a:effectRef idx="2">
-            <a:schemeClr val="accent1"/>
-          </a:effectRef>
-          <a:fontRef idx="minor">
-            <a:schemeClr val="lt1"/>
-          </a:fontRef>
-        </p:style>
-        <p:txBody>
-          <a:bodyPr rtlCol="0" anchor="ctr"/>
-          <a:lstStyle/>
-          <a:p>
-            <a:pPr algn="ctr"/>
-          </a:p>
-        </p:txBody>
-      </p:sp>
-      <p:sp>
-        <p:nvSpPr>
-          <p:cNvPr id="10" name="TextBox 9"/>
-          <p:cNvSpPr txBox="1"/>
-          <p:nvPr/>
-        </p:nvSpPr>
-        <p:spPr>
-          <a:xfrm>
-            <a:off x="493776" y="1682496"/>
-            <a:ext cx="3630168" cy="219456"/>
-          </a:xfrm>
-          <a:prstGeom prst="rect">
-            <a:avLst/>
-          </a:prstGeom>
-          <a:noFill/>
-        </p:spPr>
-        <p:txBody>
-          <a:bodyPr wrap="square" anchor="t" lIns="0" rIns="0" tIns="0" bIns="0">
-            <a:spAutoFit/>
-          </a:bodyPr>
-          <a:lstStyle/>
-          <a:p>
-            <a:pPr algn="l">
-              <a:lnSpc>
-                <a:spcPct val="100000"/>
-              </a:lnSpc>
-              <a:spcAft>
-                <a:spcPts val="400"/>
-              </a:spcAft>
-            </a:pPr>
-          </a:p>
-        </p:txBody>
-      </p:sp>
-      <p:sp>
-        <p:nvSpPr>
-          <p:cNvPr id="11" name="Rectangle 10"/>
-          <p:cNvSpPr/>
-          <p:nvPr/>
-        </p:nvSpPr>
-        <p:spPr>
-          <a:xfrm>
-            <a:off x="4187952" y="1600200"/>
-            <a:ext cx="3794760" cy="329184"/>
-          </a:xfrm>
-          <a:prstGeom prst="rect">
-            <a:avLst/>
-          </a:prstGeom>
-          <a:solidFill>
-            <a:srgbClr val="16325C"/>
-          </a:solidFill>
-          <a:ln>
-            <a:noFill/>
-          </a:ln>
-          <a:effectLst/>
-        </p:spPr>
-        <p:style>
-          <a:lnRef idx="1">
-            <a:schemeClr val="accent1"/>
-          </a:lnRef>
-          <a:fillRef idx="3">
-            <a:schemeClr val="accent1"/>
-          </a:fillRef>
-          <a:effectRef idx="2">
-            <a:schemeClr val="accent1"/>
-          </a:effectRef>
-          <a:fontRef idx="minor">
-            <a:schemeClr val="lt1"/>
-          </a:fontRef>
-        </p:style>
-        <p:txBody>
-          <a:bodyPr rtlCol="0" anchor="ctr"/>
-          <a:lstStyle/>
-          <a:p>
-            <a:pPr algn="ctr"/>
-          </a:p>
-        </p:txBody>
-      </p:sp>
-      <p:sp>
-        <p:nvSpPr>
-          <p:cNvPr id="12" name="TextBox 11"/>
-          <p:cNvSpPr txBox="1"/>
-          <p:nvPr/>
-        </p:nvSpPr>
-        <p:spPr>
-          <a:xfrm>
-            <a:off x="4270248" y="1682496"/>
-            <a:ext cx="3648456" cy="219456"/>
-          </a:xfrm>
-          <a:prstGeom prst="rect">
-            <a:avLst/>
-          </a:prstGeom>
-          <a:noFill/>
-        </p:spPr>
-        <p:txBody>
-          <a:bodyPr wrap="square" anchor="t" lIns="0" rIns="0" tIns="0" bIns="0">
-            <a:spAutoFit/>
-          </a:bodyPr>
-          <a:lstStyle/>
-          <a:p>
-            <a:pPr algn="l">
-              <a:lnSpc>
-                <a:spcPct val="100000"/>
-              </a:lnSpc>
-              <a:spcAft>
-                <a:spcPts val="400"/>
-              </a:spcAft>
-            </a:pPr>
-            <a:r>
-              <a:rPr sz="950" b="1" i="0">
-                <a:solidFill>
-                  <a:srgbClr val="FFFFFF"/>
-                </a:solidFill>
-                <a:latin typeface="Calibri"/>
-              </a:rPr>
-              <a:t>Today</a:t>
-            </a:r>
-          </a:p>
-        </p:txBody>
-      </p:sp>
-      <p:sp>
-        <p:nvSpPr>
-          <p:cNvPr id="13" name="Rectangle 12"/>
-          <p:cNvSpPr/>
-          <p:nvPr/>
-        </p:nvSpPr>
-        <p:spPr>
-          <a:xfrm>
-            <a:off x="7982712" y="1600200"/>
-            <a:ext cx="3794760" cy="329184"/>
-          </a:xfrm>
-          <a:prstGeom prst="rect">
-            <a:avLst/>
-          </a:prstGeom>
-          <a:solidFill>
-            <a:srgbClr val="16325C"/>
-          </a:solidFill>
-          <a:ln>
-            <a:noFill/>
-          </a:ln>
-          <a:effectLst/>
-        </p:spPr>
-        <p:style>
-          <a:lnRef idx="1">
-            <a:schemeClr val="accent1"/>
-          </a:lnRef>
-          <a:fillRef idx="3">
-            <a:schemeClr val="accent1"/>
-          </a:fillRef>
-          <a:effectRef idx="2">
-            <a:schemeClr val="accent1"/>
-          </a:effectRef>
-          <a:fontRef idx="minor">
-            <a:schemeClr val="lt1"/>
-          </a:fontRef>
-        </p:style>
-        <p:txBody>
-          <a:bodyPr rtlCol="0" anchor="ctr"/>
-          <a:lstStyle/>
-          <a:p>
-            <a:pPr algn="ctr"/>
-          </a:p>
-        </p:txBody>
-      </p:sp>
-      <p:sp>
-        <p:nvSpPr>
-          <p:cNvPr id="14" name="TextBox 13"/>
-          <p:cNvSpPr txBox="1"/>
-          <p:nvPr/>
-        </p:nvSpPr>
-        <p:spPr>
-          <a:xfrm>
-            <a:off x="8065008" y="1682496"/>
-            <a:ext cx="3648456" cy="219456"/>
-          </a:xfrm>
-          <a:prstGeom prst="rect">
-            <a:avLst/>
-          </a:prstGeom>
-          <a:noFill/>
-        </p:spPr>
-        <p:txBody>
-          <a:bodyPr wrap="square" anchor="t" lIns="0" rIns="0" tIns="0" bIns="0">
-            <a:spAutoFit/>
-          </a:bodyPr>
-          <a:lstStyle/>
-          <a:p>
-            <a:pPr algn="l">
-              <a:lnSpc>
-                <a:spcPct val="100000"/>
-              </a:lnSpc>
-              <a:spcAft>
-                <a:spcPts val="400"/>
-              </a:spcAft>
-            </a:pPr>
-            <a:r>
-              <a:rPr sz="950" b="1" i="0">
-                <a:solidFill>
-                  <a:srgbClr val="FFFFFF"/>
-                </a:solidFill>
-                <a:latin typeface="Calibri"/>
-              </a:rPr>
-              <a:t>With Option 2</a:t>
-            </a:r>
-          </a:p>
-        </p:txBody>
-      </p:sp>
-      <p:sp>
-        <p:nvSpPr>
-          <p:cNvPr id="15" name="Rectangle 14"/>
-          <p:cNvSpPr/>
-          <p:nvPr/>
-        </p:nvSpPr>
-        <p:spPr>
-          <a:xfrm>
-            <a:off x="411480" y="1929384"/>
-            <a:ext cx="3776472" cy="420624"/>
-          </a:xfrm>
-          <a:prstGeom prst="rect">
-            <a:avLst/>
+            <a:off x="411480" y="1572768"/>
+            <a:ext cx="5577840" cy="960120"/>
+          </a:xfrm>
+          <a:prstGeom prst="roundRect">
+            <a:avLst>
+              <a:gd name="adj" fmla="val 12000"/>
+            </a:avLst>
           </a:prstGeom>
           <a:solidFill>
             <a:srgbClr val="FFFFFF"/>
@@ -13257,14 +12842,58 @@
       </p:sp>
       <p:sp>
         <p:nvSpPr>
-          <p:cNvPr id="16" name="TextBox 15"/>
+          <p:cNvPr id="9" name="Rectangle 8"/>
+          <p:cNvSpPr/>
+          <p:nvPr/>
+        </p:nvSpPr>
+        <p:spPr>
+          <a:xfrm>
+            <a:off x="411480" y="1572768"/>
+            <a:ext cx="68580" cy="960120"/>
+          </a:xfrm>
+          <a:prstGeom prst="rect">
+            <a:avLst/>
+          </a:prstGeom>
+          <a:solidFill>
+            <a:srgbClr val="2E8B57"/>
+          </a:solidFill>
+          <a:ln>
+            <a:noFill/>
+          </a:ln>
+          <a:effectLst/>
+        </p:spPr>
+        <p:style>
+          <a:lnRef idx="1">
+            <a:schemeClr val="accent1"/>
+          </a:lnRef>
+          <a:fillRef idx="3">
+            <a:schemeClr val="accent1"/>
+          </a:fillRef>
+          <a:effectRef idx="2">
+            <a:schemeClr val="accent1"/>
+          </a:effectRef>
+          <a:fontRef idx="minor">
+            <a:schemeClr val="lt1"/>
+          </a:fontRef>
+        </p:style>
+        <p:txBody>
+          <a:bodyPr rtlCol="0" anchor="ctr"/>
+          <a:lstStyle/>
+          <a:p>
+            <a:pPr algn="ctr"/>
+          </a:p>
+        </p:txBody>
+      </p:sp>
+      <p:sp>
+        <p:nvSpPr>
+          <p:cNvPr id="10" name="TextBox 9"/>
           <p:cNvSpPr txBox="1"/>
           <p:nvPr/>
         </p:nvSpPr>
         <p:spPr>
           <a:xfrm>
-            <a:off x="493776" y="1993392"/>
-            <a:ext cx="3630168" cy="329184"/>
+            <a:off x="612648" y="1700784"/>
+            <a:ext cx="5212080" cy="274320"/>
           </a:xfrm>
           <a:prstGeom prst="rect">
             <a:avLst/>
@@ -13286,30 +12915,93 @@
               </a:spcAft>
             </a:pPr>
             <a:r>
-              <a:rPr sz="1040" b="0" i="0">
-                <a:solidFill>
-                  <a:srgbClr val="3A4356"/>
+              <a:rPr sz="1300" b="1" i="0">
+                <a:solidFill>
+                  <a:srgbClr val="16325C"/>
                 </a:solidFill>
                 <a:latin typeface="Calibri"/>
               </a:rPr>
-              <a:t>How many parts get a proper cost</a:t>
-            </a:r>
-          </a:p>
-        </p:txBody>
-      </p:sp>
-      <p:sp>
-        <p:nvSpPr>
-          <p:cNvPr id="17" name="Rectangle 16"/>
+              <a:t>OPTION 1 · a decision today</a:t>
+            </a:r>
+          </a:p>
+        </p:txBody>
+      </p:sp>
+      <p:sp>
+        <p:nvSpPr>
+          <p:cNvPr id="11" name="TextBox 10"/>
+          <p:cNvSpPr txBox="1"/>
+          <p:nvPr/>
+        </p:nvSpPr>
+        <p:spPr>
+          <a:xfrm>
+            <a:off x="612648" y="2011680"/>
+            <a:ext cx="5212080" cy="411480"/>
+          </a:xfrm>
+          <a:prstGeom prst="rect">
+            <a:avLst/>
+          </a:prstGeom>
+          <a:noFill/>
+        </p:spPr>
+        <p:txBody>
+          <a:bodyPr wrap="square" anchor="t" lIns="0" rIns="0" tIns="0" bIns="0">
+            <a:spAutoFit/>
+          </a:bodyPr>
+          <a:lstStyle/>
+          <a:p>
+            <a:pPr algn="l">
+              <a:lnSpc>
+                <a:spcPct val="112000"/>
+              </a:lnSpc>
+              <a:spcAft>
+                <a:spcPts val="300"/>
+              </a:spcAft>
+            </a:pPr>
+            <a:r>
+              <a:rPr sz="1050" b="0" i="0">
+                <a:solidFill>
+                  <a:srgbClr val="3A4356"/>
+                </a:solidFill>
+                <a:latin typeface="Calibri"/>
+              </a:rPr>
+              <a:t>Approve the trial. One commodity, 30 to 50 parts we have</a:t>
+            </a:r>
+          </a:p>
+          <a:p>
+            <a:pPr algn="l">
+              <a:lnSpc>
+                <a:spcPct val="112000"/>
+              </a:lnSpc>
+              <a:spcAft>
+                <a:spcPts val="300"/>
+              </a:spcAft>
+            </a:pPr>
+            <a:r>
+              <a:rPr sz="1050" b="0" i="0">
+                <a:solidFill>
+                  <a:srgbClr val="3A4356"/>
+                </a:solidFill>
+                <a:latin typeface="Calibri"/>
+              </a:rPr>
+              <a:t>already bought, inside CAPEE.</a:t>
+            </a:r>
+          </a:p>
+        </p:txBody>
+      </p:sp>
+      <p:sp>
+        <p:nvSpPr>
+          <p:cNvPr id="12" name="Rounded Rectangle 11"/>
           <p:cNvSpPr/>
           <p:nvPr/>
         </p:nvSpPr>
         <p:spPr>
           <a:xfrm>
-            <a:off x="4187952" y="1929384"/>
-            <a:ext cx="3794760" cy="420624"/>
-          </a:xfrm>
-          <a:prstGeom prst="rect">
-            <a:avLst/>
+            <a:off x="6199632" y="1572768"/>
+            <a:ext cx="5577840" cy="960120"/>
+          </a:xfrm>
+          <a:prstGeom prst="roundRect">
+            <a:avLst>
+              <a:gd name="adj" fmla="val 12000"/>
+            </a:avLst>
           </a:prstGeom>
           <a:solidFill>
             <a:srgbClr val="FFFFFF"/>
@@ -13345,14 +13037,58 @@
       </p:sp>
       <p:sp>
         <p:nvSpPr>
-          <p:cNvPr id="18" name="TextBox 17"/>
+          <p:cNvPr id="13" name="Rectangle 12"/>
+          <p:cNvSpPr/>
+          <p:nvPr/>
+        </p:nvSpPr>
+        <p:spPr>
+          <a:xfrm>
+            <a:off x="6199632" y="1572768"/>
+            <a:ext cx="68580" cy="960120"/>
+          </a:xfrm>
+          <a:prstGeom prst="rect">
+            <a:avLst/>
+          </a:prstGeom>
+          <a:solidFill>
+            <a:srgbClr val="6B3FA0"/>
+          </a:solidFill>
+          <a:ln>
+            <a:noFill/>
+          </a:ln>
+          <a:effectLst/>
+        </p:spPr>
+        <p:style>
+          <a:lnRef idx="1">
+            <a:schemeClr val="accent1"/>
+          </a:lnRef>
+          <a:fillRef idx="3">
+            <a:schemeClr val="accent1"/>
+          </a:fillRef>
+          <a:effectRef idx="2">
+            <a:schemeClr val="accent1"/>
+          </a:effectRef>
+          <a:fontRef idx="minor">
+            <a:schemeClr val="lt1"/>
+          </a:fontRef>
+        </p:style>
+        <p:txBody>
+          <a:bodyPr rtlCol="0" anchor="ctr"/>
+          <a:lstStyle/>
+          <a:p>
+            <a:pPr algn="ctr"/>
+          </a:p>
+        </p:txBody>
+      </p:sp>
+      <p:sp>
+        <p:nvSpPr>
+          <p:cNvPr id="14" name="TextBox 13"/>
           <p:cNvSpPr txBox="1"/>
           <p:nvPr/>
         </p:nvSpPr>
         <p:spPr>
           <a:xfrm>
-            <a:off x="4270248" y="1993392"/>
-            <a:ext cx="3648456" cy="329184"/>
+            <a:off x="6400800" y="1700784"/>
+            <a:ext cx="5212080" cy="274320"/>
           </a:xfrm>
           <a:prstGeom prst="rect">
             <a:avLst/>
@@ -13374,30 +13110,93 @@
               </a:spcAft>
             </a:pPr>
             <a:r>
-              <a:rPr sz="1040" b="0" i="0">
-                <a:solidFill>
-                  <a:srgbClr val="B03A2E"/>
+              <a:rPr sz="1300" b="1" i="0">
+                <a:solidFill>
+                  <a:srgbClr val="16325C"/>
                 </a:solidFill>
                 <a:latin typeface="Calibri"/>
               </a:rPr>
-              <a:t>The ones we have hours for</a:t>
-            </a:r>
-          </a:p>
-        </p:txBody>
-      </p:sp>
-      <p:sp>
-        <p:nvSpPr>
-          <p:cNvPr id="19" name="Rectangle 18"/>
+              <a:t>OPTION 2 · no decision today</a:t>
+            </a:r>
+          </a:p>
+        </p:txBody>
+      </p:sp>
+      <p:sp>
+        <p:nvSpPr>
+          <p:cNvPr id="15" name="TextBox 14"/>
+          <p:cNvSpPr txBox="1"/>
+          <p:nvPr/>
+        </p:nvSpPr>
+        <p:spPr>
+          <a:xfrm>
+            <a:off x="6400800" y="2011680"/>
+            <a:ext cx="5212080" cy="411480"/>
+          </a:xfrm>
+          <a:prstGeom prst="rect">
+            <a:avLst/>
+          </a:prstGeom>
+          <a:noFill/>
+        </p:spPr>
+        <p:txBody>
+          <a:bodyPr wrap="square" anchor="t" lIns="0" rIns="0" tIns="0" bIns="0">
+            <a:spAutoFit/>
+          </a:bodyPr>
+          <a:lstStyle/>
+          <a:p>
+            <a:pPr algn="l">
+              <a:lnSpc>
+                <a:spcPct val="112000"/>
+              </a:lnSpc>
+              <a:spcAft>
+                <a:spcPts val="300"/>
+              </a:spcAft>
+            </a:pPr>
+            <a:r>
+              <a:rPr sz="1050" b="0" i="0">
+                <a:solidFill>
+                  <a:srgbClr val="3A4356"/>
+                </a:solidFill>
+                <a:latin typeface="Calibri"/>
+              </a:rPr>
+              <a:t>Start the AI approval in parallel, so it is not the thing</a:t>
+            </a:r>
+          </a:p>
+          <a:p>
+            <a:pPr algn="l">
+              <a:lnSpc>
+                <a:spcPct val="112000"/>
+              </a:lnSpc>
+              <a:spcAft>
+                <a:spcPts val="300"/>
+              </a:spcAft>
+            </a:pPr>
+            <a:r>
+              <a:rPr sz="1050" b="0" i="0">
+                <a:solidFill>
+                  <a:srgbClr val="3A4356"/>
+                </a:solidFill>
+                <a:latin typeface="Calibri"/>
+              </a:rPr>
+              <a:t>holding us up when the trial finishes.</a:t>
+            </a:r>
+          </a:p>
+        </p:txBody>
+      </p:sp>
+      <p:sp>
+        <p:nvSpPr>
+          <p:cNvPr id="16" name="Rounded Rectangle 15"/>
           <p:cNvSpPr/>
           <p:nvPr/>
         </p:nvSpPr>
         <p:spPr>
           <a:xfrm>
-            <a:off x="7982712" y="1929384"/>
-            <a:ext cx="3794760" cy="420624"/>
-          </a:xfrm>
-          <a:prstGeom prst="rect">
-            <a:avLst/>
+            <a:off x="411480" y="2642616"/>
+            <a:ext cx="5577840" cy="1207008"/>
+          </a:xfrm>
+          <a:prstGeom prst="roundRect">
+            <a:avLst>
+              <a:gd name="adj" fmla="val 12000"/>
+            </a:avLst>
           </a:prstGeom>
           <a:solidFill>
             <a:srgbClr val="FFFFFF"/>
@@ -13433,67 +13232,23 @@
       </p:sp>
       <p:sp>
         <p:nvSpPr>
-          <p:cNvPr id="20" name="TextBox 19"/>
-          <p:cNvSpPr txBox="1"/>
-          <p:nvPr/>
-        </p:nvSpPr>
-        <p:spPr>
-          <a:xfrm>
-            <a:off x="8065008" y="1993392"/>
-            <a:ext cx="3648456" cy="329184"/>
-          </a:xfrm>
-          <a:prstGeom prst="rect">
-            <a:avLst/>
-          </a:prstGeom>
-          <a:noFill/>
-        </p:spPr>
-        <p:txBody>
-          <a:bodyPr wrap="square" anchor="t" lIns="0" rIns="0" tIns="0" bIns="0">
-            <a:spAutoFit/>
-          </a:bodyPr>
-          <a:lstStyle/>
-          <a:p>
-            <a:pPr algn="l">
-              <a:lnSpc>
-                <a:spcPct val="100000"/>
-              </a:lnSpc>
-              <a:spcAft>
-                <a:spcPts val="400"/>
-              </a:spcAft>
-            </a:pPr>
-            <a:r>
-              <a:rPr sz="1040" b="1" i="0">
-                <a:solidFill>
-                  <a:srgbClr val="2E8B57"/>
-                </a:solidFill>
-                <a:latin typeface="Calibri"/>
-              </a:rPr>
-              <a:t>All of them</a:t>
-            </a:r>
-          </a:p>
-        </p:txBody>
-      </p:sp>
-      <p:sp>
-        <p:nvSpPr>
-          <p:cNvPr id="21" name="Rectangle 20"/>
+          <p:cNvPr id="17" name="Rectangle 16"/>
           <p:cNvSpPr/>
           <p:nvPr/>
         </p:nvSpPr>
         <p:spPr>
           <a:xfrm>
-            <a:off x="411480" y="2350008"/>
-            <a:ext cx="3776472" cy="420624"/>
+            <a:off x="411480" y="2642616"/>
+            <a:ext cx="68580" cy="1207008"/>
           </a:xfrm>
           <a:prstGeom prst="rect">
             <a:avLst/>
           </a:prstGeom>
           <a:solidFill>
-            <a:srgbClr val="F4F7FB"/>
+            <a:srgbClr val="1D6FB8"/>
           </a:solidFill>
-          <a:ln w="9525">
-            <a:solidFill>
-              <a:srgbClr val="DCE3EE"/>
-            </a:solidFill>
+          <a:ln>
+            <a:noFill/>
           </a:ln>
           <a:effectLst/>
         </p:spPr>
@@ -13521,14 +13276,14 @@
       </p:sp>
       <p:sp>
         <p:nvSpPr>
-          <p:cNvPr id="22" name="TextBox 21"/>
+          <p:cNvPr id="18" name="TextBox 17"/>
           <p:cNvSpPr txBox="1"/>
           <p:nvPr/>
         </p:nvSpPr>
         <p:spPr>
           <a:xfrm>
-            <a:off x="493776" y="2414016"/>
-            <a:ext cx="3630168" cy="329184"/>
+            <a:off x="612648" y="2770632"/>
+            <a:ext cx="5212080" cy="274320"/>
           </a:xfrm>
           <a:prstGeom prst="rect">
             <a:avLst/>
@@ -13550,73 +13305,27 @@
               </a:spcAft>
             </a:pPr>
             <a:r>
-              <a:rPr sz="1040" b="0" i="0">
-                <a:solidFill>
-                  <a:srgbClr val="3A4356"/>
+              <a:rPr sz="1300" b="1" i="0">
+                <a:solidFill>
+                  <a:srgbClr val="16325C"/>
                 </a:solidFill>
                 <a:latin typeface="Calibri"/>
               </a:rPr>
-              <a:t>Turnaround on a basket</a:t>
-            </a:r>
-          </a:p>
-        </p:txBody>
-      </p:sp>
-      <p:sp>
-        <p:nvSpPr>
-          <p:cNvPr id="23" name="Rectangle 22"/>
-          <p:cNvSpPr/>
-          <p:nvPr/>
-        </p:nvSpPr>
-        <p:spPr>
-          <a:xfrm>
-            <a:off x="4187952" y="2350008"/>
-            <a:ext cx="3794760" cy="420624"/>
-          </a:xfrm>
-          <a:prstGeom prst="rect">
-            <a:avLst/>
-          </a:prstGeom>
-          <a:solidFill>
-            <a:srgbClr val="F4F7FB"/>
-          </a:solidFill>
-          <a:ln w="9525">
-            <a:solidFill>
-              <a:srgbClr val="DCE3EE"/>
-            </a:solidFill>
-          </a:ln>
-          <a:effectLst/>
-        </p:spPr>
-        <p:style>
-          <a:lnRef idx="1">
-            <a:schemeClr val="accent1"/>
-          </a:lnRef>
-          <a:fillRef idx="3">
-            <a:schemeClr val="accent1"/>
-          </a:fillRef>
-          <a:effectRef idx="2">
-            <a:schemeClr val="accent1"/>
-          </a:effectRef>
-          <a:fontRef idx="minor">
-            <a:schemeClr val="lt1"/>
-          </a:fontRef>
-        </p:style>
-        <p:txBody>
-          <a:bodyPr rtlCol="0" anchor="ctr"/>
-          <a:lstStyle/>
-          <a:p>
-            <a:pPr algn="ctr"/>
-          </a:p>
-        </p:txBody>
-      </p:sp>
-      <p:sp>
-        <p:nvSpPr>
-          <p:cNvPr id="24" name="TextBox 23"/>
+              <a:t>OPTION 1 NEEDS</a:t>
+            </a:r>
+          </a:p>
+        </p:txBody>
+      </p:sp>
+      <p:sp>
+        <p:nvSpPr>
+          <p:cNvPr id="19" name="TextBox 18"/>
           <p:cNvSpPr txBox="1"/>
           <p:nvPr/>
         </p:nvSpPr>
         <p:spPr>
           <a:xfrm>
-            <a:off x="4270248" y="2414016"/>
-            <a:ext cx="3648456" cy="329184"/>
+            <a:off x="612648" y="3081528"/>
+            <a:ext cx="5212080" cy="658368"/>
           </a:xfrm>
           <a:prstGeom prst="rect">
             <a:avLst/>
@@ -13631,125 +13340,77 @@
           <a:p>
             <a:pPr algn="l">
               <a:lnSpc>
-                <a:spcPct val="100000"/>
-              </a:lnSpc>
-              <a:spcAft>
-                <a:spcPts val="400"/>
-              </a:spcAft>
-            </a:pPr>
-            <a:r>
-              <a:rPr sz="1040" b="0" i="0">
-                <a:solidFill>
-                  <a:srgbClr val="B03A2E"/>
+                <a:spcPct val="112000"/>
+              </a:lnSpc>
+              <a:spcAft>
+                <a:spcPts val="300"/>
+              </a:spcAft>
+            </a:pPr>
+            <a:r>
+              <a:rPr sz="1050" b="0" i="0">
+                <a:solidFill>
+                  <a:srgbClr val="3A4356"/>
                 </a:solidFill>
                 <a:latin typeface="Calibri"/>
               </a:rPr>
-              <a:t>Days of engineer time</a:t>
-            </a:r>
-          </a:p>
-        </p:txBody>
-      </p:sp>
-      <p:sp>
-        <p:nvSpPr>
-          <p:cNvPr id="25" name="Rectangle 24"/>
-          <p:cNvSpPr/>
-          <p:nvPr/>
-        </p:nvSpPr>
-        <p:spPr>
-          <a:xfrm>
-            <a:off x="7982712" y="2350008"/>
-            <a:ext cx="3794760" cy="420624"/>
-          </a:xfrm>
-          <a:prstGeom prst="rect">
-            <a:avLst/>
-          </a:prstGeom>
-          <a:solidFill>
-            <a:srgbClr val="F4F7FB"/>
-          </a:solidFill>
-          <a:ln w="9525">
-            <a:solidFill>
-              <a:srgbClr val="DCE3EE"/>
-            </a:solidFill>
-          </a:ln>
-          <a:effectLst/>
-        </p:spPr>
-        <p:style>
-          <a:lnRef idx="1">
-            <a:schemeClr val="accent1"/>
-          </a:lnRef>
-          <a:fillRef idx="3">
-            <a:schemeClr val="accent1"/>
-          </a:fillRef>
-          <a:effectRef idx="2">
-            <a:schemeClr val="accent1"/>
-          </a:effectRef>
-          <a:fontRef idx="minor">
-            <a:schemeClr val="lt1"/>
-          </a:fontRef>
-        </p:style>
-        <p:txBody>
-          <a:bodyPr rtlCol="0" anchor="ctr"/>
-          <a:lstStyle/>
-          <a:p>
-            <a:pPr algn="ctr"/>
-          </a:p>
-        </p:txBody>
-      </p:sp>
-      <p:sp>
-        <p:nvSpPr>
-          <p:cNvPr id="26" name="TextBox 25"/>
-          <p:cNvSpPr txBox="1"/>
-          <p:nvPr/>
-        </p:nvSpPr>
-        <p:spPr>
-          <a:xfrm>
-            <a:off x="8065008" y="2414016"/>
-            <a:ext cx="3648456" cy="329184"/>
-          </a:xfrm>
-          <a:prstGeom prst="rect">
-            <a:avLst/>
-          </a:prstGeom>
-          <a:noFill/>
-        </p:spPr>
-        <p:txBody>
-          <a:bodyPr wrap="square" anchor="t" lIns="0" rIns="0" tIns="0" bIns="0">
-            <a:spAutoFit/>
-          </a:bodyPr>
-          <a:lstStyle/>
+              <a:t>A Linux server, and a way to pass numbers into CAPEE</a:t>
+            </a:r>
+          </a:p>
           <a:p>
             <a:pPr algn="l">
               <a:lnSpc>
-                <a:spcPct val="100000"/>
-              </a:lnSpc>
-              <a:spcAft>
-                <a:spcPts val="400"/>
-              </a:spcAft>
-            </a:pPr>
-            <a:r>
-              <a:rPr sz="1040" b="1" i="0">
-                <a:solidFill>
-                  <a:srgbClr val="2E8B57"/>
+                <a:spcPct val="112000"/>
+              </a:lnSpc>
+              <a:spcAft>
+                <a:spcPts val="300"/>
+              </a:spcAft>
+            </a:pPr>
+            <a:r>
+              <a:rPr sz="1050" b="0" i="0">
+                <a:solidFill>
+                  <a:srgbClr val="3A4356"/>
                 </a:solidFill>
                 <a:latin typeface="Calibri"/>
               </a:rPr>
-              <a:t>One run, once the data is together</a:t>
-            </a:r>
-          </a:p>
-        </p:txBody>
-      </p:sp>
-      <p:sp>
-        <p:nvSpPr>
-          <p:cNvPr id="27" name="Rectangle 26"/>
+              <a:t>30 to 50 parts where we know the price we paid</a:t>
+            </a:r>
+          </a:p>
+          <a:p>
+            <a:pPr algn="l">
+              <a:lnSpc>
+                <a:spcPct val="112000"/>
+              </a:lnSpc>
+              <a:spcAft>
+                <a:spcPts val="300"/>
+              </a:spcAft>
+            </a:pPr>
+            <a:r>
+              <a:rPr sz="1050" b="0" i="0">
+                <a:solidFill>
+                  <a:srgbClr val="3A4356"/>
+                </a:solidFill>
+                <a:latin typeface="Calibri"/>
+              </a:rPr>
+              <a:t>An engineer from the commodity team for the trial</a:t>
+            </a:r>
+          </a:p>
+        </p:txBody>
+      </p:sp>
+      <p:sp>
+        <p:nvSpPr>
+          <p:cNvPr id="20" name="Rounded Rectangle 19"/>
           <p:cNvSpPr/>
           <p:nvPr/>
         </p:nvSpPr>
         <p:spPr>
           <a:xfrm>
-            <a:off x="411480" y="2770632"/>
-            <a:ext cx="3776472" cy="420624"/>
-          </a:xfrm>
-          <a:prstGeom prst="rect">
-            <a:avLst/>
+            <a:off x="6199632" y="2642616"/>
+            <a:ext cx="5577840" cy="1207008"/>
+          </a:xfrm>
+          <a:prstGeom prst="roundRect">
+            <a:avLst>
+              <a:gd name="adj" fmla="val 12000"/>
+            </a:avLst>
           </a:prstGeom>
           <a:solidFill>
             <a:srgbClr val="FFFFFF"/>
@@ -13785,14 +13446,58 @@
       </p:sp>
       <p:sp>
         <p:nvSpPr>
-          <p:cNvPr id="28" name="TextBox 27"/>
+          <p:cNvPr id="21" name="Rectangle 20"/>
+          <p:cNvSpPr/>
+          <p:nvPr/>
+        </p:nvSpPr>
+        <p:spPr>
+          <a:xfrm>
+            <a:off x="6199632" y="2642616"/>
+            <a:ext cx="68580" cy="1207008"/>
+          </a:xfrm>
+          <a:prstGeom prst="rect">
+            <a:avLst/>
+          </a:prstGeom>
+          <a:solidFill>
+            <a:srgbClr val="6B3FA0"/>
+          </a:solidFill>
+          <a:ln>
+            <a:noFill/>
+          </a:ln>
+          <a:effectLst/>
+        </p:spPr>
+        <p:style>
+          <a:lnRef idx="1">
+            <a:schemeClr val="accent1"/>
+          </a:lnRef>
+          <a:fillRef idx="3">
+            <a:schemeClr val="accent1"/>
+          </a:fillRef>
+          <a:effectRef idx="2">
+            <a:schemeClr val="accent1"/>
+          </a:effectRef>
+          <a:fontRef idx="minor">
+            <a:schemeClr val="lt1"/>
+          </a:fontRef>
+        </p:style>
+        <p:txBody>
+          <a:bodyPr rtlCol="0" anchor="ctr"/>
+          <a:lstStyle/>
+          <a:p>
+            <a:pPr algn="ctr"/>
+          </a:p>
+        </p:txBody>
+      </p:sp>
+      <p:sp>
+        <p:nvSpPr>
+          <p:cNvPr id="22" name="TextBox 21"/>
           <p:cNvSpPr txBox="1"/>
           <p:nvPr/>
         </p:nvSpPr>
         <p:spPr>
           <a:xfrm>
-            <a:off x="493776" y="2834640"/>
-            <a:ext cx="3630168" cy="329184"/>
+            <a:off x="6400800" y="2770632"/>
+            <a:ext cx="5212080" cy="274320"/>
           </a:xfrm>
           <a:prstGeom prst="rect">
             <a:avLst/>
@@ -13814,30 +13519,286 @@
               </a:spcAft>
             </a:pPr>
             <a:r>
-              <a:rPr sz="1040" b="0" i="0">
-                <a:solidFill>
-                  <a:srgbClr val="3A4356"/>
+              <a:rPr sz="1300" b="1" i="0">
+                <a:solidFill>
+                  <a:srgbClr val="16325C"/>
                 </a:solidFill>
                 <a:latin typeface="Calibri"/>
               </a:rPr>
-              <a:t>What we take to a supplier</a:t>
-            </a:r>
-          </a:p>
-        </p:txBody>
-      </p:sp>
-      <p:sp>
-        <p:nvSpPr>
-          <p:cNvPr id="29" name="Rectangle 28"/>
+              <a:t>OPTION 2 NEEDS</a:t>
+            </a:r>
+          </a:p>
+        </p:txBody>
+      </p:sp>
+      <p:sp>
+        <p:nvSpPr>
+          <p:cNvPr id="23" name="TextBox 22"/>
+          <p:cNvSpPr txBox="1"/>
+          <p:nvPr/>
+        </p:nvSpPr>
+        <p:spPr>
+          <a:xfrm>
+            <a:off x="6400800" y="3081528"/>
+            <a:ext cx="5212080" cy="658368"/>
+          </a:xfrm>
+          <a:prstGeom prst="rect">
+            <a:avLst/>
+          </a:prstGeom>
+          <a:noFill/>
+        </p:spPr>
+        <p:txBody>
+          <a:bodyPr wrap="square" anchor="t" lIns="0" rIns="0" tIns="0" bIns="0">
+            <a:spAutoFit/>
+          </a:bodyPr>
+          <a:lstStyle/>
+          <a:p>
+            <a:pPr algn="l">
+              <a:lnSpc>
+                <a:spcPct val="112000"/>
+              </a:lnSpc>
+              <a:spcAft>
+                <a:spcPts val="300"/>
+              </a:spcAft>
+            </a:pPr>
+            <a:r>
+              <a:rPr sz="1050" b="0" i="0">
+                <a:solidFill>
+                  <a:srgbClr val="3A4356"/>
+                </a:solidFill>
+                <a:latin typeface="Calibri"/>
+              </a:rPr>
+              <a:t>Everything above, plus approval to use AI</a:t>
+            </a:r>
+          </a:p>
+          <a:p>
+            <a:pPr algn="l">
+              <a:lnSpc>
+                <a:spcPct val="112000"/>
+              </a:lnSpc>
+              <a:spcAft>
+                <a:spcPts val="300"/>
+              </a:spcAft>
+            </a:pPr>
+            <a:r>
+              <a:rPr sz="1050" b="0" i="0">
+                <a:solidFill>
+                  <a:srgbClr val="3A4356"/>
+                </a:solidFill>
+                <a:latin typeface="Calibri"/>
+              </a:rPr>
+              <a:t>Our own rate book loaded, with a change history</a:t>
+            </a:r>
+          </a:p>
+          <a:p>
+            <a:pPr algn="l">
+              <a:lnSpc>
+                <a:spcPct val="112000"/>
+              </a:lnSpc>
+              <a:spcAft>
+                <a:spcPts val="300"/>
+              </a:spcAft>
+            </a:pPr>
+            <a:r>
+              <a:rPr sz="1050" b="0" i="0">
+                <a:solidFill>
+                  <a:srgbClr val="3A4356"/>
+                </a:solidFill>
+                <a:latin typeface="Calibri"/>
+              </a:rPr>
+              <a:t>A record of every costing, and the run itself built</a:t>
+            </a:r>
+          </a:p>
+        </p:txBody>
+      </p:sp>
+      <p:sp>
+        <p:nvSpPr>
+          <p:cNvPr id="24" name="Rounded Rectangle 23"/>
           <p:cNvSpPr/>
           <p:nvPr/>
         </p:nvSpPr>
         <p:spPr>
           <a:xfrm>
-            <a:off x="4187952" y="2770632"/>
-            <a:ext cx="3794760" cy="420624"/>
-          </a:xfrm>
-          <a:prstGeom prst="rect">
-            <a:avLst/>
+            <a:off x="411480" y="3959352"/>
+            <a:ext cx="11365992" cy="822960"/>
+          </a:xfrm>
+          <a:prstGeom prst="roundRect">
+            <a:avLst>
+              <a:gd name="adj" fmla="val 12000"/>
+            </a:avLst>
+          </a:prstGeom>
+          <a:solidFill>
+            <a:srgbClr val="EAF6EF"/>
+          </a:solidFill>
+          <a:ln>
+            <a:noFill/>
+          </a:ln>
+          <a:effectLst/>
+        </p:spPr>
+        <p:style>
+          <a:lnRef idx="1">
+            <a:schemeClr val="accent1"/>
+          </a:lnRef>
+          <a:fillRef idx="3">
+            <a:schemeClr val="accent1"/>
+          </a:fillRef>
+          <a:effectRef idx="2">
+            <a:schemeClr val="accent1"/>
+          </a:effectRef>
+          <a:fontRef idx="minor">
+            <a:schemeClr val="lt1"/>
+          </a:fontRef>
+        </p:style>
+        <p:txBody>
+          <a:bodyPr rtlCol="0" anchor="ctr"/>
+          <a:lstStyle/>
+          <a:p>
+            <a:pPr algn="ctr"/>
+          </a:p>
+        </p:txBody>
+      </p:sp>
+      <p:sp>
+        <p:nvSpPr>
+          <p:cNvPr id="25" name="Rectangle 24"/>
+          <p:cNvSpPr/>
+          <p:nvPr/>
+        </p:nvSpPr>
+        <p:spPr>
+          <a:xfrm>
+            <a:off x="411480" y="3959352"/>
+            <a:ext cx="68580" cy="822960"/>
+          </a:xfrm>
+          <a:prstGeom prst="rect">
+            <a:avLst/>
+          </a:prstGeom>
+          <a:solidFill>
+            <a:srgbClr val="2E8B57"/>
+          </a:solidFill>
+          <a:ln>
+            <a:noFill/>
+          </a:ln>
+          <a:effectLst/>
+        </p:spPr>
+        <p:style>
+          <a:lnRef idx="1">
+            <a:schemeClr val="accent1"/>
+          </a:lnRef>
+          <a:fillRef idx="3">
+            <a:schemeClr val="accent1"/>
+          </a:fillRef>
+          <a:effectRef idx="2">
+            <a:schemeClr val="accent1"/>
+          </a:effectRef>
+          <a:fontRef idx="minor">
+            <a:schemeClr val="lt1"/>
+          </a:fontRef>
+        </p:style>
+        <p:txBody>
+          <a:bodyPr rtlCol="0" anchor="ctr"/>
+          <a:lstStyle/>
+          <a:p>
+            <a:pPr algn="ctr"/>
+          </a:p>
+        </p:txBody>
+      </p:sp>
+      <p:sp>
+        <p:nvSpPr>
+          <p:cNvPr id="26" name="TextBox 25"/>
+          <p:cNvSpPr txBox="1"/>
+          <p:nvPr/>
+        </p:nvSpPr>
+        <p:spPr>
+          <a:xfrm>
+            <a:off x="630936" y="4078224"/>
+            <a:ext cx="10954512" cy="256032"/>
+          </a:xfrm>
+          <a:prstGeom prst="rect">
+            <a:avLst/>
+          </a:prstGeom>
+          <a:noFill/>
+        </p:spPr>
+        <p:txBody>
+          <a:bodyPr wrap="square" anchor="t" lIns="0" rIns="0" tIns="0" bIns="0">
+            <a:spAutoFit/>
+          </a:bodyPr>
+          <a:lstStyle/>
+          <a:p>
+            <a:pPr algn="l">
+              <a:lnSpc>
+                <a:spcPct val="100000"/>
+              </a:lnSpc>
+              <a:spcAft>
+                <a:spcPts val="400"/>
+              </a:spcAft>
+            </a:pPr>
+            <a:r>
+              <a:rPr sz="1200" b="1" i="0">
+                <a:solidFill>
+                  <a:srgbClr val="2E8B57"/>
+                </a:solidFill>
+                <a:latin typeface="Calibri"/>
+              </a:rPr>
+              <a:t>What the trial gives us</a:t>
+            </a:r>
+          </a:p>
+        </p:txBody>
+      </p:sp>
+      <p:sp>
+        <p:nvSpPr>
+          <p:cNvPr id="27" name="TextBox 26"/>
+          <p:cNvSpPr txBox="1"/>
+          <p:nvPr/>
+        </p:nvSpPr>
+        <p:spPr>
+          <a:xfrm>
+            <a:off x="630936" y="4361688"/>
+            <a:ext cx="10954512" cy="320040"/>
+          </a:xfrm>
+          <a:prstGeom prst="rect">
+            <a:avLst/>
+          </a:prstGeom>
+          <a:noFill/>
+        </p:spPr>
+        <p:txBody>
+          <a:bodyPr wrap="square" anchor="t" lIns="0" rIns="0" tIns="0" bIns="0">
+            <a:spAutoFit/>
+          </a:bodyPr>
+          <a:lstStyle/>
+          <a:p>
+            <a:pPr algn="l">
+              <a:lnSpc>
+                <a:spcPct val="114000"/>
+              </a:lnSpc>
+              <a:spcAft>
+                <a:spcPts val="300"/>
+              </a:spcAft>
+            </a:pPr>
+            <a:r>
+              <a:rPr sz="1050" b="0" i="0">
+                <a:solidFill>
+                  <a:srgbClr val="3A4356"/>
+                </a:solidFill>
+                <a:latin typeface="Calibri"/>
+              </a:rPr>
+              <a:t>The two numbers nobody in this company can state today: how close the tool gets to a price we actually paid, and how much of the input it fills on its own. Until we have them there is no honest conversation to be had about Option 2.</a:t>
+            </a:r>
+          </a:p>
+        </p:txBody>
+      </p:sp>
+      <p:sp>
+        <p:nvSpPr>
+          <p:cNvPr id="28" name="Rounded Rectangle 27"/>
+          <p:cNvSpPr/>
+          <p:nvPr/>
+        </p:nvSpPr>
+        <p:spPr>
+          <a:xfrm>
+            <a:off x="411480" y="4901184"/>
+            <a:ext cx="11365992" cy="530352"/>
+          </a:xfrm>
+          <a:prstGeom prst="roundRect">
+            <a:avLst>
+              <a:gd name="adj" fmla="val 12000"/>
+            </a:avLst>
           </a:prstGeom>
           <a:solidFill>
             <a:srgbClr val="FFFFFF"/>
@@ -13873,14 +13834,58 @@
       </p:sp>
       <p:sp>
         <p:nvSpPr>
+          <p:cNvPr id="29" name="Rectangle 28"/>
+          <p:cNvSpPr/>
+          <p:nvPr/>
+        </p:nvSpPr>
+        <p:spPr>
+          <a:xfrm>
+            <a:off x="411480" y="4901184"/>
+            <a:ext cx="68580" cy="530352"/>
+          </a:xfrm>
+          <a:prstGeom prst="rect">
+            <a:avLst/>
+          </a:prstGeom>
+          <a:solidFill>
+            <a:srgbClr val="1D6FB8"/>
+          </a:solidFill>
+          <a:ln>
+            <a:noFill/>
+          </a:ln>
+          <a:effectLst/>
+        </p:spPr>
+        <p:style>
+          <a:lnRef idx="1">
+            <a:schemeClr val="accent1"/>
+          </a:lnRef>
+          <a:fillRef idx="3">
+            <a:schemeClr val="accent1"/>
+          </a:fillRef>
+          <a:effectRef idx="2">
+            <a:schemeClr val="accent1"/>
+          </a:effectRef>
+          <a:fontRef idx="minor">
+            <a:schemeClr val="lt1"/>
+          </a:fontRef>
+        </p:style>
+        <p:txBody>
+          <a:bodyPr rtlCol="0" anchor="ctr"/>
+          <a:lstStyle/>
+          <a:p>
+            <a:pPr algn="ctr"/>
+          </a:p>
+        </p:txBody>
+      </p:sp>
+      <p:sp>
+        <p:nvSpPr>
           <p:cNvPr id="30" name="TextBox 29"/>
           <p:cNvSpPr txBox="1"/>
           <p:nvPr/>
         </p:nvSpPr>
         <p:spPr>
           <a:xfrm>
-            <a:off x="4270248" y="2834640"/>
-            <a:ext cx="3648456" cy="329184"/>
+            <a:off x="630936" y="5038344"/>
+            <a:ext cx="2651760" cy="256032"/>
           </a:xfrm>
           <a:prstGeom prst="rect">
             <a:avLst/>
@@ -13902,30 +13907,74 @@
               </a:spcAft>
             </a:pPr>
             <a:r>
-              <a:rPr sz="1040" b="0" i="0">
-                <a:solidFill>
-                  <a:srgbClr val="B7791F"/>
+              <a:rPr sz="1080" b="1" i="0">
+                <a:solidFill>
+                  <a:srgbClr val="1D6FB8"/>
                 </a:solidFill>
                 <a:latin typeface="Calibri"/>
               </a:rPr>
-              <a:t>Our estimate</a:t>
-            </a:r>
-          </a:p>
-        </p:txBody>
-      </p:sp>
-      <p:sp>
-        <p:nvSpPr>
-          <p:cNvPr id="31" name="Rectangle 30"/>
+              <a:t>The rule that does not bend</a:t>
+            </a:r>
+          </a:p>
+        </p:txBody>
+      </p:sp>
+      <p:sp>
+        <p:nvSpPr>
+          <p:cNvPr id="31" name="TextBox 30"/>
+          <p:cNvSpPr txBox="1"/>
+          <p:nvPr/>
+        </p:nvSpPr>
+        <p:spPr>
+          <a:xfrm>
+            <a:off x="3429000" y="5038344"/>
+            <a:ext cx="8119872" cy="256032"/>
+          </a:xfrm>
+          <a:prstGeom prst="rect">
+            <a:avLst/>
+          </a:prstGeom>
+          <a:noFill/>
+        </p:spPr>
+        <p:txBody>
+          <a:bodyPr wrap="square" anchor="t" lIns="0" rIns="0" tIns="0" bIns="0">
+            <a:spAutoFit/>
+          </a:bodyPr>
+          <a:lstStyle/>
+          <a:p>
+            <a:pPr algn="l">
+              <a:lnSpc>
+                <a:spcPct val="100000"/>
+              </a:lnSpc>
+              <a:spcAft>
+                <a:spcPts val="400"/>
+              </a:spcAft>
+            </a:pPr>
+            <a:r>
+              <a:rPr sz="1019" b="0" i="0">
+                <a:solidFill>
+                  <a:srgbClr val="3A4356"/>
+                </a:solidFill>
+                <a:latin typeface="Calibri"/>
+              </a:rPr>
+              <a:t>The AI reads, sorts and sets up. It never sets a price — the money comes from the same fixed rules we use today.</a:t>
+            </a:r>
+          </a:p>
+        </p:txBody>
+      </p:sp>
+      <p:sp>
+        <p:nvSpPr>
+          <p:cNvPr id="32" name="Rounded Rectangle 31"/>
           <p:cNvSpPr/>
           <p:nvPr/>
         </p:nvSpPr>
         <p:spPr>
           <a:xfrm>
-            <a:off x="7982712" y="2770632"/>
-            <a:ext cx="3794760" cy="420624"/>
-          </a:xfrm>
-          <a:prstGeom prst="rect">
-            <a:avLst/>
+            <a:off x="411480" y="5468112"/>
+            <a:ext cx="11365992" cy="530352"/>
+          </a:xfrm>
+          <a:prstGeom prst="roundRect">
+            <a:avLst>
+              <a:gd name="adj" fmla="val 12000"/>
+            </a:avLst>
           </a:prstGeom>
           <a:solidFill>
             <a:srgbClr val="FFFFFF"/>
@@ -13961,67 +14010,23 @@
       </p:sp>
       <p:sp>
         <p:nvSpPr>
-          <p:cNvPr id="32" name="TextBox 31"/>
-          <p:cNvSpPr txBox="1"/>
-          <p:nvPr/>
-        </p:nvSpPr>
-        <p:spPr>
-          <a:xfrm>
-            <a:off x="8065008" y="2834640"/>
-            <a:ext cx="3648456" cy="329184"/>
-          </a:xfrm>
-          <a:prstGeom prst="rect">
-            <a:avLst/>
-          </a:prstGeom>
-          <a:noFill/>
-        </p:spPr>
-        <p:txBody>
-          <a:bodyPr wrap="square" anchor="t" lIns="0" rIns="0" tIns="0" bIns="0">
-            <a:spAutoFit/>
-          </a:bodyPr>
-          <a:lstStyle/>
-          <a:p>
-            <a:pPr algn="l">
-              <a:lnSpc>
-                <a:spcPct val="100000"/>
-              </a:lnSpc>
-              <a:spcAft>
-                <a:spcPts val="400"/>
-              </a:spcAft>
-            </a:pPr>
-            <a:r>
-              <a:rPr sz="1040" b="1" i="0">
-                <a:solidFill>
-                  <a:srgbClr val="2E8B57"/>
-                </a:solidFill>
-                <a:latin typeface="Calibri"/>
-              </a:rPr>
-              <a:t>The build-up, where their price differs, and what to ask</a:t>
-            </a:r>
-          </a:p>
-        </p:txBody>
-      </p:sp>
-      <p:sp>
-        <p:nvSpPr>
           <p:cNvPr id="33" name="Rectangle 32"/>
           <p:cNvSpPr/>
           <p:nvPr/>
         </p:nvSpPr>
         <p:spPr>
           <a:xfrm>
-            <a:off x="411480" y="3191256"/>
-            <a:ext cx="3776472" cy="420624"/>
+            <a:off x="411480" y="5468112"/>
+            <a:ext cx="68580" cy="530352"/>
           </a:xfrm>
           <a:prstGeom prst="rect">
             <a:avLst/>
           </a:prstGeom>
           <a:solidFill>
-            <a:srgbClr val="F4F7FB"/>
+            <a:srgbClr val="B7791F"/>
           </a:solidFill>
-          <a:ln w="9525">
-            <a:solidFill>
-              <a:srgbClr val="DCE3EE"/>
-            </a:solidFill>
+          <a:ln>
+            <a:noFill/>
           </a:ln>
           <a:effectLst/>
         </p:spPr>
@@ -14055,8 +14060,8 @@
         </p:nvSpPr>
         <p:spPr>
           <a:xfrm>
-            <a:off x="493776" y="3255264"/>
-            <a:ext cx="3630168" cy="329184"/>
+            <a:off x="630936" y="5605272"/>
+            <a:ext cx="2651760" cy="256032"/>
           </a:xfrm>
           <a:prstGeom prst="rect">
             <a:avLst/>
@@ -14078,73 +14083,27 @@
               </a:spcAft>
             </a:pPr>
             <a:r>
-              <a:rPr sz="1040" b="0" i="0">
-                <a:solidFill>
-                  <a:srgbClr val="3A4356"/>
+              <a:rPr sz="1080" b="1" i="0">
+                <a:solidFill>
+                  <a:srgbClr val="B7791F"/>
                 </a:solidFill>
                 <a:latin typeface="Calibri"/>
               </a:rPr>
-              <a:t>Where the engineer spends the time</a:t>
-            </a:r>
-          </a:p>
-        </p:txBody>
-      </p:sp>
-      <p:sp>
-        <p:nvSpPr>
-          <p:cNvPr id="35" name="Rectangle 34"/>
-          <p:cNvSpPr/>
-          <p:nvPr/>
-        </p:nvSpPr>
-        <p:spPr>
-          <a:xfrm>
-            <a:off x="4187952" y="3191256"/>
-            <a:ext cx="3794760" cy="420624"/>
-          </a:xfrm>
-          <a:prstGeom prst="rect">
-            <a:avLst/>
-          </a:prstGeom>
-          <a:solidFill>
-            <a:srgbClr val="F4F7FB"/>
-          </a:solidFill>
-          <a:ln w="9525">
-            <a:solidFill>
-              <a:srgbClr val="DCE3EE"/>
-            </a:solidFill>
-          </a:ln>
-          <a:effectLst/>
-        </p:spPr>
-        <p:style>
-          <a:lnRef idx="1">
-            <a:schemeClr val="accent1"/>
-          </a:lnRef>
-          <a:fillRef idx="3">
-            <a:schemeClr val="accent1"/>
-          </a:fillRef>
-          <a:effectRef idx="2">
-            <a:schemeClr val="accent1"/>
-          </a:effectRef>
-          <a:fontRef idx="minor">
-            <a:schemeClr val="lt1"/>
-          </a:fontRef>
-        </p:style>
-        <p:txBody>
-          <a:bodyPr rtlCol="0" anchor="ctr"/>
-          <a:lstStyle/>
-          <a:p>
-            <a:pPr algn="ctr"/>
-          </a:p>
-        </p:txBody>
-      </p:sp>
-      <p:sp>
-        <p:nvSpPr>
-          <p:cNvPr id="36" name="TextBox 35"/>
+              <a:t>If the trial disappoints</a:t>
+            </a:r>
+          </a:p>
+        </p:txBody>
+      </p:sp>
+      <p:sp>
+        <p:nvSpPr>
+          <p:cNvPr id="35" name="TextBox 34"/>
           <p:cNvSpPr txBox="1"/>
           <p:nvPr/>
         </p:nvSpPr>
         <p:spPr>
           <a:xfrm>
-            <a:off x="4270248" y="3255264"/>
-            <a:ext cx="3648456" cy="329184"/>
+            <a:off x="3429000" y="5605272"/>
+            <a:ext cx="8119872" cy="256032"/>
           </a:xfrm>
           <a:prstGeom prst="rect">
             <a:avLst/>
@@ -14166,115 +14125,27 @@
               </a:spcAft>
             </a:pPr>
             <a:r>
-              <a:rPr sz="1040" b="0" i="0">
-                <a:solidFill>
-                  <a:srgbClr val="B03A2E"/>
+              <a:rPr sz="1019" b="0" i="0">
+                <a:solidFill>
+                  <a:srgbClr val="3A4356"/>
                 </a:solidFill>
                 <a:latin typeface="Calibri"/>
               </a:rPr>
-              <a:t>Typing values in</a:t>
-            </a:r>
-          </a:p>
-        </p:txBody>
-      </p:sp>
-      <p:sp>
-        <p:nvSpPr>
-          <p:cNvPr id="37" name="Rectangle 36"/>
+              <a:t>Never checked against a price JLR has paid. If the answer is poor we stop, having spent only our own time.</a:t>
+            </a:r>
+          </a:p>
+        </p:txBody>
+      </p:sp>
+      <p:sp>
+        <p:nvSpPr>
+          <p:cNvPr id="36" name="Rounded Rectangle 35"/>
           <p:cNvSpPr/>
           <p:nvPr/>
         </p:nvSpPr>
         <p:spPr>
           <a:xfrm>
-            <a:off x="7982712" y="3191256"/>
-            <a:ext cx="3794760" cy="420624"/>
-          </a:xfrm>
-          <a:prstGeom prst="rect">
-            <a:avLst/>
-          </a:prstGeom>
-          <a:solidFill>
-            <a:srgbClr val="F4F7FB"/>
-          </a:solidFill>
-          <a:ln w="9525">
-            <a:solidFill>
-              <a:srgbClr val="DCE3EE"/>
-            </a:solidFill>
-          </a:ln>
-          <a:effectLst/>
-        </p:spPr>
-        <p:style>
-          <a:lnRef idx="1">
-            <a:schemeClr val="accent1"/>
-          </a:lnRef>
-          <a:fillRef idx="3">
-            <a:schemeClr val="accent1"/>
-          </a:fillRef>
-          <a:effectRef idx="2">
-            <a:schemeClr val="accent1"/>
-          </a:effectRef>
-          <a:fontRef idx="minor">
-            <a:schemeClr val="lt1"/>
-          </a:fontRef>
-        </p:style>
-        <p:txBody>
-          <a:bodyPr rtlCol="0" anchor="ctr"/>
-          <a:lstStyle/>
-          <a:p>
-            <a:pPr algn="ctr"/>
-          </a:p>
-        </p:txBody>
-      </p:sp>
-      <p:sp>
-        <p:nvSpPr>
-          <p:cNvPr id="38" name="TextBox 37"/>
-          <p:cNvSpPr txBox="1"/>
-          <p:nvPr/>
-        </p:nvSpPr>
-        <p:spPr>
-          <a:xfrm>
-            <a:off x="8065008" y="3255264"/>
-            <a:ext cx="3648456" cy="329184"/>
-          </a:xfrm>
-          <a:prstGeom prst="rect">
-            <a:avLst/>
-          </a:prstGeom>
-          <a:noFill/>
-        </p:spPr>
-        <p:txBody>
-          <a:bodyPr wrap="square" anchor="t" lIns="0" rIns="0" tIns="0" bIns="0">
-            <a:spAutoFit/>
-          </a:bodyPr>
-          <a:lstStyle/>
-          <a:p>
-            <a:pPr algn="l">
-              <a:lnSpc>
-                <a:spcPct val="100000"/>
-              </a:lnSpc>
-              <a:spcAft>
-                <a:spcPts val="400"/>
-              </a:spcAft>
-            </a:pPr>
-            <a:r>
-              <a:rPr sz="1040" b="1" i="0">
-                <a:solidFill>
-                  <a:srgbClr val="2E8B57"/>
-                </a:solidFill>
-                <a:latin typeface="Calibri"/>
-              </a:rPr>
-              <a:t>Answering what only a person can, and acting on what it finds</a:t>
-            </a:r>
-          </a:p>
-        </p:txBody>
-      </p:sp>
-      <p:sp>
-        <p:nvSpPr>
-          <p:cNvPr id="39" name="Rounded Rectangle 38"/>
-          <p:cNvSpPr/>
-          <p:nvPr/>
-        </p:nvSpPr>
-        <p:spPr>
-          <a:xfrm>
-            <a:off x="411480" y="3694176"/>
-            <a:ext cx="5577840" cy="1188720"/>
+            <a:off x="411480" y="6035040"/>
+            <a:ext cx="11365992" cy="530352"/>
           </a:xfrm>
           <a:prstGeom prst="roundRect">
             <a:avLst>
@@ -14315,614 +14186,14 @@
       </p:sp>
       <p:sp>
         <p:nvSpPr>
-          <p:cNvPr id="40" name="Rectangle 39"/>
+          <p:cNvPr id="37" name="Rectangle 36"/>
           <p:cNvSpPr/>
           <p:nvPr/>
         </p:nvSpPr>
         <p:spPr>
           <a:xfrm>
-            <a:off x="411480" y="3694176"/>
-            <a:ext cx="68580" cy="1188720"/>
-          </a:xfrm>
-          <a:prstGeom prst="rect">
-            <a:avLst/>
-          </a:prstGeom>
-          <a:solidFill>
-            <a:srgbClr val="1D6FB8"/>
-          </a:solidFill>
-          <a:ln>
-            <a:noFill/>
-          </a:ln>
-          <a:effectLst/>
-        </p:spPr>
-        <p:style>
-          <a:lnRef idx="1">
-            <a:schemeClr val="accent1"/>
-          </a:lnRef>
-          <a:fillRef idx="3">
-            <a:schemeClr val="accent1"/>
-          </a:fillRef>
-          <a:effectRef idx="2">
-            <a:schemeClr val="accent1"/>
-          </a:effectRef>
-          <a:fontRef idx="minor">
-            <a:schemeClr val="lt1"/>
-          </a:fontRef>
-        </p:style>
-        <p:txBody>
-          <a:bodyPr rtlCol="0" anchor="ctr"/>
-          <a:lstStyle/>
-          <a:p>
-            <a:pPr algn="ctr"/>
-          </a:p>
-        </p:txBody>
-      </p:sp>
-      <p:sp>
-        <p:nvSpPr>
-          <p:cNvPr id="41" name="TextBox 40"/>
-          <p:cNvSpPr txBox="1"/>
-          <p:nvPr/>
-        </p:nvSpPr>
-        <p:spPr>
-          <a:xfrm>
-            <a:off x="612648" y="3822192"/>
-            <a:ext cx="5212080" cy="274320"/>
-          </a:xfrm>
-          <a:prstGeom prst="rect">
-            <a:avLst/>
-          </a:prstGeom>
-          <a:noFill/>
-        </p:spPr>
-        <p:txBody>
-          <a:bodyPr wrap="square" anchor="t" lIns="0" rIns="0" tIns="0" bIns="0">
-            <a:spAutoFit/>
-          </a:bodyPr>
-          <a:lstStyle/>
-          <a:p>
-            <a:pPr algn="l">
-              <a:lnSpc>
-                <a:spcPct val="100000"/>
-              </a:lnSpc>
-              <a:spcAft>
-                <a:spcPts val="400"/>
-              </a:spcAft>
-            </a:pPr>
-            <a:r>
-              <a:rPr sz="1300" b="1" i="0">
-                <a:solidFill>
-                  <a:srgbClr val="16325C"/>
-                </a:solidFill>
-                <a:latin typeface="Calibri"/>
-              </a:rPr>
-              <a:t>OPTION 1 NEEDS</a:t>
-            </a:r>
-          </a:p>
-        </p:txBody>
-      </p:sp>
-      <p:sp>
-        <p:nvSpPr>
-          <p:cNvPr id="42" name="TextBox 41"/>
-          <p:cNvSpPr txBox="1"/>
-          <p:nvPr/>
-        </p:nvSpPr>
-        <p:spPr>
-          <a:xfrm>
-            <a:off x="612648" y="4133088"/>
-            <a:ext cx="5212080" cy="640080"/>
-          </a:xfrm>
-          <a:prstGeom prst="rect">
-            <a:avLst/>
-          </a:prstGeom>
-          <a:noFill/>
-        </p:spPr>
-        <p:txBody>
-          <a:bodyPr wrap="square" anchor="t" lIns="0" rIns="0" tIns="0" bIns="0">
-            <a:spAutoFit/>
-          </a:bodyPr>
-          <a:lstStyle/>
-          <a:p>
-            <a:pPr algn="l">
-              <a:lnSpc>
-                <a:spcPct val="112000"/>
-              </a:lnSpc>
-              <a:spcAft>
-                <a:spcPts val="300"/>
-              </a:spcAft>
-            </a:pPr>
-            <a:r>
-              <a:rPr sz="1050" b="0" i="0">
-                <a:solidFill>
-                  <a:srgbClr val="3A4356"/>
-                </a:solidFill>
-                <a:latin typeface="Calibri"/>
-              </a:rPr>
-              <a:t>A Linux server, and a way to pass numbers into CAPEE</a:t>
-            </a:r>
-          </a:p>
-          <a:p>
-            <a:pPr algn="l">
-              <a:lnSpc>
-                <a:spcPct val="112000"/>
-              </a:lnSpc>
-              <a:spcAft>
-                <a:spcPts val="300"/>
-              </a:spcAft>
-            </a:pPr>
-            <a:r>
-              <a:rPr sz="1050" b="0" i="0">
-                <a:solidFill>
-                  <a:srgbClr val="3A4356"/>
-                </a:solidFill>
-                <a:latin typeface="Calibri"/>
-              </a:rPr>
-              <a:t>30 to 50 parts where we know the price we paid</a:t>
-            </a:r>
-          </a:p>
-          <a:p>
-            <a:pPr algn="l">
-              <a:lnSpc>
-                <a:spcPct val="112000"/>
-              </a:lnSpc>
-              <a:spcAft>
-                <a:spcPts val="300"/>
-              </a:spcAft>
-            </a:pPr>
-            <a:r>
-              <a:rPr sz="1050" b="0" i="0">
-                <a:solidFill>
-                  <a:srgbClr val="3A4356"/>
-                </a:solidFill>
-                <a:latin typeface="Calibri"/>
-              </a:rPr>
-              <a:t>One commodity and a small team for the trial</a:t>
-            </a:r>
-          </a:p>
-        </p:txBody>
-      </p:sp>
-      <p:sp>
-        <p:nvSpPr>
-          <p:cNvPr id="43" name="Rounded Rectangle 42"/>
-          <p:cNvSpPr/>
-          <p:nvPr/>
-        </p:nvSpPr>
-        <p:spPr>
-          <a:xfrm>
-            <a:off x="6199632" y="3694176"/>
-            <a:ext cx="5577840" cy="1188720"/>
-          </a:xfrm>
-          <a:prstGeom prst="roundRect">
-            <a:avLst>
-              <a:gd name="adj" fmla="val 12000"/>
-            </a:avLst>
-          </a:prstGeom>
-          <a:solidFill>
-            <a:srgbClr val="FFFFFF"/>
-          </a:solidFill>
-          <a:ln w="9525">
-            <a:solidFill>
-              <a:srgbClr val="DCE3EE"/>
-            </a:solidFill>
-          </a:ln>
-          <a:effectLst/>
-        </p:spPr>
-        <p:style>
-          <a:lnRef idx="1">
-            <a:schemeClr val="accent1"/>
-          </a:lnRef>
-          <a:fillRef idx="3">
-            <a:schemeClr val="accent1"/>
-          </a:fillRef>
-          <a:effectRef idx="2">
-            <a:schemeClr val="accent1"/>
-          </a:effectRef>
-          <a:fontRef idx="minor">
-            <a:schemeClr val="lt1"/>
-          </a:fontRef>
-        </p:style>
-        <p:txBody>
-          <a:bodyPr rtlCol="0" anchor="ctr"/>
-          <a:lstStyle/>
-          <a:p>
-            <a:pPr algn="ctr"/>
-          </a:p>
-        </p:txBody>
-      </p:sp>
-      <p:sp>
-        <p:nvSpPr>
-          <p:cNvPr id="44" name="Rectangle 43"/>
-          <p:cNvSpPr/>
-          <p:nvPr/>
-        </p:nvSpPr>
-        <p:spPr>
-          <a:xfrm>
-            <a:off x="6199632" y="3694176"/>
-            <a:ext cx="68580" cy="1188720"/>
-          </a:xfrm>
-          <a:prstGeom prst="rect">
-            <a:avLst/>
-          </a:prstGeom>
-          <a:solidFill>
-            <a:srgbClr val="6B3FA0"/>
-          </a:solidFill>
-          <a:ln>
-            <a:noFill/>
-          </a:ln>
-          <a:effectLst/>
-        </p:spPr>
-        <p:style>
-          <a:lnRef idx="1">
-            <a:schemeClr val="accent1"/>
-          </a:lnRef>
-          <a:fillRef idx="3">
-            <a:schemeClr val="accent1"/>
-          </a:fillRef>
-          <a:effectRef idx="2">
-            <a:schemeClr val="accent1"/>
-          </a:effectRef>
-          <a:fontRef idx="minor">
-            <a:schemeClr val="lt1"/>
-          </a:fontRef>
-        </p:style>
-        <p:txBody>
-          <a:bodyPr rtlCol="0" anchor="ctr"/>
-          <a:lstStyle/>
-          <a:p>
-            <a:pPr algn="ctr"/>
-          </a:p>
-        </p:txBody>
-      </p:sp>
-      <p:sp>
-        <p:nvSpPr>
-          <p:cNvPr id="45" name="TextBox 44"/>
-          <p:cNvSpPr txBox="1"/>
-          <p:nvPr/>
-        </p:nvSpPr>
-        <p:spPr>
-          <a:xfrm>
-            <a:off x="6400800" y="3822192"/>
-            <a:ext cx="5212080" cy="274320"/>
-          </a:xfrm>
-          <a:prstGeom prst="rect">
-            <a:avLst/>
-          </a:prstGeom>
-          <a:noFill/>
-        </p:spPr>
-        <p:txBody>
-          <a:bodyPr wrap="square" anchor="t" lIns="0" rIns="0" tIns="0" bIns="0">
-            <a:spAutoFit/>
-          </a:bodyPr>
-          <a:lstStyle/>
-          <a:p>
-            <a:pPr algn="l">
-              <a:lnSpc>
-                <a:spcPct val="100000"/>
-              </a:lnSpc>
-              <a:spcAft>
-                <a:spcPts val="400"/>
-              </a:spcAft>
-            </a:pPr>
-            <a:r>
-              <a:rPr sz="1300" b="1" i="0">
-                <a:solidFill>
-                  <a:srgbClr val="16325C"/>
-                </a:solidFill>
-                <a:latin typeface="Calibri"/>
-              </a:rPr>
-              <a:t>OPTION 2 NEEDS</a:t>
-            </a:r>
-          </a:p>
-        </p:txBody>
-      </p:sp>
-      <p:sp>
-        <p:nvSpPr>
-          <p:cNvPr id="46" name="TextBox 45"/>
-          <p:cNvSpPr txBox="1"/>
-          <p:nvPr/>
-        </p:nvSpPr>
-        <p:spPr>
-          <a:xfrm>
-            <a:off x="6400800" y="4133088"/>
-            <a:ext cx="5212080" cy="640080"/>
-          </a:xfrm>
-          <a:prstGeom prst="rect">
-            <a:avLst/>
-          </a:prstGeom>
-          <a:noFill/>
-        </p:spPr>
-        <p:txBody>
-          <a:bodyPr wrap="square" anchor="t" lIns="0" rIns="0" tIns="0" bIns="0">
-            <a:spAutoFit/>
-          </a:bodyPr>
-          <a:lstStyle/>
-          <a:p>
-            <a:pPr algn="l">
-              <a:lnSpc>
-                <a:spcPct val="112000"/>
-              </a:lnSpc>
-              <a:spcAft>
-                <a:spcPts val="300"/>
-              </a:spcAft>
-            </a:pPr>
-            <a:r>
-              <a:rPr sz="1050" b="0" i="0">
-                <a:solidFill>
-                  <a:srgbClr val="3A4356"/>
-                </a:solidFill>
-                <a:latin typeface="Calibri"/>
-              </a:rPr>
-              <a:t>Everything above, plus approval to use AI</a:t>
-            </a:r>
-          </a:p>
-          <a:p>
-            <a:pPr algn="l">
-              <a:lnSpc>
-                <a:spcPct val="112000"/>
-              </a:lnSpc>
-              <a:spcAft>
-                <a:spcPts val="300"/>
-              </a:spcAft>
-            </a:pPr>
-            <a:r>
-              <a:rPr sz="1050" b="0" i="0">
-                <a:solidFill>
-                  <a:srgbClr val="3A4356"/>
-                </a:solidFill>
-                <a:latin typeface="Calibri"/>
-              </a:rPr>
-              <a:t>Our own rate book loaded, with a change history</a:t>
-            </a:r>
-          </a:p>
-          <a:p>
-            <a:pPr algn="l">
-              <a:lnSpc>
-                <a:spcPct val="112000"/>
-              </a:lnSpc>
-              <a:spcAft>
-                <a:spcPts val="300"/>
-              </a:spcAft>
-            </a:pPr>
-            <a:r>
-              <a:rPr sz="1050" b="0" i="0">
-                <a:solidFill>
-                  <a:srgbClr val="3A4356"/>
-                </a:solidFill>
-                <a:latin typeface="Calibri"/>
-              </a:rPr>
-              <a:t>A record of every costing, and the run itself built</a:t>
-            </a:r>
-          </a:p>
-        </p:txBody>
-      </p:sp>
-      <p:sp>
-        <p:nvSpPr>
-          <p:cNvPr id="47" name="Rounded Rectangle 46"/>
-          <p:cNvSpPr/>
-          <p:nvPr/>
-        </p:nvSpPr>
-        <p:spPr>
-          <a:xfrm>
-            <a:off x="411480" y="4992624"/>
-            <a:ext cx="11365992" cy="822960"/>
-          </a:xfrm>
-          <a:prstGeom prst="roundRect">
-            <a:avLst>
-              <a:gd name="adj" fmla="val 12000"/>
-            </a:avLst>
-          </a:prstGeom>
-          <a:solidFill>
-            <a:srgbClr val="EAF6EF"/>
-          </a:solidFill>
-          <a:ln>
-            <a:noFill/>
-          </a:ln>
-          <a:effectLst/>
-        </p:spPr>
-        <p:style>
-          <a:lnRef idx="1">
-            <a:schemeClr val="accent1"/>
-          </a:lnRef>
-          <a:fillRef idx="3">
-            <a:schemeClr val="accent1"/>
-          </a:fillRef>
-          <a:effectRef idx="2">
-            <a:schemeClr val="accent1"/>
-          </a:effectRef>
-          <a:fontRef idx="minor">
-            <a:schemeClr val="lt1"/>
-          </a:fontRef>
-        </p:style>
-        <p:txBody>
-          <a:bodyPr rtlCol="0" anchor="ctr"/>
-          <a:lstStyle/>
-          <a:p>
-            <a:pPr algn="ctr"/>
-          </a:p>
-        </p:txBody>
-      </p:sp>
-      <p:sp>
-        <p:nvSpPr>
-          <p:cNvPr id="48" name="Rectangle 47"/>
-          <p:cNvSpPr/>
-          <p:nvPr/>
-        </p:nvSpPr>
-        <p:spPr>
-          <a:xfrm>
-            <a:off x="411480" y="4992624"/>
-            <a:ext cx="68580" cy="822960"/>
-          </a:xfrm>
-          <a:prstGeom prst="rect">
-            <a:avLst/>
-          </a:prstGeom>
-          <a:solidFill>
-            <a:srgbClr val="2E8B57"/>
-          </a:solidFill>
-          <a:ln>
-            <a:noFill/>
-          </a:ln>
-          <a:effectLst/>
-        </p:spPr>
-        <p:style>
-          <a:lnRef idx="1">
-            <a:schemeClr val="accent1"/>
-          </a:lnRef>
-          <a:fillRef idx="3">
-            <a:schemeClr val="accent1"/>
-          </a:fillRef>
-          <a:effectRef idx="2">
-            <a:schemeClr val="accent1"/>
-          </a:effectRef>
-          <a:fontRef idx="minor">
-            <a:schemeClr val="lt1"/>
-          </a:fontRef>
-        </p:style>
-        <p:txBody>
-          <a:bodyPr rtlCol="0" anchor="ctr"/>
-          <a:lstStyle/>
-          <a:p>
-            <a:pPr algn="ctr"/>
-          </a:p>
-        </p:txBody>
-      </p:sp>
-      <p:sp>
-        <p:nvSpPr>
-          <p:cNvPr id="49" name="TextBox 48"/>
-          <p:cNvSpPr txBox="1"/>
-          <p:nvPr/>
-        </p:nvSpPr>
-        <p:spPr>
-          <a:xfrm>
-            <a:off x="630936" y="5111496"/>
-            <a:ext cx="10954512" cy="256032"/>
-          </a:xfrm>
-          <a:prstGeom prst="rect">
-            <a:avLst/>
-          </a:prstGeom>
-          <a:noFill/>
-        </p:spPr>
-        <p:txBody>
-          <a:bodyPr wrap="square" anchor="t" lIns="0" rIns="0" tIns="0" bIns="0">
-            <a:spAutoFit/>
-          </a:bodyPr>
-          <a:lstStyle/>
-          <a:p>
-            <a:pPr algn="l">
-              <a:lnSpc>
-                <a:spcPct val="100000"/>
-              </a:lnSpc>
-              <a:spcAft>
-                <a:spcPts val="400"/>
-              </a:spcAft>
-            </a:pPr>
-            <a:r>
-              <a:rPr sz="1200" b="1" i="0">
-                <a:solidFill>
-                  <a:srgbClr val="2E8B57"/>
-                </a:solidFill>
-                <a:latin typeface="Calibri"/>
-              </a:rPr>
-              <a:t>What we are asking for today: approve Option 1 as a trial, and start the AI approval for Option 2</a:t>
-            </a:r>
-          </a:p>
-        </p:txBody>
-      </p:sp>
-      <p:sp>
-        <p:nvSpPr>
-          <p:cNvPr id="50" name="TextBox 49"/>
-          <p:cNvSpPr txBox="1"/>
-          <p:nvPr/>
-        </p:nvSpPr>
-        <p:spPr>
-          <a:xfrm>
-            <a:off x="630936" y="5394960"/>
-            <a:ext cx="10954512" cy="320040"/>
-          </a:xfrm>
-          <a:prstGeom prst="rect">
-            <a:avLst/>
-          </a:prstGeom>
-          <a:noFill/>
-        </p:spPr>
-        <p:txBody>
-          <a:bodyPr wrap="square" anchor="t" lIns="0" rIns="0" tIns="0" bIns="0">
-            <a:spAutoFit/>
-          </a:bodyPr>
-          <a:lstStyle/>
-          <a:p>
-            <a:pPr algn="l">
-              <a:lnSpc>
-                <a:spcPct val="114000"/>
-              </a:lnSpc>
-              <a:spcAft>
-                <a:spcPts val="300"/>
-              </a:spcAft>
-            </a:pPr>
-            <a:r>
-              <a:rPr sz="1050" b="0" i="0">
-                <a:solidFill>
-                  <a:srgbClr val="3A4356"/>
-                </a:solidFill>
-                <a:latin typeface="Calibri"/>
-              </a:rPr>
-              <a:t>One commodity, 30 to 50 parts we have already bought, inside CAPEE, using our own time. It gives us the two numbers nobody can state today: how close the tool gets to a price we actually paid, and how much of the input it fills on its own.</a:t>
-            </a:r>
-          </a:p>
-        </p:txBody>
-      </p:sp>
-      <p:sp>
-        <p:nvSpPr>
-          <p:cNvPr id="51" name="Rounded Rectangle 50"/>
-          <p:cNvSpPr/>
-          <p:nvPr/>
-        </p:nvSpPr>
-        <p:spPr>
-          <a:xfrm>
-            <a:off x="411480" y="5925312"/>
-            <a:ext cx="11365992" cy="804672"/>
-          </a:xfrm>
-          <a:prstGeom prst="roundRect">
-            <a:avLst>
-              <a:gd name="adj" fmla="val 12000"/>
-            </a:avLst>
-          </a:prstGeom>
-          <a:solidFill>
-            <a:srgbClr val="FCF3E3"/>
-          </a:solidFill>
-          <a:ln>
-            <a:noFill/>
-          </a:ln>
-          <a:effectLst/>
-        </p:spPr>
-        <p:style>
-          <a:lnRef idx="1">
-            <a:schemeClr val="accent1"/>
-          </a:lnRef>
-          <a:fillRef idx="3">
-            <a:schemeClr val="accent1"/>
-          </a:fillRef>
-          <a:effectRef idx="2">
-            <a:schemeClr val="accent1"/>
-          </a:effectRef>
-          <a:fontRef idx="minor">
-            <a:schemeClr val="lt1"/>
-          </a:fontRef>
-        </p:style>
-        <p:txBody>
-          <a:bodyPr rtlCol="0" anchor="ctr"/>
-          <a:lstStyle/>
-          <a:p>
-            <a:pPr algn="ctr"/>
-          </a:p>
-        </p:txBody>
-      </p:sp>
-      <p:sp>
-        <p:nvSpPr>
-          <p:cNvPr id="52" name="Rectangle 51"/>
-          <p:cNvSpPr/>
-          <p:nvPr/>
-        </p:nvSpPr>
-        <p:spPr>
-          <a:xfrm>
-            <a:off x="411480" y="5925312"/>
-            <a:ext cx="68580" cy="804672"/>
+            <a:off x="411480" y="6035040"/>
+            <a:ext cx="68580" cy="530352"/>
           </a:xfrm>
           <a:prstGeom prst="rect">
             <a:avLst/>
@@ -14959,14 +14230,14 @@
       </p:sp>
       <p:sp>
         <p:nvSpPr>
-          <p:cNvPr id="53" name="TextBox 52"/>
+          <p:cNvPr id="38" name="TextBox 37"/>
           <p:cNvSpPr txBox="1"/>
           <p:nvPr/>
         </p:nvSpPr>
         <p:spPr>
           <a:xfrm>
-            <a:off x="630936" y="6044184"/>
-            <a:ext cx="10954512" cy="256032"/>
+            <a:off x="630936" y="6172200"/>
+            <a:ext cx="2651760" cy="256032"/>
           </a:xfrm>
           <a:prstGeom prst="rect">
             <a:avLst/>
@@ -14988,27 +14259,27 @@
               </a:spcAft>
             </a:pPr>
             <a:r>
-              <a:rPr sz="1200" b="1" i="0">
+              <a:rPr sz="1080" b="1" i="0">
                 <a:solidFill>
                   <a:srgbClr val="B7791F"/>
                 </a:solidFill>
                 <a:latin typeface="Calibri"/>
               </a:rPr>
-              <a:t>Two things to be straight about</a:t>
-            </a:r>
-          </a:p>
-        </p:txBody>
-      </p:sp>
-      <p:sp>
-        <p:nvSpPr>
-          <p:cNvPr id="54" name="TextBox 53"/>
+              <a:t>Nobody has sized this yet</a:t>
+            </a:r>
+          </a:p>
+        </p:txBody>
+      </p:sp>
+      <p:sp>
+        <p:nvSpPr>
+          <p:cNvPr id="39" name="TextBox 38"/>
           <p:cNvSpPr txBox="1"/>
           <p:nvPr/>
         </p:nvSpPr>
         <p:spPr>
           <a:xfrm>
-            <a:off x="630936" y="6327648"/>
-            <a:ext cx="10954512" cy="301752"/>
+            <a:off x="3429000" y="6172200"/>
+            <a:ext cx="8119872" cy="256032"/>
           </a:xfrm>
           <a:prstGeom prst="rect">
             <a:avLst/>
@@ -15023,20 +14294,20 @@
           <a:p>
             <a:pPr algn="l">
               <a:lnSpc>
-                <a:spcPct val="114000"/>
-              </a:lnSpc>
-              <a:spcAft>
-                <a:spcPts val="300"/>
-              </a:spcAft>
-            </a:pPr>
-            <a:r>
-              <a:rPr sz="1050" b="0" i="0">
+                <a:spcPct val="100000"/>
+              </a:lnSpc>
+              <a:spcAft>
+                <a:spcPts val="400"/>
+              </a:spcAft>
+            </a:pPr>
+            <a:r>
+              <a:rPr sz="1019" b="0" i="0">
                 <a:solidFill>
                   <a:srgbClr val="3A4356"/>
                 </a:solidFill>
                 <a:latin typeface="Calibri"/>
               </a:rPr>
-              <a:t>Those six capabilities work today one part at a time. Making them run over a whole basket unattended is real work, not a switch. And we have never checked the tool against a price JLR has actually paid — which is exactly what the Option 1 trial settles.</a:t>
+              <a:t>How long it takes waits on one answer from IT about how CAPEE is built. The sizing comes back with it.</a:t>
             </a:r>
           </a:p>
         </p:txBody>

--- a/CostVision-CAPEE-Business-Case.pptx
+++ b/CostVision-CAPEE-Business-Case.pptx
@@ -719,7 +719,7 @@
           <a:lstStyle/>
           <a:p>
             <a:r>
-              <a:t>This is the answer to what we get for it, and I have written it in kind rather than in pounds, for the reason I gave on the first slide: we have never timed this job and never checked the tool against a price we paid, so a pound figure from me would be a guess. Take the left column first. Option one turns the job from typing into checking, because the values come off the model. It gives the same answer every time, so a part costed by one engineer and a part costed by another are comparable, which matters when we put them in front of a supplier. The time that gets freed does not disappear — it goes back into costing more of the basket with the team we already have. Nobody learns a new tool, because CAPEE does not change. And the last one is the practical point for this room: there is no AI in Option one, so it does not wait on an AI approval. We can start it. Now the right column, and these are different in kind rather than bigger. Every part in a basket gets a proper cost instead of a sample scaled up. A basket that takes days of engineer time becomes one run, and I want to be honest that the real work then becomes gathering the part list, the models and our own rate data — the costing stops being the bottleneck. We stop taking an estimate to a supplier and start taking the build-up, plus where their price differs from ours and what to ask them about it. There is work we simply cannot do today: costing electronics from a photograph of the board, and turning an RFQ pack into costed, ranked lines. And design-to-cost stops being a list of suggestions and becomes a decision, because each change has a number against it. The green strip is the sequencing point. Option one's benefits arrive first and we keep them. Option two's depend on the accuracy figure that Option one produces, which is why these are an order rather than a choice.</a:t>
+              <a:t>This is what we get for it, written in kind rather than in pounds, for the reason I gave on the first slide: we have never timed this job and never checked the tool against a price we paid, so a pound figure from me would be a guess. The left column is Option one, and it is short on purpose. The job turns from typing into checking, because the values come off the model. It gives the same answer every time, so parts costed by different engineers are comparable. The time freed goes back into costing more parts with the team we already have. Nobody learns a new tool. And it can start now, because there is no AI in it to approve. The right column is wider because Option two genuinely has more in it. It runs on its own — parts go in and costed reports come out, and a person answers only what the model cannot show. It uses the same method for everything we make, so a plastic clip and a machined bracket are built up the same way and can sit in the same report. It costs electronics from a photograph of the board, which is work we largely cannot do today. It costs software as well: forty-three modules, from powertrain and driver assistance through to the cloud back end, which matters more every programme. Then the second half of that column is the part I would put to purchasing. It shows where a supplier's price differs from our own build-up and which part of the cost the gap sits in. Then it tells us what to do about it: what to go after, what to ask them, and what it is worth over a year. A whole RFQ pack can go in and come back priced and put in order of money. And design changes come back with a price on them rather than as a list of suggestions. The green strip is the sequencing point. Option one's benefits arrive first and we keep them. Option two's depend on the accuracy figure Option one produces, which is why these are an order rather than a choice.</a:t>
             </a:r>
           </a:p>
         </p:txBody>
@@ -11565,8 +11565,8 @@
         </p:nvSpPr>
         <p:spPr>
           <a:xfrm>
-            <a:off x="411480" y="1828800"/>
-            <a:ext cx="5577840" cy="3977639"/>
+            <a:off x="411480" y="1810512"/>
+            <a:ext cx="3611880" cy="4206240"/>
           </a:xfrm>
           <a:prstGeom prst="roundRect">
             <a:avLst>
@@ -11613,8 +11613,8 @@
         </p:nvSpPr>
         <p:spPr>
           <a:xfrm>
-            <a:off x="411480" y="1828800"/>
-            <a:ext cx="68580" cy="3977639"/>
+            <a:off x="411480" y="1810512"/>
+            <a:ext cx="68580" cy="4206240"/>
           </a:xfrm>
           <a:prstGeom prst="rect">
             <a:avLst/>
@@ -11657,8 +11657,8 @@
         </p:nvSpPr>
         <p:spPr>
           <a:xfrm>
-            <a:off x="612648" y="1956816"/>
-            <a:ext cx="5212080" cy="274320"/>
+            <a:off x="612648" y="1938528"/>
+            <a:ext cx="3246120" cy="274320"/>
           </a:xfrm>
           <a:prstGeom prst="rect">
             <a:avLst/>
@@ -11686,7 +11686,7 @@
                 </a:solidFill>
                 <a:latin typeface="Calibri"/>
               </a:rPr>
-              <a:t>OPTION 1 · automatic input into CAPEE</a:t>
+              <a:t>OPTION 1 · input into CAPEE</a:t>
             </a:r>
           </a:p>
         </p:txBody>
@@ -11699,8 +11699,8 @@
         </p:nvSpPr>
         <p:spPr>
           <a:xfrm>
-            <a:off x="612648" y="2267712"/>
-            <a:ext cx="5212080" cy="3428999"/>
+            <a:off x="612648" y="2249424"/>
+            <a:ext cx="3246120" cy="3657600"/>
           </a:xfrm>
           <a:prstGeom prst="rect">
             <a:avLst/>
@@ -11747,7 +11747,7 @@
                 </a:solidFill>
                 <a:latin typeface="Calibri"/>
               </a:rPr>
-              <a:t>The values come off the 3D model; the engineer confirms.</a:t>
+              <a:t>The values come off the 3D model.</a:t>
             </a:r>
           </a:p>
           <a:p>
@@ -11795,7 +11795,7 @@
                 </a:solidFill>
                 <a:latin typeface="Calibri"/>
               </a:rPr>
-              <a:t>One method, applied identically, whoever costs the part.</a:t>
+              <a:t>One method, whoever costs the part.</a:t>
             </a:r>
           </a:p>
           <a:p>
@@ -11824,7 +11824,7 @@
                 </a:solidFill>
                 <a:latin typeface="Calibri"/>
               </a:rPr>
-              <a:t>More parts costed by the same team</a:t>
+              <a:t>More parts for the same team</a:t>
             </a:r>
           </a:p>
           <a:p>
@@ -11843,7 +11843,7 @@
                 </a:solidFill>
                 <a:latin typeface="Calibri"/>
               </a:rPr>
-              <a:t>The time saved goes back into costing more of the basket.</a:t>
+              <a:t>The time saved goes back into costing.</a:t>
             </a:r>
           </a:p>
           <a:p>
@@ -11891,7 +11891,7 @@
                 </a:solidFill>
                 <a:latin typeface="Calibri"/>
               </a:rPr>
-              <a:t>CAPEE does not change. Same screens, same way of working.</a:t>
+              <a:t>CAPEE does not change.</a:t>
             </a:r>
           </a:p>
           <a:p>
@@ -11939,7 +11939,7 @@
                 </a:solidFill>
                 <a:latin typeface="Calibri"/>
               </a:rPr>
-              <a:t>No AI involved, so it does not wait on an AI approval.</a:t>
+              <a:t>No AI, so no approval to wait for.</a:t>
             </a:r>
           </a:p>
         </p:txBody>
@@ -11952,8 +11952,8 @@
         </p:nvSpPr>
         <p:spPr>
           <a:xfrm>
-            <a:off x="6199632" y="1828800"/>
-            <a:ext cx="5577840" cy="3977639"/>
+            <a:off x="4233672" y="1810512"/>
+            <a:ext cx="7543800" cy="4206240"/>
           </a:xfrm>
           <a:prstGeom prst="roundRect">
             <a:avLst>
@@ -12000,8 +12000,8 @@
         </p:nvSpPr>
         <p:spPr>
           <a:xfrm>
-            <a:off x="6199632" y="1828800"/>
-            <a:ext cx="68580" cy="3977639"/>
+            <a:off x="4233672" y="1810512"/>
+            <a:ext cx="68580" cy="4206240"/>
           </a:xfrm>
           <a:prstGeom prst="rect">
             <a:avLst/>
@@ -12044,8 +12044,8 @@
         </p:nvSpPr>
         <p:spPr>
           <a:xfrm>
-            <a:off x="6400800" y="1956816"/>
-            <a:ext cx="5212080" cy="274320"/>
+            <a:off x="4434840" y="1938528"/>
+            <a:ext cx="7178040" cy="274320"/>
           </a:xfrm>
           <a:prstGeom prst="rect">
             <a:avLst/>
@@ -12086,8 +12086,8 @@
         </p:nvSpPr>
         <p:spPr>
           <a:xfrm>
-            <a:off x="6400800" y="2267712"/>
-            <a:ext cx="5212080" cy="3428999"/>
+            <a:off x="4434840" y="2267712"/>
+            <a:ext cx="3488436" cy="3657600"/>
           </a:xfrm>
           <a:prstGeom prst="rect">
             <a:avLst/>
@@ -12115,7 +12115,7 @@
                 </a:solidFill>
                 <a:latin typeface="Calibri"/>
               </a:rPr>
-              <a:t>Every part costed, not a sample</a:t>
+              <a:t>It runs on its own</a:t>
             </a:r>
           </a:p>
           <a:p>
@@ -12134,7 +12134,7 @@
                 </a:solidFill>
                 <a:latin typeface="Calibri"/>
               </a:rPr>
-              <a:t>A whole basket priced from its own geometry, in one run.</a:t>
+              <a:t>Parts go in, costed reports come out. A</a:t>
             </a:r>
           </a:p>
           <a:p>
@@ -12146,6 +12146,15 @@
                 <a:spcPts val="300"/>
               </a:spcAft>
             </a:pPr>
+            <a:r>
+              <a:rPr sz="1050" b="0" i="0">
+                <a:solidFill>
+                  <a:srgbClr val="3A4356"/>
+                </a:solidFill>
+                <a:latin typeface="Calibri"/>
+              </a:rPr>
+              <a:t>person answers only what the model cannot show.</a:t>
+            </a:r>
           </a:p>
           <a:p>
             <a:pPr algn="l">
@@ -12156,6 +12165,16 @@
                 <a:spcPts val="300"/>
               </a:spcAft>
             </a:pPr>
+          </a:p>
+          <a:p>
+            <a:pPr algn="l">
+              <a:lnSpc>
+                <a:spcPct val="112000"/>
+              </a:lnSpc>
+              <a:spcAft>
+                <a:spcPts val="300"/>
+              </a:spcAft>
+            </a:pPr>
             <a:r>
               <a:rPr sz="1050" b="1" i="0">
                 <a:solidFill>
@@ -12163,7 +12182,7 @@
                 </a:solidFill>
                 <a:latin typeface="Calibri"/>
               </a:rPr>
-              <a:t>Days of work become one run</a:t>
+              <a:t>The same method for everything we make</a:t>
             </a:r>
           </a:p>
           <a:p>
@@ -12182,7 +12201,7 @@
                 </a:solidFill>
                 <a:latin typeface="Calibri"/>
               </a:rPr>
-              <a:t>Gathering the data is the job; the costing stops being it.</a:t>
+              <a:t>Metal, plastic, rubber, composites,</a:t>
             </a:r>
           </a:p>
           <a:p>
@@ -12194,6 +12213,15 @@
                 <a:spcPts val="300"/>
               </a:spcAft>
             </a:pPr>
+            <a:r>
+              <a:rPr sz="1050" b="0" i="0">
+                <a:solidFill>
+                  <a:srgbClr val="3A4356"/>
+                </a:solidFill>
+                <a:latin typeface="Calibri"/>
+              </a:rPr>
+              <a:t>electronics and assemblies.</a:t>
+            </a:r>
           </a:p>
           <a:p>
             <a:pPr algn="l">
@@ -12204,6 +12232,16 @@
                 <a:spcPts val="300"/>
               </a:spcAft>
             </a:pPr>
+          </a:p>
+          <a:p>
+            <a:pPr algn="l">
+              <a:lnSpc>
+                <a:spcPct val="112000"/>
+              </a:lnSpc>
+              <a:spcAft>
+                <a:spcPts val="300"/>
+              </a:spcAft>
+            </a:pPr>
             <a:r>
               <a:rPr sz="1050" b="1" i="0">
                 <a:solidFill>
@@ -12211,7 +12249,7 @@
                 </a:solidFill>
                 <a:latin typeface="Calibri"/>
               </a:rPr>
-              <a:t>A stronger position with suppliers</a:t>
+              <a:t>We can cost electronics</a:t>
             </a:r>
           </a:p>
           <a:p>
@@ -12230,7 +12268,7 @@
                 </a:solidFill>
                 <a:latin typeface="Calibri"/>
               </a:rPr>
-              <a:t>The build-up, where their price differs, and what to ask.</a:t>
+              <a:t>A photo of a circuit board gives us the parts</a:t>
             </a:r>
           </a:p>
           <a:p>
@@ -12242,6 +12280,15 @@
                 <a:spcPts val="300"/>
               </a:spcAft>
             </a:pPr>
+            <a:r>
+              <a:rPr sz="1050" b="0" i="0">
+                <a:solidFill>
+                  <a:srgbClr val="3A4356"/>
+                </a:solidFill>
+                <a:latin typeface="Calibri"/>
+              </a:rPr>
+              <a:t>list, the board spec and a price.</a:t>
+            </a:r>
           </a:p>
           <a:p>
             <a:pPr algn="l">
@@ -12252,6 +12299,16 @@
                 <a:spcPts val="300"/>
               </a:spcAft>
             </a:pPr>
+          </a:p>
+          <a:p>
+            <a:pPr algn="l">
+              <a:lnSpc>
+                <a:spcPct val="112000"/>
+              </a:lnSpc>
+              <a:spcAft>
+                <a:spcPts val="300"/>
+              </a:spcAft>
+            </a:pPr>
             <a:r>
               <a:rPr sz="1050" b="1" i="0">
                 <a:solidFill>
@@ -12259,7 +12316,7 @@
                 </a:solidFill>
                 <a:latin typeface="Calibri"/>
               </a:rPr>
-              <a:t>Work we cannot do at all today</a:t>
+              <a:t>Software costed too</a:t>
             </a:r>
           </a:p>
           <a:p>
@@ -12278,7 +12335,7 @@
                 </a:solidFill>
                 <a:latin typeface="Calibri"/>
               </a:rPr>
-              <a:t>Electronics costed from a photo. RFQ packs costed and ranked.</a:t>
+              <a:t>43 modules, from powertrain and driver</a:t>
             </a:r>
           </a:p>
           <a:p>
@@ -12290,7 +12347,39 @@
                 <a:spcPts val="300"/>
               </a:spcAft>
             </a:pPr>
-          </a:p>
+            <a:r>
+              <a:rPr sz="1050" b="0" i="0">
+                <a:solidFill>
+                  <a:srgbClr val="3A4356"/>
+                </a:solidFill>
+                <a:latin typeface="Calibri"/>
+              </a:rPr>
+              <a:t>assistance through to cloud.</a:t>
+            </a:r>
+          </a:p>
+        </p:txBody>
+      </p:sp>
+      <p:sp>
+        <p:nvSpPr>
+          <p:cNvPr id="17" name="TextBox 16"/>
+          <p:cNvSpPr txBox="1"/>
+          <p:nvPr/>
+        </p:nvSpPr>
+        <p:spPr>
+          <a:xfrm>
+            <a:off x="8087868" y="2267712"/>
+            <a:ext cx="3488436" cy="3657600"/>
+          </a:xfrm>
+          <a:prstGeom prst="rect">
+            <a:avLst/>
+          </a:prstGeom>
+          <a:noFill/>
+        </p:spPr>
+        <p:txBody>
+          <a:bodyPr wrap="square" anchor="t" lIns="0" rIns="0" tIns="0" bIns="0">
+            <a:spAutoFit/>
+          </a:bodyPr>
+          <a:lstStyle/>
           <a:p>
             <a:pPr algn="l">
               <a:lnSpc>
@@ -12307,7 +12396,7 @@
                 </a:solidFill>
                 <a:latin typeface="Calibri"/>
               </a:rPr>
-              <a:t>Design-to-cost becomes a decision</a:t>
+              <a:t>Where a supplier price differs</a:t>
             </a:r>
           </a:p>
           <a:p>
@@ -12326,21 +12415,241 @@
                 </a:solidFill>
                 <a:latin typeface="Calibri"/>
               </a:rPr>
-              <a:t>Changes are priced and ranked, not just listed.</a:t>
-            </a:r>
-          </a:p>
-        </p:txBody>
-      </p:sp>
-      <p:sp>
-        <p:nvSpPr>
-          <p:cNvPr id="17" name="Rounded Rectangle 16"/>
+              <a:t>Their price next to our build-up, with the gap</a:t>
+            </a:r>
+          </a:p>
+          <a:p>
+            <a:pPr algn="l">
+              <a:lnSpc>
+                <a:spcPct val="112000"/>
+              </a:lnSpc>
+              <a:spcAft>
+                <a:spcPts val="300"/>
+              </a:spcAft>
+            </a:pPr>
+            <a:r>
+              <a:rPr sz="1050" b="0" i="0">
+                <a:solidFill>
+                  <a:srgbClr val="3A4356"/>
+                </a:solidFill>
+                <a:latin typeface="Calibri"/>
+              </a:rPr>
+              <a:t>shown in each part of the cost.</a:t>
+            </a:r>
+          </a:p>
+          <a:p>
+            <a:pPr algn="l">
+              <a:lnSpc>
+                <a:spcPct val="112000"/>
+              </a:lnSpc>
+              <a:spcAft>
+                <a:spcPts val="300"/>
+              </a:spcAft>
+            </a:pPr>
+          </a:p>
+          <a:p>
+            <a:pPr algn="l">
+              <a:lnSpc>
+                <a:spcPct val="112000"/>
+              </a:lnSpc>
+              <a:spcAft>
+                <a:spcPts val="300"/>
+              </a:spcAft>
+            </a:pPr>
+            <a:r>
+              <a:rPr sz="1050" b="1" i="0">
+                <a:solidFill>
+                  <a:srgbClr val="6B3FA0"/>
+                </a:solidFill>
+                <a:latin typeface="Calibri"/>
+              </a:rPr>
+              <a:t>And what to do about it</a:t>
+            </a:r>
+          </a:p>
+          <a:p>
+            <a:pPr algn="l">
+              <a:lnSpc>
+                <a:spcPct val="112000"/>
+              </a:lnSpc>
+              <a:spcAft>
+                <a:spcPts val="300"/>
+              </a:spcAft>
+            </a:pPr>
+            <a:r>
+              <a:rPr sz="1050" b="0" i="0">
+                <a:solidFill>
+                  <a:srgbClr val="3A4356"/>
+                </a:solidFill>
+                <a:latin typeface="Calibri"/>
+              </a:rPr>
+              <a:t>What to go after, what to ask them, and what</a:t>
+            </a:r>
+          </a:p>
+          <a:p>
+            <a:pPr algn="l">
+              <a:lnSpc>
+                <a:spcPct val="112000"/>
+              </a:lnSpc>
+              <a:spcAft>
+                <a:spcPts val="300"/>
+              </a:spcAft>
+            </a:pPr>
+            <a:r>
+              <a:rPr sz="1050" b="0" i="0">
+                <a:solidFill>
+                  <a:srgbClr val="3A4356"/>
+                </a:solidFill>
+                <a:latin typeface="Calibri"/>
+              </a:rPr>
+              <a:t>it is worth over a year.</a:t>
+            </a:r>
+          </a:p>
+          <a:p>
+            <a:pPr algn="l">
+              <a:lnSpc>
+                <a:spcPct val="112000"/>
+              </a:lnSpc>
+              <a:spcAft>
+                <a:spcPts val="300"/>
+              </a:spcAft>
+            </a:pPr>
+          </a:p>
+          <a:p>
+            <a:pPr algn="l">
+              <a:lnSpc>
+                <a:spcPct val="112000"/>
+              </a:lnSpc>
+              <a:spcAft>
+                <a:spcPts val="300"/>
+              </a:spcAft>
+            </a:pPr>
+            <a:r>
+              <a:rPr sz="1050" b="1" i="0">
+                <a:solidFill>
+                  <a:srgbClr val="6B3FA0"/>
+                </a:solidFill>
+                <a:latin typeface="Calibri"/>
+              </a:rPr>
+              <a:t>A whole RFQ pack costed</a:t>
+            </a:r>
+          </a:p>
+          <a:p>
+            <a:pPr algn="l">
+              <a:lnSpc>
+                <a:spcPct val="112000"/>
+              </a:lnSpc>
+              <a:spcAft>
+                <a:spcPts val="300"/>
+              </a:spcAft>
+            </a:pPr>
+            <a:r>
+              <a:rPr sz="1050" b="0" i="0">
+                <a:solidFill>
+                  <a:srgbClr val="3A4356"/>
+                </a:solidFill>
+                <a:latin typeface="Calibri"/>
+              </a:rPr>
+              <a:t>The line items are pulled out, priced and put</a:t>
+            </a:r>
+          </a:p>
+          <a:p>
+            <a:pPr algn="l">
+              <a:lnSpc>
+                <a:spcPct val="112000"/>
+              </a:lnSpc>
+              <a:spcAft>
+                <a:spcPts val="300"/>
+              </a:spcAft>
+            </a:pPr>
+            <a:r>
+              <a:rPr sz="1050" b="0" i="0">
+                <a:solidFill>
+                  <a:srgbClr val="3A4356"/>
+                </a:solidFill>
+                <a:latin typeface="Calibri"/>
+              </a:rPr>
+              <a:t>in order of money.</a:t>
+            </a:r>
+          </a:p>
+          <a:p>
+            <a:pPr algn="l">
+              <a:lnSpc>
+                <a:spcPct val="112000"/>
+              </a:lnSpc>
+              <a:spcAft>
+                <a:spcPts val="300"/>
+              </a:spcAft>
+            </a:pPr>
+          </a:p>
+          <a:p>
+            <a:pPr algn="l">
+              <a:lnSpc>
+                <a:spcPct val="112000"/>
+              </a:lnSpc>
+              <a:spcAft>
+                <a:spcPts val="300"/>
+              </a:spcAft>
+            </a:pPr>
+            <a:r>
+              <a:rPr sz="1050" b="1" i="0">
+                <a:solidFill>
+                  <a:srgbClr val="6B3FA0"/>
+                </a:solidFill>
+                <a:latin typeface="Calibri"/>
+              </a:rPr>
+              <a:t>Design changes with a price on them</a:t>
+            </a:r>
+          </a:p>
+          <a:p>
+            <a:pPr algn="l">
+              <a:lnSpc>
+                <a:spcPct val="112000"/>
+              </a:lnSpc>
+              <a:spcAft>
+                <a:spcPts val="300"/>
+              </a:spcAft>
+            </a:pPr>
+            <a:r>
+              <a:rPr sz="1050" b="0" i="0">
+                <a:solidFill>
+                  <a:srgbClr val="3A4356"/>
+                </a:solidFill>
+                <a:latin typeface="Calibri"/>
+              </a:rPr>
+              <a:t>What makes the part expensive, and what</a:t>
+            </a:r>
+          </a:p>
+          <a:p>
+            <a:pPr algn="l">
+              <a:lnSpc>
+                <a:spcPct val="112000"/>
+              </a:lnSpc>
+              <a:spcAft>
+                <a:spcPts val="300"/>
+              </a:spcAft>
+            </a:pPr>
+            <a:r>
+              <a:rPr sz="1050" b="0" i="0">
+                <a:solidFill>
+                  <a:srgbClr val="3A4356"/>
+                </a:solidFill>
+                <a:latin typeface="Calibri"/>
+              </a:rPr>
+              <a:t>each change would save.</a:t>
+            </a:r>
+          </a:p>
+        </p:txBody>
+      </p:sp>
+      <p:sp>
+        <p:nvSpPr>
+          <p:cNvPr id="18" name="Rounded Rectangle 17"/>
           <p:cNvSpPr/>
           <p:nvPr/>
         </p:nvSpPr>
         <p:spPr>
           <a:xfrm>
-            <a:off x="411480" y="5897880"/>
-            <a:ext cx="11365992" cy="822960"/>
+            <a:off x="411480" y="6053328"/>
+            <a:ext cx="11365992" cy="758952"/>
           </a:xfrm>
           <a:prstGeom prst="roundRect">
             <a:avLst>
@@ -12379,14 +12688,14 @@
       </p:sp>
       <p:sp>
         <p:nvSpPr>
-          <p:cNvPr id="18" name="Rectangle 17"/>
+          <p:cNvPr id="19" name="Rectangle 18"/>
           <p:cNvSpPr/>
           <p:nvPr/>
         </p:nvSpPr>
         <p:spPr>
           <a:xfrm>
-            <a:off x="411480" y="5897880"/>
-            <a:ext cx="68580" cy="822960"/>
+            <a:off x="411480" y="6053328"/>
+            <a:ext cx="68580" cy="758952"/>
           </a:xfrm>
           <a:prstGeom prst="rect">
             <a:avLst/>
@@ -12423,13 +12732,13 @@
       </p:sp>
       <p:sp>
         <p:nvSpPr>
-          <p:cNvPr id="19" name="TextBox 18"/>
+          <p:cNvPr id="20" name="TextBox 19"/>
           <p:cNvSpPr txBox="1"/>
           <p:nvPr/>
         </p:nvSpPr>
         <p:spPr>
           <a:xfrm>
-            <a:off x="630936" y="6016752"/>
+            <a:off x="630936" y="6172200"/>
             <a:ext cx="10954512" cy="256032"/>
           </a:xfrm>
           <a:prstGeom prst="rect">
@@ -12465,14 +12774,14 @@
       </p:sp>
       <p:sp>
         <p:nvSpPr>
-          <p:cNvPr id="20" name="TextBox 19"/>
+          <p:cNvPr id="21" name="TextBox 20"/>
           <p:cNvSpPr txBox="1"/>
           <p:nvPr/>
         </p:nvSpPr>
         <p:spPr>
           <a:xfrm>
-            <a:off x="630936" y="6300216"/>
-            <a:ext cx="10954512" cy="320040"/>
+            <a:off x="630936" y="6455664"/>
+            <a:ext cx="10954512" cy="256032"/>
           </a:xfrm>
           <a:prstGeom prst="rect">
             <a:avLst/>
@@ -12500,7 +12809,7 @@
                 </a:solidFill>
                 <a:latin typeface="Calibri"/>
               </a:rPr>
-              <a:t>Option 1's benefits arrive first and are kept when Option 2 lands. Option 2's rest on the accuracy figure that Option 1 produces, which is the reason for doing them in this order rather than choosing between them.</a:t>
+              <a:t>Option 1's benefits arrive first and are kept when Option 2 lands. Option 2's rest on the accuracy figure that Option 1 produces, which is why these are an order and not a choice.</a:t>
             </a:r>
           </a:p>
         </p:txBody>

--- a/CostVision-CAPEE-Business-Case.pptx
+++ b/CostVision-CAPEE-Business-Case.pptx
@@ -719,7 +719,7 @@
           <a:lstStyle/>
           <a:p>
             <a:r>
-              <a:t>This is what we get for it, written in kind rather than in pounds, for the reason I gave on the first slide: we have never timed this job and never checked the tool against a price we paid, so a pound figure from me would be a guess. The left column is Option one, and it is short on purpose. The job turns from typing into checking, because the values come off the model. It gives the same answer every time, so parts costed by different engineers are comparable. The time freed goes back into costing more parts with the team we already have. Nobody learns a new tool. And it can start now, because there is no AI in it to approve. The right column is wider because Option two genuinely has more in it. It runs on its own — parts go in and costed reports come out, and a person answers only what the model cannot show. It uses the same method for everything we make, so a plastic clip and a machined bracket are built up the same way and can sit in the same report. It costs electronics from a photograph of the board, which is work we largely cannot do today. It costs software as well: forty-three modules, from powertrain and driver assistance through to the cloud back end, which matters more every programme. Then the second half of that column is the part I would put to purchasing. It shows where a supplier's price differs from our own build-up and which part of the cost the gap sits in. Then it tells us what to do about it: what to go after, what to ask them, and what it is worth over a year. A whole RFQ pack can go in and come back priced and put in order of money. And design changes come back with a price on them rather than as a list of suggestions. The green strip is the sequencing point. Option one's benefits arrive first and we keep them. Option two's depend on the accuracy figure Option one produces, which is why these are an order rather than a choice.</a:t>
+              <a:t>This is what we get for it, written in kind rather than in pounds, for the reason I gave on the first slide: we have never timed this job and never checked the tool against a price we paid, so a pound figure from me would be a guess. The left column is Option one, and it is all about the same thing: the time we spend putting numbers into CAPEE by hand. The typing goes — between twelve and sixty-nine values a part, depending on the commodity, now filled from the model. With nothing typed there is nothing to mistype, so the checking of our own transcription goes with it. It gives the same answer every time, so parts costed by different engineers are comparable. Re-costing becomes nearly free: a new volume or a new set of rates does not mean reading the model again. And the saving is not a one-off — it repeats on every part, so it grows with how many we cost. What is left is the judgement: material, tolerance class, finish and heat treatment, the calls only we can make. That column can start now, because there is no AI in it to approve. And the last line points back at slide one: put our four numbers in and all of that becomes hours. The right column is wider because Option two genuinely has more in it. It runs on its own — parts go in and costed reports come out, and a person answers only what the model cannot show. It uses the same method for everything we make, so a plastic clip and a machined bracket are built up the same way and can sit in the same report. It costs electronics from a photograph of the board, which is work we largely cannot do today. It costs software as well: forty-three modules, from powertrain and driver assistance through to the cloud back end, which matters more every programme. Then the second half of that column is the part I would put to purchasing. It shows where a supplier's price differs from our own build-up and which part of the cost the gap sits in. Then it tells us what to do about it: what to go after, what to ask them, and what it is worth over a year. A whole RFQ pack can go in and come back priced and put in order of money. And design changes come back with a price on them rather than as a list of suggestions. The green strip is the sequencing point. Option one's benefits arrive first and we keep them. Option two's depend on the accuracy figure Option one produces, which is why these are an order rather than a choice.</a:t>
             </a:r>
           </a:p>
         </p:txBody>
@@ -11566,7 +11566,7 @@
         <p:spPr>
           <a:xfrm>
             <a:off x="411480" y="1810512"/>
-            <a:ext cx="3611880" cy="4206240"/>
+            <a:ext cx="3611880" cy="4297680"/>
           </a:xfrm>
           <a:prstGeom prst="roundRect">
             <a:avLst>
@@ -11614,7 +11614,7 @@
         <p:spPr>
           <a:xfrm>
             <a:off x="411480" y="1810512"/>
-            <a:ext cx="68580" cy="4206240"/>
+            <a:ext cx="68580" cy="4297680"/>
           </a:xfrm>
           <a:prstGeom prst="rect">
             <a:avLst/>
@@ -11700,7 +11700,7 @@
         <p:spPr>
           <a:xfrm>
             <a:off x="612648" y="2249424"/>
-            <a:ext cx="3246120" cy="3657600"/>
+            <a:ext cx="3246120" cy="3749040"/>
           </a:xfrm>
           <a:prstGeom prst="rect">
             <a:avLst/>
@@ -11728,7 +11728,7 @@
                 </a:solidFill>
                 <a:latin typeface="Calibri"/>
               </a:rPr>
-              <a:t>Checking instead of typing</a:t>
+              <a:t>The typing goes</a:t>
             </a:r>
           </a:p>
           <a:p>
@@ -11747,7 +11747,7 @@
                 </a:solidFill>
                 <a:latin typeface="Calibri"/>
               </a:rPr>
-              <a:t>The values come off the 3D model.</a:t>
+              <a:t>Between 12 and 69 values per part.</a:t>
             </a:r>
           </a:p>
           <a:p>
@@ -11759,6 +11759,15 @@
                 <a:spcPts val="300"/>
               </a:spcAft>
             </a:pPr>
+            <a:r>
+              <a:rPr sz="1050" b="1" i="0">
+                <a:solidFill>
+                  <a:srgbClr val="1D6FB8"/>
+                </a:solidFill>
+                <a:latin typeface="Calibri"/>
+              </a:rPr>
+              <a:t>Nothing to mistype</a:t>
+            </a:r>
           </a:p>
           <a:p>
             <a:pPr algn="l">
@@ -11770,6 +11779,25 @@
               </a:spcAft>
             </a:pPr>
             <a:r>
+              <a:rPr sz="1050" b="0" i="0">
+                <a:solidFill>
+                  <a:srgbClr val="3A4356"/>
+                </a:solidFill>
+                <a:latin typeface="Calibri"/>
+              </a:rPr>
+              <a:t>And nothing to re-check afterwards.</a:t>
+            </a:r>
+          </a:p>
+          <a:p>
+            <a:pPr algn="l">
+              <a:lnSpc>
+                <a:spcPct val="112000"/>
+              </a:lnSpc>
+              <a:spcAft>
+                <a:spcPts val="300"/>
+              </a:spcAft>
+            </a:pPr>
+            <a:r>
               <a:rPr sz="1050" b="1" i="0">
                 <a:solidFill>
                   <a:srgbClr val="1D6FB8"/>
@@ -11807,6 +11835,15 @@
                 <a:spcPts val="300"/>
               </a:spcAft>
             </a:pPr>
+            <a:r>
+              <a:rPr sz="1050" b="1" i="0">
+                <a:solidFill>
+                  <a:srgbClr val="1D6FB8"/>
+                </a:solidFill>
+                <a:latin typeface="Calibri"/>
+              </a:rPr>
+              <a:t>A re-cost is nearly free</a:t>
+            </a:r>
           </a:p>
           <a:p>
             <a:pPr algn="l">
@@ -11818,13 +11855,32 @@
               </a:spcAft>
             </a:pPr>
             <a:r>
+              <a:rPr sz="1050" b="0" i="0">
+                <a:solidFill>
+                  <a:srgbClr val="3A4356"/>
+                </a:solidFill>
+                <a:latin typeface="Calibri"/>
+              </a:rPr>
+              <a:t>New volume or rates, no re-reading.</a:t>
+            </a:r>
+          </a:p>
+          <a:p>
+            <a:pPr algn="l">
+              <a:lnSpc>
+                <a:spcPct val="112000"/>
+              </a:lnSpc>
+              <a:spcAft>
+                <a:spcPts val="300"/>
+              </a:spcAft>
+            </a:pPr>
+            <a:r>
               <a:rPr sz="1050" b="1" i="0">
                 <a:solidFill>
                   <a:srgbClr val="1D6FB8"/>
                 </a:solidFill>
                 <a:latin typeface="Calibri"/>
               </a:rPr>
-              <a:t>More parts for the same team</a:t>
+              <a:t>The saving repeats on every part</a:t>
             </a:r>
           </a:p>
           <a:p>
@@ -11843,7 +11899,7 @@
                 </a:solidFill>
                 <a:latin typeface="Calibri"/>
               </a:rPr>
-              <a:t>The time saved goes back into costing.</a:t>
+              <a:t>It grows with how many we cost.</a:t>
             </a:r>
           </a:p>
           <a:p>
@@ -11855,6 +11911,15 @@
                 <a:spcPts val="300"/>
               </a:spcAft>
             </a:pPr>
+            <a:r>
+              <a:rPr sz="1050" b="1" i="0">
+                <a:solidFill>
+                  <a:srgbClr val="1D6FB8"/>
+                </a:solidFill>
+                <a:latin typeface="Calibri"/>
+              </a:rPr>
+              <a:t>What is left is the judgement</a:t>
+            </a:r>
           </a:p>
           <a:p>
             <a:pPr algn="l">
@@ -11866,13 +11931,51 @@
               </a:spcAft>
             </a:pPr>
             <a:r>
+              <a:rPr sz="1050" b="0" i="0">
+                <a:solidFill>
+                  <a:srgbClr val="3A4356"/>
+                </a:solidFill>
+                <a:latin typeface="Calibri"/>
+              </a:rPr>
+              <a:t>Material, tolerance, finish, heat</a:t>
+            </a:r>
+          </a:p>
+          <a:p>
+            <a:pPr algn="l">
+              <a:lnSpc>
+                <a:spcPct val="112000"/>
+              </a:lnSpc>
+              <a:spcAft>
+                <a:spcPts val="300"/>
+              </a:spcAft>
+            </a:pPr>
+            <a:r>
+              <a:rPr sz="1050" b="0" i="0">
+                <a:solidFill>
+                  <a:srgbClr val="3A4356"/>
+                </a:solidFill>
+                <a:latin typeface="Calibri"/>
+              </a:rPr>
+              <a:t>treatment — the calls only we can make.</a:t>
+            </a:r>
+          </a:p>
+          <a:p>
+            <a:pPr algn="l">
+              <a:lnSpc>
+                <a:spcPct val="112000"/>
+              </a:lnSpc>
+              <a:spcAft>
+                <a:spcPts val="300"/>
+              </a:spcAft>
+            </a:pPr>
+            <a:r>
               <a:rPr sz="1050" b="1" i="0">
                 <a:solidFill>
                   <a:srgbClr val="1D6FB8"/>
                 </a:solidFill>
                 <a:latin typeface="Calibri"/>
               </a:rPr>
-              <a:t>Nothing new to learn</a:t>
+              <a:t>It can start now</a:t>
             </a:r>
           </a:p>
           <a:p>
@@ -11891,7 +11994,7 @@
                 </a:solidFill>
                 <a:latin typeface="Calibri"/>
               </a:rPr>
-              <a:t>CAPEE does not change.</a:t>
+              <a:t>No AI, so no approval to wait for.</a:t>
             </a:r>
           </a:p>
           <a:p>
@@ -11920,26 +12023,7 @@
                 </a:solidFill>
                 <a:latin typeface="Calibri"/>
               </a:rPr>
-              <a:t>It can start now</a:t>
-            </a:r>
-          </a:p>
-          <a:p>
-            <a:pPr algn="l">
-              <a:lnSpc>
-                <a:spcPct val="112000"/>
-              </a:lnSpc>
-              <a:spcAft>
-                <a:spcPts val="300"/>
-              </a:spcAft>
-            </a:pPr>
-            <a:r>
-              <a:rPr sz="1050" b="0" i="0">
-                <a:solidFill>
-                  <a:srgbClr val="3A4356"/>
-                </a:solidFill>
-                <a:latin typeface="Calibri"/>
-              </a:rPr>
-              <a:t>No AI, so no approval to wait for.</a:t>
+              <a:t>Slide 1 turns this into hours.</a:t>
             </a:r>
           </a:p>
         </p:txBody>
@@ -11953,7 +12037,7 @@
         <p:spPr>
           <a:xfrm>
             <a:off x="4233672" y="1810512"/>
-            <a:ext cx="7543800" cy="4206240"/>
+            <a:ext cx="7543800" cy="4297680"/>
           </a:xfrm>
           <a:prstGeom prst="roundRect">
             <a:avLst>
@@ -12001,7 +12085,7 @@
         <p:spPr>
           <a:xfrm>
             <a:off x="4233672" y="1810512"/>
-            <a:ext cx="68580" cy="4206240"/>
+            <a:ext cx="68580" cy="4297680"/>
           </a:xfrm>
           <a:prstGeom prst="rect">
             <a:avLst/>
@@ -12087,7 +12171,7 @@
         <p:spPr>
           <a:xfrm>
             <a:off x="4434840" y="2267712"/>
-            <a:ext cx="3488436" cy="3657600"/>
+            <a:ext cx="3488436" cy="3749040"/>
           </a:xfrm>
           <a:prstGeom prst="rect">
             <a:avLst/>
@@ -12368,7 +12452,7 @@
         <p:spPr>
           <a:xfrm>
             <a:off x="8087868" y="2267712"/>
-            <a:ext cx="3488436" cy="3657600"/>
+            <a:ext cx="3488436" cy="3749040"/>
           </a:xfrm>
           <a:prstGeom prst="rect">
             <a:avLst/>
@@ -12648,8 +12732,8 @@
         </p:nvSpPr>
         <p:spPr>
           <a:xfrm>
-            <a:off x="411480" y="6053328"/>
-            <a:ext cx="11365992" cy="758952"/>
+            <a:off x="411480" y="6163056"/>
+            <a:ext cx="11365992" cy="603504"/>
           </a:xfrm>
           <a:prstGeom prst="roundRect">
             <a:avLst>
@@ -12694,8 +12778,8 @@
         </p:nvSpPr>
         <p:spPr>
           <a:xfrm>
-            <a:off x="411480" y="6053328"/>
-            <a:ext cx="68580" cy="758952"/>
+            <a:off x="411480" y="6163056"/>
+            <a:ext cx="68580" cy="603504"/>
           </a:xfrm>
           <a:prstGeom prst="rect">
             <a:avLst/>
@@ -12738,7 +12822,7 @@
         </p:nvSpPr>
         <p:spPr>
           <a:xfrm>
-            <a:off x="630936" y="6172200"/>
+            <a:off x="630936" y="6281928"/>
             <a:ext cx="10954512" cy="256032"/>
           </a:xfrm>
           <a:prstGeom prst="rect">
@@ -12780,8 +12864,8 @@
         </p:nvSpPr>
         <p:spPr>
           <a:xfrm>
-            <a:off x="630936" y="6455664"/>
-            <a:ext cx="10954512" cy="256032"/>
+            <a:off x="630936" y="6565392"/>
+            <a:ext cx="10954512" cy="109728"/>
           </a:xfrm>
           <a:prstGeom prst="rect">
             <a:avLst/>
@@ -12809,7 +12893,7 @@
                 </a:solidFill>
                 <a:latin typeface="Calibri"/>
               </a:rPr>
-              <a:t>Option 1's benefits arrive first and are kept when Option 2 lands. Option 2's rest on the accuracy figure that Option 1 produces, which is why these are an order and not a choice.</a:t>
+              <a:t>Option 1's benefits arrive first and are kept when Option 2 lands; Option 2's rest on the accuracy figure Option 1 produces.</a:t>
             </a:r>
           </a:p>
         </p:txBody>

--- a/CostVision-CAPEE-Business-Case.pptx
+++ b/CostVision-CAPEE-Business-Case.pptx
@@ -649,7 +649,7 @@
           <a:lstStyle/>
           <a:p>
             <a:r>
-              <a:t>This is the slide I would spend the most time on, because it is the part of the case that is easy to under-sell. Six things the tool does, and one distinction I want to make before I go through them: five of these work today, one part at a time, in the tool as it stands. The first one does not, and that is why it is the amber tile. A list of parts and their models goes in and every part comes back costed, with a report per part and per basket, without anybody sitting there — that is what Option two builds, and today we cost the parts we have hours for and estimate the rest from a sample. Next to it is the one that usually gets a reaction in the room. You take a photograph of a circuit board and the tool works out what is on it, builds the bill of materials, works out the board specification and costs it. That is a job that takes an electronics buyer a long time and most of us cannot do at all. Third along, an RFQ pack goes in and comes back as costed lines, ranked by where the money is, with a first draft of the negotiation brief written for you. Bottom left is the assistant, and I want to be precise about it. It does the setting up: it picks the process route and the machine and fills in what the geometry gives it, and then it comes back to a person with one question rather than a hundred. Next to that is the one our buyers will care about most. Put a supplier's price next to our own build-up and the tool tells you which part of it the gap sits in and what to ask them about it. And the last one turns design-for-cost from a list into a decision: it flags what makes a part expensive and puts a number on each change, ordered by what it saves. The blue strip at the bottom is the sentence I would want people to leave with. The AI reads and sorts and sets up. It never sets a price. The money is still worked out by the same fixed rules and the same rate book we use now, so every number can be explained line by line, exactly as it can today.</a:t>
+              <a:t>This is the slide I would spend the most time on, because it is the part of the case that is easy to under-sell. Six things the tool does, and all six of them work today. The split on the slide is not what works and what does not — it is what needs an AI service and what does not. The top row needs none at all. It is the fixed rules and our own rate book, so it is the same policy position as Option one. The bottom row reads something a person would otherwise read, so it needs a model, and that is the approval I am asking us to start. Taking the top row first. A list of parts and their three-D models goes in and every part comes back costed, with a report per part and per basket, with nobody sitting there and on our own rates. That one is built and it runs; today we cost the parts we have hours for and estimate the rest from a sample. Next to it is the one our buyers will care about most. Put a supplier's price next to our own build-up and the tool tells you which part of it the gap sits in and what to ask them about it. And the third turns design-for-cost from a list into a decision: it flags what makes a part expensive and puts a number on each change, ordered by what it saves. Now the bottom row. The first usually gets a reaction in the room. You take a photograph of a circuit board and the tool works out what is on it, builds the bill of materials, works out the board specification and costs it. That is a job that takes an electronics buyer a long time and most of us cannot do at all. Next along, an RFQ pack goes in and comes back as costed lines, ranked by where the money is, with a first draft of the negotiation brief written for you. And the last is the assistant, and I want to be precise about it. It does the setting up: it picks the process route and the machine and fills in what the geometry gives it, and then it comes back to a person with one question rather than a hundred. The blue strip at the bottom is the sentence I would want people to leave with. Where the AI is used it reads and sorts and sets up. It never sets a price. The money is still worked out by the same fixed rules and the same rate book we use now, so every number can be explained line by line, exactly as it can today.</a:t>
             </a:r>
           </a:p>
         </p:txBody>
@@ -789,7 +789,7 @@
           <a:lstStyle/>
           <a:p>
             <a:r>
-              <a:t>So this is the decision, and I have split it into what I want today and what I do not. On the left, Option one: approve the trial. One commodity, thirty to fifty parts we have already bought, run inside CAPEE. On the right, Option two: I am not asking you to decide it. What I am asking is that we start the AI approval alongside the trial, because that is the long pole and there is no sense discovering at the end of the trial that we now have to begin it. The two cards underneath are what each one needs. Option one needs a server, a way to pass numbers into CAPEE, some parts where we know what we paid, and an engineer from the commodity team for the trial. Option two needs all of that plus the AI approval, our own rate book with a change history, and a few things built around the engine. The green strip is what we get out of the trial and it is the reason to do it: two numbers that nobody in this company can state today. How close the tool gets to a price we actually paid, and how much of the input it fills on its own. Until we have those, any conversation about Option two is people trading opinions. Then three short things I want to say plainly rather than have asked. The first is the governance point and it is the one I would repeat if you take nothing else away: the AI reads, sorts and sets up, and it never sets a price. The money comes out of the same fixed rules and the same rate book as today, so every number can be defended line by line exactly as it can now. The second is the exit. We have never compared this against a price we have paid. If the trial says the tool is not close enough, we stop, and what we will have spent is our own engineering time — that is precisely why I am asking for a trial and not a rollout. And the third is the honest answer to how long: nobody has sized it. It waits on one answer from IT about how CAPEE is built, and the sizing comes back with that answer rather than being invented now.</a:t>
+              <a:t>So this is the decision, and I have split it into what I want today and what I do not. On the left, Option one: approve the trial. One commodity, thirty to fifty parts we have already bought, run inside CAPEE. On the right, Option two: I am not asking you to decide it. The bulk run itself is built — it costs a basket of our own parts unattended, on our own rates. What I am asking is that we start the AI approval alongside the trial, because that is the long pole and there is no sense discovering at the end of the trial that we now have to begin it. The two cards underneath are what each one needs. Option one needs a server, a way to pass numbers into CAPEE, some parts where we know what we paid, and an engineer from the commodity team for the trial. Option two needs all of that, plus the AI approval and our own rate book loaded into the tool. The rest of it is built. The green strip is what we get out of the trial and it is the reason to do it: two numbers that nobody in this company can state today. How close the tool gets to a price we actually paid, and how much of the input it fills on its own. Until we have those, any conversation about Option two is people trading opinions. Then three short things I want to say plainly rather than have asked. The first is the governance point and it is the one I would repeat if you take nothing else away: the AI reads, sorts and sets up, and it never sets a price. The money comes out of the same fixed rules and the same rate book as today, so every number can be defended line by line exactly as it can now. The second is the exit. We have never compared this against a price we have paid, and it has never been run on a JLR laptop. If the trial says the tool is not close enough, we stop, and what we will have spent is our own engineering time — that is precisely why I am asking for a trial and not a rollout. And the third is the honest answer to how long: nobody has sized it. It waits on one answer from IT about how CAPEE is built, and the sizing comes back with that answer rather than being invented now.</a:t>
             </a:r>
           </a:p>
         </p:txBody>
@@ -9585,7 +9585,7 @@
                 </a:solidFill>
                 <a:latin typeface="Calibri"/>
               </a:rPr>
-              <a:t>What the tool does. Five of these work today, one part at a time — running them over a whole basket is what Option 2 builds.</a:t>
+              <a:t>All six work today. The top row needs no AI at all; the bottom row needs an AI service, which is the approval to start now.</a:t>
             </a:r>
           </a:p>
         </p:txBody>
@@ -9653,7 +9653,7 @@
             <a:avLst/>
           </a:prstGeom>
           <a:solidFill>
-            <a:srgbClr val="B7791F"/>
+            <a:srgbClr val="2E8B57"/>
           </a:solidFill>
           <a:ln>
             <a:noFill/>
@@ -9697,7 +9697,7 @@
             <a:avLst/>
           </a:prstGeom>
           <a:solidFill>
-            <a:srgbClr val="B7791F"/>
+            <a:srgbClr val="2E8B57"/>
           </a:solidFill>
           <a:ln>
             <a:noFill/>
@@ -9829,7 +9829,7 @@
                 </a:solidFill>
                 <a:latin typeface="Calibri"/>
               </a:rPr>
-              <a:t>A list of parts and their 3D models goes in. Every part costed and reported with nobody sitting there. This is the one Option 2 builds.</a:t>
+              <a:t>A list of parts and their 3D models goes in. Every part costed and reported with nobody sitting there, on our own rates.</a:t>
             </a:r>
           </a:p>
         </p:txBody>
@@ -9897,7 +9897,7 @@
             <a:avLst/>
           </a:prstGeom>
           <a:solidFill>
-            <a:srgbClr val="6B3FA0"/>
+            <a:srgbClr val="2E8B57"/>
           </a:solidFill>
           <a:ln>
             <a:noFill/>
@@ -9941,7 +9941,7 @@
             <a:avLst/>
           </a:prstGeom>
           <a:solidFill>
-            <a:srgbClr val="6B3FA0"/>
+            <a:srgbClr val="2E8B57"/>
           </a:solidFill>
           <a:ln>
             <a:noFill/>
@@ -9972,7 +9972,7 @@
       </p:sp>
       <p:pic>
         <p:nvPicPr>
-          <p:cNvPr id="18" name="Picture 17" descr="eye.png"/>
+          <p:cNvPr id="18" name="Picture 17" descr="coins.png"/>
           <p:cNvPicPr>
             <a:picLocks noChangeAspect="1"/>
           </p:cNvPicPr>
@@ -10031,7 +10031,7 @@
                 </a:solidFill>
                 <a:latin typeface="Calibri"/>
               </a:rPr>
-              <a:t>A board photo becomes a costed BOM</a:t>
+              <a:t>Supplier quotes taken apart</a:t>
             </a:r>
           </a:p>
         </p:txBody>
@@ -10073,7 +10073,7 @@
                 </a:solidFill>
                 <a:latin typeface="Calibri"/>
               </a:rPr>
-              <a:t>Take a picture of a circuit board. The tool works out what is on it, builds the bill of materials and the board spec, and costs it.</a:t>
+              <a:t>Put their price next to our own build-up and see which part of it the gap is in, with the questions to put to them.</a:t>
             </a:r>
           </a:p>
         </p:txBody>
@@ -10141,7 +10141,7 @@
             <a:avLst/>
           </a:prstGeom>
           <a:solidFill>
-            <a:srgbClr val="6B3FA0"/>
+            <a:srgbClr val="2E8B57"/>
           </a:solidFill>
           <a:ln>
             <a:noFill/>
@@ -10185,7 +10185,7 @@
             <a:avLst/>
           </a:prstGeom>
           <a:solidFill>
-            <a:srgbClr val="6B3FA0"/>
+            <a:srgbClr val="2E8B57"/>
           </a:solidFill>
           <a:ln>
             <a:noFill/>
@@ -10216,7 +10216,7 @@
       </p:sp>
       <p:pic>
         <p:nvPicPr>
-          <p:cNvPr id="24" name="Picture 23" descr="clip.png"/>
+          <p:cNvPr id="24" name="Picture 23" descr="press.png"/>
           <p:cNvPicPr>
             <a:picLocks noChangeAspect="1"/>
           </p:cNvPicPr>
@@ -10275,7 +10275,7 @@
                 </a:solidFill>
                 <a:latin typeface="Calibri"/>
               </a:rPr>
-              <a:t>An RFQ pack becomes costed lines</a:t>
+              <a:t>Design changes priced, not guessed</a:t>
             </a:r>
           </a:p>
         </p:txBody>
@@ -10317,7 +10317,7 @@
                 </a:solidFill>
                 <a:latin typeface="Calibri"/>
               </a:rPr>
-              <a:t>The tool pulls the line items out of the pack, costs each one, ranks them by money and drafts the negotiation brief.</a:t>
+              <a:t>It flags what makes a part expensive and puts a number on each change, ranked by the money it would save.</a:t>
             </a:r>
           </a:p>
         </p:txBody>
@@ -10385,7 +10385,7 @@
             <a:avLst/>
           </a:prstGeom>
           <a:solidFill>
-            <a:srgbClr val="1D6FB8"/>
+            <a:srgbClr val="6B3FA0"/>
           </a:solidFill>
           <a:ln>
             <a:noFill/>
@@ -10429,7 +10429,7 @@
             <a:avLst/>
           </a:prstGeom>
           <a:solidFill>
-            <a:srgbClr val="1D6FB8"/>
+            <a:srgbClr val="6B3FA0"/>
           </a:solidFill>
           <a:ln>
             <a:noFill/>
@@ -10460,7 +10460,7 @@
       </p:sp>
       <p:pic>
         <p:nvPicPr>
-          <p:cNvPr id="30" name="Picture 29" descr="person.png"/>
+          <p:cNvPr id="30" name="Picture 29" descr="eye.png"/>
           <p:cNvPicPr>
             <a:picLocks noChangeAspect="1"/>
           </p:cNvPicPr>
@@ -10519,7 +10519,7 @@
                 </a:solidFill>
                 <a:latin typeface="Calibri"/>
               </a:rPr>
-              <a:t>An assistant does the setting up</a:t>
+              <a:t>A board photo becomes a BOM</a:t>
             </a:r>
           </a:p>
         </p:txBody>
@@ -10561,7 +10561,7 @@
                 </a:solidFill>
                 <a:latin typeface="Calibri"/>
               </a:rPr>
-              <a:t>It picks the process route and the machine and fills in what the geometry gives, then asks one question instead of a hundred.</a:t>
+              <a:t>Take a picture of a circuit board. The tool works out what is on it, builds the bill of materials and the board spec, and costs it.</a:t>
             </a:r>
           </a:p>
         </p:txBody>
@@ -10629,7 +10629,7 @@
             <a:avLst/>
           </a:prstGeom>
           <a:solidFill>
-            <a:srgbClr val="1D6FB8"/>
+            <a:srgbClr val="6B3FA0"/>
           </a:solidFill>
           <a:ln>
             <a:noFill/>
@@ -10673,7 +10673,7 @@
             <a:avLst/>
           </a:prstGeom>
           <a:solidFill>
-            <a:srgbClr val="1D6FB8"/>
+            <a:srgbClr val="6B3FA0"/>
           </a:solidFill>
           <a:ln>
             <a:noFill/>
@@ -10704,7 +10704,7 @@
       </p:sp>
       <p:pic>
         <p:nvPicPr>
-          <p:cNvPr id="36" name="Picture 35" descr="coins.png"/>
+          <p:cNvPr id="36" name="Picture 35" descr="clip.png"/>
           <p:cNvPicPr>
             <a:picLocks noChangeAspect="1"/>
           </p:cNvPicPr>
@@ -10763,7 +10763,7 @@
                 </a:solidFill>
                 <a:latin typeface="Calibri"/>
               </a:rPr>
-              <a:t>Supplier quotes taken apart</a:t>
+              <a:t>An RFQ pack becomes costed lines</a:t>
             </a:r>
           </a:p>
         </p:txBody>
@@ -10805,7 +10805,7 @@
                 </a:solidFill>
                 <a:latin typeface="Calibri"/>
               </a:rPr>
-              <a:t>Put their price next to our own build-up and see which part of it the gap is in, with the questions to put to them.</a:t>
+              <a:t>The tool pulls the line items out of the pack, costs each one, ranks them by money and drafts the negotiation brief.</a:t>
             </a:r>
           </a:p>
         </p:txBody>
@@ -10873,7 +10873,7 @@
             <a:avLst/>
           </a:prstGeom>
           <a:solidFill>
-            <a:srgbClr val="1D6FB8"/>
+            <a:srgbClr val="6B3FA0"/>
           </a:solidFill>
           <a:ln>
             <a:noFill/>
@@ -10914,6 +10914,204 @@
             <a:ext cx="548640" cy="548640"/>
           </a:xfrm>
           <a:prstGeom prst="ellipse">
+            <a:avLst/>
+          </a:prstGeom>
+          <a:solidFill>
+            <a:srgbClr val="6B3FA0"/>
+          </a:solidFill>
+          <a:ln>
+            <a:noFill/>
+          </a:ln>
+          <a:effectLst/>
+        </p:spPr>
+        <p:style>
+          <a:lnRef idx="1">
+            <a:schemeClr val="accent1"/>
+          </a:lnRef>
+          <a:fillRef idx="3">
+            <a:schemeClr val="accent1"/>
+          </a:fillRef>
+          <a:effectRef idx="2">
+            <a:schemeClr val="accent1"/>
+          </a:effectRef>
+          <a:fontRef idx="minor">
+            <a:schemeClr val="lt1"/>
+          </a:fontRef>
+        </p:style>
+        <p:txBody>
+          <a:bodyPr rtlCol="0" anchor="ctr"/>
+          <a:lstStyle/>
+          <a:p>
+            <a:pPr algn="ctr"/>
+          </a:p>
+        </p:txBody>
+      </p:sp>
+      <p:pic>
+        <p:nvPicPr>
+          <p:cNvPr id="42" name="Picture 41" descr="person.png"/>
+          <p:cNvPicPr>
+            <a:picLocks noChangeAspect="1"/>
+          </p:cNvPicPr>
+          <p:nvPr/>
+        </p:nvPicPr>
+        <p:blipFill>
+          <a:blip r:embed="rId7"/>
+          <a:stretch>
+            <a:fillRect/>
+          </a:stretch>
+        </p:blipFill>
+        <p:spPr>
+          <a:xfrm>
+            <a:off x="8491118" y="4175150"/>
+            <a:ext cx="263348" cy="263348"/>
+          </a:xfrm>
+          <a:prstGeom prst="rect">
+            <a:avLst/>
+          </a:prstGeom>
+        </p:spPr>
+      </p:pic>
+      <p:sp>
+        <p:nvSpPr>
+          <p:cNvPr id="43" name="TextBox 42"/>
+          <p:cNvSpPr txBox="1"/>
+          <p:nvPr/>
+        </p:nvSpPr>
+        <p:spPr>
+          <a:xfrm>
+            <a:off x="8348472" y="4709160"/>
+            <a:ext cx="3209544" cy="310896"/>
+          </a:xfrm>
+          <a:prstGeom prst="rect">
+            <a:avLst/>
+          </a:prstGeom>
+          <a:noFill/>
+        </p:spPr>
+        <p:txBody>
+          <a:bodyPr wrap="square" anchor="t" lIns="0" rIns="0" tIns="0" bIns="0">
+            <a:spAutoFit/>
+          </a:bodyPr>
+          <a:lstStyle/>
+          <a:p>
+            <a:pPr algn="l">
+              <a:lnSpc>
+                <a:spcPct val="100000"/>
+              </a:lnSpc>
+              <a:spcAft>
+                <a:spcPts val="400"/>
+              </a:spcAft>
+            </a:pPr>
+            <a:r>
+              <a:rPr sz="1180" b="1" i="0">
+                <a:solidFill>
+                  <a:srgbClr val="16325C"/>
+                </a:solidFill>
+                <a:latin typeface="Calibri"/>
+              </a:rPr>
+              <a:t>An assistant does the setting up</a:t>
+            </a:r>
+          </a:p>
+        </p:txBody>
+      </p:sp>
+      <p:sp>
+        <p:nvSpPr>
+          <p:cNvPr id="44" name="TextBox 43"/>
+          <p:cNvSpPr txBox="1"/>
+          <p:nvPr/>
+        </p:nvSpPr>
+        <p:spPr>
+          <a:xfrm>
+            <a:off x="8348472" y="5038344"/>
+            <a:ext cx="3209544" cy="557783"/>
+          </a:xfrm>
+          <a:prstGeom prst="rect">
+            <a:avLst/>
+          </a:prstGeom>
+          <a:noFill/>
+        </p:spPr>
+        <p:txBody>
+          <a:bodyPr wrap="square" anchor="t" lIns="0" rIns="0" tIns="0" bIns="0">
+            <a:spAutoFit/>
+          </a:bodyPr>
+          <a:lstStyle/>
+          <a:p>
+            <a:pPr algn="l">
+              <a:lnSpc>
+                <a:spcPct val="114000"/>
+              </a:lnSpc>
+              <a:spcAft>
+                <a:spcPts val="400"/>
+              </a:spcAft>
+            </a:pPr>
+            <a:r>
+              <a:rPr sz="980" b="0" i="0">
+                <a:solidFill>
+                  <a:srgbClr val="3A4356"/>
+                </a:solidFill>
+                <a:latin typeface="Calibri"/>
+              </a:rPr>
+              <a:t>It picks the process route and the machine and fills in what the geometry gives, then asks one question instead of a hundred.</a:t>
+            </a:r>
+          </a:p>
+        </p:txBody>
+      </p:sp>
+      <p:sp>
+        <p:nvSpPr>
+          <p:cNvPr id="45" name="Rounded Rectangle 44"/>
+          <p:cNvSpPr/>
+          <p:nvPr/>
+        </p:nvSpPr>
+        <p:spPr>
+          <a:xfrm>
+            <a:off x="411480" y="5779008"/>
+            <a:ext cx="11365992" cy="868680"/>
+          </a:xfrm>
+          <a:prstGeom prst="roundRect">
+            <a:avLst>
+              <a:gd name="adj" fmla="val 12000"/>
+            </a:avLst>
+          </a:prstGeom>
+          <a:solidFill>
+            <a:srgbClr val="E8F1FA"/>
+          </a:solidFill>
+          <a:ln>
+            <a:noFill/>
+          </a:ln>
+          <a:effectLst/>
+        </p:spPr>
+        <p:style>
+          <a:lnRef idx="1">
+            <a:schemeClr val="accent1"/>
+          </a:lnRef>
+          <a:fillRef idx="3">
+            <a:schemeClr val="accent1"/>
+          </a:fillRef>
+          <a:effectRef idx="2">
+            <a:schemeClr val="accent1"/>
+          </a:effectRef>
+          <a:fontRef idx="minor">
+            <a:schemeClr val="lt1"/>
+          </a:fontRef>
+        </p:style>
+        <p:txBody>
+          <a:bodyPr rtlCol="0" anchor="ctr"/>
+          <a:lstStyle/>
+          <a:p>
+            <a:pPr algn="ctr"/>
+          </a:p>
+        </p:txBody>
+      </p:sp>
+      <p:sp>
+        <p:nvSpPr>
+          <p:cNvPr id="46" name="Rectangle 45"/>
+          <p:cNvSpPr/>
+          <p:nvPr/>
+        </p:nvSpPr>
+        <p:spPr>
+          <a:xfrm>
+            <a:off x="411480" y="5779008"/>
+            <a:ext cx="68580" cy="868680"/>
+          </a:xfrm>
+          <a:prstGeom prst="rect">
             <a:avLst/>
           </a:prstGeom>
           <a:solidFill>
@@ -10946,40 +11144,16 @@
           </a:p>
         </p:txBody>
       </p:sp>
-      <p:pic>
-        <p:nvPicPr>
-          <p:cNvPr id="42" name="Picture 41" descr="press.png"/>
-          <p:cNvPicPr>
-            <a:picLocks noChangeAspect="1"/>
-          </p:cNvPicPr>
-          <p:nvPr/>
-        </p:nvPicPr>
-        <p:blipFill>
-          <a:blip r:embed="rId7"/>
-          <a:stretch>
-            <a:fillRect/>
-          </a:stretch>
-        </p:blipFill>
-        <p:spPr>
-          <a:xfrm>
-            <a:off x="8491118" y="4175150"/>
-            <a:ext cx="263348" cy="263348"/>
-          </a:xfrm>
-          <a:prstGeom prst="rect">
-            <a:avLst/>
-          </a:prstGeom>
-        </p:spPr>
-      </p:pic>
-      <p:sp>
-        <p:nvSpPr>
-          <p:cNvPr id="43" name="TextBox 42"/>
+      <p:sp>
+        <p:nvSpPr>
+          <p:cNvPr id="47" name="TextBox 46"/>
           <p:cNvSpPr txBox="1"/>
           <p:nvPr/>
         </p:nvSpPr>
         <p:spPr>
           <a:xfrm>
-            <a:off x="8348472" y="4709160"/>
-            <a:ext cx="3209544" cy="310896"/>
+            <a:off x="630936" y="5897880"/>
+            <a:ext cx="10954512" cy="256032"/>
           </a:xfrm>
           <a:prstGeom prst="rect">
             <a:avLst/>
@@ -11001,27 +11175,27 @@
               </a:spcAft>
             </a:pPr>
             <a:r>
-              <a:rPr sz="1180" b="1" i="0">
-                <a:solidFill>
-                  <a:srgbClr val="16325C"/>
-                </a:solidFill>
-                <a:latin typeface="Calibri"/>
-              </a:rPr>
-              <a:t>Design changes priced, not guessed</a:t>
-            </a:r>
-          </a:p>
-        </p:txBody>
-      </p:sp>
-      <p:sp>
-        <p:nvSpPr>
-          <p:cNvPr id="44" name="TextBox 43"/>
+              <a:rPr sz="1200" b="1" i="0">
+                <a:solidFill>
+                  <a:srgbClr val="1D6FB8"/>
+                </a:solidFill>
+                <a:latin typeface="Calibri"/>
+              </a:rPr>
+              <a:t>All six end in the same engine</a:t>
+            </a:r>
+          </a:p>
+        </p:txBody>
+      </p:sp>
+      <p:sp>
+        <p:nvSpPr>
+          <p:cNvPr id="48" name="TextBox 47"/>
           <p:cNvSpPr txBox="1"/>
           <p:nvPr/>
         </p:nvSpPr>
         <p:spPr>
           <a:xfrm>
-            <a:off x="8348472" y="5038344"/>
-            <a:ext cx="3209544" cy="557783"/>
+            <a:off x="630936" y="6181344"/>
+            <a:ext cx="10954512" cy="365760"/>
           </a:xfrm>
           <a:prstGeom prst="rect">
             <a:avLst/>
@@ -11039,191 +11213,17 @@
                 <a:spcPct val="114000"/>
               </a:lnSpc>
               <a:spcAft>
-                <a:spcPts val="400"/>
-              </a:spcAft>
-            </a:pPr>
-            <a:r>
-              <a:rPr sz="980" b="0" i="0">
+                <a:spcPts val="300"/>
+              </a:spcAft>
+            </a:pPr>
+            <a:r>
+              <a:rPr sz="1050" b="0" i="0">
                 <a:solidFill>
                   <a:srgbClr val="3A4356"/>
                 </a:solidFill>
                 <a:latin typeface="Calibri"/>
               </a:rPr>
-              <a:t>It flags what makes a part expensive and puts a number on each change, ranked by the money it would save.</a:t>
-            </a:r>
-          </a:p>
-        </p:txBody>
-      </p:sp>
-      <p:sp>
-        <p:nvSpPr>
-          <p:cNvPr id="45" name="Rounded Rectangle 44"/>
-          <p:cNvSpPr/>
-          <p:nvPr/>
-        </p:nvSpPr>
-        <p:spPr>
-          <a:xfrm>
-            <a:off x="411480" y="5779008"/>
-            <a:ext cx="11365992" cy="868680"/>
-          </a:xfrm>
-          <a:prstGeom prst="roundRect">
-            <a:avLst>
-              <a:gd name="adj" fmla="val 12000"/>
-            </a:avLst>
-          </a:prstGeom>
-          <a:solidFill>
-            <a:srgbClr val="E8F1FA"/>
-          </a:solidFill>
-          <a:ln>
-            <a:noFill/>
-          </a:ln>
-          <a:effectLst/>
-        </p:spPr>
-        <p:style>
-          <a:lnRef idx="1">
-            <a:schemeClr val="accent1"/>
-          </a:lnRef>
-          <a:fillRef idx="3">
-            <a:schemeClr val="accent1"/>
-          </a:fillRef>
-          <a:effectRef idx="2">
-            <a:schemeClr val="accent1"/>
-          </a:effectRef>
-          <a:fontRef idx="minor">
-            <a:schemeClr val="lt1"/>
-          </a:fontRef>
-        </p:style>
-        <p:txBody>
-          <a:bodyPr rtlCol="0" anchor="ctr"/>
-          <a:lstStyle/>
-          <a:p>
-            <a:pPr algn="ctr"/>
-          </a:p>
-        </p:txBody>
-      </p:sp>
-      <p:sp>
-        <p:nvSpPr>
-          <p:cNvPr id="46" name="Rectangle 45"/>
-          <p:cNvSpPr/>
-          <p:nvPr/>
-        </p:nvSpPr>
-        <p:spPr>
-          <a:xfrm>
-            <a:off x="411480" y="5779008"/>
-            <a:ext cx="68580" cy="868680"/>
-          </a:xfrm>
-          <a:prstGeom prst="rect">
-            <a:avLst/>
-          </a:prstGeom>
-          <a:solidFill>
-            <a:srgbClr val="1D6FB8"/>
-          </a:solidFill>
-          <a:ln>
-            <a:noFill/>
-          </a:ln>
-          <a:effectLst/>
-        </p:spPr>
-        <p:style>
-          <a:lnRef idx="1">
-            <a:schemeClr val="accent1"/>
-          </a:lnRef>
-          <a:fillRef idx="3">
-            <a:schemeClr val="accent1"/>
-          </a:fillRef>
-          <a:effectRef idx="2">
-            <a:schemeClr val="accent1"/>
-          </a:effectRef>
-          <a:fontRef idx="minor">
-            <a:schemeClr val="lt1"/>
-          </a:fontRef>
-        </p:style>
-        <p:txBody>
-          <a:bodyPr rtlCol="0" anchor="ctr"/>
-          <a:lstStyle/>
-          <a:p>
-            <a:pPr algn="ctr"/>
-          </a:p>
-        </p:txBody>
-      </p:sp>
-      <p:sp>
-        <p:nvSpPr>
-          <p:cNvPr id="47" name="TextBox 46"/>
-          <p:cNvSpPr txBox="1"/>
-          <p:nvPr/>
-        </p:nvSpPr>
-        <p:spPr>
-          <a:xfrm>
-            <a:off x="630936" y="5897880"/>
-            <a:ext cx="10954512" cy="256032"/>
-          </a:xfrm>
-          <a:prstGeom prst="rect">
-            <a:avLst/>
-          </a:prstGeom>
-          <a:noFill/>
-        </p:spPr>
-        <p:txBody>
-          <a:bodyPr wrap="square" anchor="t" lIns="0" rIns="0" tIns="0" bIns="0">
-            <a:spAutoFit/>
-          </a:bodyPr>
-          <a:lstStyle/>
-          <a:p>
-            <a:pPr algn="l">
-              <a:lnSpc>
-                <a:spcPct val="100000"/>
-              </a:lnSpc>
-              <a:spcAft>
-                <a:spcPts val="400"/>
-              </a:spcAft>
-            </a:pPr>
-            <a:r>
-              <a:rPr sz="1200" b="1" i="0">
-                <a:solidFill>
-                  <a:srgbClr val="1D6FB8"/>
-                </a:solidFill>
-                <a:latin typeface="Calibri"/>
-              </a:rPr>
-              <a:t>All six end in the same engine</a:t>
-            </a:r>
-          </a:p>
-        </p:txBody>
-      </p:sp>
-      <p:sp>
-        <p:nvSpPr>
-          <p:cNvPr id="48" name="TextBox 47"/>
-          <p:cNvSpPr txBox="1"/>
-          <p:nvPr/>
-        </p:nvSpPr>
-        <p:spPr>
-          <a:xfrm>
-            <a:off x="630936" y="6181344"/>
-            <a:ext cx="10954512" cy="365760"/>
-          </a:xfrm>
-          <a:prstGeom prst="rect">
-            <a:avLst/>
-          </a:prstGeom>
-          <a:noFill/>
-        </p:spPr>
-        <p:txBody>
-          <a:bodyPr wrap="square" anchor="t" lIns="0" rIns="0" tIns="0" bIns="0">
-            <a:spAutoFit/>
-          </a:bodyPr>
-          <a:lstStyle/>
-          <a:p>
-            <a:pPr algn="l">
-              <a:lnSpc>
-                <a:spcPct val="114000"/>
-              </a:lnSpc>
-              <a:spcAft>
-                <a:spcPts val="300"/>
-              </a:spcAft>
-            </a:pPr>
-            <a:r>
-              <a:rPr sz="1050" b="0" i="0">
-                <a:solidFill>
-                  <a:srgbClr val="3A4356"/>
-                </a:solidFill>
-                <a:latin typeface="Calibri"/>
-              </a:rPr>
-              <a:t>The AI reads, sorts and sets up — the photo, the pack, the drawing, the process route. It never sets a price. The money is worked out by the same fixed rules and the same rate book we use today, so every number can still be explained line by line.</a:t>
+              <a:t>Where the AI is used it reads, sorts and sets up — the photo, the pack, the drawing, the process route. It never sets a price. The money is worked out by the same fixed rules and the same rate book in every one of the six, so every number can be explained line by line.</a:t>
             </a:r>
           </a:p>
         </p:txBody>
@@ -13551,7 +13551,7 @@
                 </a:solidFill>
                 <a:latin typeface="Calibri"/>
               </a:rPr>
-              <a:t>Start the AI approval in parallel, so it is not the thing</a:t>
+              <a:t>The bulk run is built and runs unattended on our own</a:t>
             </a:r>
           </a:p>
           <a:p>
@@ -13570,7 +13570,7 @@
                 </a:solidFill>
                 <a:latin typeface="Calibri"/>
               </a:rPr>
-              <a:t>holding us up when the trial finishes.</a:t>
+              <a:t>parts. Start the AI approval so it is not what holds us up.</a:t>
             </a:r>
           </a:p>
         </p:txBody>
@@ -13960,7 +13960,7 @@
                 </a:solidFill>
                 <a:latin typeface="Calibri"/>
               </a:rPr>
-              <a:t>Everything above, plus approval to use AI</a:t>
+              <a:t>Everything above, plus approval to use AI — for the</a:t>
             </a:r>
           </a:p>
           <a:p>
@@ -13979,7 +13979,7 @@
                 </a:solidFill>
                 <a:latin typeface="Calibri"/>
               </a:rPr>
-              <a:t>Our own rate book loaded, with a change history</a:t>
+              <a:t>three on the last slide that read something</a:t>
             </a:r>
           </a:p>
           <a:p>
@@ -13998,7 +13998,7 @@
                 </a:solidFill>
                 <a:latin typeface="Calibri"/>
               </a:rPr>
-              <a:t>A record of every costing, and the run itself built</a:t>
+              <a:t>Our own rate book loaded. The rest is built</a:t>
             </a:r>
           </a:p>
         </p:txBody>
@@ -14524,7 +14524,7 @@
                 </a:solidFill>
                 <a:latin typeface="Calibri"/>
               </a:rPr>
-              <a:t>Never checked against a price JLR has paid. If the answer is poor we stop, having spent only our own time.</a:t>
+              <a:t>Never checked against a price JLR has paid, and never yet run on a JLR laptop. If the answer is poor we stop, having spent only our own time.</a:t>
             </a:r>
           </a:p>
         </p:txBody>

--- a/CostVision-CAPEE-Business-Case.pptx
+++ b/CostVision-CAPEE-Business-Case.pptx
@@ -13746,7 +13746,7 @@
                 </a:solidFill>
                 <a:latin typeface="Calibri"/>
               </a:rPr>
-              <a:t>A Linux server, and a way to pass numbers into CAPEE</a:t>
+              <a:t>A server to run the measurement on, and a way to pass numbers into CAPEE</a:t>
             </a:r>
           </a:p>
           <a:p>
